--- a/docs/public/course-assets/course-pptx/em-002.pptx
+++ b/docs/public/course-assets/course-pptx/em-002.pptx
@@ -2,25 +2,25 @@
 <file path=ppt/presentation.xml><?xml version="1.0" encoding="utf-8"?>
 <p:presentation xmlns:p="http://schemas.openxmlformats.org/presentationml/2006/main">
   <p:sldMasterIdLst>
-    <p:sldMasterId xmlns:r="http://schemas.openxmlformats.org/officeDocument/2006/relationships" id="2147483648" r:id="Rd60f19059e3f48ba"/>
+    <p:sldMasterId xmlns:r="http://schemas.openxmlformats.org/officeDocument/2006/relationships" id="2147483648" r:id="Rcce27f31b59c476c"/>
   </p:sldMasterIdLst>
   <p:notesMasterIdLst>
-    <p:notesMasterId xmlns:r="http://schemas.openxmlformats.org/officeDocument/2006/relationships" r:id="Re0a7b7c65fd347e8"/>
+    <p:notesMasterId xmlns:r="http://schemas.openxmlformats.org/officeDocument/2006/relationships" r:id="R0fa228dd75464b96"/>
   </p:notesMasterIdLst>
   <p:sldIdLst>
-    <p:sldId xmlns:r="http://schemas.openxmlformats.org/officeDocument/2006/relationships" id="256" r:id="Racb8a8d08e074cb9"/>
-    <p:sldId xmlns:r="http://schemas.openxmlformats.org/officeDocument/2006/relationships" id="257" r:id="Ra51ed03864f74b53"/>
-    <p:sldId xmlns:r="http://schemas.openxmlformats.org/officeDocument/2006/relationships" id="258" r:id="R876b9ca8736a49ad"/>
-    <p:sldId xmlns:r="http://schemas.openxmlformats.org/officeDocument/2006/relationships" id="259" r:id="Rda773331b5df4236"/>
-    <p:sldId xmlns:r="http://schemas.openxmlformats.org/officeDocument/2006/relationships" id="260" r:id="R7a2d60ec87324f7e"/>
-    <p:sldId xmlns:r="http://schemas.openxmlformats.org/officeDocument/2006/relationships" id="261" r:id="R0d6fc57798744def"/>
-    <p:sldId xmlns:r="http://schemas.openxmlformats.org/officeDocument/2006/relationships" id="262" r:id="R5365d0beadf441be"/>
-    <p:sldId xmlns:r="http://schemas.openxmlformats.org/officeDocument/2006/relationships" id="263" r:id="R4fdeb70eb54d4087"/>
-    <p:sldId xmlns:r="http://schemas.openxmlformats.org/officeDocument/2006/relationships" id="264" r:id="R45abac8f70dc4693"/>
-    <p:sldId xmlns:r="http://schemas.openxmlformats.org/officeDocument/2006/relationships" id="265" r:id="R202f09b0ed214bfd"/>
-    <p:sldId xmlns:r="http://schemas.openxmlformats.org/officeDocument/2006/relationships" id="266" r:id="Rbfd380c6acd34420"/>
-    <p:sldId xmlns:r="http://schemas.openxmlformats.org/officeDocument/2006/relationships" id="267" r:id="Rd94a1ba8eec74d46"/>
-    <p:sldId xmlns:r="http://schemas.openxmlformats.org/officeDocument/2006/relationships" id="268" r:id="Rb9dea61111d0430c"/>
+    <p:sldId xmlns:r="http://schemas.openxmlformats.org/officeDocument/2006/relationships" id="256" r:id="R187fb6a5b8ac453e"/>
+    <p:sldId xmlns:r="http://schemas.openxmlformats.org/officeDocument/2006/relationships" id="257" r:id="R5bde833cca3742df"/>
+    <p:sldId xmlns:r="http://schemas.openxmlformats.org/officeDocument/2006/relationships" id="258" r:id="Reb2a73822e264dba"/>
+    <p:sldId xmlns:r="http://schemas.openxmlformats.org/officeDocument/2006/relationships" id="259" r:id="Rd39ba1a134e54a0f"/>
+    <p:sldId xmlns:r="http://schemas.openxmlformats.org/officeDocument/2006/relationships" id="260" r:id="Rfd0a472d48514256"/>
+    <p:sldId xmlns:r="http://schemas.openxmlformats.org/officeDocument/2006/relationships" id="261" r:id="R42ee2ac2bde74ed9"/>
+    <p:sldId xmlns:r="http://schemas.openxmlformats.org/officeDocument/2006/relationships" id="262" r:id="R449549fda3864564"/>
+    <p:sldId xmlns:r="http://schemas.openxmlformats.org/officeDocument/2006/relationships" id="263" r:id="Rb5c723566cdd4600"/>
+    <p:sldId xmlns:r="http://schemas.openxmlformats.org/officeDocument/2006/relationships" id="264" r:id="R53ee1f4878994bcd"/>
+    <p:sldId xmlns:r="http://schemas.openxmlformats.org/officeDocument/2006/relationships" id="265" r:id="R8a571b07bd0e450f"/>
+    <p:sldId xmlns:r="http://schemas.openxmlformats.org/officeDocument/2006/relationships" id="266" r:id="Rb67a0b96a0d9435a"/>
+    <p:sldId xmlns:r="http://schemas.openxmlformats.org/officeDocument/2006/relationships" id="267" r:id="Red68391bc26a42d9"/>
+    <p:sldId xmlns:r="http://schemas.openxmlformats.org/officeDocument/2006/relationships" id="268" r:id="Ra21bec7381b3402f"/>
   </p:sldIdLst>
   <p:sldSz cx="12192000" cy="6858000"/>
   <p:notesSz cx="6858000" cy="9144000"/>
@@ -1405,7 +1405,7 @@
   </p:cSld>
   <p:clrMap bg1="lt1" tx1="dk1" bg2="lt2" tx2="dk2" accent1="accent1" accent2="accent2" accent3="accent3" accent4="accent4" accent5="accent5" accent6="accent6" hlink="hlink" folHlink="folHlink"/>
   <p:sldLayoutIdLst>
-    <p:sldLayoutId xmlns:r="http://schemas.openxmlformats.org/officeDocument/2006/relationships" id="2147483649" r:id="Rf615353098154165"/>
+    <p:sldLayoutId xmlns:r="http://schemas.openxmlformats.org/officeDocument/2006/relationships" id="2147483649" r:id="R28405c9468c646d7"/>
   </p:sldLayoutIdLst>
   <p:txStyles>
     <p:titleStyle>
@@ -1956,7 +1956,7 @@
           <p:cNvPr id="1" name="cover-rule">
             <a:extLst xmlns:a="http://schemas.openxmlformats.org/drawingml/2006/main">
               <a:ext uri="{FF2B5EF4-FFF2-40B4-BE49-F238E27FC236}">
-                <a16:creationId xmlns:a16="http://schemas.microsoft.com/office/drawing/2014/main" id="{E7D45344-D016-41C6-B206-F6A9B5CA8F67}"/>
+                <a16:creationId xmlns:a16="http://schemas.microsoft.com/office/drawing/2014/main" id="{5D5C39D4-76DC-476B-82F4-38A8560EB095}"/>
               </a:ext>
             </a:extLst>
           </p:cNvPr>
@@ -1989,7 +1989,7 @@
           <p:cNvPr id="2" name="cover-ring-1">
             <a:extLst xmlns:a="http://schemas.openxmlformats.org/drawingml/2006/main">
               <a:ext uri="{FF2B5EF4-FFF2-40B4-BE49-F238E27FC236}">
-                <a16:creationId xmlns:a16="http://schemas.microsoft.com/office/drawing/2014/main" id="{DF1D1B24-1A93-49C6-B618-26FD1DF875B4}"/>
+                <a16:creationId xmlns:a16="http://schemas.microsoft.com/office/drawing/2014/main" id="{7EE34F9F-E2A9-41E7-A260-6C1B23E896C6}"/>
               </a:ext>
             </a:extLst>
           </p:cNvPr>
@@ -2020,7 +2020,7 @@
           <p:cNvPr id="3" name="cover-ring-2">
             <a:extLst xmlns:a="http://schemas.openxmlformats.org/drawingml/2006/main">
               <a:ext uri="{FF2B5EF4-FFF2-40B4-BE49-F238E27FC236}">
-                <a16:creationId xmlns:a16="http://schemas.microsoft.com/office/drawing/2014/main" id="{5D00D101-4825-4044-B9BD-90FCA3A2AA3B}"/>
+                <a16:creationId xmlns:a16="http://schemas.microsoft.com/office/drawing/2014/main" id="{51FB4B6F-E95C-40ED-B80D-F9678600BAF1}"/>
               </a:ext>
             </a:extLst>
           </p:cNvPr>
@@ -2051,7 +2051,7 @@
           <p:cNvPr id="4" name="cover-core">
             <a:extLst xmlns:a="http://schemas.openxmlformats.org/drawingml/2006/main">
               <a:ext uri="{FF2B5EF4-FFF2-40B4-BE49-F238E27FC236}">
-                <a16:creationId xmlns:a16="http://schemas.microsoft.com/office/drawing/2014/main" id="{F3580173-AAFC-4243-948A-338DF29EBF05}"/>
+                <a16:creationId xmlns:a16="http://schemas.microsoft.com/office/drawing/2014/main" id="{25583988-B489-4DF3-8C7B-102611C86203}"/>
               </a:ext>
             </a:extLst>
           </p:cNvPr>
@@ -2084,7 +2084,7 @@
           <p:cNvPr id="5" name="cover-line-1">
             <a:extLst xmlns:a="http://schemas.openxmlformats.org/drawingml/2006/main">
               <a:ext uri="{FF2B5EF4-FFF2-40B4-BE49-F238E27FC236}">
-                <a16:creationId xmlns:a16="http://schemas.microsoft.com/office/drawing/2014/main" id="{A0845057-4F24-400E-A846-83EF4B960C6D}"/>
+                <a16:creationId xmlns:a16="http://schemas.microsoft.com/office/drawing/2014/main" id="{6E96CD53-CD28-48B3-B998-B258AC9A3816}"/>
               </a:ext>
             </a:extLst>
           </p:cNvPr>
@@ -2115,7 +2115,7 @@
           <p:cNvPr id="6" name="cover-line-2">
             <a:extLst xmlns:a="http://schemas.openxmlformats.org/drawingml/2006/main">
               <a:ext uri="{FF2B5EF4-FFF2-40B4-BE49-F238E27FC236}">
-                <a16:creationId xmlns:a16="http://schemas.microsoft.com/office/drawing/2014/main" id="{89094B11-CE68-42AE-BD75-8DBB4D90BB13}"/>
+                <a16:creationId xmlns:a16="http://schemas.microsoft.com/office/drawing/2014/main" id="{D24D89E5-C162-4DD4-87BA-C72C85FEBF56}"/>
               </a:ext>
             </a:extLst>
           </p:cNvPr>
@@ -2146,7 +2146,7 @@
           <p:cNvPr id="7" name="cover-eyebrow">
             <a:extLst xmlns:a="http://schemas.openxmlformats.org/drawingml/2006/main">
               <a:ext uri="{FF2B5EF4-FFF2-40B4-BE49-F238E27FC236}">
-                <a16:creationId xmlns:a16="http://schemas.microsoft.com/office/drawing/2014/main" id="{7A234FC3-88EF-4FA2-AF2D-72E1AB71082D}"/>
+                <a16:creationId xmlns:a16="http://schemas.microsoft.com/office/drawing/2014/main" id="{BD59CF0D-AE9B-4108-B615-6C12E3DB9EEB}"/>
               </a:ext>
             </a:extLst>
           </p:cNvPr>
@@ -2204,7 +2204,7 @@
           <p:cNvPr id="8" name="cover-title">
             <a:extLst xmlns:a="http://schemas.openxmlformats.org/drawingml/2006/main">
               <a:ext uri="{FF2B5EF4-FFF2-40B4-BE49-F238E27FC236}">
-                <a16:creationId xmlns:a16="http://schemas.microsoft.com/office/drawing/2014/main" id="{6D980BFA-C163-4C96-9A8F-5C83A4639061}"/>
+                <a16:creationId xmlns:a16="http://schemas.microsoft.com/office/drawing/2014/main" id="{B4649B72-2B3A-4402-A5C1-763871321B29}"/>
               </a:ext>
             </a:extLst>
           </p:cNvPr>
@@ -2262,7 +2262,7 @@
           <p:cNvPr id="9" name="cover-subtitle">
             <a:extLst xmlns:a="http://schemas.openxmlformats.org/drawingml/2006/main">
               <a:ext uri="{FF2B5EF4-FFF2-40B4-BE49-F238E27FC236}">
-                <a16:creationId xmlns:a16="http://schemas.microsoft.com/office/drawing/2014/main" id="{476C3EEC-AF60-4FC5-8F94-47CFFF62C792}"/>
+                <a16:creationId xmlns:a16="http://schemas.microsoft.com/office/drawing/2014/main" id="{1FA84E32-2CC3-4A3A-BE6B-1136C48B0A9E}"/>
               </a:ext>
             </a:extLst>
           </p:cNvPr>
@@ -2324,7 +2324,7 @@
           <p:cNvPr id="10" name="cover-lead">
             <a:extLst xmlns:a="http://schemas.openxmlformats.org/drawingml/2006/main">
               <a:ext uri="{FF2B5EF4-FFF2-40B4-BE49-F238E27FC236}">
-                <a16:creationId xmlns:a16="http://schemas.microsoft.com/office/drawing/2014/main" id="{57E5602D-D034-4A2A-82DC-EBCC7C3CF9B7}"/>
+                <a16:creationId xmlns:a16="http://schemas.microsoft.com/office/drawing/2014/main" id="{ED4E38B0-C3F5-4C22-BF36-32E76F78C929}"/>
               </a:ext>
             </a:extLst>
           </p:cNvPr>
@@ -2382,7 +2382,7 @@
           <p:cNvPr id="11" name="cover-course">
             <a:extLst xmlns:a="http://schemas.openxmlformats.org/drawingml/2006/main">
               <a:ext uri="{FF2B5EF4-FFF2-40B4-BE49-F238E27FC236}">
-                <a16:creationId xmlns:a16="http://schemas.microsoft.com/office/drawing/2014/main" id="{39196C4C-6B2A-4498-AB34-5EF0359E1278}"/>
+                <a16:creationId xmlns:a16="http://schemas.microsoft.com/office/drawing/2014/main" id="{58969478-3CC1-44AB-81A7-FCBF06925109}"/>
               </a:ext>
             </a:extLst>
           </p:cNvPr>
@@ -2440,7 +2440,7 @@
           <p:cNvPr id="12" name="cover-id">
             <a:extLst xmlns:a="http://schemas.openxmlformats.org/drawingml/2006/main">
               <a:ext uri="{FF2B5EF4-FFF2-40B4-BE49-F238E27FC236}">
-                <a16:creationId xmlns:a16="http://schemas.microsoft.com/office/drawing/2014/main" id="{93282DC4-DBA8-49C8-BA80-821463BA8430}"/>
+                <a16:creationId xmlns:a16="http://schemas.microsoft.com/office/drawing/2014/main" id="{3EC91FFC-9B41-4A9F-AED1-A8E5543C9620}"/>
               </a:ext>
             </a:extLst>
           </p:cNvPr>
@@ -2496,7 +2496,7 @@
     </p:spTree>
     <p:extLst>
       <p:ext uri="{BB962C8B-B14F-4D97-AF65-F5344CB8AC3E}">
-        <p14:creationId xmlns:p14="http://schemas.microsoft.com/office/powerpoint/2010/main" val="1297770806"/>
+        <p14:creationId xmlns:p14="http://schemas.microsoft.com/office/powerpoint/2010/main" val="258272804"/>
       </p:ext>
     </p:extLst>
   </p:cSld>
@@ -2527,7 +2527,7 @@
           <p:cNvPr id="1" name="s10-rule">
             <a:extLst xmlns:a="http://schemas.openxmlformats.org/drawingml/2006/main">
               <a:ext uri="{FF2B5EF4-FFF2-40B4-BE49-F238E27FC236}">
-                <a16:creationId xmlns:a16="http://schemas.microsoft.com/office/drawing/2014/main" id="{1C83F1A9-5B3A-41E8-8A9D-1ABFF06989E6}"/>
+                <a16:creationId xmlns:a16="http://schemas.microsoft.com/office/drawing/2014/main" id="{77E0AF5F-865C-4DC8-A6C5-BA7769AFF933}"/>
               </a:ext>
             </a:extLst>
           </p:cNvPr>
@@ -2560,7 +2560,7 @@
           <p:cNvPr id="2" name="s10-eyebrow">
             <a:extLst xmlns:a="http://schemas.openxmlformats.org/drawingml/2006/main">
               <a:ext uri="{FF2B5EF4-FFF2-40B4-BE49-F238E27FC236}">
-                <a16:creationId xmlns:a16="http://schemas.microsoft.com/office/drawing/2014/main" id="{EF444FC0-A7F5-4913-864D-4EB8DBD4D031}"/>
+                <a16:creationId xmlns:a16="http://schemas.microsoft.com/office/drawing/2014/main" id="{05199E6A-A2B7-439A-BA65-4A2FD8604EEB}"/>
               </a:ext>
             </a:extLst>
           </p:cNvPr>
@@ -2618,7 +2618,7 @@
           <p:cNvPr id="3" name="s10-title">
             <a:extLst xmlns:a="http://schemas.openxmlformats.org/drawingml/2006/main">
               <a:ext uri="{FF2B5EF4-FFF2-40B4-BE49-F238E27FC236}">
-                <a16:creationId xmlns:a16="http://schemas.microsoft.com/office/drawing/2014/main" id="{88A27C6D-7D0D-4138-8EEC-C199579360D7}"/>
+                <a16:creationId xmlns:a16="http://schemas.microsoft.com/office/drawing/2014/main" id="{99282203-9957-4961-8CE1-EEC6188CD8C4}"/>
               </a:ext>
             </a:extLst>
           </p:cNvPr>
@@ -2676,7 +2676,7 @@
           <p:cNvPr id="4" name="s10-footer">
             <a:extLst xmlns:a="http://schemas.openxmlformats.org/drawingml/2006/main">
               <a:ext uri="{FF2B5EF4-FFF2-40B4-BE49-F238E27FC236}">
-                <a16:creationId xmlns:a16="http://schemas.microsoft.com/office/drawing/2014/main" id="{F4E2A351-FECE-4031-9C15-4441B8025568}"/>
+                <a16:creationId xmlns:a16="http://schemas.microsoft.com/office/drawing/2014/main" id="{352E196A-3C81-461D-A7CD-C16E80B33011}"/>
               </a:ext>
             </a:extLst>
           </p:cNvPr>
@@ -2707,7 +2707,7 @@
           <p:cNvPr id="5" name="s10-identity">
             <a:extLst xmlns:a="http://schemas.openxmlformats.org/drawingml/2006/main">
               <a:ext uri="{FF2B5EF4-FFF2-40B4-BE49-F238E27FC236}">
-                <a16:creationId xmlns:a16="http://schemas.microsoft.com/office/drawing/2014/main" id="{5D7FD379-BE27-4F1A-8195-315CB802EDB7}"/>
+                <a16:creationId xmlns:a16="http://schemas.microsoft.com/office/drawing/2014/main" id="{FEE7EA0B-C4FC-48FB-B8C0-72BFA7DB141B}"/>
               </a:ext>
             </a:extLst>
           </p:cNvPr>
@@ -2765,7 +2765,7 @@
           <p:cNvPr id="6" name="case-title">
             <a:extLst xmlns:a="http://schemas.openxmlformats.org/drawingml/2006/main">
               <a:ext uri="{FF2B5EF4-FFF2-40B4-BE49-F238E27FC236}">
-                <a16:creationId xmlns:a16="http://schemas.microsoft.com/office/drawing/2014/main" id="{074AE248-62A1-4590-9A52-716CBC3D7358}"/>
+                <a16:creationId xmlns:a16="http://schemas.microsoft.com/office/drawing/2014/main" id="{12647997-222D-4B38-B7A3-A5764C63E2ED}"/>
               </a:ext>
             </a:extLst>
           </p:cNvPr>
@@ -2829,7 +2829,7 @@
           <p:cNvPr id="7" name="case-row-0">
             <a:extLst xmlns:a="http://schemas.openxmlformats.org/drawingml/2006/main">
               <a:ext uri="{FF2B5EF4-FFF2-40B4-BE49-F238E27FC236}">
-                <a16:creationId xmlns:a16="http://schemas.microsoft.com/office/drawing/2014/main" id="{8C300548-3D92-464D-8AA5-226FE8C03D15}"/>
+                <a16:creationId xmlns:a16="http://schemas.microsoft.com/office/drawing/2014/main" id="{8EF8E090-9C21-4114-98BA-AF7FFB33D173}"/>
               </a:ext>
             </a:extLst>
           </p:cNvPr>
@@ -2893,7 +2893,7 @@
           <p:cNvPr id="8" name="case-row-1">
             <a:extLst xmlns:a="http://schemas.openxmlformats.org/drawingml/2006/main">
               <a:ext uri="{FF2B5EF4-FFF2-40B4-BE49-F238E27FC236}">
-                <a16:creationId xmlns:a16="http://schemas.microsoft.com/office/drawing/2014/main" id="{CAD06016-507F-4B72-A04B-B0552A92BD5A}"/>
+                <a16:creationId xmlns:a16="http://schemas.microsoft.com/office/drawing/2014/main" id="{76423B61-272B-4A00-8D38-38A758D55B03}"/>
               </a:ext>
             </a:extLst>
           </p:cNvPr>
@@ -2957,7 +2957,7 @@
           <p:cNvPr id="9" name="case-row-2">
             <a:extLst xmlns:a="http://schemas.openxmlformats.org/drawingml/2006/main">
               <a:ext uri="{FF2B5EF4-FFF2-40B4-BE49-F238E27FC236}">
-                <a16:creationId xmlns:a16="http://schemas.microsoft.com/office/drawing/2014/main" id="{C133095A-7190-4DA9-BDFB-1ABB8DE48AAB}"/>
+                <a16:creationId xmlns:a16="http://schemas.microsoft.com/office/drawing/2014/main" id="{F7744E5C-A36B-4961-AB3B-5894E57FCE15}"/>
               </a:ext>
             </a:extLst>
           </p:cNvPr>
@@ -3021,7 +3021,7 @@
           <p:cNvPr id="10" name="case-row-3">
             <a:extLst xmlns:a="http://schemas.openxmlformats.org/drawingml/2006/main">
               <a:ext uri="{FF2B5EF4-FFF2-40B4-BE49-F238E27FC236}">
-                <a16:creationId xmlns:a16="http://schemas.microsoft.com/office/drawing/2014/main" id="{19CB0668-966E-4C10-ADA6-C2FB6727620C}"/>
+                <a16:creationId xmlns:a16="http://schemas.microsoft.com/office/drawing/2014/main" id="{9EBC86D1-8A45-4B55-9F53-C315A0011096}"/>
               </a:ext>
             </a:extLst>
           </p:cNvPr>
@@ -3085,7 +3085,7 @@
           <p:cNvPr id="11" name="case-row-4">
             <a:extLst xmlns:a="http://schemas.openxmlformats.org/drawingml/2006/main">
               <a:ext uri="{FF2B5EF4-FFF2-40B4-BE49-F238E27FC236}">
-                <a16:creationId xmlns:a16="http://schemas.microsoft.com/office/drawing/2014/main" id="{4846B0E1-5C91-4E26-9355-A9857D223D9C}"/>
+                <a16:creationId xmlns:a16="http://schemas.microsoft.com/office/drawing/2014/main" id="{1B06E5FD-FC6D-4547-8A8B-8B4EF76F6433}"/>
               </a:ext>
             </a:extLst>
           </p:cNvPr>
@@ -3109,7 +3109,7 @@
           </a:solidFill>
           <a:ln xmlns:a="http://schemas.openxmlformats.org/drawingml/2006/main" w="9525">
             <a:solidFill>
-              <a:srgbClr val="2D9B72"/>
+              <a:srgbClr val="0B6B4F"/>
             </a:solidFill>
             <a:prstDash val="solid"/>
           </a:ln>
@@ -3149,7 +3149,7 @@
           <p:cNvPr id="12" name="s10-takeaway-rule">
             <a:extLst xmlns:a="http://schemas.openxmlformats.org/drawingml/2006/main">
               <a:ext uri="{FF2B5EF4-FFF2-40B4-BE49-F238E27FC236}">
-                <a16:creationId xmlns:a16="http://schemas.microsoft.com/office/drawing/2014/main" id="{A8A67803-44D3-4DF6-AA1F-EA76E8EE575C}"/>
+                <a16:creationId xmlns:a16="http://schemas.microsoft.com/office/drawing/2014/main" id="{6015E1F9-0B5A-4F96-9206-37BAF182725B}"/>
               </a:ext>
             </a:extLst>
           </p:cNvPr>
@@ -3182,7 +3182,7 @@
           <p:cNvPr id="13" name="s10-takeaway">
             <a:extLst xmlns:a="http://schemas.openxmlformats.org/drawingml/2006/main">
               <a:ext uri="{FF2B5EF4-FFF2-40B4-BE49-F238E27FC236}">
-                <a16:creationId xmlns:a16="http://schemas.microsoft.com/office/drawing/2014/main" id="{CCAFAE2F-4CE8-4958-A68E-6995BE277485}"/>
+                <a16:creationId xmlns:a16="http://schemas.microsoft.com/office/drawing/2014/main" id="{E5E11AD0-D329-4FAA-83DD-D0B5EA2EA400}"/>
               </a:ext>
             </a:extLst>
           </p:cNvPr>
@@ -3238,7 +3238,7 @@
     </p:spTree>
     <p:extLst>
       <p:ext uri="{BB962C8B-B14F-4D97-AF65-F5344CB8AC3E}">
-        <p14:creationId xmlns:p14="http://schemas.microsoft.com/office/powerpoint/2010/main" val="476714151"/>
+        <p14:creationId xmlns:p14="http://schemas.microsoft.com/office/powerpoint/2010/main" val="482910537"/>
       </p:ext>
     </p:extLst>
   </p:cSld>
@@ -3269,7 +3269,7 @@
           <p:cNvPr id="1" name="s11-rule">
             <a:extLst xmlns:a="http://schemas.openxmlformats.org/drawingml/2006/main">
               <a:ext uri="{FF2B5EF4-FFF2-40B4-BE49-F238E27FC236}">
-                <a16:creationId xmlns:a16="http://schemas.microsoft.com/office/drawing/2014/main" id="{6FFA5505-8FA4-4006-8429-37FD3B2EF731}"/>
+                <a16:creationId xmlns:a16="http://schemas.microsoft.com/office/drawing/2014/main" id="{966292AD-CC07-4573-BA31-50B4C4164498}"/>
               </a:ext>
             </a:extLst>
           </p:cNvPr>
@@ -3302,7 +3302,7 @@
           <p:cNvPr id="2" name="s11-eyebrow">
             <a:extLst xmlns:a="http://schemas.openxmlformats.org/drawingml/2006/main">
               <a:ext uri="{FF2B5EF4-FFF2-40B4-BE49-F238E27FC236}">
-                <a16:creationId xmlns:a16="http://schemas.microsoft.com/office/drawing/2014/main" id="{879BAF29-AA85-40BD-A7E5-FA1AB4B608EA}"/>
+                <a16:creationId xmlns:a16="http://schemas.microsoft.com/office/drawing/2014/main" id="{4AD1D62A-B0F9-40E2-AD3A-C5C75B056256}"/>
               </a:ext>
             </a:extLst>
           </p:cNvPr>
@@ -3360,7 +3360,7 @@
           <p:cNvPr id="3" name="s11-title">
             <a:extLst xmlns:a="http://schemas.openxmlformats.org/drawingml/2006/main">
               <a:ext uri="{FF2B5EF4-FFF2-40B4-BE49-F238E27FC236}">
-                <a16:creationId xmlns:a16="http://schemas.microsoft.com/office/drawing/2014/main" id="{74BEA29B-CAB2-4808-B744-95503BED9855}"/>
+                <a16:creationId xmlns:a16="http://schemas.microsoft.com/office/drawing/2014/main" id="{BDA2648D-C07C-4199-ABDB-A0935BB82859}"/>
               </a:ext>
             </a:extLst>
           </p:cNvPr>
@@ -3408,7 +3408,7 @@
                 <a:ea typeface="PingFang SC"/>
                 <a:cs typeface="PingFang SC"/>
               </a:rPr>
-              <a:t>把方法落实为可验证的行动</a:t>
+              <a:t>人形与四足机器人：一次可验收练习</a:t>
             </a:r>
           </a:p>
         </p:txBody>
@@ -3418,7 +3418,7 @@
           <p:cNvPr id="4" name="s11-footer">
             <a:extLst xmlns:a="http://schemas.openxmlformats.org/drawingml/2006/main">
               <a:ext uri="{FF2B5EF4-FFF2-40B4-BE49-F238E27FC236}">
-                <a16:creationId xmlns:a16="http://schemas.microsoft.com/office/drawing/2014/main" id="{AEBF28F8-C595-4292-A5F3-57D5C703BB51}"/>
+                <a16:creationId xmlns:a16="http://schemas.microsoft.com/office/drawing/2014/main" id="{650F78D0-3872-4544-8CAB-97543A6F0E84}"/>
               </a:ext>
             </a:extLst>
           </p:cNvPr>
@@ -3449,7 +3449,7 @@
           <p:cNvPr id="5" name="s11-identity">
             <a:extLst xmlns:a="http://schemas.openxmlformats.org/drawingml/2006/main">
               <a:ext uri="{FF2B5EF4-FFF2-40B4-BE49-F238E27FC236}">
-                <a16:creationId xmlns:a16="http://schemas.microsoft.com/office/drawing/2014/main" id="{63DE80BB-1EA2-40FD-9B1F-D875CBD93631}"/>
+                <a16:creationId xmlns:a16="http://schemas.microsoft.com/office/drawing/2014/main" id="{C8A1490F-2529-4D68-9A77-68C9EC61CF97}"/>
               </a:ext>
             </a:extLst>
           </p:cNvPr>
@@ -3507,7 +3507,7 @@
           <p:cNvPr id="6" name="practice-circle-0">
             <a:extLst xmlns:a="http://schemas.openxmlformats.org/drawingml/2006/main">
               <a:ext uri="{FF2B5EF4-FFF2-40B4-BE49-F238E27FC236}">
-                <a16:creationId xmlns:a16="http://schemas.microsoft.com/office/drawing/2014/main" id="{C2A2EA0D-EAA7-4C31-9281-8F040AE9C12E}"/>
+                <a16:creationId xmlns:a16="http://schemas.microsoft.com/office/drawing/2014/main" id="{67C141EE-8B65-4DDC-AE6F-B20FFC43C7C9}"/>
               </a:ext>
             </a:extLst>
           </p:cNvPr>
@@ -3540,7 +3540,7 @@
           <p:cNvPr id="7" name="practice-number-0">
             <a:extLst xmlns:a="http://schemas.openxmlformats.org/drawingml/2006/main">
               <a:ext uri="{FF2B5EF4-FFF2-40B4-BE49-F238E27FC236}">
-                <a16:creationId xmlns:a16="http://schemas.microsoft.com/office/drawing/2014/main" id="{6D860D0B-2642-45B2-BB67-343316D7FBC2}"/>
+                <a16:creationId xmlns:a16="http://schemas.microsoft.com/office/drawing/2014/main" id="{11B39F83-E621-449A-A9F2-03DBF86430AD}"/>
               </a:ext>
             </a:extLst>
           </p:cNvPr>
@@ -3598,7 +3598,7 @@
           <p:cNvPr id="8" name="practice-item-0">
             <a:extLst xmlns:a="http://schemas.openxmlformats.org/drawingml/2006/main">
               <a:ext uri="{FF2B5EF4-FFF2-40B4-BE49-F238E27FC236}">
-                <a16:creationId xmlns:a16="http://schemas.microsoft.com/office/drawing/2014/main" id="{64AEB539-E594-4E2A-92B6-5514662AECEC}"/>
+                <a16:creationId xmlns:a16="http://schemas.microsoft.com/office/drawing/2014/main" id="{145866E0-D290-4B1B-A4C2-3CA912CC8154}"/>
               </a:ext>
             </a:extLst>
           </p:cNvPr>
@@ -3652,7 +3652,7 @@
                 <a:ea typeface="PingFang SC"/>
                 <a:cs typeface="PingFang SC"/>
               </a:rPr>
-              <a:t>画出 Go2 机器人硬件组成图。；列出人形机器人进入服务场景前要验证的三项能力</a:t>
+              <a:t>画出 Go2 机器人硬件组成图；列出人形机器人进入服务场景前要验证的三项能力</a:t>
             </a:r>
           </a:p>
         </p:txBody>
@@ -3662,7 +3662,7 @@
           <p:cNvPr id="9" name="practice-connector-0">
             <a:extLst xmlns:a="http://schemas.openxmlformats.org/drawingml/2006/main">
               <a:ext uri="{FF2B5EF4-FFF2-40B4-BE49-F238E27FC236}">
-                <a16:creationId xmlns:a16="http://schemas.microsoft.com/office/drawing/2014/main" id="{01A4F7C3-324C-4282-AF29-D7DB05E1EB99}"/>
+                <a16:creationId xmlns:a16="http://schemas.microsoft.com/office/drawing/2014/main" id="{395FE6C1-15C9-4523-AFDD-E07709374017}"/>
               </a:ext>
             </a:extLst>
           </p:cNvPr>
@@ -3682,7 +3682,7 @@
           <a:noFill xmlns:a="http://schemas.openxmlformats.org/drawingml/2006/main"/>
           <a:ln xmlns:a="http://schemas.openxmlformats.org/drawingml/2006/main" w="28575">
             <a:solidFill>
-              <a:srgbClr val="2D9B72"/>
+              <a:srgbClr val="0B6B4F"/>
             </a:solidFill>
             <a:prstDash val="solid"/>
           </a:ln>
@@ -3693,7 +3693,7 @@
           <p:cNvPr id="10" name="practice-circle-1">
             <a:extLst xmlns:a="http://schemas.openxmlformats.org/drawingml/2006/main">
               <a:ext uri="{FF2B5EF4-FFF2-40B4-BE49-F238E27FC236}">
-                <a16:creationId xmlns:a16="http://schemas.microsoft.com/office/drawing/2014/main" id="{3798D5F1-4AF9-4E34-BAF7-64C47DD7ADDB}"/>
+                <a16:creationId xmlns:a16="http://schemas.microsoft.com/office/drawing/2014/main" id="{5C2E2010-4E6F-4543-B35E-971A11A8E743}"/>
               </a:ext>
             </a:extLst>
           </p:cNvPr>
@@ -3726,7 +3726,7 @@
           <p:cNvPr id="11" name="practice-number-1">
             <a:extLst xmlns:a="http://schemas.openxmlformats.org/drawingml/2006/main">
               <a:ext uri="{FF2B5EF4-FFF2-40B4-BE49-F238E27FC236}">
-                <a16:creationId xmlns:a16="http://schemas.microsoft.com/office/drawing/2014/main" id="{AE989E43-924C-47BD-B4BA-F412D81583EA}"/>
+                <a16:creationId xmlns:a16="http://schemas.microsoft.com/office/drawing/2014/main" id="{E29FF66A-3096-4F82-85F5-7DB35BFA34A0}"/>
               </a:ext>
             </a:extLst>
           </p:cNvPr>
@@ -3784,7 +3784,7 @@
           <p:cNvPr id="12" name="practice-item-1">
             <a:extLst xmlns:a="http://schemas.openxmlformats.org/drawingml/2006/main">
               <a:ext uri="{FF2B5EF4-FFF2-40B4-BE49-F238E27FC236}">
-                <a16:creationId xmlns:a16="http://schemas.microsoft.com/office/drawing/2014/main" id="{08A3F27B-0407-44E8-943A-7B137D695AA6}"/>
+                <a16:creationId xmlns:a16="http://schemas.microsoft.com/office/drawing/2014/main" id="{548BF328-55F6-4AAA-B694-8B1D4F3D3036}"/>
               </a:ext>
             </a:extLst>
           </p:cNvPr>
@@ -3848,7 +3848,7 @@
           <p:cNvPr id="13" name="practice-connector-1">
             <a:extLst xmlns:a="http://schemas.openxmlformats.org/drawingml/2006/main">
               <a:ext uri="{FF2B5EF4-FFF2-40B4-BE49-F238E27FC236}">
-                <a16:creationId xmlns:a16="http://schemas.microsoft.com/office/drawing/2014/main" id="{743E91F5-FF0D-4A23-88F8-AF0AC97C6BC3}"/>
+                <a16:creationId xmlns:a16="http://schemas.microsoft.com/office/drawing/2014/main" id="{D398133D-0461-4212-8068-9A5B29AC994A}"/>
               </a:ext>
             </a:extLst>
           </p:cNvPr>
@@ -3868,7 +3868,7 @@
           <a:noFill xmlns:a="http://schemas.openxmlformats.org/drawingml/2006/main"/>
           <a:ln xmlns:a="http://schemas.openxmlformats.org/drawingml/2006/main" w="28575">
             <a:solidFill>
-              <a:srgbClr val="2D9B72"/>
+              <a:srgbClr val="0B6B4F"/>
             </a:solidFill>
             <a:prstDash val="solid"/>
           </a:ln>
@@ -3879,7 +3879,7 @@
           <p:cNvPr id="14" name="practice-circle-2">
             <a:extLst xmlns:a="http://schemas.openxmlformats.org/drawingml/2006/main">
               <a:ext uri="{FF2B5EF4-FFF2-40B4-BE49-F238E27FC236}">
-                <a16:creationId xmlns:a16="http://schemas.microsoft.com/office/drawing/2014/main" id="{92816533-8035-4FD6-B961-7156215A0388}"/>
+                <a16:creationId xmlns:a16="http://schemas.microsoft.com/office/drawing/2014/main" id="{CEE83D2E-F35D-46DA-B93E-6BE2293C69F7}"/>
               </a:ext>
             </a:extLst>
           </p:cNvPr>
@@ -3897,7 +3897,7 @@
             <a:avLst/>
           </a:prstGeom>
           <a:solidFill xmlns:a="http://schemas.openxmlformats.org/drawingml/2006/main">
-            <a:srgbClr val="2D9B72"/>
+            <a:srgbClr val="0B6B4F"/>
           </a:solidFill>
           <a:ln xmlns:a="http://schemas.openxmlformats.org/drawingml/2006/main" w="28575">
             <a:solidFill>
@@ -3912,7 +3912,7 @@
           <p:cNvPr id="15" name="practice-number-2">
             <a:extLst xmlns:a="http://schemas.openxmlformats.org/drawingml/2006/main">
               <a:ext uri="{FF2B5EF4-FFF2-40B4-BE49-F238E27FC236}">
-                <a16:creationId xmlns:a16="http://schemas.microsoft.com/office/drawing/2014/main" id="{83652131-B6DA-4470-9410-09B2AE25849C}"/>
+                <a16:creationId xmlns:a16="http://schemas.microsoft.com/office/drawing/2014/main" id="{7307B5A8-03B1-47B6-8F5C-3DD17C794150}"/>
               </a:ext>
             </a:extLst>
           </p:cNvPr>
@@ -3970,7 +3970,7 @@
           <p:cNvPr id="16" name="practice-item-2">
             <a:extLst xmlns:a="http://schemas.openxmlformats.org/drawingml/2006/main">
               <a:ext uri="{FF2B5EF4-FFF2-40B4-BE49-F238E27FC236}">
-                <a16:creationId xmlns:a16="http://schemas.microsoft.com/office/drawing/2014/main" id="{1F2867D4-8B4E-4A5C-883D-E849D5E85F0F}"/>
+                <a16:creationId xmlns:a16="http://schemas.microsoft.com/office/drawing/2014/main" id="{59424EC1-2B5F-4D03-8CC4-0F6971F3379D}"/>
               </a:ext>
             </a:extLst>
           </p:cNvPr>
@@ -3994,7 +3994,7 @@
           </a:solidFill>
           <a:ln xmlns:a="http://schemas.openxmlformats.org/drawingml/2006/main" w="19050">
             <a:solidFill>
-              <a:srgbClr val="2D9B72"/>
+              <a:srgbClr val="0B6B4F"/>
             </a:solidFill>
             <a:prstDash val="solid"/>
           </a:ln>
@@ -4032,7 +4032,7 @@
     </p:spTree>
     <p:extLst>
       <p:ext uri="{BB962C8B-B14F-4D97-AF65-F5344CB8AC3E}">
-        <p14:creationId xmlns:p14="http://schemas.microsoft.com/office/powerpoint/2010/main" val="154800081"/>
+        <p14:creationId xmlns:p14="http://schemas.microsoft.com/office/powerpoint/2010/main" val="1803648223"/>
       </p:ext>
     </p:extLst>
   </p:cSld>
@@ -4063,7 +4063,7 @@
           <p:cNvPr id="1" name="s12-rule">
             <a:extLst xmlns:a="http://schemas.openxmlformats.org/drawingml/2006/main">
               <a:ext uri="{FF2B5EF4-FFF2-40B4-BE49-F238E27FC236}">
-                <a16:creationId xmlns:a16="http://schemas.microsoft.com/office/drawing/2014/main" id="{D817D53A-A76E-4BA8-8646-618C8298349A}"/>
+                <a16:creationId xmlns:a16="http://schemas.microsoft.com/office/drawing/2014/main" id="{DFE031F5-C24E-4EC2-979A-D5B6108A4770}"/>
               </a:ext>
             </a:extLst>
           </p:cNvPr>
@@ -4096,7 +4096,7 @@
           <p:cNvPr id="2" name="s12-eyebrow">
             <a:extLst xmlns:a="http://schemas.openxmlformats.org/drawingml/2006/main">
               <a:ext uri="{FF2B5EF4-FFF2-40B4-BE49-F238E27FC236}">
-                <a16:creationId xmlns:a16="http://schemas.microsoft.com/office/drawing/2014/main" id="{DFEB7822-2729-4392-8D33-F4ACE93FECC3}"/>
+                <a16:creationId xmlns:a16="http://schemas.microsoft.com/office/drawing/2014/main" id="{FE4C20A8-B0AB-4DF2-9085-88D0B3DA5D40}"/>
               </a:ext>
             </a:extLst>
           </p:cNvPr>
@@ -4154,7 +4154,7 @@
           <p:cNvPr id="3" name="s12-title">
             <a:extLst xmlns:a="http://schemas.openxmlformats.org/drawingml/2006/main">
               <a:ext uri="{FF2B5EF4-FFF2-40B4-BE49-F238E27FC236}">
-                <a16:creationId xmlns:a16="http://schemas.microsoft.com/office/drawing/2014/main" id="{EF886155-E059-4571-8CA7-9B20D382D989}"/>
+                <a16:creationId xmlns:a16="http://schemas.microsoft.com/office/drawing/2014/main" id="{209E29D7-51A8-48A3-8494-089CB39E51B5}"/>
               </a:ext>
             </a:extLst>
           </p:cNvPr>
@@ -4202,7 +4202,7 @@
                 <a:ea typeface="PingFang SC"/>
                 <a:cs typeface="PingFang SC"/>
               </a:rPr>
-              <a:t>带走三条可复用的判断原则</a:t>
+              <a:t>人形与四足机器人：判断时先抓住三点</a:t>
             </a:r>
           </a:p>
         </p:txBody>
@@ -4212,7 +4212,7 @@
           <p:cNvPr id="4" name="s12-footer">
             <a:extLst xmlns:a="http://schemas.openxmlformats.org/drawingml/2006/main">
               <a:ext uri="{FF2B5EF4-FFF2-40B4-BE49-F238E27FC236}">
-                <a16:creationId xmlns:a16="http://schemas.microsoft.com/office/drawing/2014/main" id="{49EFF555-3CC6-47FF-B346-5EB739B6FF3C}"/>
+                <a16:creationId xmlns:a16="http://schemas.microsoft.com/office/drawing/2014/main" id="{8CD8663E-744F-49E3-B63C-02DDBA3EE618}"/>
               </a:ext>
             </a:extLst>
           </p:cNvPr>
@@ -4243,7 +4243,7 @@
           <p:cNvPr id="5" name="s12-identity">
             <a:extLst xmlns:a="http://schemas.openxmlformats.org/drawingml/2006/main">
               <a:ext uri="{FF2B5EF4-FFF2-40B4-BE49-F238E27FC236}">
-                <a16:creationId xmlns:a16="http://schemas.microsoft.com/office/drawing/2014/main" id="{6E86403C-57ED-40A9-A1F8-28A7BD8DC155}"/>
+                <a16:creationId xmlns:a16="http://schemas.microsoft.com/office/drawing/2014/main" id="{B35C57E2-6F83-446A-B021-1DDF7EECE205}"/>
               </a:ext>
             </a:extLst>
           </p:cNvPr>
@@ -4301,7 +4301,7 @@
           <p:cNvPr id="6" name="recap-circle-0">
             <a:extLst xmlns:a="http://schemas.openxmlformats.org/drawingml/2006/main">
               <a:ext uri="{FF2B5EF4-FFF2-40B4-BE49-F238E27FC236}">
-                <a16:creationId xmlns:a16="http://schemas.microsoft.com/office/drawing/2014/main" id="{6A7CA9CF-81B5-41BC-BDCE-39F0017B3963}"/>
+                <a16:creationId xmlns:a16="http://schemas.microsoft.com/office/drawing/2014/main" id="{3AEF295E-F22E-4D67-ABDC-A1315142EEE7}"/>
               </a:ext>
             </a:extLst>
           </p:cNvPr>
@@ -4334,7 +4334,7 @@
           <p:cNvPr id="7" name="recap-number-0">
             <a:extLst xmlns:a="http://schemas.openxmlformats.org/drawingml/2006/main">
               <a:ext uri="{FF2B5EF4-FFF2-40B4-BE49-F238E27FC236}">
-                <a16:creationId xmlns:a16="http://schemas.microsoft.com/office/drawing/2014/main" id="{E3FD7973-D028-4BF6-B59B-5249E76E0987}"/>
+                <a16:creationId xmlns:a16="http://schemas.microsoft.com/office/drawing/2014/main" id="{C86DD4C9-066D-421C-962B-F4115443D583}"/>
               </a:ext>
             </a:extLst>
           </p:cNvPr>
@@ -4392,7 +4392,7 @@
           <p:cNvPr id="8" name="recap-item-0">
             <a:extLst xmlns:a="http://schemas.openxmlformats.org/drawingml/2006/main">
               <a:ext uri="{FF2B5EF4-FFF2-40B4-BE49-F238E27FC236}">
-                <a16:creationId xmlns:a16="http://schemas.microsoft.com/office/drawing/2014/main" id="{75DCAA88-3525-4B17-BC2B-AE1F863947D9}"/>
+                <a16:creationId xmlns:a16="http://schemas.microsoft.com/office/drawing/2014/main" id="{CC9FCE00-5CC2-42CD-82F4-4B08D815F5AA}"/>
               </a:ext>
             </a:extLst>
           </p:cNvPr>
@@ -4456,7 +4456,7 @@
           <p:cNvPr id="9" name="recap-connector-0">
             <a:extLst xmlns:a="http://schemas.openxmlformats.org/drawingml/2006/main">
               <a:ext uri="{FF2B5EF4-FFF2-40B4-BE49-F238E27FC236}">
-                <a16:creationId xmlns:a16="http://schemas.microsoft.com/office/drawing/2014/main" id="{BA5196E3-5520-489F-B999-9122B3CA7D59}"/>
+                <a16:creationId xmlns:a16="http://schemas.microsoft.com/office/drawing/2014/main" id="{C16DAF41-950A-407B-99D0-CC5323A57320}"/>
               </a:ext>
             </a:extLst>
           </p:cNvPr>
@@ -4476,7 +4476,7 @@
           <a:noFill xmlns:a="http://schemas.openxmlformats.org/drawingml/2006/main"/>
           <a:ln xmlns:a="http://schemas.openxmlformats.org/drawingml/2006/main" w="28575">
             <a:solidFill>
-              <a:srgbClr val="2D9B72"/>
+              <a:srgbClr val="0B6B4F"/>
             </a:solidFill>
             <a:prstDash val="solid"/>
           </a:ln>
@@ -4487,7 +4487,7 @@
           <p:cNvPr id="10" name="recap-circle-1">
             <a:extLst xmlns:a="http://schemas.openxmlformats.org/drawingml/2006/main">
               <a:ext uri="{FF2B5EF4-FFF2-40B4-BE49-F238E27FC236}">
-                <a16:creationId xmlns:a16="http://schemas.microsoft.com/office/drawing/2014/main" id="{66822857-D7B8-4768-B48E-8687BEED822C}"/>
+                <a16:creationId xmlns:a16="http://schemas.microsoft.com/office/drawing/2014/main" id="{327C18FB-94D8-44AD-9ACF-0AFF222928C1}"/>
               </a:ext>
             </a:extLst>
           </p:cNvPr>
@@ -4520,7 +4520,7 @@
           <p:cNvPr id="11" name="recap-number-1">
             <a:extLst xmlns:a="http://schemas.openxmlformats.org/drawingml/2006/main">
               <a:ext uri="{FF2B5EF4-FFF2-40B4-BE49-F238E27FC236}">
-                <a16:creationId xmlns:a16="http://schemas.microsoft.com/office/drawing/2014/main" id="{741AF91A-082E-4465-BFA6-29749353EA99}"/>
+                <a16:creationId xmlns:a16="http://schemas.microsoft.com/office/drawing/2014/main" id="{AABDB819-F55F-4EEB-90A7-C2CA14C3253C}"/>
               </a:ext>
             </a:extLst>
           </p:cNvPr>
@@ -4578,7 +4578,7 @@
           <p:cNvPr id="12" name="recap-item-1">
             <a:extLst xmlns:a="http://schemas.openxmlformats.org/drawingml/2006/main">
               <a:ext uri="{FF2B5EF4-FFF2-40B4-BE49-F238E27FC236}">
-                <a16:creationId xmlns:a16="http://schemas.microsoft.com/office/drawing/2014/main" id="{A7F66319-50FE-47E6-80CE-8FFAEF7E3F39}"/>
+                <a16:creationId xmlns:a16="http://schemas.microsoft.com/office/drawing/2014/main" id="{71F54DD7-66AC-4DBC-8A3D-D690861D1789}"/>
               </a:ext>
             </a:extLst>
           </p:cNvPr>
@@ -4642,7 +4642,7 @@
           <p:cNvPr id="13" name="recap-connector-1">
             <a:extLst xmlns:a="http://schemas.openxmlformats.org/drawingml/2006/main">
               <a:ext uri="{FF2B5EF4-FFF2-40B4-BE49-F238E27FC236}">
-                <a16:creationId xmlns:a16="http://schemas.microsoft.com/office/drawing/2014/main" id="{D2E4C225-C366-408F-96E4-723917CFD242}"/>
+                <a16:creationId xmlns:a16="http://schemas.microsoft.com/office/drawing/2014/main" id="{FD3F4EC9-B5C9-4A57-840C-C1779019E54A}"/>
               </a:ext>
             </a:extLst>
           </p:cNvPr>
@@ -4662,7 +4662,7 @@
           <a:noFill xmlns:a="http://schemas.openxmlformats.org/drawingml/2006/main"/>
           <a:ln xmlns:a="http://schemas.openxmlformats.org/drawingml/2006/main" w="28575">
             <a:solidFill>
-              <a:srgbClr val="2D9B72"/>
+              <a:srgbClr val="0B6B4F"/>
             </a:solidFill>
             <a:prstDash val="solid"/>
           </a:ln>
@@ -4673,7 +4673,7 @@
           <p:cNvPr id="14" name="recap-circle-2">
             <a:extLst xmlns:a="http://schemas.openxmlformats.org/drawingml/2006/main">
               <a:ext uri="{FF2B5EF4-FFF2-40B4-BE49-F238E27FC236}">
-                <a16:creationId xmlns:a16="http://schemas.microsoft.com/office/drawing/2014/main" id="{1A6BC5F2-7F6A-42FC-9B70-B07205E07A9F}"/>
+                <a16:creationId xmlns:a16="http://schemas.microsoft.com/office/drawing/2014/main" id="{34DF1FD7-6460-447C-A584-A9AE18714C89}"/>
               </a:ext>
             </a:extLst>
           </p:cNvPr>
@@ -4691,7 +4691,7 @@
             <a:avLst/>
           </a:prstGeom>
           <a:solidFill xmlns:a="http://schemas.openxmlformats.org/drawingml/2006/main">
-            <a:srgbClr val="2D9B72"/>
+            <a:srgbClr val="0B6B4F"/>
           </a:solidFill>
           <a:ln xmlns:a="http://schemas.openxmlformats.org/drawingml/2006/main" w="28575">
             <a:solidFill>
@@ -4706,7 +4706,7 @@
           <p:cNvPr id="15" name="recap-number-2">
             <a:extLst xmlns:a="http://schemas.openxmlformats.org/drawingml/2006/main">
               <a:ext uri="{FF2B5EF4-FFF2-40B4-BE49-F238E27FC236}">
-                <a16:creationId xmlns:a16="http://schemas.microsoft.com/office/drawing/2014/main" id="{479BA53A-B8F7-4222-8875-E5F4284DAA05}"/>
+                <a16:creationId xmlns:a16="http://schemas.microsoft.com/office/drawing/2014/main" id="{25AF9B32-7ED8-4ABB-9CE2-DCC61D4B84C8}"/>
               </a:ext>
             </a:extLst>
           </p:cNvPr>
@@ -4764,7 +4764,7 @@
           <p:cNvPr id="16" name="recap-item-2">
             <a:extLst xmlns:a="http://schemas.openxmlformats.org/drawingml/2006/main">
               <a:ext uri="{FF2B5EF4-FFF2-40B4-BE49-F238E27FC236}">
-                <a16:creationId xmlns:a16="http://schemas.microsoft.com/office/drawing/2014/main" id="{B7001EF2-8E41-41FA-888F-B3DCFC60AB7B}"/>
+                <a16:creationId xmlns:a16="http://schemas.microsoft.com/office/drawing/2014/main" id="{FCAEC69A-4CB8-497D-9066-868FB2C9890F}"/>
               </a:ext>
             </a:extLst>
           </p:cNvPr>
@@ -4788,7 +4788,7 @@
           </a:solidFill>
           <a:ln xmlns:a="http://schemas.openxmlformats.org/drawingml/2006/main" w="19050">
             <a:solidFill>
-              <a:srgbClr val="2D9B72"/>
+              <a:srgbClr val="0B6B4F"/>
             </a:solidFill>
             <a:prstDash val="solid"/>
           </a:ln>
@@ -4826,7 +4826,7 @@
     </p:spTree>
     <p:extLst>
       <p:ext uri="{BB962C8B-B14F-4D97-AF65-F5344CB8AC3E}">
-        <p14:creationId xmlns:p14="http://schemas.microsoft.com/office/powerpoint/2010/main" val="1786389050"/>
+        <p14:creationId xmlns:p14="http://schemas.microsoft.com/office/powerpoint/2010/main" val="65024041"/>
       </p:ext>
     </p:extLst>
   </p:cSld>
@@ -4857,7 +4857,7 @@
           <p:cNvPr id="1" name="s13-rule">
             <a:extLst xmlns:a="http://schemas.openxmlformats.org/drawingml/2006/main">
               <a:ext uri="{FF2B5EF4-FFF2-40B4-BE49-F238E27FC236}">
-                <a16:creationId xmlns:a16="http://schemas.microsoft.com/office/drawing/2014/main" id="{9C96D4CC-342C-4D22-BB38-1D9EE01F2471}"/>
+                <a16:creationId xmlns:a16="http://schemas.microsoft.com/office/drawing/2014/main" id="{0F08D356-BD4A-4B10-AD56-092E63B9C2DE}"/>
               </a:ext>
             </a:extLst>
           </p:cNvPr>
@@ -4890,7 +4890,7 @@
           <p:cNvPr id="2" name="s13-eyebrow">
             <a:extLst xmlns:a="http://schemas.openxmlformats.org/drawingml/2006/main">
               <a:ext uri="{FF2B5EF4-FFF2-40B4-BE49-F238E27FC236}">
-                <a16:creationId xmlns:a16="http://schemas.microsoft.com/office/drawing/2014/main" id="{ED9CEA7B-10F5-4991-B74B-FBD344385BC6}"/>
+                <a16:creationId xmlns:a16="http://schemas.microsoft.com/office/drawing/2014/main" id="{A00AD9D8-7001-463F-BC9F-A9724B5F20F8}"/>
               </a:ext>
             </a:extLst>
           </p:cNvPr>
@@ -4948,7 +4948,7 @@
           <p:cNvPr id="3" name="s13-title">
             <a:extLst xmlns:a="http://schemas.openxmlformats.org/drawingml/2006/main">
               <a:ext uri="{FF2B5EF4-FFF2-40B4-BE49-F238E27FC236}">
-                <a16:creationId xmlns:a16="http://schemas.microsoft.com/office/drawing/2014/main" id="{C3078ED1-90E2-452B-A3C5-4219D8CCE3FF}"/>
+                <a16:creationId xmlns:a16="http://schemas.microsoft.com/office/drawing/2014/main" id="{4FFFEBAD-7078-46E3-BC22-C30D235C660E}"/>
               </a:ext>
             </a:extLst>
           </p:cNvPr>
@@ -4996,7 +4996,7 @@
                 <a:ea typeface="PingFang SC"/>
                 <a:cs typeface="PingFang SC"/>
               </a:rPr>
-              <a:t>从公开重制课件回到可核对的学习资料</a:t>
+              <a:t>人形与四足机器人：依据、边界与延伸</a:t>
             </a:r>
           </a:p>
         </p:txBody>
@@ -5006,7 +5006,7 @@
           <p:cNvPr id="4" name="s13-footer">
             <a:extLst xmlns:a="http://schemas.openxmlformats.org/drawingml/2006/main">
               <a:ext uri="{FF2B5EF4-FFF2-40B4-BE49-F238E27FC236}">
-                <a16:creationId xmlns:a16="http://schemas.microsoft.com/office/drawing/2014/main" id="{DED6AA3D-CC2F-48AD-BE99-B285393F3BCC}"/>
+                <a16:creationId xmlns:a16="http://schemas.microsoft.com/office/drawing/2014/main" id="{AF52058F-8E48-4FD8-8CB9-FF4B855D258B}"/>
               </a:ext>
             </a:extLst>
           </p:cNvPr>
@@ -5037,7 +5037,7 @@
           <p:cNvPr id="5" name="s13-identity">
             <a:extLst xmlns:a="http://schemas.openxmlformats.org/drawingml/2006/main">
               <a:ext uri="{FF2B5EF4-FFF2-40B4-BE49-F238E27FC236}">
-                <a16:creationId xmlns:a16="http://schemas.microsoft.com/office/drawing/2014/main" id="{A8FC89F5-76B0-455A-AFFA-C891E89B7A0F}"/>
+                <a16:creationId xmlns:a16="http://schemas.microsoft.com/office/drawing/2014/main" id="{9B113835-8BE9-4586-8E2B-E8FAF621F095}"/>
               </a:ext>
             </a:extLst>
           </p:cNvPr>
@@ -5095,7 +5095,7 @@
           <p:cNvPr id="6" name="source-0">
             <a:extLst xmlns:a="http://schemas.openxmlformats.org/drawingml/2006/main">
               <a:ext uri="{FF2B5EF4-FFF2-40B4-BE49-F238E27FC236}">
-                <a16:creationId xmlns:a16="http://schemas.microsoft.com/office/drawing/2014/main" id="{DB944A15-21DB-4506-AA60-58FA7406092F}"/>
+                <a16:creationId xmlns:a16="http://schemas.microsoft.com/office/drawing/2014/main" id="{61F24C4E-21B5-4A1E-9040-6B571F25CFDE}"/>
               </a:ext>
             </a:extLst>
           </p:cNvPr>
@@ -5119,7 +5119,7 @@
           </a:solidFill>
           <a:ln xmlns:a="http://schemas.openxmlformats.org/drawingml/2006/main" w="9525">
             <a:solidFill>
-              <a:srgbClr val="2D9B72"/>
+              <a:srgbClr val="0B6B4F"/>
             </a:solidFill>
             <a:prstDash val="solid"/>
           </a:ln>
@@ -5159,7 +5159,7 @@
           <p:cNvPr id="7" name="source-1">
             <a:extLst xmlns:a="http://schemas.openxmlformats.org/drawingml/2006/main">
               <a:ext uri="{FF2B5EF4-FFF2-40B4-BE49-F238E27FC236}">
-                <a16:creationId xmlns:a16="http://schemas.microsoft.com/office/drawing/2014/main" id="{91DF7C24-BBB2-461B-8B80-317AA49161F0}"/>
+                <a16:creationId xmlns:a16="http://schemas.microsoft.com/office/drawing/2014/main" id="{955DFD89-7B4F-4C9A-A9F6-AB263AF14A09}"/>
               </a:ext>
             </a:extLst>
           </p:cNvPr>
@@ -5223,7 +5223,7 @@
           <p:cNvPr id="8" name="s13-takeaway-rule">
             <a:extLst xmlns:a="http://schemas.openxmlformats.org/drawingml/2006/main">
               <a:ext uri="{FF2B5EF4-FFF2-40B4-BE49-F238E27FC236}">
-                <a16:creationId xmlns:a16="http://schemas.microsoft.com/office/drawing/2014/main" id="{61DFFC80-1D57-4197-84C8-2690867F2E21}"/>
+                <a16:creationId xmlns:a16="http://schemas.microsoft.com/office/drawing/2014/main" id="{8DC1503D-D187-4C58-B3E9-0606513F4510}"/>
               </a:ext>
             </a:extLst>
           </p:cNvPr>
@@ -5256,7 +5256,7 @@
           <p:cNvPr id="9" name="s13-takeaway">
             <a:extLst xmlns:a="http://schemas.openxmlformats.org/drawingml/2006/main">
               <a:ext uri="{FF2B5EF4-FFF2-40B4-BE49-F238E27FC236}">
-                <a16:creationId xmlns:a16="http://schemas.microsoft.com/office/drawing/2014/main" id="{FF9312A5-7B6D-48E2-B2D6-EE0CEBCD2B36}"/>
+                <a16:creationId xmlns:a16="http://schemas.microsoft.com/office/drawing/2014/main" id="{7B3DCB49-5858-44C6-BC2E-2B19229B6875}"/>
               </a:ext>
             </a:extLst>
           </p:cNvPr>
@@ -5312,7 +5312,7 @@
     </p:spTree>
     <p:extLst>
       <p:ext uri="{BB962C8B-B14F-4D97-AF65-F5344CB8AC3E}">
-        <p14:creationId xmlns:p14="http://schemas.microsoft.com/office/powerpoint/2010/main" val="930059379"/>
+        <p14:creationId xmlns:p14="http://schemas.microsoft.com/office/powerpoint/2010/main" val="1797938021"/>
       </p:ext>
     </p:extLst>
   </p:cSld>
@@ -5343,7 +5343,7 @@
           <p:cNvPr id="1" name="s2-rule">
             <a:extLst xmlns:a="http://schemas.openxmlformats.org/drawingml/2006/main">
               <a:ext uri="{FF2B5EF4-FFF2-40B4-BE49-F238E27FC236}">
-                <a16:creationId xmlns:a16="http://schemas.microsoft.com/office/drawing/2014/main" id="{9036FDA4-360B-4C78-961D-3D7FEBE7BDEE}"/>
+                <a16:creationId xmlns:a16="http://schemas.microsoft.com/office/drawing/2014/main" id="{9D52822C-6D17-4427-B2D3-3C012B2A15BC}"/>
               </a:ext>
             </a:extLst>
           </p:cNvPr>
@@ -5376,7 +5376,7 @@
           <p:cNvPr id="2" name="s2-eyebrow">
             <a:extLst xmlns:a="http://schemas.openxmlformats.org/drawingml/2006/main">
               <a:ext uri="{FF2B5EF4-FFF2-40B4-BE49-F238E27FC236}">
-                <a16:creationId xmlns:a16="http://schemas.microsoft.com/office/drawing/2014/main" id="{5500D814-4090-45EC-BCE6-AF2A66702A2A}"/>
+                <a16:creationId xmlns:a16="http://schemas.microsoft.com/office/drawing/2014/main" id="{13CF7F51-ACDC-41C1-A79A-600E5A4FBD1E}"/>
               </a:ext>
             </a:extLst>
           </p:cNvPr>
@@ -5434,7 +5434,7 @@
           <p:cNvPr id="3" name="s2-title">
             <a:extLst xmlns:a="http://schemas.openxmlformats.org/drawingml/2006/main">
               <a:ext uri="{FF2B5EF4-FFF2-40B4-BE49-F238E27FC236}">
-                <a16:creationId xmlns:a16="http://schemas.microsoft.com/office/drawing/2014/main" id="{828595AA-FF9A-4CE9-A7DD-5D29646A91B8}"/>
+                <a16:creationId xmlns:a16="http://schemas.microsoft.com/office/drawing/2014/main" id="{FC1A85CF-0937-4709-B640-6A19FB0039C0}"/>
               </a:ext>
             </a:extLst>
           </p:cNvPr>
@@ -5482,7 +5482,7 @@
                 <a:ea typeface="PingFang SC"/>
                 <a:cs typeface="PingFang SC"/>
               </a:rPr>
-              <a:t>学完这一节，你能完成这些判断与行动</a:t>
+              <a:t>人形与四足机器人：2项学习结果</a:t>
             </a:r>
           </a:p>
         </p:txBody>
@@ -5492,7 +5492,7 @@
           <p:cNvPr id="4" name="s2-footer">
             <a:extLst xmlns:a="http://schemas.openxmlformats.org/drawingml/2006/main">
               <a:ext uri="{FF2B5EF4-FFF2-40B4-BE49-F238E27FC236}">
-                <a16:creationId xmlns:a16="http://schemas.microsoft.com/office/drawing/2014/main" id="{A1544397-49E9-4F94-9092-73C15B27715D}"/>
+                <a16:creationId xmlns:a16="http://schemas.microsoft.com/office/drawing/2014/main" id="{8A61BE8C-F5C6-40B0-BFFA-D2BF9EE8ECD0}"/>
               </a:ext>
             </a:extLst>
           </p:cNvPr>
@@ -5523,7 +5523,7 @@
           <p:cNvPr id="5" name="s2-identity">
             <a:extLst xmlns:a="http://schemas.openxmlformats.org/drawingml/2006/main">
               <a:ext uri="{FF2B5EF4-FFF2-40B4-BE49-F238E27FC236}">
-                <a16:creationId xmlns:a16="http://schemas.microsoft.com/office/drawing/2014/main" id="{12F71F57-52AA-4781-9657-60072AF54CDE}"/>
+                <a16:creationId xmlns:a16="http://schemas.microsoft.com/office/drawing/2014/main" id="{9A3E315C-3187-4715-B8EA-1C0F4666E851}"/>
               </a:ext>
             </a:extLst>
           </p:cNvPr>
@@ -5581,7 +5581,7 @@
           <p:cNvPr id="6" name="objective-1">
             <a:extLst xmlns:a="http://schemas.openxmlformats.org/drawingml/2006/main">
               <a:ext uri="{FF2B5EF4-FFF2-40B4-BE49-F238E27FC236}">
-                <a16:creationId xmlns:a16="http://schemas.microsoft.com/office/drawing/2014/main" id="{325B4585-B894-4465-9280-AE88D856661F}"/>
+                <a16:creationId xmlns:a16="http://schemas.microsoft.com/office/drawing/2014/main" id="{E292172A-1024-4BE4-ABD1-6654013839AD}"/>
               </a:ext>
             </a:extLst>
           </p:cNvPr>
@@ -5668,7 +5668,7 @@
           <p:cNvPr id="7" name="objective-2">
             <a:extLst xmlns:a="http://schemas.openxmlformats.org/drawingml/2006/main">
               <a:ext uri="{FF2B5EF4-FFF2-40B4-BE49-F238E27FC236}">
-                <a16:creationId xmlns:a16="http://schemas.microsoft.com/office/drawing/2014/main" id="{361058E5-6D23-41D0-BDF6-C5D3FD0FE10F}"/>
+                <a16:creationId xmlns:a16="http://schemas.microsoft.com/office/drawing/2014/main" id="{4B391F83-45EC-43BE-80A0-FF706F707C9E}"/>
               </a:ext>
             </a:extLst>
           </p:cNvPr>
@@ -5692,7 +5692,7 @@
           </a:solidFill>
           <a:ln xmlns:a="http://schemas.openxmlformats.org/drawingml/2006/main" w="19050">
             <a:solidFill>
-              <a:srgbClr val="2D9B72"/>
+              <a:srgbClr val="0B6B4F"/>
             </a:solidFill>
             <a:prstDash val="solid"/>
           </a:ln>
@@ -5753,7 +5753,7 @@
     </p:spTree>
     <p:extLst>
       <p:ext uri="{BB962C8B-B14F-4D97-AF65-F5344CB8AC3E}">
-        <p14:creationId xmlns:p14="http://schemas.microsoft.com/office/powerpoint/2010/main" val="2052884883"/>
+        <p14:creationId xmlns:p14="http://schemas.microsoft.com/office/powerpoint/2010/main" val="419263279"/>
       </p:ext>
     </p:extLst>
   </p:cSld>
@@ -5784,7 +5784,7 @@
           <p:cNvPr id="1" name="s3-rule">
             <a:extLst xmlns:a="http://schemas.openxmlformats.org/drawingml/2006/main">
               <a:ext uri="{FF2B5EF4-FFF2-40B4-BE49-F238E27FC236}">
-                <a16:creationId xmlns:a16="http://schemas.microsoft.com/office/drawing/2014/main" id="{A5593566-F042-40CB-9C2F-E5A81820A060}"/>
+                <a16:creationId xmlns:a16="http://schemas.microsoft.com/office/drawing/2014/main" id="{5385AED8-DF6B-43A9-9E86-89873E905B51}"/>
               </a:ext>
             </a:extLst>
           </p:cNvPr>
@@ -5817,7 +5817,7 @@
           <p:cNvPr id="2" name="s3-eyebrow">
             <a:extLst xmlns:a="http://schemas.openxmlformats.org/drawingml/2006/main">
               <a:ext uri="{FF2B5EF4-FFF2-40B4-BE49-F238E27FC236}">
-                <a16:creationId xmlns:a16="http://schemas.microsoft.com/office/drawing/2014/main" id="{ED83D092-0E66-40A4-B6AD-24E63567E61A}"/>
+                <a16:creationId xmlns:a16="http://schemas.microsoft.com/office/drawing/2014/main" id="{DA759590-D561-4EFF-9D3A-DD2E9DE0D811}"/>
               </a:ext>
             </a:extLst>
           </p:cNvPr>
@@ -5875,7 +5875,7 @@
           <p:cNvPr id="3" name="s3-title">
             <a:extLst xmlns:a="http://schemas.openxmlformats.org/drawingml/2006/main">
               <a:ext uri="{FF2B5EF4-FFF2-40B4-BE49-F238E27FC236}">
-                <a16:creationId xmlns:a16="http://schemas.microsoft.com/office/drawing/2014/main" id="{42F00164-F123-4F25-933A-4832292DDAD9}"/>
+                <a16:creationId xmlns:a16="http://schemas.microsoft.com/office/drawing/2014/main" id="{4E1144DC-3820-4514-9216-597D7DB82907}"/>
               </a:ext>
             </a:extLst>
           </p:cNvPr>
@@ -5933,7 +5933,7 @@
           <p:cNvPr id="4" name="s3-footer">
             <a:extLst xmlns:a="http://schemas.openxmlformats.org/drawingml/2006/main">
               <a:ext uri="{FF2B5EF4-FFF2-40B4-BE49-F238E27FC236}">
-                <a16:creationId xmlns:a16="http://schemas.microsoft.com/office/drawing/2014/main" id="{34F33E19-19FC-4139-A9C5-713B1BC110AE}"/>
+                <a16:creationId xmlns:a16="http://schemas.microsoft.com/office/drawing/2014/main" id="{565EA4A9-2B0E-478E-8B3B-7B428FEA02F2}"/>
               </a:ext>
             </a:extLst>
           </p:cNvPr>
@@ -5964,7 +5964,7 @@
           <p:cNvPr id="5" name="s3-identity">
             <a:extLst xmlns:a="http://schemas.openxmlformats.org/drawingml/2006/main">
               <a:ext uri="{FF2B5EF4-FFF2-40B4-BE49-F238E27FC236}">
-                <a16:creationId xmlns:a16="http://schemas.microsoft.com/office/drawing/2014/main" id="{DA3998E9-B2B0-40F2-AC37-C03ADA49087F}"/>
+                <a16:creationId xmlns:a16="http://schemas.microsoft.com/office/drawing/2014/main" id="{AFB0A864-2F10-4862-AAEC-77C67AC5FF86}"/>
               </a:ext>
             </a:extLst>
           </p:cNvPr>
@@ -6022,7 +6022,7 @@
           <p:cNvPr id="6" name="core-no-0">
             <a:extLst xmlns:a="http://schemas.openxmlformats.org/drawingml/2006/main">
               <a:ext uri="{FF2B5EF4-FFF2-40B4-BE49-F238E27FC236}">
-                <a16:creationId xmlns:a16="http://schemas.microsoft.com/office/drawing/2014/main" id="{49521A82-752D-4167-9955-0739BB35A64F}"/>
+                <a16:creationId xmlns:a16="http://schemas.microsoft.com/office/drawing/2014/main" id="{6B00B514-09A4-4266-A4E8-E5A947D9C6F1}"/>
               </a:ext>
             </a:extLst>
           </p:cNvPr>
@@ -6054,7 +6054,7 @@
             <a:pPr algn="l">
               <a:defRPr sz="2250" b="1">
                 <a:solidFill>
-                  <a:srgbClr val="2D9B72"/>
+                  <a:srgbClr val="0B6B4F"/>
                 </a:solidFill>
                 <a:latin typeface="PingFang SC"/>
                 <a:ea typeface="PingFang SC"/>
@@ -6064,7 +6064,7 @@
             <a:r>
               <a:rPr sz="2250" b="1">
                 <a:solidFill>
-                  <a:srgbClr val="2D9B72"/>
+                  <a:srgbClr val="0B6B4F"/>
                 </a:solidFill>
                 <a:latin typeface="PingFang SC"/>
                 <a:ea typeface="PingFang SC"/>
@@ -6080,7 +6080,7 @@
           <p:cNvPr id="7" name="core-label-0">
             <a:extLst xmlns:a="http://schemas.openxmlformats.org/drawingml/2006/main">
               <a:ext uri="{FF2B5EF4-FFF2-40B4-BE49-F238E27FC236}">
-                <a16:creationId xmlns:a16="http://schemas.microsoft.com/office/drawing/2014/main" id="{0211E94B-116E-493B-9973-D78C1B92678B}"/>
+                <a16:creationId xmlns:a16="http://schemas.microsoft.com/office/drawing/2014/main" id="{E290EB65-3D3A-47E1-B44C-916F1006637D}"/>
               </a:ext>
             </a:extLst>
           </p:cNvPr>
@@ -6138,7 +6138,7 @@
           <p:cNvPr id="8" name="core-body-0">
             <a:extLst xmlns:a="http://schemas.openxmlformats.org/drawingml/2006/main">
               <a:ext uri="{FF2B5EF4-FFF2-40B4-BE49-F238E27FC236}">
-                <a16:creationId xmlns:a16="http://schemas.microsoft.com/office/drawing/2014/main" id="{EEA8DF13-24BC-4148-907A-BD8E8B1542E6}"/>
+                <a16:creationId xmlns:a16="http://schemas.microsoft.com/office/drawing/2014/main" id="{343EC3D7-EF32-4612-BDE0-36E2ECC3FFFE}"/>
               </a:ext>
             </a:extLst>
           </p:cNvPr>
@@ -6162,7 +6162,7 @@
           </a:solidFill>
           <a:ln xmlns:a="http://schemas.openxmlformats.org/drawingml/2006/main" w="19050">
             <a:solidFill>
-              <a:srgbClr val="2D9B72"/>
+              <a:srgbClr val="0B6B4F"/>
             </a:solidFill>
             <a:prstDash val="solid"/>
           </a:ln>
@@ -6202,7 +6202,7 @@
           <p:cNvPr id="9" name="core-no-1">
             <a:extLst xmlns:a="http://schemas.openxmlformats.org/drawingml/2006/main">
               <a:ext uri="{FF2B5EF4-FFF2-40B4-BE49-F238E27FC236}">
-                <a16:creationId xmlns:a16="http://schemas.microsoft.com/office/drawing/2014/main" id="{0874884F-45B8-4F4E-807A-C3B23C46563B}"/>
+                <a16:creationId xmlns:a16="http://schemas.microsoft.com/office/drawing/2014/main" id="{D87CDD1F-29A5-4ABC-B21F-408EBF79D7A9}"/>
               </a:ext>
             </a:extLst>
           </p:cNvPr>
@@ -6234,7 +6234,7 @@
             <a:pPr algn="l">
               <a:defRPr sz="2250" b="1">
                 <a:solidFill>
-                  <a:srgbClr val="2D9B72"/>
+                  <a:srgbClr val="0B6B4F"/>
                 </a:solidFill>
                 <a:latin typeface="PingFang SC"/>
                 <a:ea typeface="PingFang SC"/>
@@ -6244,7 +6244,7 @@
             <a:r>
               <a:rPr sz="2250" b="1">
                 <a:solidFill>
-                  <a:srgbClr val="2D9B72"/>
+                  <a:srgbClr val="0B6B4F"/>
                 </a:solidFill>
                 <a:latin typeface="PingFang SC"/>
                 <a:ea typeface="PingFang SC"/>
@@ -6260,7 +6260,7 @@
           <p:cNvPr id="10" name="core-body-1">
             <a:extLst xmlns:a="http://schemas.openxmlformats.org/drawingml/2006/main">
               <a:ext uri="{FF2B5EF4-FFF2-40B4-BE49-F238E27FC236}">
-                <a16:creationId xmlns:a16="http://schemas.microsoft.com/office/drawing/2014/main" id="{01D0FCF1-8E0A-4410-8F88-8D8A956D8E55}"/>
+                <a16:creationId xmlns:a16="http://schemas.microsoft.com/office/drawing/2014/main" id="{BF6D8B04-A4B1-4C93-B781-3E3582B627F3}"/>
               </a:ext>
             </a:extLst>
           </p:cNvPr>
@@ -6324,7 +6324,7 @@
           <p:cNvPr id="11" name="s3-takeaway-rule">
             <a:extLst xmlns:a="http://schemas.openxmlformats.org/drawingml/2006/main">
               <a:ext uri="{FF2B5EF4-FFF2-40B4-BE49-F238E27FC236}">
-                <a16:creationId xmlns:a16="http://schemas.microsoft.com/office/drawing/2014/main" id="{D6B9FEF3-62C5-4BE5-89CF-C913FDACD692}"/>
+                <a16:creationId xmlns:a16="http://schemas.microsoft.com/office/drawing/2014/main" id="{8BB89901-1E26-4366-AB2E-B7B26A36C3E0}"/>
               </a:ext>
             </a:extLst>
           </p:cNvPr>
@@ -6357,7 +6357,7 @@
           <p:cNvPr id="12" name="s3-takeaway">
             <a:extLst xmlns:a="http://schemas.openxmlformats.org/drawingml/2006/main">
               <a:ext uri="{FF2B5EF4-FFF2-40B4-BE49-F238E27FC236}">
-                <a16:creationId xmlns:a16="http://schemas.microsoft.com/office/drawing/2014/main" id="{C5711291-7D53-4B3B-A27E-993074FCEDE0}"/>
+                <a16:creationId xmlns:a16="http://schemas.microsoft.com/office/drawing/2014/main" id="{62DD0C29-5030-4156-965B-0153F5348487}"/>
               </a:ext>
             </a:extLst>
           </p:cNvPr>
@@ -6413,7 +6413,7 @@
     </p:spTree>
     <p:extLst>
       <p:ext uri="{BB962C8B-B14F-4D97-AF65-F5344CB8AC3E}">
-        <p14:creationId xmlns:p14="http://schemas.microsoft.com/office/powerpoint/2010/main" val="1115811052"/>
+        <p14:creationId xmlns:p14="http://schemas.microsoft.com/office/powerpoint/2010/main" val="1773478590"/>
       </p:ext>
     </p:extLst>
   </p:cSld>
@@ -6444,7 +6444,7 @@
           <p:cNvPr id="1" name="s4-rule">
             <a:extLst xmlns:a="http://schemas.openxmlformats.org/drawingml/2006/main">
               <a:ext uri="{FF2B5EF4-FFF2-40B4-BE49-F238E27FC236}">
-                <a16:creationId xmlns:a16="http://schemas.microsoft.com/office/drawing/2014/main" id="{AECE06B1-3D5F-4C42-B880-7383B1374B04}"/>
+                <a16:creationId xmlns:a16="http://schemas.microsoft.com/office/drawing/2014/main" id="{52097E81-09C6-4E76-898B-6EB345E0710D}"/>
               </a:ext>
             </a:extLst>
           </p:cNvPr>
@@ -6477,7 +6477,7 @@
           <p:cNvPr id="2" name="s4-eyebrow">
             <a:extLst xmlns:a="http://schemas.openxmlformats.org/drawingml/2006/main">
               <a:ext uri="{FF2B5EF4-FFF2-40B4-BE49-F238E27FC236}">
-                <a16:creationId xmlns:a16="http://schemas.microsoft.com/office/drawing/2014/main" id="{C953D4C2-AD1B-402D-B30C-6329235FAAA6}"/>
+                <a16:creationId xmlns:a16="http://schemas.microsoft.com/office/drawing/2014/main" id="{5AF03E68-C437-46A3-95BB-D3CF8AA5B9EE}"/>
               </a:ext>
             </a:extLst>
           </p:cNvPr>
@@ -6535,7 +6535,7 @@
           <p:cNvPr id="3" name="s4-title">
             <a:extLst xmlns:a="http://schemas.openxmlformats.org/drawingml/2006/main">
               <a:ext uri="{FF2B5EF4-FFF2-40B4-BE49-F238E27FC236}">
-                <a16:creationId xmlns:a16="http://schemas.microsoft.com/office/drawing/2014/main" id="{91CA1679-9E3C-4874-A076-A1E0B9FA6B6E}"/>
+                <a16:creationId xmlns:a16="http://schemas.microsoft.com/office/drawing/2014/main" id="{DEF17033-72DC-41EE-B8A5-8E974E084039}"/>
               </a:ext>
             </a:extLst>
           </p:cNvPr>
@@ -6560,7 +6560,7 @@
         </p:spPr>
         <p:txBody>
           <a:bodyPr xmlns:a="http://schemas.openxmlformats.org/drawingml/2006/main" lIns="0" tIns="0" rIns="0" bIns="0" anchor="ctr">
-            <a:normAutofit fontScale="86983"/>
+            <a:normAutofit fontScale="100000"/>
           </a:bodyPr>
           <a:lstStyle xmlns:a="http://schemas.openxmlformats.org/drawingml/2006/main"/>
           <a:p xmlns:a="http://schemas.openxmlformats.org/drawingml/2006/main">
@@ -6583,7 +6583,7 @@
                 <a:ea typeface="PingFang SC"/>
                 <a:cs typeface="PingFang SC"/>
               </a:rPr>
-              <a:t>机器人运动不仅是让关节转动，而是让身体在动态环境中保持平衡</a:t>
+              <a:t>机器人运动的核心是在动态环境中保持平衡</a:t>
             </a:r>
           </a:p>
         </p:txBody>
@@ -6593,7 +6593,7 @@
           <p:cNvPr id="4" name="s4-footer">
             <a:extLst xmlns:a="http://schemas.openxmlformats.org/drawingml/2006/main">
               <a:ext uri="{FF2B5EF4-FFF2-40B4-BE49-F238E27FC236}">
-                <a16:creationId xmlns:a16="http://schemas.microsoft.com/office/drawing/2014/main" id="{ACD39FD3-01EC-4EF4-BDC2-F55BDCA904EA}"/>
+                <a16:creationId xmlns:a16="http://schemas.microsoft.com/office/drawing/2014/main" id="{4E8914B9-2F43-4C5F-93B1-4AD3A84CD955}"/>
               </a:ext>
             </a:extLst>
           </p:cNvPr>
@@ -6624,7 +6624,7 @@
           <p:cNvPr id="5" name="s4-identity">
             <a:extLst xmlns:a="http://schemas.openxmlformats.org/drawingml/2006/main">
               <a:ext uri="{FF2B5EF4-FFF2-40B4-BE49-F238E27FC236}">
-                <a16:creationId xmlns:a16="http://schemas.microsoft.com/office/drawing/2014/main" id="{14D75884-125A-4D43-9756-F51D9C81DA11}"/>
+                <a16:creationId xmlns:a16="http://schemas.microsoft.com/office/drawing/2014/main" id="{F7708452-2819-497F-9E22-A29A0FB0C16F}"/>
               </a:ext>
             </a:extLst>
           </p:cNvPr>
@@ -6682,7 +6682,7 @@
           <p:cNvPr id="6" name="core-no-0">
             <a:extLst xmlns:a="http://schemas.openxmlformats.org/drawingml/2006/main">
               <a:ext uri="{FF2B5EF4-FFF2-40B4-BE49-F238E27FC236}">
-                <a16:creationId xmlns:a16="http://schemas.microsoft.com/office/drawing/2014/main" id="{A885788A-0BFB-4C02-B670-25C8EC558EFB}"/>
+                <a16:creationId xmlns:a16="http://schemas.microsoft.com/office/drawing/2014/main" id="{86C37DD5-E56C-4262-826E-A657094522A9}"/>
               </a:ext>
             </a:extLst>
           </p:cNvPr>
@@ -6714,7 +6714,7 @@
             <a:pPr algn="l">
               <a:defRPr sz="2250" b="1">
                 <a:solidFill>
-                  <a:srgbClr val="2D9B72"/>
+                  <a:srgbClr val="0B6B4F"/>
                 </a:solidFill>
                 <a:latin typeface="PingFang SC"/>
                 <a:ea typeface="PingFang SC"/>
@@ -6724,7 +6724,7 @@
             <a:r>
               <a:rPr sz="2250" b="1">
                 <a:solidFill>
-                  <a:srgbClr val="2D9B72"/>
+                  <a:srgbClr val="0B6B4F"/>
                 </a:solidFill>
                 <a:latin typeface="PingFang SC"/>
                 <a:ea typeface="PingFang SC"/>
@@ -6740,7 +6740,7 @@
           <p:cNvPr id="7" name="core-label-0">
             <a:extLst xmlns:a="http://schemas.openxmlformats.org/drawingml/2006/main">
               <a:ext uri="{FF2B5EF4-FFF2-40B4-BE49-F238E27FC236}">
-                <a16:creationId xmlns:a16="http://schemas.microsoft.com/office/drawing/2014/main" id="{5EF9CA4F-ECA9-4A6F-A3FC-77F4C2DEDC84}"/>
+                <a16:creationId xmlns:a16="http://schemas.microsoft.com/office/drawing/2014/main" id="{4178F5D8-CA6B-4B28-8ADF-EAAA352AA5A9}"/>
               </a:ext>
             </a:extLst>
           </p:cNvPr>
@@ -6798,7 +6798,7 @@
           <p:cNvPr id="8" name="core-body-0">
             <a:extLst xmlns:a="http://schemas.openxmlformats.org/drawingml/2006/main">
               <a:ext uri="{FF2B5EF4-FFF2-40B4-BE49-F238E27FC236}">
-                <a16:creationId xmlns:a16="http://schemas.microsoft.com/office/drawing/2014/main" id="{417FE67E-0EA8-4B98-BA63-A567D6CF429E}"/>
+                <a16:creationId xmlns:a16="http://schemas.microsoft.com/office/drawing/2014/main" id="{AA3A0020-30FD-4BF0-B636-91B9ED158864}"/>
               </a:ext>
             </a:extLst>
           </p:cNvPr>
@@ -6822,7 +6822,7 @@
           </a:solidFill>
           <a:ln xmlns:a="http://schemas.openxmlformats.org/drawingml/2006/main" w="19050">
             <a:solidFill>
-              <a:srgbClr val="2D9B72"/>
+              <a:srgbClr val="0B6B4F"/>
             </a:solidFill>
             <a:prstDash val="solid"/>
           </a:ln>
@@ -6862,7 +6862,7 @@
           <p:cNvPr id="9" name="core-no-1">
             <a:extLst xmlns:a="http://schemas.openxmlformats.org/drawingml/2006/main">
               <a:ext uri="{FF2B5EF4-FFF2-40B4-BE49-F238E27FC236}">
-                <a16:creationId xmlns:a16="http://schemas.microsoft.com/office/drawing/2014/main" id="{89E934B8-2148-484A-9547-DC162064CE39}"/>
+                <a16:creationId xmlns:a16="http://schemas.microsoft.com/office/drawing/2014/main" id="{9A44FA36-79C1-470C-80EC-46457A4E6971}"/>
               </a:ext>
             </a:extLst>
           </p:cNvPr>
@@ -6894,7 +6894,7 @@
             <a:pPr algn="l">
               <a:defRPr sz="2250" b="1">
                 <a:solidFill>
-                  <a:srgbClr val="2D9B72"/>
+                  <a:srgbClr val="0B6B4F"/>
                 </a:solidFill>
                 <a:latin typeface="PingFang SC"/>
                 <a:ea typeface="PingFang SC"/>
@@ -6904,7 +6904,7 @@
             <a:r>
               <a:rPr sz="2250" b="1">
                 <a:solidFill>
-                  <a:srgbClr val="2D9B72"/>
+                  <a:srgbClr val="0B6B4F"/>
                 </a:solidFill>
                 <a:latin typeface="PingFang SC"/>
                 <a:ea typeface="PingFang SC"/>
@@ -6920,7 +6920,7 @@
           <p:cNvPr id="10" name="core-body-1">
             <a:extLst xmlns:a="http://schemas.openxmlformats.org/drawingml/2006/main">
               <a:ext uri="{FF2B5EF4-FFF2-40B4-BE49-F238E27FC236}">
-                <a16:creationId xmlns:a16="http://schemas.microsoft.com/office/drawing/2014/main" id="{9997F40D-F445-468A-86FF-73FBB55F8671}"/>
+                <a16:creationId xmlns:a16="http://schemas.microsoft.com/office/drawing/2014/main" id="{82BD6226-85F2-4B81-9592-F802784F24B2}"/>
               </a:ext>
             </a:extLst>
           </p:cNvPr>
@@ -6984,7 +6984,7 @@
           <p:cNvPr id="11" name="s4-takeaway-rule">
             <a:extLst xmlns:a="http://schemas.openxmlformats.org/drawingml/2006/main">
               <a:ext uri="{FF2B5EF4-FFF2-40B4-BE49-F238E27FC236}">
-                <a16:creationId xmlns:a16="http://schemas.microsoft.com/office/drawing/2014/main" id="{22BC00C8-9C99-4A7D-A975-D734AFF0098E}"/>
+                <a16:creationId xmlns:a16="http://schemas.microsoft.com/office/drawing/2014/main" id="{69F84815-CF1A-4037-8566-F175A6785B95}"/>
               </a:ext>
             </a:extLst>
           </p:cNvPr>
@@ -7017,7 +7017,7 @@
           <p:cNvPr id="12" name="s4-takeaway">
             <a:extLst xmlns:a="http://schemas.openxmlformats.org/drawingml/2006/main">
               <a:ext uri="{FF2B5EF4-FFF2-40B4-BE49-F238E27FC236}">
-                <a16:creationId xmlns:a16="http://schemas.microsoft.com/office/drawing/2014/main" id="{19FD87C3-BDD8-4EE1-860E-13AF8F7C6638}"/>
+                <a16:creationId xmlns:a16="http://schemas.microsoft.com/office/drawing/2014/main" id="{3DA9251C-E01A-45A1-B8B5-6EFBABD72125}"/>
               </a:ext>
             </a:extLst>
           </p:cNvPr>
@@ -7065,7 +7065,7 @@
                 <a:ea typeface="PingFang SC"/>
                 <a:cs typeface="PingFang SC"/>
               </a:rPr>
-              <a:t>机器人运动不仅是让关节转动，而是让身体在动态环境中保持平衡</a:t>
+              <a:t>机器人运动的核心是在动态环境中保持平衡</a:t>
             </a:r>
           </a:p>
         </p:txBody>
@@ -7073,7 +7073,7 @@
     </p:spTree>
     <p:extLst>
       <p:ext uri="{BB962C8B-B14F-4D97-AF65-F5344CB8AC3E}">
-        <p14:creationId xmlns:p14="http://schemas.microsoft.com/office/powerpoint/2010/main" val="2086866086"/>
+        <p14:creationId xmlns:p14="http://schemas.microsoft.com/office/powerpoint/2010/main" val="411144879"/>
       </p:ext>
     </p:extLst>
   </p:cSld>
@@ -7104,7 +7104,7 @@
           <p:cNvPr id="1" name="s5-rule">
             <a:extLst xmlns:a="http://schemas.openxmlformats.org/drawingml/2006/main">
               <a:ext uri="{FF2B5EF4-FFF2-40B4-BE49-F238E27FC236}">
-                <a16:creationId xmlns:a16="http://schemas.microsoft.com/office/drawing/2014/main" id="{C822D0DD-BC6E-4B2E-91C9-4006E1F03B4D}"/>
+                <a16:creationId xmlns:a16="http://schemas.microsoft.com/office/drawing/2014/main" id="{C7E9F34E-FA31-4122-A470-4392E666055E}"/>
               </a:ext>
             </a:extLst>
           </p:cNvPr>
@@ -7137,7 +7137,7 @@
           <p:cNvPr id="2" name="s5-eyebrow">
             <a:extLst xmlns:a="http://schemas.openxmlformats.org/drawingml/2006/main">
               <a:ext uri="{FF2B5EF4-FFF2-40B4-BE49-F238E27FC236}">
-                <a16:creationId xmlns:a16="http://schemas.microsoft.com/office/drawing/2014/main" id="{105789DF-6AAA-4B75-96A1-C7871D5DF201}"/>
+                <a16:creationId xmlns:a16="http://schemas.microsoft.com/office/drawing/2014/main" id="{281081E4-F113-4DF3-8EE7-1D7B3A61C423}"/>
               </a:ext>
             </a:extLst>
           </p:cNvPr>
@@ -7195,7 +7195,7 @@
           <p:cNvPr id="3" name="s5-title">
             <a:extLst xmlns:a="http://schemas.openxmlformats.org/drawingml/2006/main">
               <a:ext uri="{FF2B5EF4-FFF2-40B4-BE49-F238E27FC236}">
-                <a16:creationId xmlns:a16="http://schemas.microsoft.com/office/drawing/2014/main" id="{09584BD1-170A-4497-BE2F-A862014BBCFD}"/>
+                <a16:creationId xmlns:a16="http://schemas.microsoft.com/office/drawing/2014/main" id="{84BA8DCE-4186-4401-BA63-B3C046FBEA63}"/>
               </a:ext>
             </a:extLst>
           </p:cNvPr>
@@ -7243,7 +7243,7 @@
                 <a:ea typeface="PingFang SC"/>
                 <a:cs typeface="PingFang SC"/>
               </a:rPr>
-              <a:t>人形机器人被关注</a:t>
+              <a:t>人形结构扩大操作潜力，也提高控制难度</a:t>
             </a:r>
           </a:p>
         </p:txBody>
@@ -7253,7 +7253,7 @@
           <p:cNvPr id="4" name="s5-footer">
             <a:extLst xmlns:a="http://schemas.openxmlformats.org/drawingml/2006/main">
               <a:ext uri="{FF2B5EF4-FFF2-40B4-BE49-F238E27FC236}">
-                <a16:creationId xmlns:a16="http://schemas.microsoft.com/office/drawing/2014/main" id="{6F06F2CD-10BA-4D76-912E-14DCCBE914D4}"/>
+                <a16:creationId xmlns:a16="http://schemas.microsoft.com/office/drawing/2014/main" id="{B5E0AA9D-9512-4810-81C6-39858F1EAE9B}"/>
               </a:ext>
             </a:extLst>
           </p:cNvPr>
@@ -7284,7 +7284,7 @@
           <p:cNvPr id="5" name="s5-identity">
             <a:extLst xmlns:a="http://schemas.openxmlformats.org/drawingml/2006/main">
               <a:ext uri="{FF2B5EF4-FFF2-40B4-BE49-F238E27FC236}">
-                <a16:creationId xmlns:a16="http://schemas.microsoft.com/office/drawing/2014/main" id="{8407EDA4-6ADF-4398-AC1A-063835DEEB4C}"/>
+                <a16:creationId xmlns:a16="http://schemas.microsoft.com/office/drawing/2014/main" id="{201D81B8-48CF-470E-B400-371909F4087C}"/>
               </a:ext>
             </a:extLst>
           </p:cNvPr>
@@ -7342,7 +7342,7 @@
           <p:cNvPr id="6" name="core-no-0">
             <a:extLst xmlns:a="http://schemas.openxmlformats.org/drawingml/2006/main">
               <a:ext uri="{FF2B5EF4-FFF2-40B4-BE49-F238E27FC236}">
-                <a16:creationId xmlns:a16="http://schemas.microsoft.com/office/drawing/2014/main" id="{2F2A3EB4-3787-4F7F-8245-3F5DD900F50E}"/>
+                <a16:creationId xmlns:a16="http://schemas.microsoft.com/office/drawing/2014/main" id="{FF7587F8-01CB-43A8-9177-ADCF87EC9F5F}"/>
               </a:ext>
             </a:extLst>
           </p:cNvPr>
@@ -7374,7 +7374,7 @@
             <a:pPr algn="l">
               <a:defRPr sz="2250" b="1">
                 <a:solidFill>
-                  <a:srgbClr val="2D9B72"/>
+                  <a:srgbClr val="0B6B4F"/>
                 </a:solidFill>
                 <a:latin typeface="PingFang SC"/>
                 <a:ea typeface="PingFang SC"/>
@@ -7384,7 +7384,7 @@
             <a:r>
               <a:rPr sz="2250" b="1">
                 <a:solidFill>
-                  <a:srgbClr val="2D9B72"/>
+                  <a:srgbClr val="0B6B4F"/>
                 </a:solidFill>
                 <a:latin typeface="PingFang SC"/>
                 <a:ea typeface="PingFang SC"/>
@@ -7400,7 +7400,7 @@
           <p:cNvPr id="7" name="core-label-0">
             <a:extLst xmlns:a="http://schemas.openxmlformats.org/drawingml/2006/main">
               <a:ext uri="{FF2B5EF4-FFF2-40B4-BE49-F238E27FC236}">
-                <a16:creationId xmlns:a16="http://schemas.microsoft.com/office/drawing/2014/main" id="{D2C9A293-5ACB-4872-93B3-622D9C98913C}"/>
+                <a16:creationId xmlns:a16="http://schemas.microsoft.com/office/drawing/2014/main" id="{7FF0105E-B9A0-44E9-BFBC-E0DA3DB558AA}"/>
               </a:ext>
             </a:extLst>
           </p:cNvPr>
@@ -7458,7 +7458,7 @@
           <p:cNvPr id="8" name="core-body-0">
             <a:extLst xmlns:a="http://schemas.openxmlformats.org/drawingml/2006/main">
               <a:ext uri="{FF2B5EF4-FFF2-40B4-BE49-F238E27FC236}">
-                <a16:creationId xmlns:a16="http://schemas.microsoft.com/office/drawing/2014/main" id="{39E8D3B2-C510-4E22-960C-D0F9E4CA715E}"/>
+                <a16:creationId xmlns:a16="http://schemas.microsoft.com/office/drawing/2014/main" id="{A6BA1FEF-EF32-4D01-9693-F0A481497CD8}"/>
               </a:ext>
             </a:extLst>
           </p:cNvPr>
@@ -7482,7 +7482,7 @@
           </a:solidFill>
           <a:ln xmlns:a="http://schemas.openxmlformats.org/drawingml/2006/main" w="19050">
             <a:solidFill>
-              <a:srgbClr val="2D9B72"/>
+              <a:srgbClr val="0B6B4F"/>
             </a:solidFill>
             <a:prstDash val="solid"/>
           </a:ln>
@@ -7522,7 +7522,7 @@
           <p:cNvPr id="9" name="core-no-1">
             <a:extLst xmlns:a="http://schemas.openxmlformats.org/drawingml/2006/main">
               <a:ext uri="{FF2B5EF4-FFF2-40B4-BE49-F238E27FC236}">
-                <a16:creationId xmlns:a16="http://schemas.microsoft.com/office/drawing/2014/main" id="{86312B17-B3BF-4A6E-AA77-E6CAE759A27C}"/>
+                <a16:creationId xmlns:a16="http://schemas.microsoft.com/office/drawing/2014/main" id="{CCB19011-6A01-49C3-83E5-F93ACA1C780C}"/>
               </a:ext>
             </a:extLst>
           </p:cNvPr>
@@ -7554,7 +7554,7 @@
             <a:pPr algn="l">
               <a:defRPr sz="2250" b="1">
                 <a:solidFill>
-                  <a:srgbClr val="2D9B72"/>
+                  <a:srgbClr val="0B6B4F"/>
                 </a:solidFill>
                 <a:latin typeface="PingFang SC"/>
                 <a:ea typeface="PingFang SC"/>
@@ -7564,7 +7564,7 @@
             <a:r>
               <a:rPr sz="2250" b="1">
                 <a:solidFill>
-                  <a:srgbClr val="2D9B72"/>
+                  <a:srgbClr val="0B6B4F"/>
                 </a:solidFill>
                 <a:latin typeface="PingFang SC"/>
                 <a:ea typeface="PingFang SC"/>
@@ -7580,7 +7580,7 @@
           <p:cNvPr id="10" name="core-body-1">
             <a:extLst xmlns:a="http://schemas.openxmlformats.org/drawingml/2006/main">
               <a:ext uri="{FF2B5EF4-FFF2-40B4-BE49-F238E27FC236}">
-                <a16:creationId xmlns:a16="http://schemas.microsoft.com/office/drawing/2014/main" id="{5A985972-A10E-476D-A951-152E6061F95D}"/>
+                <a16:creationId xmlns:a16="http://schemas.microsoft.com/office/drawing/2014/main" id="{A621CF35-32AD-4BA5-BC80-93C0826D1E3A}"/>
               </a:ext>
             </a:extLst>
           </p:cNvPr>
@@ -7644,7 +7644,7 @@
           <p:cNvPr id="11" name="s5-takeaway-rule">
             <a:extLst xmlns:a="http://schemas.openxmlformats.org/drawingml/2006/main">
               <a:ext uri="{FF2B5EF4-FFF2-40B4-BE49-F238E27FC236}">
-                <a16:creationId xmlns:a16="http://schemas.microsoft.com/office/drawing/2014/main" id="{C2E54F7B-11F6-49D1-8B64-C4F034D56115}"/>
+                <a16:creationId xmlns:a16="http://schemas.microsoft.com/office/drawing/2014/main" id="{4B75D422-F693-4C20-A4A8-4B58CDCC893B}"/>
               </a:ext>
             </a:extLst>
           </p:cNvPr>
@@ -7677,7 +7677,7 @@
           <p:cNvPr id="12" name="s5-takeaway">
             <a:extLst xmlns:a="http://schemas.openxmlformats.org/drawingml/2006/main">
               <a:ext uri="{FF2B5EF4-FFF2-40B4-BE49-F238E27FC236}">
-                <a16:creationId xmlns:a16="http://schemas.microsoft.com/office/drawing/2014/main" id="{424D9296-F9AA-401F-AE3D-35763A902783}"/>
+                <a16:creationId xmlns:a16="http://schemas.microsoft.com/office/drawing/2014/main" id="{59FE74BB-C750-4CA1-81F5-0DBDEB3DF370}"/>
               </a:ext>
             </a:extLst>
           </p:cNvPr>
@@ -7725,7 +7725,7 @@
                 <a:ea typeface="PingFang SC"/>
                 <a:cs typeface="PingFang SC"/>
               </a:rPr>
-              <a:t>人形机器人被关注</a:t>
+              <a:t>人形结构扩大操作潜力，也提高控制难度</a:t>
             </a:r>
           </a:p>
         </p:txBody>
@@ -7733,7 +7733,7 @@
     </p:spTree>
     <p:extLst>
       <p:ext uri="{BB962C8B-B14F-4D97-AF65-F5344CB8AC3E}">
-        <p14:creationId xmlns:p14="http://schemas.microsoft.com/office/powerpoint/2010/main" val="2098772360"/>
+        <p14:creationId xmlns:p14="http://schemas.microsoft.com/office/powerpoint/2010/main" val="1193368904"/>
       </p:ext>
     </p:extLst>
   </p:cSld>
@@ -7764,7 +7764,7 @@
           <p:cNvPr id="1" name="s6-rule">
             <a:extLst xmlns:a="http://schemas.openxmlformats.org/drawingml/2006/main">
               <a:ext uri="{FF2B5EF4-FFF2-40B4-BE49-F238E27FC236}">
-                <a16:creationId xmlns:a16="http://schemas.microsoft.com/office/drawing/2014/main" id="{7E620AB5-CD4D-4505-8654-35630609902C}"/>
+                <a16:creationId xmlns:a16="http://schemas.microsoft.com/office/drawing/2014/main" id="{096A5201-2F98-4450-A003-AF6BF9DFE45B}"/>
               </a:ext>
             </a:extLst>
           </p:cNvPr>
@@ -7797,7 +7797,7 @@
           <p:cNvPr id="2" name="s6-eyebrow">
             <a:extLst xmlns:a="http://schemas.openxmlformats.org/drawingml/2006/main">
               <a:ext uri="{FF2B5EF4-FFF2-40B4-BE49-F238E27FC236}">
-                <a16:creationId xmlns:a16="http://schemas.microsoft.com/office/drawing/2014/main" id="{76804A00-97E9-434C-8770-408F45D00EB9}"/>
+                <a16:creationId xmlns:a16="http://schemas.microsoft.com/office/drawing/2014/main" id="{CA766A29-A4F3-4636-8BAD-4914A77F4071}"/>
               </a:ext>
             </a:extLst>
           </p:cNvPr>
@@ -7855,7 +7855,7 @@
           <p:cNvPr id="3" name="s6-title">
             <a:extLst xmlns:a="http://schemas.openxmlformats.org/drawingml/2006/main">
               <a:ext uri="{FF2B5EF4-FFF2-40B4-BE49-F238E27FC236}">
-                <a16:creationId xmlns:a16="http://schemas.microsoft.com/office/drawing/2014/main" id="{C36DC0E0-093D-44EB-8E1F-464A6A96AE7C}"/>
+                <a16:creationId xmlns:a16="http://schemas.microsoft.com/office/drawing/2014/main" id="{ACFE9634-90FC-4AE4-AC34-F7529F921DC7}"/>
               </a:ext>
             </a:extLst>
           </p:cNvPr>
@@ -7913,7 +7913,7 @@
           <p:cNvPr id="4" name="s6-footer">
             <a:extLst xmlns:a="http://schemas.openxmlformats.org/drawingml/2006/main">
               <a:ext uri="{FF2B5EF4-FFF2-40B4-BE49-F238E27FC236}">
-                <a16:creationId xmlns:a16="http://schemas.microsoft.com/office/drawing/2014/main" id="{03EF3053-51BD-456B-BD44-220D0E0F32DF}"/>
+                <a16:creationId xmlns:a16="http://schemas.microsoft.com/office/drawing/2014/main" id="{AB544DBF-1F6A-4558-9EE7-65AE5EF828AF}"/>
               </a:ext>
             </a:extLst>
           </p:cNvPr>
@@ -7944,7 +7944,7 @@
           <p:cNvPr id="5" name="s6-identity">
             <a:extLst xmlns:a="http://schemas.openxmlformats.org/drawingml/2006/main">
               <a:ext uri="{FF2B5EF4-FFF2-40B4-BE49-F238E27FC236}">
-                <a16:creationId xmlns:a16="http://schemas.microsoft.com/office/drawing/2014/main" id="{51291958-A4A0-4895-A1B8-DAAA225BC79B}"/>
+                <a16:creationId xmlns:a16="http://schemas.microsoft.com/office/drawing/2014/main" id="{7504629A-D24A-4743-A3D2-180515D8F2AB}"/>
               </a:ext>
             </a:extLst>
           </p:cNvPr>
@@ -8002,7 +8002,7 @@
           <p:cNvPr id="6" name="core-no-0">
             <a:extLst xmlns:a="http://schemas.openxmlformats.org/drawingml/2006/main">
               <a:ext uri="{FF2B5EF4-FFF2-40B4-BE49-F238E27FC236}">
-                <a16:creationId xmlns:a16="http://schemas.microsoft.com/office/drawing/2014/main" id="{163CF7D0-4421-4ABC-A3DB-82CF5EC7B7DB}"/>
+                <a16:creationId xmlns:a16="http://schemas.microsoft.com/office/drawing/2014/main" id="{EB13C235-A312-4622-9D11-B00E1E19D4DF}"/>
               </a:ext>
             </a:extLst>
           </p:cNvPr>
@@ -8034,7 +8034,7 @@
             <a:pPr algn="l">
               <a:defRPr sz="2250" b="1">
                 <a:solidFill>
-                  <a:srgbClr val="2D9B72"/>
+                  <a:srgbClr val="0B6B4F"/>
                 </a:solidFill>
                 <a:latin typeface="PingFang SC"/>
                 <a:ea typeface="PingFang SC"/>
@@ -8044,7 +8044,7 @@
             <a:r>
               <a:rPr sz="2250" b="1">
                 <a:solidFill>
-                  <a:srgbClr val="2D9B72"/>
+                  <a:srgbClr val="0B6B4F"/>
                 </a:solidFill>
                 <a:latin typeface="PingFang SC"/>
                 <a:ea typeface="PingFang SC"/>
@@ -8060,7 +8060,7 @@
           <p:cNvPr id="7" name="core-label-0">
             <a:extLst xmlns:a="http://schemas.openxmlformats.org/drawingml/2006/main">
               <a:ext uri="{FF2B5EF4-FFF2-40B4-BE49-F238E27FC236}">
-                <a16:creationId xmlns:a16="http://schemas.microsoft.com/office/drawing/2014/main" id="{44CAF0C4-8285-45F7-A2EF-F03C7ABC0AA2}"/>
+                <a16:creationId xmlns:a16="http://schemas.microsoft.com/office/drawing/2014/main" id="{933F0B91-DB5D-4E0D-ACC8-2E11D29E067A}"/>
               </a:ext>
             </a:extLst>
           </p:cNvPr>
@@ -8118,7 +8118,7 @@
           <p:cNvPr id="8" name="core-body-0">
             <a:extLst xmlns:a="http://schemas.openxmlformats.org/drawingml/2006/main">
               <a:ext uri="{FF2B5EF4-FFF2-40B4-BE49-F238E27FC236}">
-                <a16:creationId xmlns:a16="http://schemas.microsoft.com/office/drawing/2014/main" id="{2D20FBEA-A1A7-446F-8964-54E0E395213F}"/>
+                <a16:creationId xmlns:a16="http://schemas.microsoft.com/office/drawing/2014/main" id="{8FC83BEF-FA89-4DD4-BF16-A7CF1D4056D3}"/>
               </a:ext>
             </a:extLst>
           </p:cNvPr>
@@ -8142,7 +8142,7 @@
           </a:solidFill>
           <a:ln xmlns:a="http://schemas.openxmlformats.org/drawingml/2006/main" w="19050">
             <a:solidFill>
-              <a:srgbClr val="2D9B72"/>
+              <a:srgbClr val="0B6B4F"/>
             </a:solidFill>
             <a:prstDash val="solid"/>
           </a:ln>
@@ -8182,7 +8182,7 @@
           <p:cNvPr id="9" name="core-no-1">
             <a:extLst xmlns:a="http://schemas.openxmlformats.org/drawingml/2006/main">
               <a:ext uri="{FF2B5EF4-FFF2-40B4-BE49-F238E27FC236}">
-                <a16:creationId xmlns:a16="http://schemas.microsoft.com/office/drawing/2014/main" id="{53611E6C-EF41-4460-86F1-0155C1FEE6D6}"/>
+                <a16:creationId xmlns:a16="http://schemas.microsoft.com/office/drawing/2014/main" id="{45D89961-720F-4859-AFEA-C5E45EF8817F}"/>
               </a:ext>
             </a:extLst>
           </p:cNvPr>
@@ -8214,7 +8214,7 @@
             <a:pPr algn="l">
               <a:defRPr sz="2250" b="1">
                 <a:solidFill>
-                  <a:srgbClr val="2D9B72"/>
+                  <a:srgbClr val="0B6B4F"/>
                 </a:solidFill>
                 <a:latin typeface="PingFang SC"/>
                 <a:ea typeface="PingFang SC"/>
@@ -8224,7 +8224,7 @@
             <a:r>
               <a:rPr sz="2250" b="1">
                 <a:solidFill>
-                  <a:srgbClr val="2D9B72"/>
+                  <a:srgbClr val="0B6B4F"/>
                 </a:solidFill>
                 <a:latin typeface="PingFang SC"/>
                 <a:ea typeface="PingFang SC"/>
@@ -8240,7 +8240,7 @@
           <p:cNvPr id="10" name="core-body-1">
             <a:extLst xmlns:a="http://schemas.openxmlformats.org/drawingml/2006/main">
               <a:ext uri="{FF2B5EF4-FFF2-40B4-BE49-F238E27FC236}">
-                <a16:creationId xmlns:a16="http://schemas.microsoft.com/office/drawing/2014/main" id="{26891C6E-BE55-48A0-A2B1-41F0D8CAB55E}"/>
+                <a16:creationId xmlns:a16="http://schemas.microsoft.com/office/drawing/2014/main" id="{85702B2C-CAC1-4463-8F03-D6DD6FA12B96}"/>
               </a:ext>
             </a:extLst>
           </p:cNvPr>
@@ -8304,7 +8304,7 @@
           <p:cNvPr id="11" name="s6-takeaway-rule">
             <a:extLst xmlns:a="http://schemas.openxmlformats.org/drawingml/2006/main">
               <a:ext uri="{FF2B5EF4-FFF2-40B4-BE49-F238E27FC236}">
-                <a16:creationId xmlns:a16="http://schemas.microsoft.com/office/drawing/2014/main" id="{77021751-048F-4B81-8245-89CC7F2C91B3}"/>
+                <a16:creationId xmlns:a16="http://schemas.microsoft.com/office/drawing/2014/main" id="{AE606F0D-2449-4300-90BD-4A20990A6709}"/>
               </a:ext>
             </a:extLst>
           </p:cNvPr>
@@ -8337,7 +8337,7 @@
           <p:cNvPr id="12" name="s6-takeaway">
             <a:extLst xmlns:a="http://schemas.openxmlformats.org/drawingml/2006/main">
               <a:ext uri="{FF2B5EF4-FFF2-40B4-BE49-F238E27FC236}">
-                <a16:creationId xmlns:a16="http://schemas.microsoft.com/office/drawing/2014/main" id="{E040055F-F562-42AE-BBF3-30B7C63FFDF7}"/>
+                <a16:creationId xmlns:a16="http://schemas.microsoft.com/office/drawing/2014/main" id="{42DD33AF-C22E-45DF-9331-1E46EC00531D}"/>
               </a:ext>
             </a:extLst>
           </p:cNvPr>
@@ -8393,7 +8393,7 @@
     </p:spTree>
     <p:extLst>
       <p:ext uri="{BB962C8B-B14F-4D97-AF65-F5344CB8AC3E}">
-        <p14:creationId xmlns:p14="http://schemas.microsoft.com/office/powerpoint/2010/main" val="1248565403"/>
+        <p14:creationId xmlns:p14="http://schemas.microsoft.com/office/powerpoint/2010/main" val="1960213651"/>
       </p:ext>
     </p:extLst>
   </p:cSld>
@@ -8424,7 +8424,7 @@
           <p:cNvPr id="1" name="s7-rule">
             <a:extLst xmlns:a="http://schemas.openxmlformats.org/drawingml/2006/main">
               <a:ext uri="{FF2B5EF4-FFF2-40B4-BE49-F238E27FC236}">
-                <a16:creationId xmlns:a16="http://schemas.microsoft.com/office/drawing/2014/main" id="{CBF4F5BB-EF0D-478D-A0DE-C7CBB4A6966D}"/>
+                <a16:creationId xmlns:a16="http://schemas.microsoft.com/office/drawing/2014/main" id="{50398342-5B30-4232-9B1B-6C6EA5817C2A}"/>
               </a:ext>
             </a:extLst>
           </p:cNvPr>
@@ -8457,7 +8457,7 @@
           <p:cNvPr id="2" name="s7-eyebrow">
             <a:extLst xmlns:a="http://schemas.openxmlformats.org/drawingml/2006/main">
               <a:ext uri="{FF2B5EF4-FFF2-40B4-BE49-F238E27FC236}">
-                <a16:creationId xmlns:a16="http://schemas.microsoft.com/office/drawing/2014/main" id="{15942404-F62F-4356-92AE-70A95245EEBC}"/>
+                <a16:creationId xmlns:a16="http://schemas.microsoft.com/office/drawing/2014/main" id="{C54DA7C7-59F1-4E2E-80C7-5220CA6481F4}"/>
               </a:ext>
             </a:extLst>
           </p:cNvPr>
@@ -8515,7 +8515,7 @@
           <p:cNvPr id="3" name="s7-title">
             <a:extLst xmlns:a="http://schemas.openxmlformats.org/drawingml/2006/main">
               <a:ext uri="{FF2B5EF4-FFF2-40B4-BE49-F238E27FC236}">
-                <a16:creationId xmlns:a16="http://schemas.microsoft.com/office/drawing/2014/main" id="{AAC15981-7D6B-41DD-BB70-3C12C7EB1890}"/>
+                <a16:creationId xmlns:a16="http://schemas.microsoft.com/office/drawing/2014/main" id="{BF22D334-ED25-4975-B390-98480B6FD911}"/>
               </a:ext>
             </a:extLst>
           </p:cNvPr>
@@ -8573,7 +8573,7 @@
           <p:cNvPr id="4" name="s7-footer">
             <a:extLst xmlns:a="http://schemas.openxmlformats.org/drawingml/2006/main">
               <a:ext uri="{FF2B5EF4-FFF2-40B4-BE49-F238E27FC236}">
-                <a16:creationId xmlns:a16="http://schemas.microsoft.com/office/drawing/2014/main" id="{C6BC276D-B1B4-43AA-BC1E-4D65C32FF4BE}"/>
+                <a16:creationId xmlns:a16="http://schemas.microsoft.com/office/drawing/2014/main" id="{D4ED7A48-7AD0-4D35-9C3D-E49F1B0D76F1}"/>
               </a:ext>
             </a:extLst>
           </p:cNvPr>
@@ -8604,7 +8604,7 @@
           <p:cNvPr id="5" name="s7-identity">
             <a:extLst xmlns:a="http://schemas.openxmlformats.org/drawingml/2006/main">
               <a:ext uri="{FF2B5EF4-FFF2-40B4-BE49-F238E27FC236}">
-                <a16:creationId xmlns:a16="http://schemas.microsoft.com/office/drawing/2014/main" id="{60504A8C-6566-442F-846A-EBAA83403FBF}"/>
+                <a16:creationId xmlns:a16="http://schemas.microsoft.com/office/drawing/2014/main" id="{624881FF-6F28-45F8-A2D6-8658FC32540A}"/>
               </a:ext>
             </a:extLst>
           </p:cNvPr>
@@ -8662,7 +8662,7 @@
           <p:cNvPr id="6" name="core-no-0">
             <a:extLst xmlns:a="http://schemas.openxmlformats.org/drawingml/2006/main">
               <a:ext uri="{FF2B5EF4-FFF2-40B4-BE49-F238E27FC236}">
-                <a16:creationId xmlns:a16="http://schemas.microsoft.com/office/drawing/2014/main" id="{CEE22143-F58F-4E89-BE6B-0A34A1158076}"/>
+                <a16:creationId xmlns:a16="http://schemas.microsoft.com/office/drawing/2014/main" id="{BF6B87F1-04FA-4607-A3D3-91C68B04A22E}"/>
               </a:ext>
             </a:extLst>
           </p:cNvPr>
@@ -8694,7 +8694,7 @@
             <a:pPr algn="l">
               <a:defRPr sz="2250" b="1">
                 <a:solidFill>
-                  <a:srgbClr val="2D9B72"/>
+                  <a:srgbClr val="0B6B4F"/>
                 </a:solidFill>
                 <a:latin typeface="PingFang SC"/>
                 <a:ea typeface="PingFang SC"/>
@@ -8704,7 +8704,7 @@
             <a:r>
               <a:rPr sz="2250" b="1">
                 <a:solidFill>
-                  <a:srgbClr val="2D9B72"/>
+                  <a:srgbClr val="0B6B4F"/>
                 </a:solidFill>
                 <a:latin typeface="PingFang SC"/>
                 <a:ea typeface="PingFang SC"/>
@@ -8720,7 +8720,7 @@
           <p:cNvPr id="7" name="core-label-0">
             <a:extLst xmlns:a="http://schemas.openxmlformats.org/drawingml/2006/main">
               <a:ext uri="{FF2B5EF4-FFF2-40B4-BE49-F238E27FC236}">
-                <a16:creationId xmlns:a16="http://schemas.microsoft.com/office/drawing/2014/main" id="{B3D9EB63-08FB-4F97-ABDE-A4FE6B3836A0}"/>
+                <a16:creationId xmlns:a16="http://schemas.microsoft.com/office/drawing/2014/main" id="{78AB15E8-9FB5-4A4A-951A-EDFE105F192E}"/>
               </a:ext>
             </a:extLst>
           </p:cNvPr>
@@ -8778,7 +8778,7 @@
           <p:cNvPr id="8" name="core-body-0">
             <a:extLst xmlns:a="http://schemas.openxmlformats.org/drawingml/2006/main">
               <a:ext uri="{FF2B5EF4-FFF2-40B4-BE49-F238E27FC236}">
-                <a16:creationId xmlns:a16="http://schemas.microsoft.com/office/drawing/2014/main" id="{506B9657-0975-4BC1-9CE1-BDE17A886481}"/>
+                <a16:creationId xmlns:a16="http://schemas.microsoft.com/office/drawing/2014/main" id="{2F0E2A13-F797-43DC-B6EF-1D22AD8346CD}"/>
               </a:ext>
             </a:extLst>
           </p:cNvPr>
@@ -8802,14 +8802,14 @@
           </a:solidFill>
           <a:ln xmlns:a="http://schemas.openxmlformats.org/drawingml/2006/main" w="19050">
             <a:solidFill>
-              <a:srgbClr val="2D9B72"/>
+              <a:srgbClr val="0B6B4F"/>
             </a:solidFill>
             <a:prstDash val="solid"/>
           </a:ln>
         </p:spPr>
         <p:txBody>
           <a:bodyPr xmlns:a="http://schemas.openxmlformats.org/drawingml/2006/main" lIns="152400" tIns="133350" rIns="152400" bIns="133350" anchor="ctr">
-            <a:normAutofit fontScale="98233"/>
+            <a:normAutofit fontScale="100000"/>
           </a:bodyPr>
           <a:lstStyle xmlns:a="http://schemas.openxmlformats.org/drawingml/2006/main"/>
           <a:p xmlns:a="http://schemas.openxmlformats.org/drawingml/2006/main">
@@ -8832,7 +8832,7 @@
                 <a:ea typeface="PingFang SC"/>
                 <a:cs typeface="PingFang SC"/>
               </a:rPr>
-              <a:t>机器人生态至少包含四层：机身、关节、传感器和电池等硬件；SDK、通信接口、ROS2 驱动和状态消息等开发层；仿真、数据采集、策略训练和模型部署等算法层；场景集成、现场安全、备件…</a:t>
+              <a:t>机器人生态至少包含四层；机身、关节、传感器和电池等硬件；SDK、通信接口、ROS2 驱动和状态消息等开发层；仿真、数据采集、策略训练和模型部署等算法层</a:t>
             </a:r>
           </a:p>
         </p:txBody>
@@ -8842,7 +8842,7 @@
           <p:cNvPr id="9" name="core-no-1">
             <a:extLst xmlns:a="http://schemas.openxmlformats.org/drawingml/2006/main">
               <a:ext uri="{FF2B5EF4-FFF2-40B4-BE49-F238E27FC236}">
-                <a16:creationId xmlns:a16="http://schemas.microsoft.com/office/drawing/2014/main" id="{7C82F6C0-B8F0-4920-8140-7451CBEC580A}"/>
+                <a16:creationId xmlns:a16="http://schemas.microsoft.com/office/drawing/2014/main" id="{42A2928D-4B57-4BE7-80C4-46FDD1EB1563}"/>
               </a:ext>
             </a:extLst>
           </p:cNvPr>
@@ -8874,7 +8874,7 @@
             <a:pPr algn="l">
               <a:defRPr sz="2250" b="1">
                 <a:solidFill>
-                  <a:srgbClr val="2D9B72"/>
+                  <a:srgbClr val="0B6B4F"/>
                 </a:solidFill>
                 <a:latin typeface="PingFang SC"/>
                 <a:ea typeface="PingFang SC"/>
@@ -8884,7 +8884,7 @@
             <a:r>
               <a:rPr sz="2250" b="1">
                 <a:solidFill>
-                  <a:srgbClr val="2D9B72"/>
+                  <a:srgbClr val="0B6B4F"/>
                 </a:solidFill>
                 <a:latin typeface="PingFang SC"/>
                 <a:ea typeface="PingFang SC"/>
@@ -8900,7 +8900,7 @@
           <p:cNvPr id="10" name="core-body-1">
             <a:extLst xmlns:a="http://schemas.openxmlformats.org/drawingml/2006/main">
               <a:ext uri="{FF2B5EF4-FFF2-40B4-BE49-F238E27FC236}">
-                <a16:creationId xmlns:a16="http://schemas.microsoft.com/office/drawing/2014/main" id="{0996D158-F20D-451A-84A5-692FAB3F4E38}"/>
+                <a16:creationId xmlns:a16="http://schemas.microsoft.com/office/drawing/2014/main" id="{F8D57B18-A4AD-49B3-A844-0A19E6A83D67}"/>
               </a:ext>
             </a:extLst>
           </p:cNvPr>
@@ -8954,7 +8954,7 @@
                 <a:ea typeface="PingFang SC"/>
                 <a:cs typeface="PingFang SC"/>
               </a:rPr>
-              <a:t>Go2 与 G1 都可以进入这套生态，但接口和风险包络不同。四足平台重心较低、支撑稳定，常用于巡检、教学和移动感知；人形平台能利用为人设计的门、台阶、工具和工位，却需要处理更多关节、双足接触…</a:t>
+              <a:t>Go2 与 G1 都可以进入这套生态；但接口和风险包络不同；四足平台重心较低、支撑稳定；常用于巡检、教学和移动感知；人形平台能利用为人设计的门、台阶、工具和工位</a:t>
             </a:r>
           </a:p>
         </p:txBody>
@@ -8964,7 +8964,7 @@
           <p:cNvPr id="11" name="s7-takeaway-rule">
             <a:extLst xmlns:a="http://schemas.openxmlformats.org/drawingml/2006/main">
               <a:ext uri="{FF2B5EF4-FFF2-40B4-BE49-F238E27FC236}">
-                <a16:creationId xmlns:a16="http://schemas.microsoft.com/office/drawing/2014/main" id="{F7A3C9EA-5373-4144-8BD9-623998D0730A}"/>
+                <a16:creationId xmlns:a16="http://schemas.microsoft.com/office/drawing/2014/main" id="{64366480-A9B7-439E-BE47-B96778EE0252}"/>
               </a:ext>
             </a:extLst>
           </p:cNvPr>
@@ -8997,7 +8997,7 @@
           <p:cNvPr id="12" name="s7-takeaway">
             <a:extLst xmlns:a="http://schemas.openxmlformats.org/drawingml/2006/main">
               <a:ext uri="{FF2B5EF4-FFF2-40B4-BE49-F238E27FC236}">
-                <a16:creationId xmlns:a16="http://schemas.microsoft.com/office/drawing/2014/main" id="{1D2D56A5-FD81-4546-B520-3DB7FB334287}"/>
+                <a16:creationId xmlns:a16="http://schemas.microsoft.com/office/drawing/2014/main" id="{07A5196D-B35D-4DC5-8C89-8B5B31CCEB32}"/>
               </a:ext>
             </a:extLst>
           </p:cNvPr>
@@ -9053,7 +9053,7 @@
     </p:spTree>
     <p:extLst>
       <p:ext uri="{BB962C8B-B14F-4D97-AF65-F5344CB8AC3E}">
-        <p14:creationId xmlns:p14="http://schemas.microsoft.com/office/powerpoint/2010/main" val="206716093"/>
+        <p14:creationId xmlns:p14="http://schemas.microsoft.com/office/powerpoint/2010/main" val="1848355458"/>
       </p:ext>
     </p:extLst>
   </p:cSld>
@@ -9084,7 +9084,7 @@
           <p:cNvPr id="1" name="s8-rule">
             <a:extLst xmlns:a="http://schemas.openxmlformats.org/drawingml/2006/main">
               <a:ext uri="{FF2B5EF4-FFF2-40B4-BE49-F238E27FC236}">
-                <a16:creationId xmlns:a16="http://schemas.microsoft.com/office/drawing/2014/main" id="{37C8E030-DA38-433B-BA7B-28F69EADE85E}"/>
+                <a16:creationId xmlns:a16="http://schemas.microsoft.com/office/drawing/2014/main" id="{D8D4186B-F633-4242-9088-3968BAE9061D}"/>
               </a:ext>
             </a:extLst>
           </p:cNvPr>
@@ -9117,7 +9117,7 @@
           <p:cNvPr id="2" name="s8-eyebrow">
             <a:extLst xmlns:a="http://schemas.openxmlformats.org/drawingml/2006/main">
               <a:ext uri="{FF2B5EF4-FFF2-40B4-BE49-F238E27FC236}">
-                <a16:creationId xmlns:a16="http://schemas.microsoft.com/office/drawing/2014/main" id="{D0C8EA24-708A-4BF3-A8A7-023D2D137A94}"/>
+                <a16:creationId xmlns:a16="http://schemas.microsoft.com/office/drawing/2014/main" id="{9098FB17-15D2-490F-B4BC-A87C097996E9}"/>
               </a:ext>
             </a:extLst>
           </p:cNvPr>
@@ -9175,7 +9175,7 @@
           <p:cNvPr id="3" name="s8-title">
             <a:extLst xmlns:a="http://schemas.openxmlformats.org/drawingml/2006/main">
               <a:ext uri="{FF2B5EF4-FFF2-40B4-BE49-F238E27FC236}">
-                <a16:creationId xmlns:a16="http://schemas.microsoft.com/office/drawing/2014/main" id="{FBC6DFF9-DAE8-4163-ADEF-5C7865146AC9}"/>
+                <a16:creationId xmlns:a16="http://schemas.microsoft.com/office/drawing/2014/main" id="{65AED37F-DD0F-412D-A594-F24B27485410}"/>
               </a:ext>
             </a:extLst>
           </p:cNvPr>
@@ -9233,7 +9233,7 @@
           <p:cNvPr id="4" name="s8-footer">
             <a:extLst xmlns:a="http://schemas.openxmlformats.org/drawingml/2006/main">
               <a:ext uri="{FF2B5EF4-FFF2-40B4-BE49-F238E27FC236}">
-                <a16:creationId xmlns:a16="http://schemas.microsoft.com/office/drawing/2014/main" id="{E5DE337A-A334-40C3-8790-2F15340B8263}"/>
+                <a16:creationId xmlns:a16="http://schemas.microsoft.com/office/drawing/2014/main" id="{2D306024-3F45-4F82-848D-75D10ADADFF0}"/>
               </a:ext>
             </a:extLst>
           </p:cNvPr>
@@ -9264,7 +9264,7 @@
           <p:cNvPr id="5" name="s8-identity">
             <a:extLst xmlns:a="http://schemas.openxmlformats.org/drawingml/2006/main">
               <a:ext uri="{FF2B5EF4-FFF2-40B4-BE49-F238E27FC236}">
-                <a16:creationId xmlns:a16="http://schemas.microsoft.com/office/drawing/2014/main" id="{619F8100-7934-45B0-B9F5-57FB7F5EEBE7}"/>
+                <a16:creationId xmlns:a16="http://schemas.microsoft.com/office/drawing/2014/main" id="{97D2D19F-3468-41C8-BFC6-391AEAE40E91}"/>
               </a:ext>
             </a:extLst>
           </p:cNvPr>
@@ -9322,7 +9322,7 @@
           <p:cNvPr id="6" name="core-no-0">
             <a:extLst xmlns:a="http://schemas.openxmlformats.org/drawingml/2006/main">
               <a:ext uri="{FF2B5EF4-FFF2-40B4-BE49-F238E27FC236}">
-                <a16:creationId xmlns:a16="http://schemas.microsoft.com/office/drawing/2014/main" id="{031B6883-4827-4D22-8F2D-2EDC881A15F6}"/>
+                <a16:creationId xmlns:a16="http://schemas.microsoft.com/office/drawing/2014/main" id="{353D27DC-2DBE-4556-8C8D-62ED45782AFF}"/>
               </a:ext>
             </a:extLst>
           </p:cNvPr>
@@ -9354,7 +9354,7 @@
             <a:pPr algn="l">
               <a:defRPr sz="2250" b="1">
                 <a:solidFill>
-                  <a:srgbClr val="2D9B72"/>
+                  <a:srgbClr val="0B6B4F"/>
                 </a:solidFill>
                 <a:latin typeface="PingFang SC"/>
                 <a:ea typeface="PingFang SC"/>
@@ -9364,7 +9364,7 @@
             <a:r>
               <a:rPr sz="2250" b="1">
                 <a:solidFill>
-                  <a:srgbClr val="2D9B72"/>
+                  <a:srgbClr val="0B6B4F"/>
                 </a:solidFill>
                 <a:latin typeface="PingFang SC"/>
                 <a:ea typeface="PingFang SC"/>
@@ -9380,7 +9380,7 @@
           <p:cNvPr id="7" name="core-label-0">
             <a:extLst xmlns:a="http://schemas.openxmlformats.org/drawingml/2006/main">
               <a:ext uri="{FF2B5EF4-FFF2-40B4-BE49-F238E27FC236}">
-                <a16:creationId xmlns:a16="http://schemas.microsoft.com/office/drawing/2014/main" id="{4B4A49FB-2FCE-4C44-9D8F-0D0CA3FFCB2A}"/>
+                <a16:creationId xmlns:a16="http://schemas.microsoft.com/office/drawing/2014/main" id="{A1341EEF-4878-4865-8CCA-74EF6878B16E}"/>
               </a:ext>
             </a:extLst>
           </p:cNvPr>
@@ -9438,7 +9438,7 @@
           <p:cNvPr id="8" name="core-body-0">
             <a:extLst xmlns:a="http://schemas.openxmlformats.org/drawingml/2006/main">
               <a:ext uri="{FF2B5EF4-FFF2-40B4-BE49-F238E27FC236}">
-                <a16:creationId xmlns:a16="http://schemas.microsoft.com/office/drawing/2014/main" id="{7D7D9272-21F0-4FAA-991F-B972E9DB948B}"/>
+                <a16:creationId xmlns:a16="http://schemas.microsoft.com/office/drawing/2014/main" id="{0DB57540-9B4F-4C6F-81CA-4E82512E9CD4}"/>
               </a:ext>
             </a:extLst>
           </p:cNvPr>
@@ -9462,14 +9462,14 @@
           </a:solidFill>
           <a:ln xmlns:a="http://schemas.openxmlformats.org/drawingml/2006/main" w="19050">
             <a:solidFill>
-              <a:srgbClr val="2D9B72"/>
+              <a:srgbClr val="0B6B4F"/>
             </a:solidFill>
             <a:prstDash val="solid"/>
           </a:ln>
         </p:spPr>
         <p:txBody>
           <a:bodyPr xmlns:a="http://schemas.openxmlformats.org/drawingml/2006/main" lIns="152400" tIns="133350" rIns="152400" bIns="133350" anchor="ctr">
-            <a:normAutofit fontScale="98233"/>
+            <a:normAutofit fontScale="100000"/>
           </a:bodyPr>
           <a:lstStyle xmlns:a="http://schemas.openxmlformats.org/drawingml/2006/main"/>
           <a:p xmlns:a="http://schemas.openxmlformats.org/drawingml/2006/main">
@@ -9492,7 +9492,7 @@
                 <a:ea typeface="PingFang SC"/>
                 <a:cs typeface="PingFang SC"/>
               </a:rPr>
-              <a:t>机器人项目的成本包括设备与传感器、计算单元、备件、电池、场地改造、软件集成、标注与训练、现场操作、维护停机和安全责任。原型演示往往由工程师随时接管，规模部署则要求普通运营人员能够识别异常…</a:t>
+              <a:t>机器人项目的成本包括设备与传感器、计算单元、备件、电池、场地改造、软件集成、标注与训练、现场操作、维护停机和安全责任；原型演示往往由工程师随时接管</a:t>
             </a:r>
           </a:p>
         </p:txBody>
@@ -9502,7 +9502,7 @@
           <p:cNvPr id="9" name="core-no-1">
             <a:extLst xmlns:a="http://schemas.openxmlformats.org/drawingml/2006/main">
               <a:ext uri="{FF2B5EF4-FFF2-40B4-BE49-F238E27FC236}">
-                <a16:creationId xmlns:a16="http://schemas.microsoft.com/office/drawing/2014/main" id="{E5EF6966-3055-4527-8495-CAF9608FFDA4}"/>
+                <a16:creationId xmlns:a16="http://schemas.microsoft.com/office/drawing/2014/main" id="{3ADF610C-B4E1-4E63-96A1-994C38B2B6B5}"/>
               </a:ext>
             </a:extLst>
           </p:cNvPr>
@@ -9534,7 +9534,7 @@
             <a:pPr algn="l">
               <a:defRPr sz="2250" b="1">
                 <a:solidFill>
-                  <a:srgbClr val="2D9B72"/>
+                  <a:srgbClr val="0B6B4F"/>
                 </a:solidFill>
                 <a:latin typeface="PingFang SC"/>
                 <a:ea typeface="PingFang SC"/>
@@ -9544,7 +9544,7 @@
             <a:r>
               <a:rPr sz="2250" b="1">
                 <a:solidFill>
-                  <a:srgbClr val="2D9B72"/>
+                  <a:srgbClr val="0B6B4F"/>
                 </a:solidFill>
                 <a:latin typeface="PingFang SC"/>
                 <a:ea typeface="PingFang SC"/>
@@ -9560,7 +9560,7 @@
           <p:cNvPr id="10" name="core-body-1">
             <a:extLst xmlns:a="http://schemas.openxmlformats.org/drawingml/2006/main">
               <a:ext uri="{FF2B5EF4-FFF2-40B4-BE49-F238E27FC236}">
-                <a16:creationId xmlns:a16="http://schemas.microsoft.com/office/drawing/2014/main" id="{F77EE905-688B-43E7-A7C9-E1018845DA3E}"/>
+                <a16:creationId xmlns:a16="http://schemas.microsoft.com/office/drawing/2014/main" id="{0ABD86CA-67F8-48F8-9CD7-A92A9477E9D4}"/>
               </a:ext>
             </a:extLst>
           </p:cNvPr>
@@ -9614,7 +9614,7 @@
                 <a:ea typeface="PingFang SC"/>
                 <a:cs typeface="PingFang SC"/>
               </a:rPr>
-              <a:t>比较形态时应把任务收益与总成本放在一起：四足机器人也许更容易在不平地面移动，但不一定能操作为人设计的工具；人形机器人也许覆盖更多工位，却可能需要更高的安全投入。最合适的形态由任务与环境决定…</a:t>
+              <a:t>比较形态时应把任务收益与总成本放在一起；四足机器人也许更容易在不平地面移动；但不一定能操作为人设计的工具；人形机器人也许覆盖更多工位；却可能需要更高的安全投入；最合适的形态由任务与环境决定</a:t>
             </a:r>
           </a:p>
         </p:txBody>
@@ -9624,7 +9624,7 @@
           <p:cNvPr id="11" name="s8-takeaway-rule">
             <a:extLst xmlns:a="http://schemas.openxmlformats.org/drawingml/2006/main">
               <a:ext uri="{FF2B5EF4-FFF2-40B4-BE49-F238E27FC236}">
-                <a16:creationId xmlns:a16="http://schemas.microsoft.com/office/drawing/2014/main" id="{299388A6-109C-4ABE-8C0E-D3F7F27976AC}"/>
+                <a16:creationId xmlns:a16="http://schemas.microsoft.com/office/drawing/2014/main" id="{08B8D866-5516-4C66-B334-4D29A795FADF}"/>
               </a:ext>
             </a:extLst>
           </p:cNvPr>
@@ -9657,7 +9657,7 @@
           <p:cNvPr id="12" name="s8-takeaway">
             <a:extLst xmlns:a="http://schemas.openxmlformats.org/drawingml/2006/main">
               <a:ext uri="{FF2B5EF4-FFF2-40B4-BE49-F238E27FC236}">
-                <a16:creationId xmlns:a16="http://schemas.microsoft.com/office/drawing/2014/main" id="{2832E3A4-D44B-4B5B-BD8D-150F88C775E8}"/>
+                <a16:creationId xmlns:a16="http://schemas.microsoft.com/office/drawing/2014/main" id="{6B6B000B-A54B-4D46-8D80-0DA991D1DFD6}"/>
               </a:ext>
             </a:extLst>
           </p:cNvPr>
@@ -9713,7 +9713,7 @@
     </p:spTree>
     <p:extLst>
       <p:ext uri="{BB962C8B-B14F-4D97-AF65-F5344CB8AC3E}">
-        <p14:creationId xmlns:p14="http://schemas.microsoft.com/office/powerpoint/2010/main" val="2032804781"/>
+        <p14:creationId xmlns:p14="http://schemas.microsoft.com/office/powerpoint/2010/main" val="1540804346"/>
       </p:ext>
     </p:extLst>
   </p:cSld>
@@ -9744,7 +9744,7 @@
           <p:cNvPr id="1" name="s9-rule">
             <a:extLst xmlns:a="http://schemas.openxmlformats.org/drawingml/2006/main">
               <a:ext uri="{FF2B5EF4-FFF2-40B4-BE49-F238E27FC236}">
-                <a16:creationId xmlns:a16="http://schemas.microsoft.com/office/drawing/2014/main" id="{96811843-75C1-4F6E-B1F7-160B56A323CC}"/>
+                <a16:creationId xmlns:a16="http://schemas.microsoft.com/office/drawing/2014/main" id="{2C6DDF47-8E44-483B-8095-151E356CA64D}"/>
               </a:ext>
             </a:extLst>
           </p:cNvPr>
@@ -9777,7 +9777,7 @@
           <p:cNvPr id="2" name="s9-eyebrow">
             <a:extLst xmlns:a="http://schemas.openxmlformats.org/drawingml/2006/main">
               <a:ext uri="{FF2B5EF4-FFF2-40B4-BE49-F238E27FC236}">
-                <a16:creationId xmlns:a16="http://schemas.microsoft.com/office/drawing/2014/main" id="{C17D72A7-C9A5-4B9C-87FB-1E52C153DECB}"/>
+                <a16:creationId xmlns:a16="http://schemas.microsoft.com/office/drawing/2014/main" id="{4ECBFC5B-6A4B-4A97-BE53-CF44DE58596A}"/>
               </a:ext>
             </a:extLst>
           </p:cNvPr>
@@ -9835,7 +9835,7 @@
           <p:cNvPr id="3" name="s9-title">
             <a:extLst xmlns:a="http://schemas.openxmlformats.org/drawingml/2006/main">
               <a:ext uri="{FF2B5EF4-FFF2-40B4-BE49-F238E27FC236}">
-                <a16:creationId xmlns:a16="http://schemas.microsoft.com/office/drawing/2014/main" id="{FAE9949F-DA3D-46E2-9F02-076047B9F464}"/>
+                <a16:creationId xmlns:a16="http://schemas.microsoft.com/office/drawing/2014/main" id="{5FD477CE-E09E-45DD-8F6C-FF093C43A7C1}"/>
               </a:ext>
             </a:extLst>
           </p:cNvPr>
@@ -9893,7 +9893,7 @@
           <p:cNvPr id="4" name="s9-footer">
             <a:extLst xmlns:a="http://schemas.openxmlformats.org/drawingml/2006/main">
               <a:ext uri="{FF2B5EF4-FFF2-40B4-BE49-F238E27FC236}">
-                <a16:creationId xmlns:a16="http://schemas.microsoft.com/office/drawing/2014/main" id="{3522DB91-6E69-481D-829C-4496F2D82331}"/>
+                <a16:creationId xmlns:a16="http://schemas.microsoft.com/office/drawing/2014/main" id="{EE1B011A-588F-475D-A514-852BC748620A}"/>
               </a:ext>
             </a:extLst>
           </p:cNvPr>
@@ -9924,7 +9924,7 @@
           <p:cNvPr id="5" name="s9-identity">
             <a:extLst xmlns:a="http://schemas.openxmlformats.org/drawingml/2006/main">
               <a:ext uri="{FF2B5EF4-FFF2-40B4-BE49-F238E27FC236}">
-                <a16:creationId xmlns:a16="http://schemas.microsoft.com/office/drawing/2014/main" id="{E5F6EDBD-C391-40D2-BA25-14B60A6CFB84}"/>
+                <a16:creationId xmlns:a16="http://schemas.microsoft.com/office/drawing/2014/main" id="{B61E00BF-D9AB-410C-AC30-09779AD9C3FC}"/>
               </a:ext>
             </a:extLst>
           </p:cNvPr>
@@ -9982,7 +9982,7 @@
           <p:cNvPr id="6" name="core-no-0">
             <a:extLst xmlns:a="http://schemas.openxmlformats.org/drawingml/2006/main">
               <a:ext uri="{FF2B5EF4-FFF2-40B4-BE49-F238E27FC236}">
-                <a16:creationId xmlns:a16="http://schemas.microsoft.com/office/drawing/2014/main" id="{039DCD3E-950C-4CF3-B36E-B37392164B6B}"/>
+                <a16:creationId xmlns:a16="http://schemas.microsoft.com/office/drawing/2014/main" id="{3AD46BFD-73CF-4B48-B23A-CBC8205E1692}"/>
               </a:ext>
             </a:extLst>
           </p:cNvPr>
@@ -10014,7 +10014,7 @@
             <a:pPr algn="l">
               <a:defRPr sz="2250" b="1">
                 <a:solidFill>
-                  <a:srgbClr val="2D9B72"/>
+                  <a:srgbClr val="0B6B4F"/>
                 </a:solidFill>
                 <a:latin typeface="PingFang SC"/>
                 <a:ea typeface="PingFang SC"/>
@@ -10024,7 +10024,7 @@
             <a:r>
               <a:rPr sz="2250" b="1">
                 <a:solidFill>
-                  <a:srgbClr val="2D9B72"/>
+                  <a:srgbClr val="0B6B4F"/>
                 </a:solidFill>
                 <a:latin typeface="PingFang SC"/>
                 <a:ea typeface="PingFang SC"/>
@@ -10040,7 +10040,7 @@
           <p:cNvPr id="7" name="core-label-0">
             <a:extLst xmlns:a="http://schemas.openxmlformats.org/drawingml/2006/main">
               <a:ext uri="{FF2B5EF4-FFF2-40B4-BE49-F238E27FC236}">
-                <a16:creationId xmlns:a16="http://schemas.microsoft.com/office/drawing/2014/main" id="{EC6E1B21-6561-4DEF-A227-3C041EDBB400}"/>
+                <a16:creationId xmlns:a16="http://schemas.microsoft.com/office/drawing/2014/main" id="{854C91F2-53C1-499F-A0A6-E153FBB147F8}"/>
               </a:ext>
             </a:extLst>
           </p:cNvPr>
@@ -10098,7 +10098,7 @@
           <p:cNvPr id="8" name="core-body-0">
             <a:extLst xmlns:a="http://schemas.openxmlformats.org/drawingml/2006/main">
               <a:ext uri="{FF2B5EF4-FFF2-40B4-BE49-F238E27FC236}">
-                <a16:creationId xmlns:a16="http://schemas.microsoft.com/office/drawing/2014/main" id="{983CCAED-685C-4647-BFFE-C87DD9952397}"/>
+                <a16:creationId xmlns:a16="http://schemas.microsoft.com/office/drawing/2014/main" id="{366433E9-CD6E-4422-8A1D-12C7D36E3757}"/>
               </a:ext>
             </a:extLst>
           </p:cNvPr>
@@ -10122,7 +10122,7 @@
           </a:solidFill>
           <a:ln xmlns:a="http://schemas.openxmlformats.org/drawingml/2006/main" w="19050">
             <a:solidFill>
-              <a:srgbClr val="2D9B72"/>
+              <a:srgbClr val="0B6B4F"/>
             </a:solidFill>
             <a:prstDash val="solid"/>
           </a:ln>
@@ -10162,7 +10162,7 @@
           <p:cNvPr id="9" name="core-no-1">
             <a:extLst xmlns:a="http://schemas.openxmlformats.org/drawingml/2006/main">
               <a:ext uri="{FF2B5EF4-FFF2-40B4-BE49-F238E27FC236}">
-                <a16:creationId xmlns:a16="http://schemas.microsoft.com/office/drawing/2014/main" id="{65907D45-17EF-471D-A2C1-5A7A8E55A7AD}"/>
+                <a16:creationId xmlns:a16="http://schemas.microsoft.com/office/drawing/2014/main" id="{E043D68A-DB26-48AA-919A-8C62B0825783}"/>
               </a:ext>
             </a:extLst>
           </p:cNvPr>
@@ -10194,7 +10194,7 @@
             <a:pPr algn="l">
               <a:defRPr sz="2250" b="1">
                 <a:solidFill>
-                  <a:srgbClr val="2D9B72"/>
+                  <a:srgbClr val="0B6B4F"/>
                 </a:solidFill>
                 <a:latin typeface="PingFang SC"/>
                 <a:ea typeface="PingFang SC"/>
@@ -10204,7 +10204,7 @@
             <a:r>
               <a:rPr sz="2250" b="1">
                 <a:solidFill>
-                  <a:srgbClr val="2D9B72"/>
+                  <a:srgbClr val="0B6B4F"/>
                 </a:solidFill>
                 <a:latin typeface="PingFang SC"/>
                 <a:ea typeface="PingFang SC"/>
@@ -10220,7 +10220,7 @@
           <p:cNvPr id="10" name="core-body-1">
             <a:extLst xmlns:a="http://schemas.openxmlformats.org/drawingml/2006/main">
               <a:ext uri="{FF2B5EF4-FFF2-40B4-BE49-F238E27FC236}">
-                <a16:creationId xmlns:a16="http://schemas.microsoft.com/office/drawing/2014/main" id="{F151C650-74B0-4111-A1CA-339F2912B214}"/>
+                <a16:creationId xmlns:a16="http://schemas.microsoft.com/office/drawing/2014/main" id="{4FC823ED-890A-4B47-8AC2-0F2F9E38D3C8}"/>
               </a:ext>
             </a:extLst>
           </p:cNvPr>
@@ -10284,7 +10284,7 @@
           <p:cNvPr id="11" name="s9-takeaway-rule">
             <a:extLst xmlns:a="http://schemas.openxmlformats.org/drawingml/2006/main">
               <a:ext uri="{FF2B5EF4-FFF2-40B4-BE49-F238E27FC236}">
-                <a16:creationId xmlns:a16="http://schemas.microsoft.com/office/drawing/2014/main" id="{5BE3BF0C-65A2-4437-BD5F-9520BDA12202}"/>
+                <a16:creationId xmlns:a16="http://schemas.microsoft.com/office/drawing/2014/main" id="{AC57DEDD-80B0-4784-A34E-36387F5365CE}"/>
               </a:ext>
             </a:extLst>
           </p:cNvPr>
@@ -10317,7 +10317,7 @@
           <p:cNvPr id="12" name="s9-takeaway">
             <a:extLst xmlns:a="http://schemas.openxmlformats.org/drawingml/2006/main">
               <a:ext uri="{FF2B5EF4-FFF2-40B4-BE49-F238E27FC236}">
-                <a16:creationId xmlns:a16="http://schemas.microsoft.com/office/drawing/2014/main" id="{3815FEE7-CB38-4CA8-9837-D5E12B9E4A52}"/>
+                <a16:creationId xmlns:a16="http://schemas.microsoft.com/office/drawing/2014/main" id="{0E526CFD-D3FD-4F75-82AD-52BB6B76FB7D}"/>
               </a:ext>
             </a:extLst>
           </p:cNvPr>
@@ -10373,7 +10373,7 @@
     </p:spTree>
     <p:extLst>
       <p:ext uri="{BB962C8B-B14F-4D97-AF65-F5344CB8AC3E}">
-        <p14:creationId xmlns:p14="http://schemas.microsoft.com/office/powerpoint/2010/main" val="965923972"/>
+        <p14:creationId xmlns:p14="http://schemas.microsoft.com/office/powerpoint/2010/main" val="565987112"/>
       </p:ext>
     </p:extLst>
   </p:cSld>

--- a/docs/public/course-assets/course-pptx/em-002.pptx
+++ b/docs/public/course-assets/course-pptx/em-002.pptx
@@ -2,25 +2,25 @@
 <file path=ppt/presentation.xml><?xml version="1.0" encoding="utf-8"?>
 <p:presentation xmlns:p="http://schemas.openxmlformats.org/presentationml/2006/main">
   <p:sldMasterIdLst>
-    <p:sldMasterId xmlns:r="http://schemas.openxmlformats.org/officeDocument/2006/relationships" id="2147483648" r:id="Rcce27f31b59c476c"/>
+    <p:sldMasterId xmlns:r="http://schemas.openxmlformats.org/officeDocument/2006/relationships" id="2147483648" r:id="Rb4148ce171604629"/>
   </p:sldMasterIdLst>
   <p:notesMasterIdLst>
-    <p:notesMasterId xmlns:r="http://schemas.openxmlformats.org/officeDocument/2006/relationships" r:id="R0fa228dd75464b96"/>
+    <p:notesMasterId xmlns:r="http://schemas.openxmlformats.org/officeDocument/2006/relationships" r:id="R1cf6592aef604a6e"/>
   </p:notesMasterIdLst>
   <p:sldIdLst>
-    <p:sldId xmlns:r="http://schemas.openxmlformats.org/officeDocument/2006/relationships" id="256" r:id="R187fb6a5b8ac453e"/>
-    <p:sldId xmlns:r="http://schemas.openxmlformats.org/officeDocument/2006/relationships" id="257" r:id="R5bde833cca3742df"/>
-    <p:sldId xmlns:r="http://schemas.openxmlformats.org/officeDocument/2006/relationships" id="258" r:id="Reb2a73822e264dba"/>
-    <p:sldId xmlns:r="http://schemas.openxmlformats.org/officeDocument/2006/relationships" id="259" r:id="Rd39ba1a134e54a0f"/>
-    <p:sldId xmlns:r="http://schemas.openxmlformats.org/officeDocument/2006/relationships" id="260" r:id="Rfd0a472d48514256"/>
-    <p:sldId xmlns:r="http://schemas.openxmlformats.org/officeDocument/2006/relationships" id="261" r:id="R42ee2ac2bde74ed9"/>
-    <p:sldId xmlns:r="http://schemas.openxmlformats.org/officeDocument/2006/relationships" id="262" r:id="R449549fda3864564"/>
-    <p:sldId xmlns:r="http://schemas.openxmlformats.org/officeDocument/2006/relationships" id="263" r:id="Rb5c723566cdd4600"/>
-    <p:sldId xmlns:r="http://schemas.openxmlformats.org/officeDocument/2006/relationships" id="264" r:id="R53ee1f4878994bcd"/>
-    <p:sldId xmlns:r="http://schemas.openxmlformats.org/officeDocument/2006/relationships" id="265" r:id="R8a571b07bd0e450f"/>
-    <p:sldId xmlns:r="http://schemas.openxmlformats.org/officeDocument/2006/relationships" id="266" r:id="Rb67a0b96a0d9435a"/>
-    <p:sldId xmlns:r="http://schemas.openxmlformats.org/officeDocument/2006/relationships" id="267" r:id="Red68391bc26a42d9"/>
-    <p:sldId xmlns:r="http://schemas.openxmlformats.org/officeDocument/2006/relationships" id="268" r:id="Ra21bec7381b3402f"/>
+    <p:sldId xmlns:r="http://schemas.openxmlformats.org/officeDocument/2006/relationships" id="256" r:id="R2066e5bcd8b346e4"/>
+    <p:sldId xmlns:r="http://schemas.openxmlformats.org/officeDocument/2006/relationships" id="257" r:id="Rda3a3dd9921941d1"/>
+    <p:sldId xmlns:r="http://schemas.openxmlformats.org/officeDocument/2006/relationships" id="258" r:id="Rcf82910775444ce2"/>
+    <p:sldId xmlns:r="http://schemas.openxmlformats.org/officeDocument/2006/relationships" id="259" r:id="R9c54dd8194684343"/>
+    <p:sldId xmlns:r="http://schemas.openxmlformats.org/officeDocument/2006/relationships" id="260" r:id="Ree2d76b16333449e"/>
+    <p:sldId xmlns:r="http://schemas.openxmlformats.org/officeDocument/2006/relationships" id="261" r:id="R685e4917204c4deb"/>
+    <p:sldId xmlns:r="http://schemas.openxmlformats.org/officeDocument/2006/relationships" id="262" r:id="R2f0b85f37f454776"/>
+    <p:sldId xmlns:r="http://schemas.openxmlformats.org/officeDocument/2006/relationships" id="263" r:id="R7affd01558644703"/>
+    <p:sldId xmlns:r="http://schemas.openxmlformats.org/officeDocument/2006/relationships" id="264" r:id="R953f23f4cdcb407a"/>
+    <p:sldId xmlns:r="http://schemas.openxmlformats.org/officeDocument/2006/relationships" id="265" r:id="R9cb555aee1ac4188"/>
+    <p:sldId xmlns:r="http://schemas.openxmlformats.org/officeDocument/2006/relationships" id="266" r:id="Rc4ee3f5510e64b6e"/>
+    <p:sldId xmlns:r="http://schemas.openxmlformats.org/officeDocument/2006/relationships" id="267" r:id="R74f213d084224ec7"/>
+    <p:sldId xmlns:r="http://schemas.openxmlformats.org/officeDocument/2006/relationships" id="268" r:id="R9bc879ed72cc45eb"/>
   </p:sldIdLst>
   <p:sldSz cx="12192000" cy="6858000"/>
   <p:notesSz cx="6858000" cy="9144000"/>
@@ -1405,7 +1405,7 @@
   </p:cSld>
   <p:clrMap bg1="lt1" tx1="dk1" bg2="lt2" tx2="dk2" accent1="accent1" accent2="accent2" accent3="accent3" accent4="accent4" accent5="accent5" accent6="accent6" hlink="hlink" folHlink="folHlink"/>
   <p:sldLayoutIdLst>
-    <p:sldLayoutId xmlns:r="http://schemas.openxmlformats.org/officeDocument/2006/relationships" id="2147483649" r:id="R28405c9468c646d7"/>
+    <p:sldLayoutId xmlns:r="http://schemas.openxmlformats.org/officeDocument/2006/relationships" id="2147483649" r:id="R2e472a04b8784b9f"/>
   </p:sldLayoutIdLst>
   <p:txStyles>
     <p:titleStyle>
@@ -1956,7 +1956,7 @@
           <p:cNvPr id="1" name="cover-rule">
             <a:extLst xmlns:a="http://schemas.openxmlformats.org/drawingml/2006/main">
               <a:ext uri="{FF2B5EF4-FFF2-40B4-BE49-F238E27FC236}">
-                <a16:creationId xmlns:a16="http://schemas.microsoft.com/office/drawing/2014/main" id="{5D5C39D4-76DC-476B-82F4-38A8560EB095}"/>
+                <a16:creationId xmlns:a16="http://schemas.microsoft.com/office/drawing/2014/main" id="{BBFA525B-265B-4D09-A2B9-2F2F5D00F8A2}"/>
               </a:ext>
             </a:extLst>
           </p:cNvPr>
@@ -1989,7 +1989,7 @@
           <p:cNvPr id="2" name="cover-ring-1">
             <a:extLst xmlns:a="http://schemas.openxmlformats.org/drawingml/2006/main">
               <a:ext uri="{FF2B5EF4-FFF2-40B4-BE49-F238E27FC236}">
-                <a16:creationId xmlns:a16="http://schemas.microsoft.com/office/drawing/2014/main" id="{7EE34F9F-E2A9-41E7-A260-6C1B23E896C6}"/>
+                <a16:creationId xmlns:a16="http://schemas.microsoft.com/office/drawing/2014/main" id="{FE75BD3A-1E7D-4981-94A1-A2EE2FCB79CE}"/>
               </a:ext>
             </a:extLst>
           </p:cNvPr>
@@ -2020,7 +2020,7 @@
           <p:cNvPr id="3" name="cover-ring-2">
             <a:extLst xmlns:a="http://schemas.openxmlformats.org/drawingml/2006/main">
               <a:ext uri="{FF2B5EF4-FFF2-40B4-BE49-F238E27FC236}">
-                <a16:creationId xmlns:a16="http://schemas.microsoft.com/office/drawing/2014/main" id="{51FB4B6F-E95C-40ED-B80D-F9678600BAF1}"/>
+                <a16:creationId xmlns:a16="http://schemas.microsoft.com/office/drawing/2014/main" id="{37873D8A-FA6A-439C-A41E-285AF0C786C9}"/>
               </a:ext>
             </a:extLst>
           </p:cNvPr>
@@ -2051,7 +2051,7 @@
           <p:cNvPr id="4" name="cover-core">
             <a:extLst xmlns:a="http://schemas.openxmlformats.org/drawingml/2006/main">
               <a:ext uri="{FF2B5EF4-FFF2-40B4-BE49-F238E27FC236}">
-                <a16:creationId xmlns:a16="http://schemas.microsoft.com/office/drawing/2014/main" id="{25583988-B489-4DF3-8C7B-102611C86203}"/>
+                <a16:creationId xmlns:a16="http://schemas.microsoft.com/office/drawing/2014/main" id="{190E3DA5-AE7F-4F69-AF15-2ADABD2A4CFF}"/>
               </a:ext>
             </a:extLst>
           </p:cNvPr>
@@ -2084,7 +2084,7 @@
           <p:cNvPr id="5" name="cover-line-1">
             <a:extLst xmlns:a="http://schemas.openxmlformats.org/drawingml/2006/main">
               <a:ext uri="{FF2B5EF4-FFF2-40B4-BE49-F238E27FC236}">
-                <a16:creationId xmlns:a16="http://schemas.microsoft.com/office/drawing/2014/main" id="{6E96CD53-CD28-48B3-B998-B258AC9A3816}"/>
+                <a16:creationId xmlns:a16="http://schemas.microsoft.com/office/drawing/2014/main" id="{59DFAF1E-8857-40E0-BDD7-FDE8DDB4154B}"/>
               </a:ext>
             </a:extLst>
           </p:cNvPr>
@@ -2115,7 +2115,7 @@
           <p:cNvPr id="6" name="cover-line-2">
             <a:extLst xmlns:a="http://schemas.openxmlformats.org/drawingml/2006/main">
               <a:ext uri="{FF2B5EF4-FFF2-40B4-BE49-F238E27FC236}">
-                <a16:creationId xmlns:a16="http://schemas.microsoft.com/office/drawing/2014/main" id="{D24D89E5-C162-4DD4-87BA-C72C85FEBF56}"/>
+                <a16:creationId xmlns:a16="http://schemas.microsoft.com/office/drawing/2014/main" id="{A4CE93E6-3C69-4A8D-9FB0-A9986CA447C8}"/>
               </a:ext>
             </a:extLst>
           </p:cNvPr>
@@ -2146,7 +2146,7 @@
           <p:cNvPr id="7" name="cover-eyebrow">
             <a:extLst xmlns:a="http://schemas.openxmlformats.org/drawingml/2006/main">
               <a:ext uri="{FF2B5EF4-FFF2-40B4-BE49-F238E27FC236}">
-                <a16:creationId xmlns:a16="http://schemas.microsoft.com/office/drawing/2014/main" id="{BD59CF0D-AE9B-4108-B615-6C12E3DB9EEB}"/>
+                <a16:creationId xmlns:a16="http://schemas.microsoft.com/office/drawing/2014/main" id="{87E5DE7C-94FF-4F75-ABB4-B4F5F60E1493}"/>
               </a:ext>
             </a:extLst>
           </p:cNvPr>
@@ -2204,7 +2204,7 @@
           <p:cNvPr id="8" name="cover-title">
             <a:extLst xmlns:a="http://schemas.openxmlformats.org/drawingml/2006/main">
               <a:ext uri="{FF2B5EF4-FFF2-40B4-BE49-F238E27FC236}">
-                <a16:creationId xmlns:a16="http://schemas.microsoft.com/office/drawing/2014/main" id="{B4649B72-2B3A-4402-A5C1-763871321B29}"/>
+                <a16:creationId xmlns:a16="http://schemas.microsoft.com/office/drawing/2014/main" id="{C198B643-EAE0-4494-9D49-7251B8EFA8CC}"/>
               </a:ext>
             </a:extLst>
           </p:cNvPr>
@@ -2262,7 +2262,7 @@
           <p:cNvPr id="9" name="cover-subtitle">
             <a:extLst xmlns:a="http://schemas.openxmlformats.org/drawingml/2006/main">
               <a:ext uri="{FF2B5EF4-FFF2-40B4-BE49-F238E27FC236}">
-                <a16:creationId xmlns:a16="http://schemas.microsoft.com/office/drawing/2014/main" id="{1FA84E32-2CC3-4A3A-BE6B-1136C48B0A9E}"/>
+                <a16:creationId xmlns:a16="http://schemas.microsoft.com/office/drawing/2014/main" id="{85EAD7EE-4744-4E19-9A35-4665AAFA075B}"/>
               </a:ext>
             </a:extLst>
           </p:cNvPr>
@@ -2324,7 +2324,7 @@
           <p:cNvPr id="10" name="cover-lead">
             <a:extLst xmlns:a="http://schemas.openxmlformats.org/drawingml/2006/main">
               <a:ext uri="{FF2B5EF4-FFF2-40B4-BE49-F238E27FC236}">
-                <a16:creationId xmlns:a16="http://schemas.microsoft.com/office/drawing/2014/main" id="{ED4E38B0-C3F5-4C22-BF36-32E76F78C929}"/>
+                <a16:creationId xmlns:a16="http://schemas.microsoft.com/office/drawing/2014/main" id="{2F59CC0E-6CAB-46E4-A4F6-5028924478E4}"/>
               </a:ext>
             </a:extLst>
           </p:cNvPr>
@@ -2382,7 +2382,7 @@
           <p:cNvPr id="11" name="cover-course">
             <a:extLst xmlns:a="http://schemas.openxmlformats.org/drawingml/2006/main">
               <a:ext uri="{FF2B5EF4-FFF2-40B4-BE49-F238E27FC236}">
-                <a16:creationId xmlns:a16="http://schemas.microsoft.com/office/drawing/2014/main" id="{58969478-3CC1-44AB-81A7-FCBF06925109}"/>
+                <a16:creationId xmlns:a16="http://schemas.microsoft.com/office/drawing/2014/main" id="{9A429B48-6464-4D33-B3D5-D4A2C71DA0C0}"/>
               </a:ext>
             </a:extLst>
           </p:cNvPr>
@@ -2440,7 +2440,7 @@
           <p:cNvPr id="12" name="cover-id">
             <a:extLst xmlns:a="http://schemas.openxmlformats.org/drawingml/2006/main">
               <a:ext uri="{FF2B5EF4-FFF2-40B4-BE49-F238E27FC236}">
-                <a16:creationId xmlns:a16="http://schemas.microsoft.com/office/drawing/2014/main" id="{3EC91FFC-9B41-4A9F-AED1-A8E5543C9620}"/>
+                <a16:creationId xmlns:a16="http://schemas.microsoft.com/office/drawing/2014/main" id="{50E4BAA3-5EFF-40AD-BCA4-4773710D1D41}"/>
               </a:ext>
             </a:extLst>
           </p:cNvPr>
@@ -2496,7 +2496,7 @@
     </p:spTree>
     <p:extLst>
       <p:ext uri="{BB962C8B-B14F-4D97-AF65-F5344CB8AC3E}">
-        <p14:creationId xmlns:p14="http://schemas.microsoft.com/office/powerpoint/2010/main" val="258272804"/>
+        <p14:creationId xmlns:p14="http://schemas.microsoft.com/office/powerpoint/2010/main" val="254295720"/>
       </p:ext>
     </p:extLst>
   </p:cSld>
@@ -2527,7 +2527,7 @@
           <p:cNvPr id="1" name="s10-rule">
             <a:extLst xmlns:a="http://schemas.openxmlformats.org/drawingml/2006/main">
               <a:ext uri="{FF2B5EF4-FFF2-40B4-BE49-F238E27FC236}">
-                <a16:creationId xmlns:a16="http://schemas.microsoft.com/office/drawing/2014/main" id="{77E0AF5F-865C-4DC8-A6C5-BA7769AFF933}"/>
+                <a16:creationId xmlns:a16="http://schemas.microsoft.com/office/drawing/2014/main" id="{5A71865A-2782-4D8A-A5C5-2D6C5D482693}"/>
               </a:ext>
             </a:extLst>
           </p:cNvPr>
@@ -2560,7 +2560,7 @@
           <p:cNvPr id="2" name="s10-eyebrow">
             <a:extLst xmlns:a="http://schemas.openxmlformats.org/drawingml/2006/main">
               <a:ext uri="{FF2B5EF4-FFF2-40B4-BE49-F238E27FC236}">
-                <a16:creationId xmlns:a16="http://schemas.microsoft.com/office/drawing/2014/main" id="{05199E6A-A2B7-439A-BA65-4A2FD8604EEB}"/>
+                <a16:creationId xmlns:a16="http://schemas.microsoft.com/office/drawing/2014/main" id="{B7B6AFF4-E85D-4BD6-B157-7EB3B6FD7DDC}"/>
               </a:ext>
             </a:extLst>
           </p:cNvPr>
@@ -2618,7 +2618,7 @@
           <p:cNvPr id="3" name="s10-title">
             <a:extLst xmlns:a="http://schemas.openxmlformats.org/drawingml/2006/main">
               <a:ext uri="{FF2B5EF4-FFF2-40B4-BE49-F238E27FC236}">
-                <a16:creationId xmlns:a16="http://schemas.microsoft.com/office/drawing/2014/main" id="{99282203-9957-4961-8CE1-EEC6188CD8C4}"/>
+                <a16:creationId xmlns:a16="http://schemas.microsoft.com/office/drawing/2014/main" id="{31EA0C7A-E71F-4122-A153-C2B73F46D6A7}"/>
               </a:ext>
             </a:extLst>
           </p:cNvPr>
@@ -2676,7 +2676,7 @@
           <p:cNvPr id="4" name="s10-footer">
             <a:extLst xmlns:a="http://schemas.openxmlformats.org/drawingml/2006/main">
               <a:ext uri="{FF2B5EF4-FFF2-40B4-BE49-F238E27FC236}">
-                <a16:creationId xmlns:a16="http://schemas.microsoft.com/office/drawing/2014/main" id="{352E196A-3C81-461D-A7CD-C16E80B33011}"/>
+                <a16:creationId xmlns:a16="http://schemas.microsoft.com/office/drawing/2014/main" id="{B03E3727-DC86-4217-B64F-464D55615A04}"/>
               </a:ext>
             </a:extLst>
           </p:cNvPr>
@@ -2707,7 +2707,7 @@
           <p:cNvPr id="5" name="s10-identity">
             <a:extLst xmlns:a="http://schemas.openxmlformats.org/drawingml/2006/main">
               <a:ext uri="{FF2B5EF4-FFF2-40B4-BE49-F238E27FC236}">
-                <a16:creationId xmlns:a16="http://schemas.microsoft.com/office/drawing/2014/main" id="{FEE7EA0B-C4FC-48FB-B8C0-72BFA7DB141B}"/>
+                <a16:creationId xmlns:a16="http://schemas.microsoft.com/office/drawing/2014/main" id="{B7714EAD-3EC6-486E-B3EF-A8FA4EE31804}"/>
               </a:ext>
             </a:extLst>
           </p:cNvPr>
@@ -2765,7 +2765,7 @@
           <p:cNvPr id="6" name="case-title">
             <a:extLst xmlns:a="http://schemas.openxmlformats.org/drawingml/2006/main">
               <a:ext uri="{FF2B5EF4-FFF2-40B4-BE49-F238E27FC236}">
-                <a16:creationId xmlns:a16="http://schemas.microsoft.com/office/drawing/2014/main" id="{12647997-222D-4B38-B7A3-A5764C63E2ED}"/>
+                <a16:creationId xmlns:a16="http://schemas.microsoft.com/office/drawing/2014/main" id="{F6C9AB12-34B9-48C2-83E2-918402339265}"/>
               </a:ext>
             </a:extLst>
           </p:cNvPr>
@@ -2829,7 +2829,7 @@
           <p:cNvPr id="7" name="case-row-0">
             <a:extLst xmlns:a="http://schemas.openxmlformats.org/drawingml/2006/main">
               <a:ext uri="{FF2B5EF4-FFF2-40B4-BE49-F238E27FC236}">
-                <a16:creationId xmlns:a16="http://schemas.microsoft.com/office/drawing/2014/main" id="{8EF8E090-9C21-4114-98BA-AF7FFB33D173}"/>
+                <a16:creationId xmlns:a16="http://schemas.microsoft.com/office/drawing/2014/main" id="{698151C1-4FBA-40E7-ACB6-75BFA17AFC8F}"/>
               </a:ext>
             </a:extLst>
           </p:cNvPr>
@@ -2893,7 +2893,7 @@
           <p:cNvPr id="8" name="case-row-1">
             <a:extLst xmlns:a="http://schemas.openxmlformats.org/drawingml/2006/main">
               <a:ext uri="{FF2B5EF4-FFF2-40B4-BE49-F238E27FC236}">
-                <a16:creationId xmlns:a16="http://schemas.microsoft.com/office/drawing/2014/main" id="{76423B61-272B-4A00-8D38-38A758D55B03}"/>
+                <a16:creationId xmlns:a16="http://schemas.microsoft.com/office/drawing/2014/main" id="{26C92573-4124-41C8-BE4A-7257B5D35239}"/>
               </a:ext>
             </a:extLst>
           </p:cNvPr>
@@ -2957,7 +2957,7 @@
           <p:cNvPr id="9" name="case-row-2">
             <a:extLst xmlns:a="http://schemas.openxmlformats.org/drawingml/2006/main">
               <a:ext uri="{FF2B5EF4-FFF2-40B4-BE49-F238E27FC236}">
-                <a16:creationId xmlns:a16="http://schemas.microsoft.com/office/drawing/2014/main" id="{F7744E5C-A36B-4961-AB3B-5894E57FCE15}"/>
+                <a16:creationId xmlns:a16="http://schemas.microsoft.com/office/drawing/2014/main" id="{8D93089C-57DA-4623-B67B-CC39829418D2}"/>
               </a:ext>
             </a:extLst>
           </p:cNvPr>
@@ -3021,7 +3021,7 @@
           <p:cNvPr id="10" name="case-row-3">
             <a:extLst xmlns:a="http://schemas.openxmlformats.org/drawingml/2006/main">
               <a:ext uri="{FF2B5EF4-FFF2-40B4-BE49-F238E27FC236}">
-                <a16:creationId xmlns:a16="http://schemas.microsoft.com/office/drawing/2014/main" id="{9EBC86D1-8A45-4B55-9F53-C315A0011096}"/>
+                <a16:creationId xmlns:a16="http://schemas.microsoft.com/office/drawing/2014/main" id="{B4866148-762F-44A9-AC74-3C898D820204}"/>
               </a:ext>
             </a:extLst>
           </p:cNvPr>
@@ -3085,7 +3085,7 @@
           <p:cNvPr id="11" name="case-row-4">
             <a:extLst xmlns:a="http://schemas.openxmlformats.org/drawingml/2006/main">
               <a:ext uri="{FF2B5EF4-FFF2-40B4-BE49-F238E27FC236}">
-                <a16:creationId xmlns:a16="http://schemas.microsoft.com/office/drawing/2014/main" id="{1B06E5FD-FC6D-4547-8A8B-8B4EF76F6433}"/>
+                <a16:creationId xmlns:a16="http://schemas.microsoft.com/office/drawing/2014/main" id="{8107276D-4A64-4422-A15D-42AA2641604A}"/>
               </a:ext>
             </a:extLst>
           </p:cNvPr>
@@ -3149,7 +3149,7 @@
           <p:cNvPr id="12" name="s10-takeaway-rule">
             <a:extLst xmlns:a="http://schemas.openxmlformats.org/drawingml/2006/main">
               <a:ext uri="{FF2B5EF4-FFF2-40B4-BE49-F238E27FC236}">
-                <a16:creationId xmlns:a16="http://schemas.microsoft.com/office/drawing/2014/main" id="{6015E1F9-0B5A-4F96-9206-37BAF182725B}"/>
+                <a16:creationId xmlns:a16="http://schemas.microsoft.com/office/drawing/2014/main" id="{0D04FF1F-4453-404F-B7C9-31F778B43A2B}"/>
               </a:ext>
             </a:extLst>
           </p:cNvPr>
@@ -3182,7 +3182,7 @@
           <p:cNvPr id="13" name="s10-takeaway">
             <a:extLst xmlns:a="http://schemas.openxmlformats.org/drawingml/2006/main">
               <a:ext uri="{FF2B5EF4-FFF2-40B4-BE49-F238E27FC236}">
-                <a16:creationId xmlns:a16="http://schemas.microsoft.com/office/drawing/2014/main" id="{E5E11AD0-D329-4FAA-83DD-D0B5EA2EA400}"/>
+                <a16:creationId xmlns:a16="http://schemas.microsoft.com/office/drawing/2014/main" id="{C76894D1-1E98-4AE7-8DBA-DEFA2453A6FF}"/>
               </a:ext>
             </a:extLst>
           </p:cNvPr>
@@ -3238,7 +3238,7 @@
     </p:spTree>
     <p:extLst>
       <p:ext uri="{BB962C8B-B14F-4D97-AF65-F5344CB8AC3E}">
-        <p14:creationId xmlns:p14="http://schemas.microsoft.com/office/powerpoint/2010/main" val="482910537"/>
+        <p14:creationId xmlns:p14="http://schemas.microsoft.com/office/powerpoint/2010/main" val="654176262"/>
       </p:ext>
     </p:extLst>
   </p:cSld>
@@ -3269,7 +3269,7 @@
           <p:cNvPr id="1" name="s11-rule">
             <a:extLst xmlns:a="http://schemas.openxmlformats.org/drawingml/2006/main">
               <a:ext uri="{FF2B5EF4-FFF2-40B4-BE49-F238E27FC236}">
-                <a16:creationId xmlns:a16="http://schemas.microsoft.com/office/drawing/2014/main" id="{966292AD-CC07-4573-BA31-50B4C4164498}"/>
+                <a16:creationId xmlns:a16="http://schemas.microsoft.com/office/drawing/2014/main" id="{F4ACAE14-DACB-4AE9-969E-9B314A5C4CAF}"/>
               </a:ext>
             </a:extLst>
           </p:cNvPr>
@@ -3302,7 +3302,7 @@
           <p:cNvPr id="2" name="s11-eyebrow">
             <a:extLst xmlns:a="http://schemas.openxmlformats.org/drawingml/2006/main">
               <a:ext uri="{FF2B5EF4-FFF2-40B4-BE49-F238E27FC236}">
-                <a16:creationId xmlns:a16="http://schemas.microsoft.com/office/drawing/2014/main" id="{4AD1D62A-B0F9-40E2-AD3A-C5C75B056256}"/>
+                <a16:creationId xmlns:a16="http://schemas.microsoft.com/office/drawing/2014/main" id="{A0272040-0459-43BA-BD64-06BFDC59A098}"/>
               </a:ext>
             </a:extLst>
           </p:cNvPr>
@@ -3360,7 +3360,7 @@
           <p:cNvPr id="3" name="s11-title">
             <a:extLst xmlns:a="http://schemas.openxmlformats.org/drawingml/2006/main">
               <a:ext uri="{FF2B5EF4-FFF2-40B4-BE49-F238E27FC236}">
-                <a16:creationId xmlns:a16="http://schemas.microsoft.com/office/drawing/2014/main" id="{BDA2648D-C07C-4199-ABDB-A0935BB82859}"/>
+                <a16:creationId xmlns:a16="http://schemas.microsoft.com/office/drawing/2014/main" id="{51CF4D18-FC1A-44B3-AF37-03316285D351}"/>
               </a:ext>
             </a:extLst>
           </p:cNvPr>
@@ -3418,7 +3418,7 @@
           <p:cNvPr id="4" name="s11-footer">
             <a:extLst xmlns:a="http://schemas.openxmlformats.org/drawingml/2006/main">
               <a:ext uri="{FF2B5EF4-FFF2-40B4-BE49-F238E27FC236}">
-                <a16:creationId xmlns:a16="http://schemas.microsoft.com/office/drawing/2014/main" id="{650F78D0-3872-4544-8CAB-97543A6F0E84}"/>
+                <a16:creationId xmlns:a16="http://schemas.microsoft.com/office/drawing/2014/main" id="{A1F12CA2-5312-43E8-8088-2FDF72AEE172}"/>
               </a:ext>
             </a:extLst>
           </p:cNvPr>
@@ -3449,7 +3449,7 @@
           <p:cNvPr id="5" name="s11-identity">
             <a:extLst xmlns:a="http://schemas.openxmlformats.org/drawingml/2006/main">
               <a:ext uri="{FF2B5EF4-FFF2-40B4-BE49-F238E27FC236}">
-                <a16:creationId xmlns:a16="http://schemas.microsoft.com/office/drawing/2014/main" id="{C8A1490F-2529-4D68-9A77-68C9EC61CF97}"/>
+                <a16:creationId xmlns:a16="http://schemas.microsoft.com/office/drawing/2014/main" id="{C5AA3366-8F59-4810-9369-5BEA8C3525FB}"/>
               </a:ext>
             </a:extLst>
           </p:cNvPr>
@@ -3507,7 +3507,7 @@
           <p:cNvPr id="6" name="practice-circle-0">
             <a:extLst xmlns:a="http://schemas.openxmlformats.org/drawingml/2006/main">
               <a:ext uri="{FF2B5EF4-FFF2-40B4-BE49-F238E27FC236}">
-                <a16:creationId xmlns:a16="http://schemas.microsoft.com/office/drawing/2014/main" id="{67C141EE-8B65-4DDC-AE6F-B20FFC43C7C9}"/>
+                <a16:creationId xmlns:a16="http://schemas.microsoft.com/office/drawing/2014/main" id="{4D085BC0-5002-4059-BD44-66478C5AFD3F}"/>
               </a:ext>
             </a:extLst>
           </p:cNvPr>
@@ -3540,7 +3540,7 @@
           <p:cNvPr id="7" name="practice-number-0">
             <a:extLst xmlns:a="http://schemas.openxmlformats.org/drawingml/2006/main">
               <a:ext uri="{FF2B5EF4-FFF2-40B4-BE49-F238E27FC236}">
-                <a16:creationId xmlns:a16="http://schemas.microsoft.com/office/drawing/2014/main" id="{11B39F83-E621-449A-A9F2-03DBF86430AD}"/>
+                <a16:creationId xmlns:a16="http://schemas.microsoft.com/office/drawing/2014/main" id="{BFA337D0-98E5-4D20-AE3C-9AF1BBD06AD5}"/>
               </a:ext>
             </a:extLst>
           </p:cNvPr>
@@ -3598,7 +3598,7 @@
           <p:cNvPr id="8" name="practice-item-0">
             <a:extLst xmlns:a="http://schemas.openxmlformats.org/drawingml/2006/main">
               <a:ext uri="{FF2B5EF4-FFF2-40B4-BE49-F238E27FC236}">
-                <a16:creationId xmlns:a16="http://schemas.microsoft.com/office/drawing/2014/main" id="{145866E0-D290-4B1B-A4C2-3CA912CC8154}"/>
+                <a16:creationId xmlns:a16="http://schemas.microsoft.com/office/drawing/2014/main" id="{42916A90-41D0-43A5-8E04-04F743E8C71F}"/>
               </a:ext>
             </a:extLst>
           </p:cNvPr>
@@ -3662,7 +3662,7 @@
           <p:cNvPr id="9" name="practice-connector-0">
             <a:extLst xmlns:a="http://schemas.openxmlformats.org/drawingml/2006/main">
               <a:ext uri="{FF2B5EF4-FFF2-40B4-BE49-F238E27FC236}">
-                <a16:creationId xmlns:a16="http://schemas.microsoft.com/office/drawing/2014/main" id="{395FE6C1-15C9-4523-AFDD-E07709374017}"/>
+                <a16:creationId xmlns:a16="http://schemas.microsoft.com/office/drawing/2014/main" id="{3AF05409-735C-43DE-BCBC-C5584137F2B6}"/>
               </a:ext>
             </a:extLst>
           </p:cNvPr>
@@ -3693,7 +3693,7 @@
           <p:cNvPr id="10" name="practice-circle-1">
             <a:extLst xmlns:a="http://schemas.openxmlformats.org/drawingml/2006/main">
               <a:ext uri="{FF2B5EF4-FFF2-40B4-BE49-F238E27FC236}">
-                <a16:creationId xmlns:a16="http://schemas.microsoft.com/office/drawing/2014/main" id="{5C2E2010-4E6F-4543-B35E-971A11A8E743}"/>
+                <a16:creationId xmlns:a16="http://schemas.microsoft.com/office/drawing/2014/main" id="{D80CEDA7-7A8B-4739-9840-D9919E26F6C1}"/>
               </a:ext>
             </a:extLst>
           </p:cNvPr>
@@ -3726,7 +3726,7 @@
           <p:cNvPr id="11" name="practice-number-1">
             <a:extLst xmlns:a="http://schemas.openxmlformats.org/drawingml/2006/main">
               <a:ext uri="{FF2B5EF4-FFF2-40B4-BE49-F238E27FC236}">
-                <a16:creationId xmlns:a16="http://schemas.microsoft.com/office/drawing/2014/main" id="{E29FF66A-3096-4F82-85F5-7DB35BFA34A0}"/>
+                <a16:creationId xmlns:a16="http://schemas.microsoft.com/office/drawing/2014/main" id="{7CB53A12-BA82-4C0A-A9FB-FFFAFC5F9F5E}"/>
               </a:ext>
             </a:extLst>
           </p:cNvPr>
@@ -3784,7 +3784,7 @@
           <p:cNvPr id="12" name="practice-item-1">
             <a:extLst xmlns:a="http://schemas.openxmlformats.org/drawingml/2006/main">
               <a:ext uri="{FF2B5EF4-FFF2-40B4-BE49-F238E27FC236}">
-                <a16:creationId xmlns:a16="http://schemas.microsoft.com/office/drawing/2014/main" id="{548BF328-55F6-4AAA-B694-8B1D4F3D3036}"/>
+                <a16:creationId xmlns:a16="http://schemas.microsoft.com/office/drawing/2014/main" id="{D96AE2AF-E43C-4FA4-A6A6-403B49F2C088}"/>
               </a:ext>
             </a:extLst>
           </p:cNvPr>
@@ -3848,7 +3848,7 @@
           <p:cNvPr id="13" name="practice-connector-1">
             <a:extLst xmlns:a="http://schemas.openxmlformats.org/drawingml/2006/main">
               <a:ext uri="{FF2B5EF4-FFF2-40B4-BE49-F238E27FC236}">
-                <a16:creationId xmlns:a16="http://schemas.microsoft.com/office/drawing/2014/main" id="{D398133D-0461-4212-8068-9A5B29AC994A}"/>
+                <a16:creationId xmlns:a16="http://schemas.microsoft.com/office/drawing/2014/main" id="{C1CB29DA-1F91-46D6-8C1F-443F11250E94}"/>
               </a:ext>
             </a:extLst>
           </p:cNvPr>
@@ -3879,7 +3879,7 @@
           <p:cNvPr id="14" name="practice-circle-2">
             <a:extLst xmlns:a="http://schemas.openxmlformats.org/drawingml/2006/main">
               <a:ext uri="{FF2B5EF4-FFF2-40B4-BE49-F238E27FC236}">
-                <a16:creationId xmlns:a16="http://schemas.microsoft.com/office/drawing/2014/main" id="{CEE83D2E-F35D-46DA-B93E-6BE2293C69F7}"/>
+                <a16:creationId xmlns:a16="http://schemas.microsoft.com/office/drawing/2014/main" id="{F9444D7A-8116-4DE8-8477-63F0EC43D776}"/>
               </a:ext>
             </a:extLst>
           </p:cNvPr>
@@ -3912,7 +3912,7 @@
           <p:cNvPr id="15" name="practice-number-2">
             <a:extLst xmlns:a="http://schemas.openxmlformats.org/drawingml/2006/main">
               <a:ext uri="{FF2B5EF4-FFF2-40B4-BE49-F238E27FC236}">
-                <a16:creationId xmlns:a16="http://schemas.microsoft.com/office/drawing/2014/main" id="{7307B5A8-03B1-47B6-8F5C-3DD17C794150}"/>
+                <a16:creationId xmlns:a16="http://schemas.microsoft.com/office/drawing/2014/main" id="{66905434-4964-4066-818A-580283144D1F}"/>
               </a:ext>
             </a:extLst>
           </p:cNvPr>
@@ -3970,7 +3970,7 @@
           <p:cNvPr id="16" name="practice-item-2">
             <a:extLst xmlns:a="http://schemas.openxmlformats.org/drawingml/2006/main">
               <a:ext uri="{FF2B5EF4-FFF2-40B4-BE49-F238E27FC236}">
-                <a16:creationId xmlns:a16="http://schemas.microsoft.com/office/drawing/2014/main" id="{59424EC1-2B5F-4D03-8CC4-0F6971F3379D}"/>
+                <a16:creationId xmlns:a16="http://schemas.microsoft.com/office/drawing/2014/main" id="{D9BD816D-85D1-4CE2-9ED4-F03E7FC17620}"/>
               </a:ext>
             </a:extLst>
           </p:cNvPr>
@@ -4032,7 +4032,7 @@
     </p:spTree>
     <p:extLst>
       <p:ext uri="{BB962C8B-B14F-4D97-AF65-F5344CB8AC3E}">
-        <p14:creationId xmlns:p14="http://schemas.microsoft.com/office/powerpoint/2010/main" val="1803648223"/>
+        <p14:creationId xmlns:p14="http://schemas.microsoft.com/office/powerpoint/2010/main" val="1040197947"/>
       </p:ext>
     </p:extLst>
   </p:cSld>
@@ -4063,7 +4063,7 @@
           <p:cNvPr id="1" name="s12-rule">
             <a:extLst xmlns:a="http://schemas.openxmlformats.org/drawingml/2006/main">
               <a:ext uri="{FF2B5EF4-FFF2-40B4-BE49-F238E27FC236}">
-                <a16:creationId xmlns:a16="http://schemas.microsoft.com/office/drawing/2014/main" id="{DFE031F5-C24E-4EC2-979A-D5B6108A4770}"/>
+                <a16:creationId xmlns:a16="http://schemas.microsoft.com/office/drawing/2014/main" id="{8C287415-3123-46D8-B297-E89C4F2FA7CE}"/>
               </a:ext>
             </a:extLst>
           </p:cNvPr>
@@ -4096,7 +4096,7 @@
           <p:cNvPr id="2" name="s12-eyebrow">
             <a:extLst xmlns:a="http://schemas.openxmlformats.org/drawingml/2006/main">
               <a:ext uri="{FF2B5EF4-FFF2-40B4-BE49-F238E27FC236}">
-                <a16:creationId xmlns:a16="http://schemas.microsoft.com/office/drawing/2014/main" id="{FE4C20A8-B0AB-4DF2-9085-88D0B3DA5D40}"/>
+                <a16:creationId xmlns:a16="http://schemas.microsoft.com/office/drawing/2014/main" id="{1683B165-ABF8-40D7-BA89-8E0D1C1D1D2B}"/>
               </a:ext>
             </a:extLst>
           </p:cNvPr>
@@ -4154,7 +4154,7 @@
           <p:cNvPr id="3" name="s12-title">
             <a:extLst xmlns:a="http://schemas.openxmlformats.org/drawingml/2006/main">
               <a:ext uri="{FF2B5EF4-FFF2-40B4-BE49-F238E27FC236}">
-                <a16:creationId xmlns:a16="http://schemas.microsoft.com/office/drawing/2014/main" id="{209E29D7-51A8-48A3-8494-089CB39E51B5}"/>
+                <a16:creationId xmlns:a16="http://schemas.microsoft.com/office/drawing/2014/main" id="{C51D8980-910E-4F53-8A76-B0F461BBB973}"/>
               </a:ext>
             </a:extLst>
           </p:cNvPr>
@@ -4212,7 +4212,7 @@
           <p:cNvPr id="4" name="s12-footer">
             <a:extLst xmlns:a="http://schemas.openxmlformats.org/drawingml/2006/main">
               <a:ext uri="{FF2B5EF4-FFF2-40B4-BE49-F238E27FC236}">
-                <a16:creationId xmlns:a16="http://schemas.microsoft.com/office/drawing/2014/main" id="{8CD8663E-744F-49E3-B63C-02DDBA3EE618}"/>
+                <a16:creationId xmlns:a16="http://schemas.microsoft.com/office/drawing/2014/main" id="{1B8BE81B-9613-45F5-8386-25AA23713863}"/>
               </a:ext>
             </a:extLst>
           </p:cNvPr>
@@ -4243,7 +4243,7 @@
           <p:cNvPr id="5" name="s12-identity">
             <a:extLst xmlns:a="http://schemas.openxmlformats.org/drawingml/2006/main">
               <a:ext uri="{FF2B5EF4-FFF2-40B4-BE49-F238E27FC236}">
-                <a16:creationId xmlns:a16="http://schemas.microsoft.com/office/drawing/2014/main" id="{B35C57E2-6F83-446A-B021-1DDF7EECE205}"/>
+                <a16:creationId xmlns:a16="http://schemas.microsoft.com/office/drawing/2014/main" id="{0F4AA89F-5356-4C94-97C4-1C6EFBAF466D}"/>
               </a:ext>
             </a:extLst>
           </p:cNvPr>
@@ -4301,7 +4301,7 @@
           <p:cNvPr id="6" name="recap-circle-0">
             <a:extLst xmlns:a="http://schemas.openxmlformats.org/drawingml/2006/main">
               <a:ext uri="{FF2B5EF4-FFF2-40B4-BE49-F238E27FC236}">
-                <a16:creationId xmlns:a16="http://schemas.microsoft.com/office/drawing/2014/main" id="{3AEF295E-F22E-4D67-ABDC-A1315142EEE7}"/>
+                <a16:creationId xmlns:a16="http://schemas.microsoft.com/office/drawing/2014/main" id="{AC4CF551-F8D6-46C1-9177-87D47E2825D3}"/>
               </a:ext>
             </a:extLst>
           </p:cNvPr>
@@ -4334,7 +4334,7 @@
           <p:cNvPr id="7" name="recap-number-0">
             <a:extLst xmlns:a="http://schemas.openxmlformats.org/drawingml/2006/main">
               <a:ext uri="{FF2B5EF4-FFF2-40B4-BE49-F238E27FC236}">
-                <a16:creationId xmlns:a16="http://schemas.microsoft.com/office/drawing/2014/main" id="{C86DD4C9-066D-421C-962B-F4115443D583}"/>
+                <a16:creationId xmlns:a16="http://schemas.microsoft.com/office/drawing/2014/main" id="{D807C80F-F8EB-4462-B3E5-B500E1885445}"/>
               </a:ext>
             </a:extLst>
           </p:cNvPr>
@@ -4392,7 +4392,7 @@
           <p:cNvPr id="8" name="recap-item-0">
             <a:extLst xmlns:a="http://schemas.openxmlformats.org/drawingml/2006/main">
               <a:ext uri="{FF2B5EF4-FFF2-40B4-BE49-F238E27FC236}">
-                <a16:creationId xmlns:a16="http://schemas.microsoft.com/office/drawing/2014/main" id="{CC9FCE00-5CC2-42CD-82F4-4B08D815F5AA}"/>
+                <a16:creationId xmlns:a16="http://schemas.microsoft.com/office/drawing/2014/main" id="{CD54668C-90AD-423D-8E97-A772DF743868}"/>
               </a:ext>
             </a:extLst>
           </p:cNvPr>
@@ -4456,7 +4456,7 @@
           <p:cNvPr id="9" name="recap-connector-0">
             <a:extLst xmlns:a="http://schemas.openxmlformats.org/drawingml/2006/main">
               <a:ext uri="{FF2B5EF4-FFF2-40B4-BE49-F238E27FC236}">
-                <a16:creationId xmlns:a16="http://schemas.microsoft.com/office/drawing/2014/main" id="{C16DAF41-950A-407B-99D0-CC5323A57320}"/>
+                <a16:creationId xmlns:a16="http://schemas.microsoft.com/office/drawing/2014/main" id="{450F3D0D-6DD5-4CB4-BE71-E19A74F4CF6C}"/>
               </a:ext>
             </a:extLst>
           </p:cNvPr>
@@ -4487,7 +4487,7 @@
           <p:cNvPr id="10" name="recap-circle-1">
             <a:extLst xmlns:a="http://schemas.openxmlformats.org/drawingml/2006/main">
               <a:ext uri="{FF2B5EF4-FFF2-40B4-BE49-F238E27FC236}">
-                <a16:creationId xmlns:a16="http://schemas.microsoft.com/office/drawing/2014/main" id="{327C18FB-94D8-44AD-9ACF-0AFF222928C1}"/>
+                <a16:creationId xmlns:a16="http://schemas.microsoft.com/office/drawing/2014/main" id="{4BF5CC7C-2B1F-4E1A-9080-AA54DE1BC44F}"/>
               </a:ext>
             </a:extLst>
           </p:cNvPr>
@@ -4520,7 +4520,7 @@
           <p:cNvPr id="11" name="recap-number-1">
             <a:extLst xmlns:a="http://schemas.openxmlformats.org/drawingml/2006/main">
               <a:ext uri="{FF2B5EF4-FFF2-40B4-BE49-F238E27FC236}">
-                <a16:creationId xmlns:a16="http://schemas.microsoft.com/office/drawing/2014/main" id="{AABDB819-F55F-4EEB-90A7-C2CA14C3253C}"/>
+                <a16:creationId xmlns:a16="http://schemas.microsoft.com/office/drawing/2014/main" id="{8EA89BC1-F979-4CDB-8B75-83246A22834E}"/>
               </a:ext>
             </a:extLst>
           </p:cNvPr>
@@ -4578,7 +4578,7 @@
           <p:cNvPr id="12" name="recap-item-1">
             <a:extLst xmlns:a="http://schemas.openxmlformats.org/drawingml/2006/main">
               <a:ext uri="{FF2B5EF4-FFF2-40B4-BE49-F238E27FC236}">
-                <a16:creationId xmlns:a16="http://schemas.microsoft.com/office/drawing/2014/main" id="{71F54DD7-66AC-4DBC-8A3D-D690861D1789}"/>
+                <a16:creationId xmlns:a16="http://schemas.microsoft.com/office/drawing/2014/main" id="{B0B57BB3-A9A3-484F-89CC-AD491A9D0042}"/>
               </a:ext>
             </a:extLst>
           </p:cNvPr>
@@ -4642,7 +4642,7 @@
           <p:cNvPr id="13" name="recap-connector-1">
             <a:extLst xmlns:a="http://schemas.openxmlformats.org/drawingml/2006/main">
               <a:ext uri="{FF2B5EF4-FFF2-40B4-BE49-F238E27FC236}">
-                <a16:creationId xmlns:a16="http://schemas.microsoft.com/office/drawing/2014/main" id="{FD3F4EC9-B5C9-4A57-840C-C1779019E54A}"/>
+                <a16:creationId xmlns:a16="http://schemas.microsoft.com/office/drawing/2014/main" id="{E31CB819-8447-4035-8AB3-C8B0D2BBED5E}"/>
               </a:ext>
             </a:extLst>
           </p:cNvPr>
@@ -4673,7 +4673,7 @@
           <p:cNvPr id="14" name="recap-circle-2">
             <a:extLst xmlns:a="http://schemas.openxmlformats.org/drawingml/2006/main">
               <a:ext uri="{FF2B5EF4-FFF2-40B4-BE49-F238E27FC236}">
-                <a16:creationId xmlns:a16="http://schemas.microsoft.com/office/drawing/2014/main" id="{34DF1FD7-6460-447C-A584-A9AE18714C89}"/>
+                <a16:creationId xmlns:a16="http://schemas.microsoft.com/office/drawing/2014/main" id="{BDA54381-7C3E-45C8-B57D-520415DC8178}"/>
               </a:ext>
             </a:extLst>
           </p:cNvPr>
@@ -4706,7 +4706,7 @@
           <p:cNvPr id="15" name="recap-number-2">
             <a:extLst xmlns:a="http://schemas.openxmlformats.org/drawingml/2006/main">
               <a:ext uri="{FF2B5EF4-FFF2-40B4-BE49-F238E27FC236}">
-                <a16:creationId xmlns:a16="http://schemas.microsoft.com/office/drawing/2014/main" id="{25AF9B32-7ED8-4ABB-9CE2-DCC61D4B84C8}"/>
+                <a16:creationId xmlns:a16="http://schemas.microsoft.com/office/drawing/2014/main" id="{81C6B174-F9DD-4797-B9AA-1C4B421F5297}"/>
               </a:ext>
             </a:extLst>
           </p:cNvPr>
@@ -4764,7 +4764,7 @@
           <p:cNvPr id="16" name="recap-item-2">
             <a:extLst xmlns:a="http://schemas.openxmlformats.org/drawingml/2006/main">
               <a:ext uri="{FF2B5EF4-FFF2-40B4-BE49-F238E27FC236}">
-                <a16:creationId xmlns:a16="http://schemas.microsoft.com/office/drawing/2014/main" id="{FCAEC69A-4CB8-497D-9066-868FB2C9890F}"/>
+                <a16:creationId xmlns:a16="http://schemas.microsoft.com/office/drawing/2014/main" id="{AD311220-A7D3-4D82-A059-1E74D25F38F4}"/>
               </a:ext>
             </a:extLst>
           </p:cNvPr>
@@ -4826,7 +4826,7 @@
     </p:spTree>
     <p:extLst>
       <p:ext uri="{BB962C8B-B14F-4D97-AF65-F5344CB8AC3E}">
-        <p14:creationId xmlns:p14="http://schemas.microsoft.com/office/powerpoint/2010/main" val="65024041"/>
+        <p14:creationId xmlns:p14="http://schemas.microsoft.com/office/powerpoint/2010/main" val="1992791871"/>
       </p:ext>
     </p:extLst>
   </p:cSld>
@@ -4857,7 +4857,7 @@
           <p:cNvPr id="1" name="s13-rule">
             <a:extLst xmlns:a="http://schemas.openxmlformats.org/drawingml/2006/main">
               <a:ext uri="{FF2B5EF4-FFF2-40B4-BE49-F238E27FC236}">
-                <a16:creationId xmlns:a16="http://schemas.microsoft.com/office/drawing/2014/main" id="{0F08D356-BD4A-4B10-AD56-092E63B9C2DE}"/>
+                <a16:creationId xmlns:a16="http://schemas.microsoft.com/office/drawing/2014/main" id="{C5FDD624-141B-4B1C-99B1-12E3545B5F0B}"/>
               </a:ext>
             </a:extLst>
           </p:cNvPr>
@@ -4890,7 +4890,7 @@
           <p:cNvPr id="2" name="s13-eyebrow">
             <a:extLst xmlns:a="http://schemas.openxmlformats.org/drawingml/2006/main">
               <a:ext uri="{FF2B5EF4-FFF2-40B4-BE49-F238E27FC236}">
-                <a16:creationId xmlns:a16="http://schemas.microsoft.com/office/drawing/2014/main" id="{A00AD9D8-7001-463F-BC9F-A9724B5F20F8}"/>
+                <a16:creationId xmlns:a16="http://schemas.microsoft.com/office/drawing/2014/main" id="{8677818F-9FEF-4016-8D0D-ABBE76CC5349}"/>
               </a:ext>
             </a:extLst>
           </p:cNvPr>
@@ -4948,7 +4948,7 @@
           <p:cNvPr id="3" name="s13-title">
             <a:extLst xmlns:a="http://schemas.openxmlformats.org/drawingml/2006/main">
               <a:ext uri="{FF2B5EF4-FFF2-40B4-BE49-F238E27FC236}">
-                <a16:creationId xmlns:a16="http://schemas.microsoft.com/office/drawing/2014/main" id="{4FFFEBAD-7078-46E3-BC22-C30D235C660E}"/>
+                <a16:creationId xmlns:a16="http://schemas.microsoft.com/office/drawing/2014/main" id="{C73C9C69-1384-4EC9-A11A-906B0EA40FD7}"/>
               </a:ext>
             </a:extLst>
           </p:cNvPr>
@@ -5006,7 +5006,7 @@
           <p:cNvPr id="4" name="s13-footer">
             <a:extLst xmlns:a="http://schemas.openxmlformats.org/drawingml/2006/main">
               <a:ext uri="{FF2B5EF4-FFF2-40B4-BE49-F238E27FC236}">
-                <a16:creationId xmlns:a16="http://schemas.microsoft.com/office/drawing/2014/main" id="{AF52058F-8E48-4FD8-8CB9-FF4B855D258B}"/>
+                <a16:creationId xmlns:a16="http://schemas.microsoft.com/office/drawing/2014/main" id="{ECFD38F0-DD3B-461F-B813-28DDF244E5F8}"/>
               </a:ext>
             </a:extLst>
           </p:cNvPr>
@@ -5037,7 +5037,7 @@
           <p:cNvPr id="5" name="s13-identity">
             <a:extLst xmlns:a="http://schemas.openxmlformats.org/drawingml/2006/main">
               <a:ext uri="{FF2B5EF4-FFF2-40B4-BE49-F238E27FC236}">
-                <a16:creationId xmlns:a16="http://schemas.microsoft.com/office/drawing/2014/main" id="{9B113835-8BE9-4586-8E2B-E8FAF621F095}"/>
+                <a16:creationId xmlns:a16="http://schemas.microsoft.com/office/drawing/2014/main" id="{730A9874-8C3F-4F8B-877F-0DE7F4D3BEA7}"/>
               </a:ext>
             </a:extLst>
           </p:cNvPr>
@@ -5095,7 +5095,7 @@
           <p:cNvPr id="6" name="source-0">
             <a:extLst xmlns:a="http://schemas.openxmlformats.org/drawingml/2006/main">
               <a:ext uri="{FF2B5EF4-FFF2-40B4-BE49-F238E27FC236}">
-                <a16:creationId xmlns:a16="http://schemas.microsoft.com/office/drawing/2014/main" id="{61F24C4E-21B5-4A1E-9040-6B571F25CFDE}"/>
+                <a16:creationId xmlns:a16="http://schemas.microsoft.com/office/drawing/2014/main" id="{1831003A-C90E-41E1-9FC2-099C47A60C76}"/>
               </a:ext>
             </a:extLst>
           </p:cNvPr>
@@ -5159,7 +5159,7 @@
           <p:cNvPr id="7" name="source-1">
             <a:extLst xmlns:a="http://schemas.openxmlformats.org/drawingml/2006/main">
               <a:ext uri="{FF2B5EF4-FFF2-40B4-BE49-F238E27FC236}">
-                <a16:creationId xmlns:a16="http://schemas.microsoft.com/office/drawing/2014/main" id="{955DFD89-7B4F-4C9A-A9F6-AB263AF14A09}"/>
+                <a16:creationId xmlns:a16="http://schemas.microsoft.com/office/drawing/2014/main" id="{16871354-D5A4-43B6-8C32-EF9305D82D67}"/>
               </a:ext>
             </a:extLst>
           </p:cNvPr>
@@ -5223,7 +5223,7 @@
           <p:cNvPr id="8" name="s13-takeaway-rule">
             <a:extLst xmlns:a="http://schemas.openxmlformats.org/drawingml/2006/main">
               <a:ext uri="{FF2B5EF4-FFF2-40B4-BE49-F238E27FC236}">
-                <a16:creationId xmlns:a16="http://schemas.microsoft.com/office/drawing/2014/main" id="{8DC1503D-D187-4C58-B3E9-0606513F4510}"/>
+                <a16:creationId xmlns:a16="http://schemas.microsoft.com/office/drawing/2014/main" id="{C21602C9-5B83-46E2-9B11-070F9CF037E7}"/>
               </a:ext>
             </a:extLst>
           </p:cNvPr>
@@ -5256,7 +5256,7 @@
           <p:cNvPr id="9" name="s13-takeaway">
             <a:extLst xmlns:a="http://schemas.openxmlformats.org/drawingml/2006/main">
               <a:ext uri="{FF2B5EF4-FFF2-40B4-BE49-F238E27FC236}">
-                <a16:creationId xmlns:a16="http://schemas.microsoft.com/office/drawing/2014/main" id="{7B3DCB49-5858-44C6-BC2E-2B19229B6875}"/>
+                <a16:creationId xmlns:a16="http://schemas.microsoft.com/office/drawing/2014/main" id="{50106896-1E43-4BDC-A41F-386B251E90D0}"/>
               </a:ext>
             </a:extLst>
           </p:cNvPr>
@@ -5281,7 +5281,7 @@
         </p:spPr>
         <p:txBody>
           <a:bodyPr xmlns:a="http://schemas.openxmlformats.org/drawingml/2006/main" lIns="0" tIns="0" rIns="0" bIns="0" anchor="ctr">
-            <a:normAutofit fontScale="100000"/>
+            <a:normAutofit fontScale="95911"/>
           </a:bodyPr>
           <a:lstStyle xmlns:a="http://schemas.openxmlformats.org/drawingml/2006/main"/>
           <a:p xmlns:a="http://schemas.openxmlformats.org/drawingml/2006/main">
@@ -5304,7 +5304,7 @@
                 <a:ea typeface="PingFang SC"/>
                 <a:cs typeface="PingFang SC"/>
               </a:rPr>
-              <a:t>公开幻灯片只使用课程原创文字与原生图形；完整论证、链接和事实边界请见本节讲义。</a:t>
+              <a:t>课程精编页用于讲授主线；播放器中的“原课件”模式保留团队 PowerPoint 精选页、真实图片和可播放视频。</a:t>
             </a:r>
           </a:p>
         </p:txBody>
@@ -5312,7 +5312,7 @@
     </p:spTree>
     <p:extLst>
       <p:ext uri="{BB962C8B-B14F-4D97-AF65-F5344CB8AC3E}">
-        <p14:creationId xmlns:p14="http://schemas.microsoft.com/office/powerpoint/2010/main" val="1797938021"/>
+        <p14:creationId xmlns:p14="http://schemas.microsoft.com/office/powerpoint/2010/main" val="1987899000"/>
       </p:ext>
     </p:extLst>
   </p:cSld>
@@ -5343,7 +5343,7 @@
           <p:cNvPr id="1" name="s2-rule">
             <a:extLst xmlns:a="http://schemas.openxmlformats.org/drawingml/2006/main">
               <a:ext uri="{FF2B5EF4-FFF2-40B4-BE49-F238E27FC236}">
-                <a16:creationId xmlns:a16="http://schemas.microsoft.com/office/drawing/2014/main" id="{9D52822C-6D17-4427-B2D3-3C012B2A15BC}"/>
+                <a16:creationId xmlns:a16="http://schemas.microsoft.com/office/drawing/2014/main" id="{45B655D5-BF7F-40FC-9049-AAC10C6E40B3}"/>
               </a:ext>
             </a:extLst>
           </p:cNvPr>
@@ -5376,7 +5376,7 @@
           <p:cNvPr id="2" name="s2-eyebrow">
             <a:extLst xmlns:a="http://schemas.openxmlformats.org/drawingml/2006/main">
               <a:ext uri="{FF2B5EF4-FFF2-40B4-BE49-F238E27FC236}">
-                <a16:creationId xmlns:a16="http://schemas.microsoft.com/office/drawing/2014/main" id="{13CF7F51-ACDC-41C1-A79A-600E5A4FBD1E}"/>
+                <a16:creationId xmlns:a16="http://schemas.microsoft.com/office/drawing/2014/main" id="{B2A4ED31-AB8D-41ED-BCF1-435683C7DE32}"/>
               </a:ext>
             </a:extLst>
           </p:cNvPr>
@@ -5434,7 +5434,7 @@
           <p:cNvPr id="3" name="s2-title">
             <a:extLst xmlns:a="http://schemas.openxmlformats.org/drawingml/2006/main">
               <a:ext uri="{FF2B5EF4-FFF2-40B4-BE49-F238E27FC236}">
-                <a16:creationId xmlns:a16="http://schemas.microsoft.com/office/drawing/2014/main" id="{FC1A85CF-0937-4709-B640-6A19FB0039C0}"/>
+                <a16:creationId xmlns:a16="http://schemas.microsoft.com/office/drawing/2014/main" id="{22B929B9-A189-4D2D-9429-3FF6DB67FC6A}"/>
               </a:ext>
             </a:extLst>
           </p:cNvPr>
@@ -5492,7 +5492,7 @@
           <p:cNvPr id="4" name="s2-footer">
             <a:extLst xmlns:a="http://schemas.openxmlformats.org/drawingml/2006/main">
               <a:ext uri="{FF2B5EF4-FFF2-40B4-BE49-F238E27FC236}">
-                <a16:creationId xmlns:a16="http://schemas.microsoft.com/office/drawing/2014/main" id="{8A61BE8C-F5C6-40B0-BFFA-D2BF9EE8ECD0}"/>
+                <a16:creationId xmlns:a16="http://schemas.microsoft.com/office/drawing/2014/main" id="{66027F74-739B-4FFB-AC00-B37D9DF2F4EE}"/>
               </a:ext>
             </a:extLst>
           </p:cNvPr>
@@ -5523,7 +5523,7 @@
           <p:cNvPr id="5" name="s2-identity">
             <a:extLst xmlns:a="http://schemas.openxmlformats.org/drawingml/2006/main">
               <a:ext uri="{FF2B5EF4-FFF2-40B4-BE49-F238E27FC236}">
-                <a16:creationId xmlns:a16="http://schemas.microsoft.com/office/drawing/2014/main" id="{9A3E315C-3187-4715-B8EA-1C0F4666E851}"/>
+                <a16:creationId xmlns:a16="http://schemas.microsoft.com/office/drawing/2014/main" id="{333ABB6D-FD93-4523-9545-49ACD09FE7BF}"/>
               </a:ext>
             </a:extLst>
           </p:cNvPr>
@@ -5581,7 +5581,7 @@
           <p:cNvPr id="6" name="objective-1">
             <a:extLst xmlns:a="http://schemas.openxmlformats.org/drawingml/2006/main">
               <a:ext uri="{FF2B5EF4-FFF2-40B4-BE49-F238E27FC236}">
-                <a16:creationId xmlns:a16="http://schemas.microsoft.com/office/drawing/2014/main" id="{E292172A-1024-4BE4-ABD1-6654013839AD}"/>
+                <a16:creationId xmlns:a16="http://schemas.microsoft.com/office/drawing/2014/main" id="{14FD4518-1119-4AC5-86FA-851D950257C2}"/>
               </a:ext>
             </a:extLst>
           </p:cNvPr>
@@ -5668,7 +5668,7 @@
           <p:cNvPr id="7" name="objective-2">
             <a:extLst xmlns:a="http://schemas.openxmlformats.org/drawingml/2006/main">
               <a:ext uri="{FF2B5EF4-FFF2-40B4-BE49-F238E27FC236}">
-                <a16:creationId xmlns:a16="http://schemas.microsoft.com/office/drawing/2014/main" id="{4B391F83-45EC-43BE-80A0-FF706F707C9E}"/>
+                <a16:creationId xmlns:a16="http://schemas.microsoft.com/office/drawing/2014/main" id="{8FEAE02F-5ED1-4AAC-9A71-6F8B5442A280}"/>
               </a:ext>
             </a:extLst>
           </p:cNvPr>
@@ -5753,7 +5753,7 @@
     </p:spTree>
     <p:extLst>
       <p:ext uri="{BB962C8B-B14F-4D97-AF65-F5344CB8AC3E}">
-        <p14:creationId xmlns:p14="http://schemas.microsoft.com/office/powerpoint/2010/main" val="419263279"/>
+        <p14:creationId xmlns:p14="http://schemas.microsoft.com/office/powerpoint/2010/main" val="139358510"/>
       </p:ext>
     </p:extLst>
   </p:cSld>
@@ -5784,7 +5784,7 @@
           <p:cNvPr id="1" name="s3-rule">
             <a:extLst xmlns:a="http://schemas.openxmlformats.org/drawingml/2006/main">
               <a:ext uri="{FF2B5EF4-FFF2-40B4-BE49-F238E27FC236}">
-                <a16:creationId xmlns:a16="http://schemas.microsoft.com/office/drawing/2014/main" id="{5385AED8-DF6B-43A9-9E86-89873E905B51}"/>
+                <a16:creationId xmlns:a16="http://schemas.microsoft.com/office/drawing/2014/main" id="{C6AB8539-A495-4B2E-939D-A69A48F244E9}"/>
               </a:ext>
             </a:extLst>
           </p:cNvPr>
@@ -5817,7 +5817,7 @@
           <p:cNvPr id="2" name="s3-eyebrow">
             <a:extLst xmlns:a="http://schemas.openxmlformats.org/drawingml/2006/main">
               <a:ext uri="{FF2B5EF4-FFF2-40B4-BE49-F238E27FC236}">
-                <a16:creationId xmlns:a16="http://schemas.microsoft.com/office/drawing/2014/main" id="{DA759590-D561-4EFF-9D3A-DD2E9DE0D811}"/>
+                <a16:creationId xmlns:a16="http://schemas.microsoft.com/office/drawing/2014/main" id="{C6BFA881-0349-48FB-B8EE-1DCBFFDEBBDC}"/>
               </a:ext>
             </a:extLst>
           </p:cNvPr>
@@ -5875,7 +5875,7 @@
           <p:cNvPr id="3" name="s3-title">
             <a:extLst xmlns:a="http://schemas.openxmlformats.org/drawingml/2006/main">
               <a:ext uri="{FF2B5EF4-FFF2-40B4-BE49-F238E27FC236}">
-                <a16:creationId xmlns:a16="http://schemas.microsoft.com/office/drawing/2014/main" id="{4E1144DC-3820-4514-9216-597D7DB82907}"/>
+                <a16:creationId xmlns:a16="http://schemas.microsoft.com/office/drawing/2014/main" id="{AE42B5BD-4874-4677-9319-0A48796E6DD1}"/>
               </a:ext>
             </a:extLst>
           </p:cNvPr>
@@ -5933,7 +5933,7 @@
           <p:cNvPr id="4" name="s3-footer">
             <a:extLst xmlns:a="http://schemas.openxmlformats.org/drawingml/2006/main">
               <a:ext uri="{FF2B5EF4-FFF2-40B4-BE49-F238E27FC236}">
-                <a16:creationId xmlns:a16="http://schemas.microsoft.com/office/drawing/2014/main" id="{565EA4A9-2B0E-478E-8B3B-7B428FEA02F2}"/>
+                <a16:creationId xmlns:a16="http://schemas.microsoft.com/office/drawing/2014/main" id="{C242F375-CF5C-45D8-8578-CBC6057B1359}"/>
               </a:ext>
             </a:extLst>
           </p:cNvPr>
@@ -5964,7 +5964,7 @@
           <p:cNvPr id="5" name="s3-identity">
             <a:extLst xmlns:a="http://schemas.openxmlformats.org/drawingml/2006/main">
               <a:ext uri="{FF2B5EF4-FFF2-40B4-BE49-F238E27FC236}">
-                <a16:creationId xmlns:a16="http://schemas.microsoft.com/office/drawing/2014/main" id="{AFB0A864-2F10-4862-AAEC-77C67AC5FF86}"/>
+                <a16:creationId xmlns:a16="http://schemas.microsoft.com/office/drawing/2014/main" id="{94649DB6-643A-4CB2-997A-638DA2D80C4B}"/>
               </a:ext>
             </a:extLst>
           </p:cNvPr>
@@ -6022,7 +6022,7 @@
           <p:cNvPr id="6" name="core-no-0">
             <a:extLst xmlns:a="http://schemas.openxmlformats.org/drawingml/2006/main">
               <a:ext uri="{FF2B5EF4-FFF2-40B4-BE49-F238E27FC236}">
-                <a16:creationId xmlns:a16="http://schemas.microsoft.com/office/drawing/2014/main" id="{6B00B514-09A4-4266-A4E8-E5A947D9C6F1}"/>
+                <a16:creationId xmlns:a16="http://schemas.microsoft.com/office/drawing/2014/main" id="{E7ABB90D-C481-434A-A600-D1DE45BA86E5}"/>
               </a:ext>
             </a:extLst>
           </p:cNvPr>
@@ -6080,7 +6080,7 @@
           <p:cNvPr id="7" name="core-label-0">
             <a:extLst xmlns:a="http://schemas.openxmlformats.org/drawingml/2006/main">
               <a:ext uri="{FF2B5EF4-FFF2-40B4-BE49-F238E27FC236}">
-                <a16:creationId xmlns:a16="http://schemas.microsoft.com/office/drawing/2014/main" id="{E290EB65-3D3A-47E1-B44C-916F1006637D}"/>
+                <a16:creationId xmlns:a16="http://schemas.microsoft.com/office/drawing/2014/main" id="{9567A482-2CF1-4C30-B17E-062B14CE73BE}"/>
               </a:ext>
             </a:extLst>
           </p:cNvPr>
@@ -6138,7 +6138,7 @@
           <p:cNvPr id="8" name="core-body-0">
             <a:extLst xmlns:a="http://schemas.openxmlformats.org/drawingml/2006/main">
               <a:ext uri="{FF2B5EF4-FFF2-40B4-BE49-F238E27FC236}">
-                <a16:creationId xmlns:a16="http://schemas.microsoft.com/office/drawing/2014/main" id="{343EC3D7-EF32-4612-BDE0-36E2ECC3FFFE}"/>
+                <a16:creationId xmlns:a16="http://schemas.microsoft.com/office/drawing/2014/main" id="{5F95C02D-B09F-4EFC-AAB3-17F21115A86B}"/>
               </a:ext>
             </a:extLst>
           </p:cNvPr>
@@ -6202,7 +6202,7 @@
           <p:cNvPr id="9" name="core-no-1">
             <a:extLst xmlns:a="http://schemas.openxmlformats.org/drawingml/2006/main">
               <a:ext uri="{FF2B5EF4-FFF2-40B4-BE49-F238E27FC236}">
-                <a16:creationId xmlns:a16="http://schemas.microsoft.com/office/drawing/2014/main" id="{D87CDD1F-29A5-4ABC-B21F-408EBF79D7A9}"/>
+                <a16:creationId xmlns:a16="http://schemas.microsoft.com/office/drawing/2014/main" id="{1F9D78C8-E32F-45DE-8F36-2CDAEDBB6EAF}"/>
               </a:ext>
             </a:extLst>
           </p:cNvPr>
@@ -6260,7 +6260,7 @@
           <p:cNvPr id="10" name="core-body-1">
             <a:extLst xmlns:a="http://schemas.openxmlformats.org/drawingml/2006/main">
               <a:ext uri="{FF2B5EF4-FFF2-40B4-BE49-F238E27FC236}">
-                <a16:creationId xmlns:a16="http://schemas.microsoft.com/office/drawing/2014/main" id="{BF6D8B04-A4B1-4C93-B781-3E3582B627F3}"/>
+                <a16:creationId xmlns:a16="http://schemas.microsoft.com/office/drawing/2014/main" id="{15D7F11E-D313-49C5-8AF7-3F83A3F34DE0}"/>
               </a:ext>
             </a:extLst>
           </p:cNvPr>
@@ -6324,7 +6324,7 @@
           <p:cNvPr id="11" name="s3-takeaway-rule">
             <a:extLst xmlns:a="http://schemas.openxmlformats.org/drawingml/2006/main">
               <a:ext uri="{FF2B5EF4-FFF2-40B4-BE49-F238E27FC236}">
-                <a16:creationId xmlns:a16="http://schemas.microsoft.com/office/drawing/2014/main" id="{8BB89901-1E26-4366-AB2E-B7B26A36C3E0}"/>
+                <a16:creationId xmlns:a16="http://schemas.microsoft.com/office/drawing/2014/main" id="{6972C407-919C-4127-B078-8A3F9821EE6C}"/>
               </a:ext>
             </a:extLst>
           </p:cNvPr>
@@ -6357,7 +6357,7 @@
           <p:cNvPr id="12" name="s3-takeaway">
             <a:extLst xmlns:a="http://schemas.openxmlformats.org/drawingml/2006/main">
               <a:ext uri="{FF2B5EF4-FFF2-40B4-BE49-F238E27FC236}">
-                <a16:creationId xmlns:a16="http://schemas.microsoft.com/office/drawing/2014/main" id="{62DD0C29-5030-4156-965B-0153F5348487}"/>
+                <a16:creationId xmlns:a16="http://schemas.microsoft.com/office/drawing/2014/main" id="{DCBE1AAA-5A2D-4FCF-AD45-15ECD8574EE7}"/>
               </a:ext>
             </a:extLst>
           </p:cNvPr>
@@ -6413,7 +6413,7 @@
     </p:spTree>
     <p:extLst>
       <p:ext uri="{BB962C8B-B14F-4D97-AF65-F5344CB8AC3E}">
-        <p14:creationId xmlns:p14="http://schemas.microsoft.com/office/powerpoint/2010/main" val="1773478590"/>
+        <p14:creationId xmlns:p14="http://schemas.microsoft.com/office/powerpoint/2010/main" val="1365379630"/>
       </p:ext>
     </p:extLst>
   </p:cSld>
@@ -6444,7 +6444,7 @@
           <p:cNvPr id="1" name="s4-rule">
             <a:extLst xmlns:a="http://schemas.openxmlformats.org/drawingml/2006/main">
               <a:ext uri="{FF2B5EF4-FFF2-40B4-BE49-F238E27FC236}">
-                <a16:creationId xmlns:a16="http://schemas.microsoft.com/office/drawing/2014/main" id="{52097E81-09C6-4E76-898B-6EB345E0710D}"/>
+                <a16:creationId xmlns:a16="http://schemas.microsoft.com/office/drawing/2014/main" id="{4582A0F7-3BA2-4F34-8867-D961C7FFBA73}"/>
               </a:ext>
             </a:extLst>
           </p:cNvPr>
@@ -6477,7 +6477,7 @@
           <p:cNvPr id="2" name="s4-eyebrow">
             <a:extLst xmlns:a="http://schemas.openxmlformats.org/drawingml/2006/main">
               <a:ext uri="{FF2B5EF4-FFF2-40B4-BE49-F238E27FC236}">
-                <a16:creationId xmlns:a16="http://schemas.microsoft.com/office/drawing/2014/main" id="{5AF03E68-C437-46A3-95BB-D3CF8AA5B9EE}"/>
+                <a16:creationId xmlns:a16="http://schemas.microsoft.com/office/drawing/2014/main" id="{B80988CF-1972-41F9-9E02-BFD5CE0E2171}"/>
               </a:ext>
             </a:extLst>
           </p:cNvPr>
@@ -6535,7 +6535,7 @@
           <p:cNvPr id="3" name="s4-title">
             <a:extLst xmlns:a="http://schemas.openxmlformats.org/drawingml/2006/main">
               <a:ext uri="{FF2B5EF4-FFF2-40B4-BE49-F238E27FC236}">
-                <a16:creationId xmlns:a16="http://schemas.microsoft.com/office/drawing/2014/main" id="{DEF17033-72DC-41EE-B8A5-8E974E084039}"/>
+                <a16:creationId xmlns:a16="http://schemas.microsoft.com/office/drawing/2014/main" id="{DA6BC19A-A266-4317-83E6-62316D9ED15F}"/>
               </a:ext>
             </a:extLst>
           </p:cNvPr>
@@ -6593,7 +6593,7 @@
           <p:cNvPr id="4" name="s4-footer">
             <a:extLst xmlns:a="http://schemas.openxmlformats.org/drawingml/2006/main">
               <a:ext uri="{FF2B5EF4-FFF2-40B4-BE49-F238E27FC236}">
-                <a16:creationId xmlns:a16="http://schemas.microsoft.com/office/drawing/2014/main" id="{4E8914B9-2F43-4C5F-93B1-4AD3A84CD955}"/>
+                <a16:creationId xmlns:a16="http://schemas.microsoft.com/office/drawing/2014/main" id="{872B222A-6FFC-4C85-8261-9279CF292EB0}"/>
               </a:ext>
             </a:extLst>
           </p:cNvPr>
@@ -6624,7 +6624,7 @@
           <p:cNvPr id="5" name="s4-identity">
             <a:extLst xmlns:a="http://schemas.openxmlformats.org/drawingml/2006/main">
               <a:ext uri="{FF2B5EF4-FFF2-40B4-BE49-F238E27FC236}">
-                <a16:creationId xmlns:a16="http://schemas.microsoft.com/office/drawing/2014/main" id="{F7708452-2819-497F-9E22-A29A0FB0C16F}"/>
+                <a16:creationId xmlns:a16="http://schemas.microsoft.com/office/drawing/2014/main" id="{C58B5331-3B1D-42DE-8092-00B56ADF2C51}"/>
               </a:ext>
             </a:extLst>
           </p:cNvPr>
@@ -6682,7 +6682,7 @@
           <p:cNvPr id="6" name="core-no-0">
             <a:extLst xmlns:a="http://schemas.openxmlformats.org/drawingml/2006/main">
               <a:ext uri="{FF2B5EF4-FFF2-40B4-BE49-F238E27FC236}">
-                <a16:creationId xmlns:a16="http://schemas.microsoft.com/office/drawing/2014/main" id="{86C37DD5-E56C-4262-826E-A657094522A9}"/>
+                <a16:creationId xmlns:a16="http://schemas.microsoft.com/office/drawing/2014/main" id="{08D13BB5-8B5B-4136-B471-9D4913568015}"/>
               </a:ext>
             </a:extLst>
           </p:cNvPr>
@@ -6740,7 +6740,7 @@
           <p:cNvPr id="7" name="core-label-0">
             <a:extLst xmlns:a="http://schemas.openxmlformats.org/drawingml/2006/main">
               <a:ext uri="{FF2B5EF4-FFF2-40B4-BE49-F238E27FC236}">
-                <a16:creationId xmlns:a16="http://schemas.microsoft.com/office/drawing/2014/main" id="{4178F5D8-CA6B-4B28-8ADF-EAAA352AA5A9}"/>
+                <a16:creationId xmlns:a16="http://schemas.microsoft.com/office/drawing/2014/main" id="{913C4702-37B6-41A9-8547-CDC29A2BDA81}"/>
               </a:ext>
             </a:extLst>
           </p:cNvPr>
@@ -6798,7 +6798,7 @@
           <p:cNvPr id="8" name="core-body-0">
             <a:extLst xmlns:a="http://schemas.openxmlformats.org/drawingml/2006/main">
               <a:ext uri="{FF2B5EF4-FFF2-40B4-BE49-F238E27FC236}">
-                <a16:creationId xmlns:a16="http://schemas.microsoft.com/office/drawing/2014/main" id="{AA3A0020-30FD-4BF0-B636-91B9ED158864}"/>
+                <a16:creationId xmlns:a16="http://schemas.microsoft.com/office/drawing/2014/main" id="{5D09E033-FA9E-4A10-AC35-9A2414299C57}"/>
               </a:ext>
             </a:extLst>
           </p:cNvPr>
@@ -6862,7 +6862,7 @@
           <p:cNvPr id="9" name="core-no-1">
             <a:extLst xmlns:a="http://schemas.openxmlformats.org/drawingml/2006/main">
               <a:ext uri="{FF2B5EF4-FFF2-40B4-BE49-F238E27FC236}">
-                <a16:creationId xmlns:a16="http://schemas.microsoft.com/office/drawing/2014/main" id="{9A44FA36-79C1-470C-80EC-46457A4E6971}"/>
+                <a16:creationId xmlns:a16="http://schemas.microsoft.com/office/drawing/2014/main" id="{913C1BF2-1054-44A9-9627-C69901001532}"/>
               </a:ext>
             </a:extLst>
           </p:cNvPr>
@@ -6920,7 +6920,7 @@
           <p:cNvPr id="10" name="core-body-1">
             <a:extLst xmlns:a="http://schemas.openxmlformats.org/drawingml/2006/main">
               <a:ext uri="{FF2B5EF4-FFF2-40B4-BE49-F238E27FC236}">
-                <a16:creationId xmlns:a16="http://schemas.microsoft.com/office/drawing/2014/main" id="{82BD6226-85F2-4B81-9592-F802784F24B2}"/>
+                <a16:creationId xmlns:a16="http://schemas.microsoft.com/office/drawing/2014/main" id="{B3774ED8-F741-4FCD-9DA3-05849659E302}"/>
               </a:ext>
             </a:extLst>
           </p:cNvPr>
@@ -6984,7 +6984,7 @@
           <p:cNvPr id="11" name="s4-takeaway-rule">
             <a:extLst xmlns:a="http://schemas.openxmlformats.org/drawingml/2006/main">
               <a:ext uri="{FF2B5EF4-FFF2-40B4-BE49-F238E27FC236}">
-                <a16:creationId xmlns:a16="http://schemas.microsoft.com/office/drawing/2014/main" id="{69F84815-CF1A-4037-8566-F175A6785B95}"/>
+                <a16:creationId xmlns:a16="http://schemas.microsoft.com/office/drawing/2014/main" id="{B075853C-1BA3-4E79-A64A-CEAF69C0D3B6}"/>
               </a:ext>
             </a:extLst>
           </p:cNvPr>
@@ -7017,7 +7017,7 @@
           <p:cNvPr id="12" name="s4-takeaway">
             <a:extLst xmlns:a="http://schemas.openxmlformats.org/drawingml/2006/main">
               <a:ext uri="{FF2B5EF4-FFF2-40B4-BE49-F238E27FC236}">
-                <a16:creationId xmlns:a16="http://schemas.microsoft.com/office/drawing/2014/main" id="{3DA9251C-E01A-45A1-B8B5-6EFBABD72125}"/>
+                <a16:creationId xmlns:a16="http://schemas.microsoft.com/office/drawing/2014/main" id="{24B1936A-52DB-42FE-B06D-CD922BD92B87}"/>
               </a:ext>
             </a:extLst>
           </p:cNvPr>
@@ -7073,7 +7073,7 @@
     </p:spTree>
     <p:extLst>
       <p:ext uri="{BB962C8B-B14F-4D97-AF65-F5344CB8AC3E}">
-        <p14:creationId xmlns:p14="http://schemas.microsoft.com/office/powerpoint/2010/main" val="411144879"/>
+        <p14:creationId xmlns:p14="http://schemas.microsoft.com/office/powerpoint/2010/main" val="1967135254"/>
       </p:ext>
     </p:extLst>
   </p:cSld>
@@ -7104,7 +7104,7 @@
           <p:cNvPr id="1" name="s5-rule">
             <a:extLst xmlns:a="http://schemas.openxmlformats.org/drawingml/2006/main">
               <a:ext uri="{FF2B5EF4-FFF2-40B4-BE49-F238E27FC236}">
-                <a16:creationId xmlns:a16="http://schemas.microsoft.com/office/drawing/2014/main" id="{C7E9F34E-FA31-4122-A470-4392E666055E}"/>
+                <a16:creationId xmlns:a16="http://schemas.microsoft.com/office/drawing/2014/main" id="{BCD2F570-2050-4D08-8E6D-08379518FD00}"/>
               </a:ext>
             </a:extLst>
           </p:cNvPr>
@@ -7137,7 +7137,7 @@
           <p:cNvPr id="2" name="s5-eyebrow">
             <a:extLst xmlns:a="http://schemas.openxmlformats.org/drawingml/2006/main">
               <a:ext uri="{FF2B5EF4-FFF2-40B4-BE49-F238E27FC236}">
-                <a16:creationId xmlns:a16="http://schemas.microsoft.com/office/drawing/2014/main" id="{281081E4-F113-4DF3-8EE7-1D7B3A61C423}"/>
+                <a16:creationId xmlns:a16="http://schemas.microsoft.com/office/drawing/2014/main" id="{0CA2B6BB-D6ED-4544-9594-A7D0E89D8451}"/>
               </a:ext>
             </a:extLst>
           </p:cNvPr>
@@ -7195,7 +7195,7 @@
           <p:cNvPr id="3" name="s5-title">
             <a:extLst xmlns:a="http://schemas.openxmlformats.org/drawingml/2006/main">
               <a:ext uri="{FF2B5EF4-FFF2-40B4-BE49-F238E27FC236}">
-                <a16:creationId xmlns:a16="http://schemas.microsoft.com/office/drawing/2014/main" id="{84BA8DCE-4186-4401-BA63-B3C046FBEA63}"/>
+                <a16:creationId xmlns:a16="http://schemas.microsoft.com/office/drawing/2014/main" id="{4F880B91-4AE3-40E8-9DDA-7EC8E69D8564}"/>
               </a:ext>
             </a:extLst>
           </p:cNvPr>
@@ -7253,7 +7253,7 @@
           <p:cNvPr id="4" name="s5-footer">
             <a:extLst xmlns:a="http://schemas.openxmlformats.org/drawingml/2006/main">
               <a:ext uri="{FF2B5EF4-FFF2-40B4-BE49-F238E27FC236}">
-                <a16:creationId xmlns:a16="http://schemas.microsoft.com/office/drawing/2014/main" id="{B5E0AA9D-9512-4810-81C6-39858F1EAE9B}"/>
+                <a16:creationId xmlns:a16="http://schemas.microsoft.com/office/drawing/2014/main" id="{7CAD4BBA-4819-421E-8417-39C115CB119A}"/>
               </a:ext>
             </a:extLst>
           </p:cNvPr>
@@ -7284,7 +7284,7 @@
           <p:cNvPr id="5" name="s5-identity">
             <a:extLst xmlns:a="http://schemas.openxmlformats.org/drawingml/2006/main">
               <a:ext uri="{FF2B5EF4-FFF2-40B4-BE49-F238E27FC236}">
-                <a16:creationId xmlns:a16="http://schemas.microsoft.com/office/drawing/2014/main" id="{201D81B8-48CF-470E-B400-371909F4087C}"/>
+                <a16:creationId xmlns:a16="http://schemas.microsoft.com/office/drawing/2014/main" id="{112E9442-EEAD-4D98-97A6-3E66AD51F9F6}"/>
               </a:ext>
             </a:extLst>
           </p:cNvPr>
@@ -7342,7 +7342,7 @@
           <p:cNvPr id="6" name="core-no-0">
             <a:extLst xmlns:a="http://schemas.openxmlformats.org/drawingml/2006/main">
               <a:ext uri="{FF2B5EF4-FFF2-40B4-BE49-F238E27FC236}">
-                <a16:creationId xmlns:a16="http://schemas.microsoft.com/office/drawing/2014/main" id="{FF7587F8-01CB-43A8-9177-ADCF87EC9F5F}"/>
+                <a16:creationId xmlns:a16="http://schemas.microsoft.com/office/drawing/2014/main" id="{2B8901F9-B632-4D9F-BE62-366AAA326360}"/>
               </a:ext>
             </a:extLst>
           </p:cNvPr>
@@ -7400,7 +7400,7 @@
           <p:cNvPr id="7" name="core-label-0">
             <a:extLst xmlns:a="http://schemas.openxmlformats.org/drawingml/2006/main">
               <a:ext uri="{FF2B5EF4-FFF2-40B4-BE49-F238E27FC236}">
-                <a16:creationId xmlns:a16="http://schemas.microsoft.com/office/drawing/2014/main" id="{7FF0105E-B9A0-44E9-BFBC-E0DA3DB558AA}"/>
+                <a16:creationId xmlns:a16="http://schemas.microsoft.com/office/drawing/2014/main" id="{65CB8139-4A6A-427B-A704-DD69562BB8D3}"/>
               </a:ext>
             </a:extLst>
           </p:cNvPr>
@@ -7458,7 +7458,7 @@
           <p:cNvPr id="8" name="core-body-0">
             <a:extLst xmlns:a="http://schemas.openxmlformats.org/drawingml/2006/main">
               <a:ext uri="{FF2B5EF4-FFF2-40B4-BE49-F238E27FC236}">
-                <a16:creationId xmlns:a16="http://schemas.microsoft.com/office/drawing/2014/main" id="{A6BA1FEF-EF32-4D01-9693-F0A481497CD8}"/>
+                <a16:creationId xmlns:a16="http://schemas.microsoft.com/office/drawing/2014/main" id="{D8C16FC0-AEC8-4B2F-8C46-A36DC8AB9333}"/>
               </a:ext>
             </a:extLst>
           </p:cNvPr>
@@ -7522,7 +7522,7 @@
           <p:cNvPr id="9" name="core-no-1">
             <a:extLst xmlns:a="http://schemas.openxmlformats.org/drawingml/2006/main">
               <a:ext uri="{FF2B5EF4-FFF2-40B4-BE49-F238E27FC236}">
-                <a16:creationId xmlns:a16="http://schemas.microsoft.com/office/drawing/2014/main" id="{CCB19011-6A01-49C3-83E5-F93ACA1C780C}"/>
+                <a16:creationId xmlns:a16="http://schemas.microsoft.com/office/drawing/2014/main" id="{7D4D4B2F-B94F-4D87-9125-DAEE7A1C4B3E}"/>
               </a:ext>
             </a:extLst>
           </p:cNvPr>
@@ -7580,7 +7580,7 @@
           <p:cNvPr id="10" name="core-body-1">
             <a:extLst xmlns:a="http://schemas.openxmlformats.org/drawingml/2006/main">
               <a:ext uri="{FF2B5EF4-FFF2-40B4-BE49-F238E27FC236}">
-                <a16:creationId xmlns:a16="http://schemas.microsoft.com/office/drawing/2014/main" id="{A621CF35-32AD-4BA5-BC80-93C0826D1E3A}"/>
+                <a16:creationId xmlns:a16="http://schemas.microsoft.com/office/drawing/2014/main" id="{901D143D-08CB-4A2C-91EF-F0226C506986}"/>
               </a:ext>
             </a:extLst>
           </p:cNvPr>
@@ -7644,7 +7644,7 @@
           <p:cNvPr id="11" name="s5-takeaway-rule">
             <a:extLst xmlns:a="http://schemas.openxmlformats.org/drawingml/2006/main">
               <a:ext uri="{FF2B5EF4-FFF2-40B4-BE49-F238E27FC236}">
-                <a16:creationId xmlns:a16="http://schemas.microsoft.com/office/drawing/2014/main" id="{4B75D422-F693-4C20-A4A8-4B58CDCC893B}"/>
+                <a16:creationId xmlns:a16="http://schemas.microsoft.com/office/drawing/2014/main" id="{9A574F0F-BCAE-4737-AD0B-0E0CBD1A5679}"/>
               </a:ext>
             </a:extLst>
           </p:cNvPr>
@@ -7677,7 +7677,7 @@
           <p:cNvPr id="12" name="s5-takeaway">
             <a:extLst xmlns:a="http://schemas.openxmlformats.org/drawingml/2006/main">
               <a:ext uri="{FF2B5EF4-FFF2-40B4-BE49-F238E27FC236}">
-                <a16:creationId xmlns:a16="http://schemas.microsoft.com/office/drawing/2014/main" id="{59FE74BB-C750-4CA1-81F5-0DBDEB3DF370}"/>
+                <a16:creationId xmlns:a16="http://schemas.microsoft.com/office/drawing/2014/main" id="{3AC67DFB-64E0-4260-87A1-58D6E53A6CA3}"/>
               </a:ext>
             </a:extLst>
           </p:cNvPr>
@@ -7733,7 +7733,7 @@
     </p:spTree>
     <p:extLst>
       <p:ext uri="{BB962C8B-B14F-4D97-AF65-F5344CB8AC3E}">
-        <p14:creationId xmlns:p14="http://schemas.microsoft.com/office/powerpoint/2010/main" val="1193368904"/>
+        <p14:creationId xmlns:p14="http://schemas.microsoft.com/office/powerpoint/2010/main" val="568197883"/>
       </p:ext>
     </p:extLst>
   </p:cSld>
@@ -7764,7 +7764,7 @@
           <p:cNvPr id="1" name="s6-rule">
             <a:extLst xmlns:a="http://schemas.openxmlformats.org/drawingml/2006/main">
               <a:ext uri="{FF2B5EF4-FFF2-40B4-BE49-F238E27FC236}">
-                <a16:creationId xmlns:a16="http://schemas.microsoft.com/office/drawing/2014/main" id="{096A5201-2F98-4450-A003-AF6BF9DFE45B}"/>
+                <a16:creationId xmlns:a16="http://schemas.microsoft.com/office/drawing/2014/main" id="{9A0A5E6A-14EC-4B03-8033-F9AC1F236E01}"/>
               </a:ext>
             </a:extLst>
           </p:cNvPr>
@@ -7797,7 +7797,7 @@
           <p:cNvPr id="2" name="s6-eyebrow">
             <a:extLst xmlns:a="http://schemas.openxmlformats.org/drawingml/2006/main">
               <a:ext uri="{FF2B5EF4-FFF2-40B4-BE49-F238E27FC236}">
-                <a16:creationId xmlns:a16="http://schemas.microsoft.com/office/drawing/2014/main" id="{CA766A29-A4F3-4636-8BAD-4914A77F4071}"/>
+                <a16:creationId xmlns:a16="http://schemas.microsoft.com/office/drawing/2014/main" id="{39CFAEC2-1132-4788-A4F0-DE8DACB0F221}"/>
               </a:ext>
             </a:extLst>
           </p:cNvPr>
@@ -7855,7 +7855,7 @@
           <p:cNvPr id="3" name="s6-title">
             <a:extLst xmlns:a="http://schemas.openxmlformats.org/drawingml/2006/main">
               <a:ext uri="{FF2B5EF4-FFF2-40B4-BE49-F238E27FC236}">
-                <a16:creationId xmlns:a16="http://schemas.microsoft.com/office/drawing/2014/main" id="{ACFE9634-90FC-4AE4-AC34-F7529F921DC7}"/>
+                <a16:creationId xmlns:a16="http://schemas.microsoft.com/office/drawing/2014/main" id="{A88F4A72-CBC5-4357-B82A-81C9A0BAA553}"/>
               </a:ext>
             </a:extLst>
           </p:cNvPr>
@@ -7913,7 +7913,7 @@
           <p:cNvPr id="4" name="s6-footer">
             <a:extLst xmlns:a="http://schemas.openxmlformats.org/drawingml/2006/main">
               <a:ext uri="{FF2B5EF4-FFF2-40B4-BE49-F238E27FC236}">
-                <a16:creationId xmlns:a16="http://schemas.microsoft.com/office/drawing/2014/main" id="{AB544DBF-1F6A-4558-9EE7-65AE5EF828AF}"/>
+                <a16:creationId xmlns:a16="http://schemas.microsoft.com/office/drawing/2014/main" id="{93F7B627-6A78-42A9-B0C8-AB6B155C7840}"/>
               </a:ext>
             </a:extLst>
           </p:cNvPr>
@@ -7944,7 +7944,7 @@
           <p:cNvPr id="5" name="s6-identity">
             <a:extLst xmlns:a="http://schemas.openxmlformats.org/drawingml/2006/main">
               <a:ext uri="{FF2B5EF4-FFF2-40B4-BE49-F238E27FC236}">
-                <a16:creationId xmlns:a16="http://schemas.microsoft.com/office/drawing/2014/main" id="{7504629A-D24A-4743-A3D2-180515D8F2AB}"/>
+                <a16:creationId xmlns:a16="http://schemas.microsoft.com/office/drawing/2014/main" id="{0CE14A5C-3DA7-4642-9118-2DD305FAF08D}"/>
               </a:ext>
             </a:extLst>
           </p:cNvPr>
@@ -8002,7 +8002,7 @@
           <p:cNvPr id="6" name="core-no-0">
             <a:extLst xmlns:a="http://schemas.openxmlformats.org/drawingml/2006/main">
               <a:ext uri="{FF2B5EF4-FFF2-40B4-BE49-F238E27FC236}">
-                <a16:creationId xmlns:a16="http://schemas.microsoft.com/office/drawing/2014/main" id="{EB13C235-A312-4622-9D11-B00E1E19D4DF}"/>
+                <a16:creationId xmlns:a16="http://schemas.microsoft.com/office/drawing/2014/main" id="{3629C935-086D-41F6-9C3A-A6C522BA995D}"/>
               </a:ext>
             </a:extLst>
           </p:cNvPr>
@@ -8060,7 +8060,7 @@
           <p:cNvPr id="7" name="core-label-0">
             <a:extLst xmlns:a="http://schemas.openxmlformats.org/drawingml/2006/main">
               <a:ext uri="{FF2B5EF4-FFF2-40B4-BE49-F238E27FC236}">
-                <a16:creationId xmlns:a16="http://schemas.microsoft.com/office/drawing/2014/main" id="{933F0B91-DB5D-4E0D-ACC8-2E11D29E067A}"/>
+                <a16:creationId xmlns:a16="http://schemas.microsoft.com/office/drawing/2014/main" id="{E3464ECE-CB83-4CEA-A511-0C910C1A38F2}"/>
               </a:ext>
             </a:extLst>
           </p:cNvPr>
@@ -8118,7 +8118,7 @@
           <p:cNvPr id="8" name="core-body-0">
             <a:extLst xmlns:a="http://schemas.openxmlformats.org/drawingml/2006/main">
               <a:ext uri="{FF2B5EF4-FFF2-40B4-BE49-F238E27FC236}">
-                <a16:creationId xmlns:a16="http://schemas.microsoft.com/office/drawing/2014/main" id="{8FC83BEF-FA89-4DD4-BF16-A7CF1D4056D3}"/>
+                <a16:creationId xmlns:a16="http://schemas.microsoft.com/office/drawing/2014/main" id="{5557B8BA-900F-49DB-A400-CA130BCA3CF9}"/>
               </a:ext>
             </a:extLst>
           </p:cNvPr>
@@ -8182,7 +8182,7 @@
           <p:cNvPr id="9" name="core-no-1">
             <a:extLst xmlns:a="http://schemas.openxmlformats.org/drawingml/2006/main">
               <a:ext uri="{FF2B5EF4-FFF2-40B4-BE49-F238E27FC236}">
-                <a16:creationId xmlns:a16="http://schemas.microsoft.com/office/drawing/2014/main" id="{45D89961-720F-4859-AFEA-C5E45EF8817F}"/>
+                <a16:creationId xmlns:a16="http://schemas.microsoft.com/office/drawing/2014/main" id="{450D9A11-1C16-4891-9715-79D80951D385}"/>
               </a:ext>
             </a:extLst>
           </p:cNvPr>
@@ -8240,7 +8240,7 @@
           <p:cNvPr id="10" name="core-body-1">
             <a:extLst xmlns:a="http://schemas.openxmlformats.org/drawingml/2006/main">
               <a:ext uri="{FF2B5EF4-FFF2-40B4-BE49-F238E27FC236}">
-                <a16:creationId xmlns:a16="http://schemas.microsoft.com/office/drawing/2014/main" id="{85702B2C-CAC1-4463-8F03-D6DD6FA12B96}"/>
+                <a16:creationId xmlns:a16="http://schemas.microsoft.com/office/drawing/2014/main" id="{A93B37D8-1123-4415-895B-2514F260113E}"/>
               </a:ext>
             </a:extLst>
           </p:cNvPr>
@@ -8304,7 +8304,7 @@
           <p:cNvPr id="11" name="s6-takeaway-rule">
             <a:extLst xmlns:a="http://schemas.openxmlformats.org/drawingml/2006/main">
               <a:ext uri="{FF2B5EF4-FFF2-40B4-BE49-F238E27FC236}">
-                <a16:creationId xmlns:a16="http://schemas.microsoft.com/office/drawing/2014/main" id="{AE606F0D-2449-4300-90BD-4A20990A6709}"/>
+                <a16:creationId xmlns:a16="http://schemas.microsoft.com/office/drawing/2014/main" id="{F7ED12DD-B770-43E5-A4C8-D0BEC4481E30}"/>
               </a:ext>
             </a:extLst>
           </p:cNvPr>
@@ -8337,7 +8337,7 @@
           <p:cNvPr id="12" name="s6-takeaway">
             <a:extLst xmlns:a="http://schemas.openxmlformats.org/drawingml/2006/main">
               <a:ext uri="{FF2B5EF4-FFF2-40B4-BE49-F238E27FC236}">
-                <a16:creationId xmlns:a16="http://schemas.microsoft.com/office/drawing/2014/main" id="{42DD33AF-C22E-45DF-9331-1E46EC00531D}"/>
+                <a16:creationId xmlns:a16="http://schemas.microsoft.com/office/drawing/2014/main" id="{824277EF-DD09-44BF-AE5D-1CCD43832184}"/>
               </a:ext>
             </a:extLst>
           </p:cNvPr>
@@ -8393,7 +8393,7 @@
     </p:spTree>
     <p:extLst>
       <p:ext uri="{BB962C8B-B14F-4D97-AF65-F5344CB8AC3E}">
-        <p14:creationId xmlns:p14="http://schemas.microsoft.com/office/powerpoint/2010/main" val="1960213651"/>
+        <p14:creationId xmlns:p14="http://schemas.microsoft.com/office/powerpoint/2010/main" val="1186110771"/>
       </p:ext>
     </p:extLst>
   </p:cSld>
@@ -8424,7 +8424,7 @@
           <p:cNvPr id="1" name="s7-rule">
             <a:extLst xmlns:a="http://schemas.openxmlformats.org/drawingml/2006/main">
               <a:ext uri="{FF2B5EF4-FFF2-40B4-BE49-F238E27FC236}">
-                <a16:creationId xmlns:a16="http://schemas.microsoft.com/office/drawing/2014/main" id="{50398342-5B30-4232-9B1B-6C6EA5817C2A}"/>
+                <a16:creationId xmlns:a16="http://schemas.microsoft.com/office/drawing/2014/main" id="{3E757B95-6C7C-466F-AAEB-18CB4D9CF646}"/>
               </a:ext>
             </a:extLst>
           </p:cNvPr>
@@ -8457,7 +8457,7 @@
           <p:cNvPr id="2" name="s7-eyebrow">
             <a:extLst xmlns:a="http://schemas.openxmlformats.org/drawingml/2006/main">
               <a:ext uri="{FF2B5EF4-FFF2-40B4-BE49-F238E27FC236}">
-                <a16:creationId xmlns:a16="http://schemas.microsoft.com/office/drawing/2014/main" id="{C54DA7C7-59F1-4E2E-80C7-5220CA6481F4}"/>
+                <a16:creationId xmlns:a16="http://schemas.microsoft.com/office/drawing/2014/main" id="{3F3D28D6-B647-47C0-B494-A99F07B9BD52}"/>
               </a:ext>
             </a:extLst>
           </p:cNvPr>
@@ -8515,7 +8515,7 @@
           <p:cNvPr id="3" name="s7-title">
             <a:extLst xmlns:a="http://schemas.openxmlformats.org/drawingml/2006/main">
               <a:ext uri="{FF2B5EF4-FFF2-40B4-BE49-F238E27FC236}">
-                <a16:creationId xmlns:a16="http://schemas.microsoft.com/office/drawing/2014/main" id="{BF22D334-ED25-4975-B390-98480B6FD911}"/>
+                <a16:creationId xmlns:a16="http://schemas.microsoft.com/office/drawing/2014/main" id="{A6BA28C6-94C8-4677-868E-5E677F302A90}"/>
               </a:ext>
             </a:extLst>
           </p:cNvPr>
@@ -8573,7 +8573,7 @@
           <p:cNvPr id="4" name="s7-footer">
             <a:extLst xmlns:a="http://schemas.openxmlformats.org/drawingml/2006/main">
               <a:ext uri="{FF2B5EF4-FFF2-40B4-BE49-F238E27FC236}">
-                <a16:creationId xmlns:a16="http://schemas.microsoft.com/office/drawing/2014/main" id="{D4ED7A48-7AD0-4D35-9C3D-E49F1B0D76F1}"/>
+                <a16:creationId xmlns:a16="http://schemas.microsoft.com/office/drawing/2014/main" id="{3E016111-5E10-4007-BB4D-4D48A720F922}"/>
               </a:ext>
             </a:extLst>
           </p:cNvPr>
@@ -8604,7 +8604,7 @@
           <p:cNvPr id="5" name="s7-identity">
             <a:extLst xmlns:a="http://schemas.openxmlformats.org/drawingml/2006/main">
               <a:ext uri="{FF2B5EF4-FFF2-40B4-BE49-F238E27FC236}">
-                <a16:creationId xmlns:a16="http://schemas.microsoft.com/office/drawing/2014/main" id="{624881FF-6F28-45F8-A2D6-8658FC32540A}"/>
+                <a16:creationId xmlns:a16="http://schemas.microsoft.com/office/drawing/2014/main" id="{08EF60EF-52ED-447A-9ED3-FF9E19427348}"/>
               </a:ext>
             </a:extLst>
           </p:cNvPr>
@@ -8662,7 +8662,7 @@
           <p:cNvPr id="6" name="core-no-0">
             <a:extLst xmlns:a="http://schemas.openxmlformats.org/drawingml/2006/main">
               <a:ext uri="{FF2B5EF4-FFF2-40B4-BE49-F238E27FC236}">
-                <a16:creationId xmlns:a16="http://schemas.microsoft.com/office/drawing/2014/main" id="{BF6B87F1-04FA-4607-A3D3-91C68B04A22E}"/>
+                <a16:creationId xmlns:a16="http://schemas.microsoft.com/office/drawing/2014/main" id="{3467CF81-650D-4699-8FFC-4585506CFFEC}"/>
               </a:ext>
             </a:extLst>
           </p:cNvPr>
@@ -8720,7 +8720,7 @@
           <p:cNvPr id="7" name="core-label-0">
             <a:extLst xmlns:a="http://schemas.openxmlformats.org/drawingml/2006/main">
               <a:ext uri="{FF2B5EF4-FFF2-40B4-BE49-F238E27FC236}">
-                <a16:creationId xmlns:a16="http://schemas.microsoft.com/office/drawing/2014/main" id="{78AB15E8-9FB5-4A4A-951A-EDFE105F192E}"/>
+                <a16:creationId xmlns:a16="http://schemas.microsoft.com/office/drawing/2014/main" id="{97C0EC60-058C-429B-B317-C9073E73FEB5}"/>
               </a:ext>
             </a:extLst>
           </p:cNvPr>
@@ -8778,7 +8778,7 @@
           <p:cNvPr id="8" name="core-body-0">
             <a:extLst xmlns:a="http://schemas.openxmlformats.org/drawingml/2006/main">
               <a:ext uri="{FF2B5EF4-FFF2-40B4-BE49-F238E27FC236}">
-                <a16:creationId xmlns:a16="http://schemas.microsoft.com/office/drawing/2014/main" id="{2F0E2A13-F797-43DC-B6EF-1D22AD8346CD}"/>
+                <a16:creationId xmlns:a16="http://schemas.microsoft.com/office/drawing/2014/main" id="{1D01E354-B27B-4452-8362-CD8A21D314E2}"/>
               </a:ext>
             </a:extLst>
           </p:cNvPr>
@@ -8842,7 +8842,7 @@
           <p:cNvPr id="9" name="core-no-1">
             <a:extLst xmlns:a="http://schemas.openxmlformats.org/drawingml/2006/main">
               <a:ext uri="{FF2B5EF4-FFF2-40B4-BE49-F238E27FC236}">
-                <a16:creationId xmlns:a16="http://schemas.microsoft.com/office/drawing/2014/main" id="{42A2928D-4B57-4BE7-80C4-46FDD1EB1563}"/>
+                <a16:creationId xmlns:a16="http://schemas.microsoft.com/office/drawing/2014/main" id="{7AA1B19E-29A5-46AE-A7CB-151E798B3658}"/>
               </a:ext>
             </a:extLst>
           </p:cNvPr>
@@ -8900,7 +8900,7 @@
           <p:cNvPr id="10" name="core-body-1">
             <a:extLst xmlns:a="http://schemas.openxmlformats.org/drawingml/2006/main">
               <a:ext uri="{FF2B5EF4-FFF2-40B4-BE49-F238E27FC236}">
-                <a16:creationId xmlns:a16="http://schemas.microsoft.com/office/drawing/2014/main" id="{F8D57B18-A4AD-49B3-A844-0A19E6A83D67}"/>
+                <a16:creationId xmlns:a16="http://schemas.microsoft.com/office/drawing/2014/main" id="{2CE7F4B3-A57D-4D64-9150-27D461B6AC81}"/>
               </a:ext>
             </a:extLst>
           </p:cNvPr>
@@ -8964,7 +8964,7 @@
           <p:cNvPr id="11" name="s7-takeaway-rule">
             <a:extLst xmlns:a="http://schemas.openxmlformats.org/drawingml/2006/main">
               <a:ext uri="{FF2B5EF4-FFF2-40B4-BE49-F238E27FC236}">
-                <a16:creationId xmlns:a16="http://schemas.microsoft.com/office/drawing/2014/main" id="{64366480-A9B7-439E-BE47-B96778EE0252}"/>
+                <a16:creationId xmlns:a16="http://schemas.microsoft.com/office/drawing/2014/main" id="{BD3CD692-30FD-4F7C-83BD-4AB8B010DFF3}"/>
               </a:ext>
             </a:extLst>
           </p:cNvPr>
@@ -8997,7 +8997,7 @@
           <p:cNvPr id="12" name="s7-takeaway">
             <a:extLst xmlns:a="http://schemas.openxmlformats.org/drawingml/2006/main">
               <a:ext uri="{FF2B5EF4-FFF2-40B4-BE49-F238E27FC236}">
-                <a16:creationId xmlns:a16="http://schemas.microsoft.com/office/drawing/2014/main" id="{07A5196D-B35D-4DC5-8C89-8B5B31CCEB32}"/>
+                <a16:creationId xmlns:a16="http://schemas.microsoft.com/office/drawing/2014/main" id="{BF94700D-0FB7-4B0A-8980-914E7C6CEFD2}"/>
               </a:ext>
             </a:extLst>
           </p:cNvPr>
@@ -9053,7 +9053,7 @@
     </p:spTree>
     <p:extLst>
       <p:ext uri="{BB962C8B-B14F-4D97-AF65-F5344CB8AC3E}">
-        <p14:creationId xmlns:p14="http://schemas.microsoft.com/office/powerpoint/2010/main" val="1848355458"/>
+        <p14:creationId xmlns:p14="http://schemas.microsoft.com/office/powerpoint/2010/main" val="286425863"/>
       </p:ext>
     </p:extLst>
   </p:cSld>
@@ -9084,7 +9084,7 @@
           <p:cNvPr id="1" name="s8-rule">
             <a:extLst xmlns:a="http://schemas.openxmlformats.org/drawingml/2006/main">
               <a:ext uri="{FF2B5EF4-FFF2-40B4-BE49-F238E27FC236}">
-                <a16:creationId xmlns:a16="http://schemas.microsoft.com/office/drawing/2014/main" id="{D8D4186B-F633-4242-9088-3968BAE9061D}"/>
+                <a16:creationId xmlns:a16="http://schemas.microsoft.com/office/drawing/2014/main" id="{E8CD1056-2D00-48AC-B0F2-A05CDA567058}"/>
               </a:ext>
             </a:extLst>
           </p:cNvPr>
@@ -9117,7 +9117,7 @@
           <p:cNvPr id="2" name="s8-eyebrow">
             <a:extLst xmlns:a="http://schemas.openxmlformats.org/drawingml/2006/main">
               <a:ext uri="{FF2B5EF4-FFF2-40B4-BE49-F238E27FC236}">
-                <a16:creationId xmlns:a16="http://schemas.microsoft.com/office/drawing/2014/main" id="{9098FB17-15D2-490F-B4BC-A87C097996E9}"/>
+                <a16:creationId xmlns:a16="http://schemas.microsoft.com/office/drawing/2014/main" id="{CD7B5391-6071-4FDE-98B1-46E0A3C0B7AB}"/>
               </a:ext>
             </a:extLst>
           </p:cNvPr>
@@ -9175,7 +9175,7 @@
           <p:cNvPr id="3" name="s8-title">
             <a:extLst xmlns:a="http://schemas.openxmlformats.org/drawingml/2006/main">
               <a:ext uri="{FF2B5EF4-FFF2-40B4-BE49-F238E27FC236}">
-                <a16:creationId xmlns:a16="http://schemas.microsoft.com/office/drawing/2014/main" id="{65AED37F-DD0F-412D-A594-F24B27485410}"/>
+                <a16:creationId xmlns:a16="http://schemas.microsoft.com/office/drawing/2014/main" id="{540E0240-8B06-4043-B95B-D03FA6670C29}"/>
               </a:ext>
             </a:extLst>
           </p:cNvPr>
@@ -9233,7 +9233,7 @@
           <p:cNvPr id="4" name="s8-footer">
             <a:extLst xmlns:a="http://schemas.openxmlformats.org/drawingml/2006/main">
               <a:ext uri="{FF2B5EF4-FFF2-40B4-BE49-F238E27FC236}">
-                <a16:creationId xmlns:a16="http://schemas.microsoft.com/office/drawing/2014/main" id="{2D306024-3F45-4F82-848D-75D10ADADFF0}"/>
+                <a16:creationId xmlns:a16="http://schemas.microsoft.com/office/drawing/2014/main" id="{FB43CC7D-FD92-47ED-A4BA-251402A0C1A6}"/>
               </a:ext>
             </a:extLst>
           </p:cNvPr>
@@ -9264,7 +9264,7 @@
           <p:cNvPr id="5" name="s8-identity">
             <a:extLst xmlns:a="http://schemas.openxmlformats.org/drawingml/2006/main">
               <a:ext uri="{FF2B5EF4-FFF2-40B4-BE49-F238E27FC236}">
-                <a16:creationId xmlns:a16="http://schemas.microsoft.com/office/drawing/2014/main" id="{97D2D19F-3468-41C8-BFC6-391AEAE40E91}"/>
+                <a16:creationId xmlns:a16="http://schemas.microsoft.com/office/drawing/2014/main" id="{5E25092D-78E9-4B82-8514-68C505B5F75F}"/>
               </a:ext>
             </a:extLst>
           </p:cNvPr>
@@ -9322,7 +9322,7 @@
           <p:cNvPr id="6" name="core-no-0">
             <a:extLst xmlns:a="http://schemas.openxmlformats.org/drawingml/2006/main">
               <a:ext uri="{FF2B5EF4-FFF2-40B4-BE49-F238E27FC236}">
-                <a16:creationId xmlns:a16="http://schemas.microsoft.com/office/drawing/2014/main" id="{353D27DC-2DBE-4556-8C8D-62ED45782AFF}"/>
+                <a16:creationId xmlns:a16="http://schemas.microsoft.com/office/drawing/2014/main" id="{1029FA7E-2029-46CF-B603-4A9933A714C6}"/>
               </a:ext>
             </a:extLst>
           </p:cNvPr>
@@ -9380,7 +9380,7 @@
           <p:cNvPr id="7" name="core-label-0">
             <a:extLst xmlns:a="http://schemas.openxmlformats.org/drawingml/2006/main">
               <a:ext uri="{FF2B5EF4-FFF2-40B4-BE49-F238E27FC236}">
-                <a16:creationId xmlns:a16="http://schemas.microsoft.com/office/drawing/2014/main" id="{A1341EEF-4878-4865-8CCA-74EF6878B16E}"/>
+                <a16:creationId xmlns:a16="http://schemas.microsoft.com/office/drawing/2014/main" id="{0154E6EF-3FBF-4837-A986-28243D078379}"/>
               </a:ext>
             </a:extLst>
           </p:cNvPr>
@@ -9438,7 +9438,7 @@
           <p:cNvPr id="8" name="core-body-0">
             <a:extLst xmlns:a="http://schemas.openxmlformats.org/drawingml/2006/main">
               <a:ext uri="{FF2B5EF4-FFF2-40B4-BE49-F238E27FC236}">
-                <a16:creationId xmlns:a16="http://schemas.microsoft.com/office/drawing/2014/main" id="{0DB57540-9B4F-4C6F-81CA-4E82512E9CD4}"/>
+                <a16:creationId xmlns:a16="http://schemas.microsoft.com/office/drawing/2014/main" id="{5E2936C1-0B14-4FD9-8AD4-8EFE37C39CF9}"/>
               </a:ext>
             </a:extLst>
           </p:cNvPr>
@@ -9502,7 +9502,7 @@
           <p:cNvPr id="9" name="core-no-1">
             <a:extLst xmlns:a="http://schemas.openxmlformats.org/drawingml/2006/main">
               <a:ext uri="{FF2B5EF4-FFF2-40B4-BE49-F238E27FC236}">
-                <a16:creationId xmlns:a16="http://schemas.microsoft.com/office/drawing/2014/main" id="{3ADF610C-B4E1-4E63-96A1-994C38B2B6B5}"/>
+                <a16:creationId xmlns:a16="http://schemas.microsoft.com/office/drawing/2014/main" id="{B47DE981-7552-42D6-A6E7-024B2DFE9596}"/>
               </a:ext>
             </a:extLst>
           </p:cNvPr>
@@ -9560,7 +9560,7 @@
           <p:cNvPr id="10" name="core-body-1">
             <a:extLst xmlns:a="http://schemas.openxmlformats.org/drawingml/2006/main">
               <a:ext uri="{FF2B5EF4-FFF2-40B4-BE49-F238E27FC236}">
-                <a16:creationId xmlns:a16="http://schemas.microsoft.com/office/drawing/2014/main" id="{0ABD86CA-67F8-48F8-9CD7-A92A9477E9D4}"/>
+                <a16:creationId xmlns:a16="http://schemas.microsoft.com/office/drawing/2014/main" id="{B2EB6190-CE01-4B46-AA1A-8EA0277C965F}"/>
               </a:ext>
             </a:extLst>
           </p:cNvPr>
@@ -9624,7 +9624,7 @@
           <p:cNvPr id="11" name="s8-takeaway-rule">
             <a:extLst xmlns:a="http://schemas.openxmlformats.org/drawingml/2006/main">
               <a:ext uri="{FF2B5EF4-FFF2-40B4-BE49-F238E27FC236}">
-                <a16:creationId xmlns:a16="http://schemas.microsoft.com/office/drawing/2014/main" id="{08B8D866-5516-4C66-B334-4D29A795FADF}"/>
+                <a16:creationId xmlns:a16="http://schemas.microsoft.com/office/drawing/2014/main" id="{FE141E60-F190-43BB-B82C-7C1A75A566FE}"/>
               </a:ext>
             </a:extLst>
           </p:cNvPr>
@@ -9657,7 +9657,7 @@
           <p:cNvPr id="12" name="s8-takeaway">
             <a:extLst xmlns:a="http://schemas.openxmlformats.org/drawingml/2006/main">
               <a:ext uri="{FF2B5EF4-FFF2-40B4-BE49-F238E27FC236}">
-                <a16:creationId xmlns:a16="http://schemas.microsoft.com/office/drawing/2014/main" id="{6B6B000B-A54B-4D46-8D80-0DA991D1DFD6}"/>
+                <a16:creationId xmlns:a16="http://schemas.microsoft.com/office/drawing/2014/main" id="{7EB20BBE-561A-4A16-87F1-3D689B3F67F2}"/>
               </a:ext>
             </a:extLst>
           </p:cNvPr>
@@ -9713,7 +9713,7 @@
     </p:spTree>
     <p:extLst>
       <p:ext uri="{BB962C8B-B14F-4D97-AF65-F5344CB8AC3E}">
-        <p14:creationId xmlns:p14="http://schemas.microsoft.com/office/powerpoint/2010/main" val="1540804346"/>
+        <p14:creationId xmlns:p14="http://schemas.microsoft.com/office/powerpoint/2010/main" val="1487357090"/>
       </p:ext>
     </p:extLst>
   </p:cSld>
@@ -9744,7 +9744,7 @@
           <p:cNvPr id="1" name="s9-rule">
             <a:extLst xmlns:a="http://schemas.openxmlformats.org/drawingml/2006/main">
               <a:ext uri="{FF2B5EF4-FFF2-40B4-BE49-F238E27FC236}">
-                <a16:creationId xmlns:a16="http://schemas.microsoft.com/office/drawing/2014/main" id="{2C6DDF47-8E44-483B-8095-151E356CA64D}"/>
+                <a16:creationId xmlns:a16="http://schemas.microsoft.com/office/drawing/2014/main" id="{0DA9B2F5-DFAB-4818-8BD8-D94E18487A05}"/>
               </a:ext>
             </a:extLst>
           </p:cNvPr>
@@ -9777,7 +9777,7 @@
           <p:cNvPr id="2" name="s9-eyebrow">
             <a:extLst xmlns:a="http://schemas.openxmlformats.org/drawingml/2006/main">
               <a:ext uri="{FF2B5EF4-FFF2-40B4-BE49-F238E27FC236}">
-                <a16:creationId xmlns:a16="http://schemas.microsoft.com/office/drawing/2014/main" id="{4ECBFC5B-6A4B-4A97-BE53-CF44DE58596A}"/>
+                <a16:creationId xmlns:a16="http://schemas.microsoft.com/office/drawing/2014/main" id="{444EDB78-DFA6-4640-B000-E8A3456FB104}"/>
               </a:ext>
             </a:extLst>
           </p:cNvPr>
@@ -9835,7 +9835,7 @@
           <p:cNvPr id="3" name="s9-title">
             <a:extLst xmlns:a="http://schemas.openxmlformats.org/drawingml/2006/main">
               <a:ext uri="{FF2B5EF4-FFF2-40B4-BE49-F238E27FC236}">
-                <a16:creationId xmlns:a16="http://schemas.microsoft.com/office/drawing/2014/main" id="{5FD477CE-E09E-45DD-8F6C-FF093C43A7C1}"/>
+                <a16:creationId xmlns:a16="http://schemas.microsoft.com/office/drawing/2014/main" id="{18961371-15D0-4CA2-901A-B8A08FC51E92}"/>
               </a:ext>
             </a:extLst>
           </p:cNvPr>
@@ -9893,7 +9893,7 @@
           <p:cNvPr id="4" name="s9-footer">
             <a:extLst xmlns:a="http://schemas.openxmlformats.org/drawingml/2006/main">
               <a:ext uri="{FF2B5EF4-FFF2-40B4-BE49-F238E27FC236}">
-                <a16:creationId xmlns:a16="http://schemas.microsoft.com/office/drawing/2014/main" id="{EE1B011A-588F-475D-A514-852BC748620A}"/>
+                <a16:creationId xmlns:a16="http://schemas.microsoft.com/office/drawing/2014/main" id="{B6767D27-660E-4A50-B922-442A89F7C88D}"/>
               </a:ext>
             </a:extLst>
           </p:cNvPr>
@@ -9924,7 +9924,7 @@
           <p:cNvPr id="5" name="s9-identity">
             <a:extLst xmlns:a="http://schemas.openxmlformats.org/drawingml/2006/main">
               <a:ext uri="{FF2B5EF4-FFF2-40B4-BE49-F238E27FC236}">
-                <a16:creationId xmlns:a16="http://schemas.microsoft.com/office/drawing/2014/main" id="{B61E00BF-D9AB-410C-AC30-09779AD9C3FC}"/>
+                <a16:creationId xmlns:a16="http://schemas.microsoft.com/office/drawing/2014/main" id="{7E0E6904-F915-44FF-8E5D-10BF7FCFAA94}"/>
               </a:ext>
             </a:extLst>
           </p:cNvPr>
@@ -9982,7 +9982,7 @@
           <p:cNvPr id="6" name="core-no-0">
             <a:extLst xmlns:a="http://schemas.openxmlformats.org/drawingml/2006/main">
               <a:ext uri="{FF2B5EF4-FFF2-40B4-BE49-F238E27FC236}">
-                <a16:creationId xmlns:a16="http://schemas.microsoft.com/office/drawing/2014/main" id="{3AD46BFD-73CF-4B48-B23A-CBC8205E1692}"/>
+                <a16:creationId xmlns:a16="http://schemas.microsoft.com/office/drawing/2014/main" id="{9C729C8A-C53A-4595-9177-A5B1DBCB451F}"/>
               </a:ext>
             </a:extLst>
           </p:cNvPr>
@@ -10040,7 +10040,7 @@
           <p:cNvPr id="7" name="core-label-0">
             <a:extLst xmlns:a="http://schemas.openxmlformats.org/drawingml/2006/main">
               <a:ext uri="{FF2B5EF4-FFF2-40B4-BE49-F238E27FC236}">
-                <a16:creationId xmlns:a16="http://schemas.microsoft.com/office/drawing/2014/main" id="{854C91F2-53C1-499F-A0A6-E153FBB147F8}"/>
+                <a16:creationId xmlns:a16="http://schemas.microsoft.com/office/drawing/2014/main" id="{E4D8C2EA-B160-4436-BE33-9DB4A699155E}"/>
               </a:ext>
             </a:extLst>
           </p:cNvPr>
@@ -10098,7 +10098,7 @@
           <p:cNvPr id="8" name="core-body-0">
             <a:extLst xmlns:a="http://schemas.openxmlformats.org/drawingml/2006/main">
               <a:ext uri="{FF2B5EF4-FFF2-40B4-BE49-F238E27FC236}">
-                <a16:creationId xmlns:a16="http://schemas.microsoft.com/office/drawing/2014/main" id="{366433E9-CD6E-4422-8A1D-12C7D36E3757}"/>
+                <a16:creationId xmlns:a16="http://schemas.microsoft.com/office/drawing/2014/main" id="{035EE61D-3EDF-4DE9-8C70-09998C0D0179}"/>
               </a:ext>
             </a:extLst>
           </p:cNvPr>
@@ -10162,7 +10162,7 @@
           <p:cNvPr id="9" name="core-no-1">
             <a:extLst xmlns:a="http://schemas.openxmlformats.org/drawingml/2006/main">
               <a:ext uri="{FF2B5EF4-FFF2-40B4-BE49-F238E27FC236}">
-                <a16:creationId xmlns:a16="http://schemas.microsoft.com/office/drawing/2014/main" id="{E043D68A-DB26-48AA-919A-8C62B0825783}"/>
+                <a16:creationId xmlns:a16="http://schemas.microsoft.com/office/drawing/2014/main" id="{B4C50BCD-C125-4053-9F2B-06C8C5D09D29}"/>
               </a:ext>
             </a:extLst>
           </p:cNvPr>
@@ -10220,7 +10220,7 @@
           <p:cNvPr id="10" name="core-body-1">
             <a:extLst xmlns:a="http://schemas.openxmlformats.org/drawingml/2006/main">
               <a:ext uri="{FF2B5EF4-FFF2-40B4-BE49-F238E27FC236}">
-                <a16:creationId xmlns:a16="http://schemas.microsoft.com/office/drawing/2014/main" id="{4FC823ED-890A-4B47-8AC2-0F2F9E38D3C8}"/>
+                <a16:creationId xmlns:a16="http://schemas.microsoft.com/office/drawing/2014/main" id="{97611479-0609-4834-AD03-16AA083299FD}"/>
               </a:ext>
             </a:extLst>
           </p:cNvPr>
@@ -10284,7 +10284,7 @@
           <p:cNvPr id="11" name="s9-takeaway-rule">
             <a:extLst xmlns:a="http://schemas.openxmlformats.org/drawingml/2006/main">
               <a:ext uri="{FF2B5EF4-FFF2-40B4-BE49-F238E27FC236}">
-                <a16:creationId xmlns:a16="http://schemas.microsoft.com/office/drawing/2014/main" id="{AC57DEDD-80B0-4784-A34E-36387F5365CE}"/>
+                <a16:creationId xmlns:a16="http://schemas.microsoft.com/office/drawing/2014/main" id="{D61A4DE3-762B-4306-B4B2-50F2F32653AF}"/>
               </a:ext>
             </a:extLst>
           </p:cNvPr>
@@ -10317,7 +10317,7 @@
           <p:cNvPr id="12" name="s9-takeaway">
             <a:extLst xmlns:a="http://schemas.openxmlformats.org/drawingml/2006/main">
               <a:ext uri="{FF2B5EF4-FFF2-40B4-BE49-F238E27FC236}">
-                <a16:creationId xmlns:a16="http://schemas.microsoft.com/office/drawing/2014/main" id="{0E526CFD-D3FD-4F75-82AD-52BB6B76FB7D}"/>
+                <a16:creationId xmlns:a16="http://schemas.microsoft.com/office/drawing/2014/main" id="{54B23D1C-302C-47B8-882F-465267E848AD}"/>
               </a:ext>
             </a:extLst>
           </p:cNvPr>
@@ -10373,7 +10373,7 @@
     </p:spTree>
     <p:extLst>
       <p:ext uri="{BB962C8B-B14F-4D97-AF65-F5344CB8AC3E}">
-        <p14:creationId xmlns:p14="http://schemas.microsoft.com/office/powerpoint/2010/main" val="565987112"/>
+        <p14:creationId xmlns:p14="http://schemas.microsoft.com/office/powerpoint/2010/main" val="2061547061"/>
       </p:ext>
     </p:extLst>
   </p:cSld>

--- a/docs/public/course-assets/course-pptx/em-002.pptx
+++ b/docs/public/course-assets/course-pptx/em-002.pptx
@@ -2,25 +2,25 @@
 <file path=ppt/presentation.xml><?xml version="1.0" encoding="utf-8"?>
 <p:presentation xmlns:p="http://schemas.openxmlformats.org/presentationml/2006/main">
   <p:sldMasterIdLst>
-    <p:sldMasterId xmlns:r="http://schemas.openxmlformats.org/officeDocument/2006/relationships" id="2147483648" r:id="Rb4148ce171604629"/>
+    <p:sldMasterId xmlns:r="http://schemas.openxmlformats.org/officeDocument/2006/relationships" id="2147483648" r:id="R0e31a95f768d4229"/>
   </p:sldMasterIdLst>
   <p:notesMasterIdLst>
-    <p:notesMasterId xmlns:r="http://schemas.openxmlformats.org/officeDocument/2006/relationships" r:id="R1cf6592aef604a6e"/>
+    <p:notesMasterId xmlns:r="http://schemas.openxmlformats.org/officeDocument/2006/relationships" r:id="Rdd0cdbe13f7045c0"/>
   </p:notesMasterIdLst>
   <p:sldIdLst>
-    <p:sldId xmlns:r="http://schemas.openxmlformats.org/officeDocument/2006/relationships" id="256" r:id="R2066e5bcd8b346e4"/>
-    <p:sldId xmlns:r="http://schemas.openxmlformats.org/officeDocument/2006/relationships" id="257" r:id="Rda3a3dd9921941d1"/>
-    <p:sldId xmlns:r="http://schemas.openxmlformats.org/officeDocument/2006/relationships" id="258" r:id="Rcf82910775444ce2"/>
-    <p:sldId xmlns:r="http://schemas.openxmlformats.org/officeDocument/2006/relationships" id="259" r:id="R9c54dd8194684343"/>
-    <p:sldId xmlns:r="http://schemas.openxmlformats.org/officeDocument/2006/relationships" id="260" r:id="Ree2d76b16333449e"/>
-    <p:sldId xmlns:r="http://schemas.openxmlformats.org/officeDocument/2006/relationships" id="261" r:id="R685e4917204c4deb"/>
-    <p:sldId xmlns:r="http://schemas.openxmlformats.org/officeDocument/2006/relationships" id="262" r:id="R2f0b85f37f454776"/>
-    <p:sldId xmlns:r="http://schemas.openxmlformats.org/officeDocument/2006/relationships" id="263" r:id="R7affd01558644703"/>
-    <p:sldId xmlns:r="http://schemas.openxmlformats.org/officeDocument/2006/relationships" id="264" r:id="R953f23f4cdcb407a"/>
-    <p:sldId xmlns:r="http://schemas.openxmlformats.org/officeDocument/2006/relationships" id="265" r:id="R9cb555aee1ac4188"/>
-    <p:sldId xmlns:r="http://schemas.openxmlformats.org/officeDocument/2006/relationships" id="266" r:id="Rc4ee3f5510e64b6e"/>
-    <p:sldId xmlns:r="http://schemas.openxmlformats.org/officeDocument/2006/relationships" id="267" r:id="R74f213d084224ec7"/>
-    <p:sldId xmlns:r="http://schemas.openxmlformats.org/officeDocument/2006/relationships" id="268" r:id="R9bc879ed72cc45eb"/>
+    <p:sldId xmlns:r="http://schemas.openxmlformats.org/officeDocument/2006/relationships" id="256" r:id="R3867ede54ef44f5b"/>
+    <p:sldId xmlns:r="http://schemas.openxmlformats.org/officeDocument/2006/relationships" id="257" r:id="R5ae023390bba4605"/>
+    <p:sldId xmlns:r="http://schemas.openxmlformats.org/officeDocument/2006/relationships" id="258" r:id="Rf68a111261c24f17"/>
+    <p:sldId xmlns:r="http://schemas.openxmlformats.org/officeDocument/2006/relationships" id="259" r:id="R69f755f3ad5f4b73"/>
+    <p:sldId xmlns:r="http://schemas.openxmlformats.org/officeDocument/2006/relationships" id="260" r:id="R24ae9bb6e2fd4a75"/>
+    <p:sldId xmlns:r="http://schemas.openxmlformats.org/officeDocument/2006/relationships" id="261" r:id="Rd91ce11050bc4654"/>
+    <p:sldId xmlns:r="http://schemas.openxmlformats.org/officeDocument/2006/relationships" id="262" r:id="Rb8de3a4b0bb24975"/>
+    <p:sldId xmlns:r="http://schemas.openxmlformats.org/officeDocument/2006/relationships" id="263" r:id="R724cdf73257a4b5c"/>
+    <p:sldId xmlns:r="http://schemas.openxmlformats.org/officeDocument/2006/relationships" id="264" r:id="Re9e6ad0a877c4f90"/>
+    <p:sldId xmlns:r="http://schemas.openxmlformats.org/officeDocument/2006/relationships" id="265" r:id="Ra93674476ab14dee"/>
+    <p:sldId xmlns:r="http://schemas.openxmlformats.org/officeDocument/2006/relationships" id="266" r:id="Rb738e49f40af442b"/>
+    <p:sldId xmlns:r="http://schemas.openxmlformats.org/officeDocument/2006/relationships" id="267" r:id="Rce19bfcfc6a345f1"/>
+    <p:sldId xmlns:r="http://schemas.openxmlformats.org/officeDocument/2006/relationships" id="268" r:id="R860a45df61c749eb"/>
   </p:sldIdLst>
   <p:sldSz cx="12192000" cy="6858000"/>
   <p:notesSz cx="6858000" cy="9144000"/>
@@ -1405,7 +1405,7 @@
   </p:cSld>
   <p:clrMap bg1="lt1" tx1="dk1" bg2="lt2" tx2="dk2" accent1="accent1" accent2="accent2" accent3="accent3" accent4="accent4" accent5="accent5" accent6="accent6" hlink="hlink" folHlink="folHlink"/>
   <p:sldLayoutIdLst>
-    <p:sldLayoutId xmlns:r="http://schemas.openxmlformats.org/officeDocument/2006/relationships" id="2147483649" r:id="R2e472a04b8784b9f"/>
+    <p:sldLayoutId xmlns:r="http://schemas.openxmlformats.org/officeDocument/2006/relationships" id="2147483649" r:id="Rc828172f3d0e4d1d"/>
   </p:sldLayoutIdLst>
   <p:txStyles>
     <p:titleStyle>
@@ -1956,7 +1956,7 @@
           <p:cNvPr id="1" name="cover-rule">
             <a:extLst xmlns:a="http://schemas.openxmlformats.org/drawingml/2006/main">
               <a:ext uri="{FF2B5EF4-FFF2-40B4-BE49-F238E27FC236}">
-                <a16:creationId xmlns:a16="http://schemas.microsoft.com/office/drawing/2014/main" id="{BBFA525B-265B-4D09-A2B9-2F2F5D00F8A2}"/>
+                <a16:creationId xmlns:a16="http://schemas.microsoft.com/office/drawing/2014/main" id="{9A30033E-B993-405A-9ED3-ACE7DFA49AB3}"/>
               </a:ext>
             </a:extLst>
           </p:cNvPr>
@@ -1989,7 +1989,7 @@
           <p:cNvPr id="2" name="cover-ring-1">
             <a:extLst xmlns:a="http://schemas.openxmlformats.org/drawingml/2006/main">
               <a:ext uri="{FF2B5EF4-FFF2-40B4-BE49-F238E27FC236}">
-                <a16:creationId xmlns:a16="http://schemas.microsoft.com/office/drawing/2014/main" id="{FE75BD3A-1E7D-4981-94A1-A2EE2FCB79CE}"/>
+                <a16:creationId xmlns:a16="http://schemas.microsoft.com/office/drawing/2014/main" id="{883935E7-FF5A-41C6-9C3C-1BDCF15EBA2E}"/>
               </a:ext>
             </a:extLst>
           </p:cNvPr>
@@ -2020,7 +2020,7 @@
           <p:cNvPr id="3" name="cover-ring-2">
             <a:extLst xmlns:a="http://schemas.openxmlformats.org/drawingml/2006/main">
               <a:ext uri="{FF2B5EF4-FFF2-40B4-BE49-F238E27FC236}">
-                <a16:creationId xmlns:a16="http://schemas.microsoft.com/office/drawing/2014/main" id="{37873D8A-FA6A-439C-A41E-285AF0C786C9}"/>
+                <a16:creationId xmlns:a16="http://schemas.microsoft.com/office/drawing/2014/main" id="{27F44E45-1E1D-4CC7-A4EA-72CC2CF1D5C1}"/>
               </a:ext>
             </a:extLst>
           </p:cNvPr>
@@ -2051,7 +2051,7 @@
           <p:cNvPr id="4" name="cover-core">
             <a:extLst xmlns:a="http://schemas.openxmlformats.org/drawingml/2006/main">
               <a:ext uri="{FF2B5EF4-FFF2-40B4-BE49-F238E27FC236}">
-                <a16:creationId xmlns:a16="http://schemas.microsoft.com/office/drawing/2014/main" id="{190E3DA5-AE7F-4F69-AF15-2ADABD2A4CFF}"/>
+                <a16:creationId xmlns:a16="http://schemas.microsoft.com/office/drawing/2014/main" id="{5D8C62FA-AD1D-4190-9923-248729B9BCD5}"/>
               </a:ext>
             </a:extLst>
           </p:cNvPr>
@@ -2084,7 +2084,7 @@
           <p:cNvPr id="5" name="cover-line-1">
             <a:extLst xmlns:a="http://schemas.openxmlformats.org/drawingml/2006/main">
               <a:ext uri="{FF2B5EF4-FFF2-40B4-BE49-F238E27FC236}">
-                <a16:creationId xmlns:a16="http://schemas.microsoft.com/office/drawing/2014/main" id="{59DFAF1E-8857-40E0-BDD7-FDE8DDB4154B}"/>
+                <a16:creationId xmlns:a16="http://schemas.microsoft.com/office/drawing/2014/main" id="{0DB81F2A-F1B1-4AE9-8A6F-9F3C77838118}"/>
               </a:ext>
             </a:extLst>
           </p:cNvPr>
@@ -2115,7 +2115,7 @@
           <p:cNvPr id="6" name="cover-line-2">
             <a:extLst xmlns:a="http://schemas.openxmlformats.org/drawingml/2006/main">
               <a:ext uri="{FF2B5EF4-FFF2-40B4-BE49-F238E27FC236}">
-                <a16:creationId xmlns:a16="http://schemas.microsoft.com/office/drawing/2014/main" id="{A4CE93E6-3C69-4A8D-9FB0-A9986CA447C8}"/>
+                <a16:creationId xmlns:a16="http://schemas.microsoft.com/office/drawing/2014/main" id="{492AB320-D85B-419E-864A-2DE83758878B}"/>
               </a:ext>
             </a:extLst>
           </p:cNvPr>
@@ -2146,7 +2146,7 @@
           <p:cNvPr id="7" name="cover-eyebrow">
             <a:extLst xmlns:a="http://schemas.openxmlformats.org/drawingml/2006/main">
               <a:ext uri="{FF2B5EF4-FFF2-40B4-BE49-F238E27FC236}">
-                <a16:creationId xmlns:a16="http://schemas.microsoft.com/office/drawing/2014/main" id="{87E5DE7C-94FF-4F75-ABB4-B4F5F60E1493}"/>
+                <a16:creationId xmlns:a16="http://schemas.microsoft.com/office/drawing/2014/main" id="{3F38E655-4054-4E41-B2B3-E45685631124}"/>
               </a:ext>
             </a:extLst>
           </p:cNvPr>
@@ -2204,7 +2204,7 @@
           <p:cNvPr id="8" name="cover-title">
             <a:extLst xmlns:a="http://schemas.openxmlformats.org/drawingml/2006/main">
               <a:ext uri="{FF2B5EF4-FFF2-40B4-BE49-F238E27FC236}">
-                <a16:creationId xmlns:a16="http://schemas.microsoft.com/office/drawing/2014/main" id="{C198B643-EAE0-4494-9D49-7251B8EFA8CC}"/>
+                <a16:creationId xmlns:a16="http://schemas.microsoft.com/office/drawing/2014/main" id="{AA10C3E8-7701-4550-9691-2FD7765BE4ED}"/>
               </a:ext>
             </a:extLst>
           </p:cNvPr>
@@ -2262,7 +2262,7 @@
           <p:cNvPr id="9" name="cover-subtitle">
             <a:extLst xmlns:a="http://schemas.openxmlformats.org/drawingml/2006/main">
               <a:ext uri="{FF2B5EF4-FFF2-40B4-BE49-F238E27FC236}">
-                <a16:creationId xmlns:a16="http://schemas.microsoft.com/office/drawing/2014/main" id="{85EAD7EE-4744-4E19-9A35-4665AAFA075B}"/>
+                <a16:creationId xmlns:a16="http://schemas.microsoft.com/office/drawing/2014/main" id="{7BFB4C75-92A9-4324-9A90-0DAE34BB57A5}"/>
               </a:ext>
             </a:extLst>
           </p:cNvPr>
@@ -2324,7 +2324,7 @@
           <p:cNvPr id="10" name="cover-lead">
             <a:extLst xmlns:a="http://schemas.openxmlformats.org/drawingml/2006/main">
               <a:ext uri="{FF2B5EF4-FFF2-40B4-BE49-F238E27FC236}">
-                <a16:creationId xmlns:a16="http://schemas.microsoft.com/office/drawing/2014/main" id="{2F59CC0E-6CAB-46E4-A4F6-5028924478E4}"/>
+                <a16:creationId xmlns:a16="http://schemas.microsoft.com/office/drawing/2014/main" id="{7B1EC43E-576B-45A9-AC3D-667FAD345F51}"/>
               </a:ext>
             </a:extLst>
           </p:cNvPr>
@@ -2382,7 +2382,7 @@
           <p:cNvPr id="11" name="cover-course">
             <a:extLst xmlns:a="http://schemas.openxmlformats.org/drawingml/2006/main">
               <a:ext uri="{FF2B5EF4-FFF2-40B4-BE49-F238E27FC236}">
-                <a16:creationId xmlns:a16="http://schemas.microsoft.com/office/drawing/2014/main" id="{9A429B48-6464-4D33-B3D5-D4A2C71DA0C0}"/>
+                <a16:creationId xmlns:a16="http://schemas.microsoft.com/office/drawing/2014/main" id="{A62B1F98-78F5-4950-A8A0-4FC8E55F6835}"/>
               </a:ext>
             </a:extLst>
           </p:cNvPr>
@@ -2440,7 +2440,7 @@
           <p:cNvPr id="12" name="cover-id">
             <a:extLst xmlns:a="http://schemas.openxmlformats.org/drawingml/2006/main">
               <a:ext uri="{FF2B5EF4-FFF2-40B4-BE49-F238E27FC236}">
-                <a16:creationId xmlns:a16="http://schemas.microsoft.com/office/drawing/2014/main" id="{50E4BAA3-5EFF-40AD-BCA4-4773710D1D41}"/>
+                <a16:creationId xmlns:a16="http://schemas.microsoft.com/office/drawing/2014/main" id="{7BB97CF1-4C3B-423A-923D-2CA7FB309583}"/>
               </a:ext>
             </a:extLst>
           </p:cNvPr>
@@ -2496,7 +2496,7 @@
     </p:spTree>
     <p:extLst>
       <p:ext uri="{BB962C8B-B14F-4D97-AF65-F5344CB8AC3E}">
-        <p14:creationId xmlns:p14="http://schemas.microsoft.com/office/powerpoint/2010/main" val="254295720"/>
+        <p14:creationId xmlns:p14="http://schemas.microsoft.com/office/powerpoint/2010/main" val="177937865"/>
       </p:ext>
     </p:extLst>
   </p:cSld>
@@ -2527,7 +2527,7 @@
           <p:cNvPr id="1" name="s10-rule">
             <a:extLst xmlns:a="http://schemas.openxmlformats.org/drawingml/2006/main">
               <a:ext uri="{FF2B5EF4-FFF2-40B4-BE49-F238E27FC236}">
-                <a16:creationId xmlns:a16="http://schemas.microsoft.com/office/drawing/2014/main" id="{5A71865A-2782-4D8A-A5C5-2D6C5D482693}"/>
+                <a16:creationId xmlns:a16="http://schemas.microsoft.com/office/drawing/2014/main" id="{BF6256B8-D2A7-4FE1-93B2-3CEBC39A21DE}"/>
               </a:ext>
             </a:extLst>
           </p:cNvPr>
@@ -2560,7 +2560,7 @@
           <p:cNvPr id="2" name="s10-eyebrow">
             <a:extLst xmlns:a="http://schemas.openxmlformats.org/drawingml/2006/main">
               <a:ext uri="{FF2B5EF4-FFF2-40B4-BE49-F238E27FC236}">
-                <a16:creationId xmlns:a16="http://schemas.microsoft.com/office/drawing/2014/main" id="{B7B6AFF4-E85D-4BD6-B157-7EB3B6FD7DDC}"/>
+                <a16:creationId xmlns:a16="http://schemas.microsoft.com/office/drawing/2014/main" id="{17B3128D-3D7D-4E74-A752-79F6BD4282EE}"/>
               </a:ext>
             </a:extLst>
           </p:cNvPr>
@@ -2618,7 +2618,7 @@
           <p:cNvPr id="3" name="s10-title">
             <a:extLst xmlns:a="http://schemas.openxmlformats.org/drawingml/2006/main">
               <a:ext uri="{FF2B5EF4-FFF2-40B4-BE49-F238E27FC236}">
-                <a16:creationId xmlns:a16="http://schemas.microsoft.com/office/drawing/2014/main" id="{31EA0C7A-E71F-4122-A153-C2B73F46D6A7}"/>
+                <a16:creationId xmlns:a16="http://schemas.microsoft.com/office/drawing/2014/main" id="{1E6A68E1-305E-443C-A713-AA396C1D6E3D}"/>
               </a:ext>
             </a:extLst>
           </p:cNvPr>
@@ -2676,7 +2676,7 @@
           <p:cNvPr id="4" name="s10-footer">
             <a:extLst xmlns:a="http://schemas.openxmlformats.org/drawingml/2006/main">
               <a:ext uri="{FF2B5EF4-FFF2-40B4-BE49-F238E27FC236}">
-                <a16:creationId xmlns:a16="http://schemas.microsoft.com/office/drawing/2014/main" id="{B03E3727-DC86-4217-B64F-464D55615A04}"/>
+                <a16:creationId xmlns:a16="http://schemas.microsoft.com/office/drawing/2014/main" id="{F500CFB0-E37B-463F-99A1-BE54AC905763}"/>
               </a:ext>
             </a:extLst>
           </p:cNvPr>
@@ -2707,7 +2707,7 @@
           <p:cNvPr id="5" name="s10-identity">
             <a:extLst xmlns:a="http://schemas.openxmlformats.org/drawingml/2006/main">
               <a:ext uri="{FF2B5EF4-FFF2-40B4-BE49-F238E27FC236}">
-                <a16:creationId xmlns:a16="http://schemas.microsoft.com/office/drawing/2014/main" id="{B7714EAD-3EC6-486E-B3EF-A8FA4EE31804}"/>
+                <a16:creationId xmlns:a16="http://schemas.microsoft.com/office/drawing/2014/main" id="{A6063ABD-12E7-4A8E-B230-A0BEA46EB5F4}"/>
               </a:ext>
             </a:extLst>
           </p:cNvPr>
@@ -2765,7 +2765,7 @@
           <p:cNvPr id="6" name="case-title">
             <a:extLst xmlns:a="http://schemas.openxmlformats.org/drawingml/2006/main">
               <a:ext uri="{FF2B5EF4-FFF2-40B4-BE49-F238E27FC236}">
-                <a16:creationId xmlns:a16="http://schemas.microsoft.com/office/drawing/2014/main" id="{F6C9AB12-34B9-48C2-83E2-918402339265}"/>
+                <a16:creationId xmlns:a16="http://schemas.microsoft.com/office/drawing/2014/main" id="{CB1E8E73-D3A2-4599-831B-0F277F0874FF}"/>
               </a:ext>
             </a:extLst>
           </p:cNvPr>
@@ -2829,7 +2829,7 @@
           <p:cNvPr id="7" name="case-row-0">
             <a:extLst xmlns:a="http://schemas.openxmlformats.org/drawingml/2006/main">
               <a:ext uri="{FF2B5EF4-FFF2-40B4-BE49-F238E27FC236}">
-                <a16:creationId xmlns:a16="http://schemas.microsoft.com/office/drawing/2014/main" id="{698151C1-4FBA-40E7-ACB6-75BFA17AFC8F}"/>
+                <a16:creationId xmlns:a16="http://schemas.microsoft.com/office/drawing/2014/main" id="{52379506-E2FD-497E-8B76-CF5F254660F9}"/>
               </a:ext>
             </a:extLst>
           </p:cNvPr>
@@ -2893,7 +2893,7 @@
           <p:cNvPr id="8" name="case-row-1">
             <a:extLst xmlns:a="http://schemas.openxmlformats.org/drawingml/2006/main">
               <a:ext uri="{FF2B5EF4-FFF2-40B4-BE49-F238E27FC236}">
-                <a16:creationId xmlns:a16="http://schemas.microsoft.com/office/drawing/2014/main" id="{26C92573-4124-41C8-BE4A-7257B5D35239}"/>
+                <a16:creationId xmlns:a16="http://schemas.microsoft.com/office/drawing/2014/main" id="{C8C82940-BF4C-414E-A216-E374E45BEAAD}"/>
               </a:ext>
             </a:extLst>
           </p:cNvPr>
@@ -2957,7 +2957,7 @@
           <p:cNvPr id="9" name="case-row-2">
             <a:extLst xmlns:a="http://schemas.openxmlformats.org/drawingml/2006/main">
               <a:ext uri="{FF2B5EF4-FFF2-40B4-BE49-F238E27FC236}">
-                <a16:creationId xmlns:a16="http://schemas.microsoft.com/office/drawing/2014/main" id="{8D93089C-57DA-4623-B67B-CC39829418D2}"/>
+                <a16:creationId xmlns:a16="http://schemas.microsoft.com/office/drawing/2014/main" id="{F3B03CE4-46CE-4482-A9DA-33093B694138}"/>
               </a:ext>
             </a:extLst>
           </p:cNvPr>
@@ -3021,7 +3021,7 @@
           <p:cNvPr id="10" name="case-row-3">
             <a:extLst xmlns:a="http://schemas.openxmlformats.org/drawingml/2006/main">
               <a:ext uri="{FF2B5EF4-FFF2-40B4-BE49-F238E27FC236}">
-                <a16:creationId xmlns:a16="http://schemas.microsoft.com/office/drawing/2014/main" id="{B4866148-762F-44A9-AC74-3C898D820204}"/>
+                <a16:creationId xmlns:a16="http://schemas.microsoft.com/office/drawing/2014/main" id="{8349AE5E-2F66-434A-BCAC-3A9D6D0FC3DE}"/>
               </a:ext>
             </a:extLst>
           </p:cNvPr>
@@ -3085,7 +3085,7 @@
           <p:cNvPr id="11" name="case-row-4">
             <a:extLst xmlns:a="http://schemas.openxmlformats.org/drawingml/2006/main">
               <a:ext uri="{FF2B5EF4-FFF2-40B4-BE49-F238E27FC236}">
-                <a16:creationId xmlns:a16="http://schemas.microsoft.com/office/drawing/2014/main" id="{8107276D-4A64-4422-A15D-42AA2641604A}"/>
+                <a16:creationId xmlns:a16="http://schemas.microsoft.com/office/drawing/2014/main" id="{E0D19AB2-FB53-4FF3-A3E1-2AD50593C208}"/>
               </a:ext>
             </a:extLst>
           </p:cNvPr>
@@ -3149,7 +3149,7 @@
           <p:cNvPr id="12" name="s10-takeaway-rule">
             <a:extLst xmlns:a="http://schemas.openxmlformats.org/drawingml/2006/main">
               <a:ext uri="{FF2B5EF4-FFF2-40B4-BE49-F238E27FC236}">
-                <a16:creationId xmlns:a16="http://schemas.microsoft.com/office/drawing/2014/main" id="{0D04FF1F-4453-404F-B7C9-31F778B43A2B}"/>
+                <a16:creationId xmlns:a16="http://schemas.microsoft.com/office/drawing/2014/main" id="{64E80E6C-2EE1-4E02-B696-726DE9C46C7C}"/>
               </a:ext>
             </a:extLst>
           </p:cNvPr>
@@ -3182,7 +3182,7 @@
           <p:cNvPr id="13" name="s10-takeaway">
             <a:extLst xmlns:a="http://schemas.openxmlformats.org/drawingml/2006/main">
               <a:ext uri="{FF2B5EF4-FFF2-40B4-BE49-F238E27FC236}">
-                <a16:creationId xmlns:a16="http://schemas.microsoft.com/office/drawing/2014/main" id="{C76894D1-1E98-4AE7-8DBA-DEFA2453A6FF}"/>
+                <a16:creationId xmlns:a16="http://schemas.microsoft.com/office/drawing/2014/main" id="{A76F12F2-3562-4DAC-9FA3-0D92E0DE6A9C}"/>
               </a:ext>
             </a:extLst>
           </p:cNvPr>
@@ -3238,7 +3238,7 @@
     </p:spTree>
     <p:extLst>
       <p:ext uri="{BB962C8B-B14F-4D97-AF65-F5344CB8AC3E}">
-        <p14:creationId xmlns:p14="http://schemas.microsoft.com/office/powerpoint/2010/main" val="654176262"/>
+        <p14:creationId xmlns:p14="http://schemas.microsoft.com/office/powerpoint/2010/main" val="1293680185"/>
       </p:ext>
     </p:extLst>
   </p:cSld>
@@ -3269,7 +3269,7 @@
           <p:cNvPr id="1" name="s11-rule">
             <a:extLst xmlns:a="http://schemas.openxmlformats.org/drawingml/2006/main">
               <a:ext uri="{FF2B5EF4-FFF2-40B4-BE49-F238E27FC236}">
-                <a16:creationId xmlns:a16="http://schemas.microsoft.com/office/drawing/2014/main" id="{F4ACAE14-DACB-4AE9-969E-9B314A5C4CAF}"/>
+                <a16:creationId xmlns:a16="http://schemas.microsoft.com/office/drawing/2014/main" id="{626EE6EB-916C-40AD-A58B-4C68E4210D66}"/>
               </a:ext>
             </a:extLst>
           </p:cNvPr>
@@ -3302,7 +3302,7 @@
           <p:cNvPr id="2" name="s11-eyebrow">
             <a:extLst xmlns:a="http://schemas.openxmlformats.org/drawingml/2006/main">
               <a:ext uri="{FF2B5EF4-FFF2-40B4-BE49-F238E27FC236}">
-                <a16:creationId xmlns:a16="http://schemas.microsoft.com/office/drawing/2014/main" id="{A0272040-0459-43BA-BD64-06BFDC59A098}"/>
+                <a16:creationId xmlns:a16="http://schemas.microsoft.com/office/drawing/2014/main" id="{FB96D3ED-A0DC-46B5-B96B-93F1CCFE4B53}"/>
               </a:ext>
             </a:extLst>
           </p:cNvPr>
@@ -3360,7 +3360,7 @@
           <p:cNvPr id="3" name="s11-title">
             <a:extLst xmlns:a="http://schemas.openxmlformats.org/drawingml/2006/main">
               <a:ext uri="{FF2B5EF4-FFF2-40B4-BE49-F238E27FC236}">
-                <a16:creationId xmlns:a16="http://schemas.microsoft.com/office/drawing/2014/main" id="{51CF4D18-FC1A-44B3-AF37-03316285D351}"/>
+                <a16:creationId xmlns:a16="http://schemas.microsoft.com/office/drawing/2014/main" id="{6DD94FCB-EE34-4F9E-BFB7-BF65E46C39D3}"/>
               </a:ext>
             </a:extLst>
           </p:cNvPr>
@@ -3418,7 +3418,7 @@
           <p:cNvPr id="4" name="s11-footer">
             <a:extLst xmlns:a="http://schemas.openxmlformats.org/drawingml/2006/main">
               <a:ext uri="{FF2B5EF4-FFF2-40B4-BE49-F238E27FC236}">
-                <a16:creationId xmlns:a16="http://schemas.microsoft.com/office/drawing/2014/main" id="{A1F12CA2-5312-43E8-8088-2FDF72AEE172}"/>
+                <a16:creationId xmlns:a16="http://schemas.microsoft.com/office/drawing/2014/main" id="{CADE0CC8-A5C9-4AC9-B5F3-EFC00005E391}"/>
               </a:ext>
             </a:extLst>
           </p:cNvPr>
@@ -3449,7 +3449,7 @@
           <p:cNvPr id="5" name="s11-identity">
             <a:extLst xmlns:a="http://schemas.openxmlformats.org/drawingml/2006/main">
               <a:ext uri="{FF2B5EF4-FFF2-40B4-BE49-F238E27FC236}">
-                <a16:creationId xmlns:a16="http://schemas.microsoft.com/office/drawing/2014/main" id="{C5AA3366-8F59-4810-9369-5BEA8C3525FB}"/>
+                <a16:creationId xmlns:a16="http://schemas.microsoft.com/office/drawing/2014/main" id="{DA8E10E2-16DC-4180-9D3F-CC1118691F31}"/>
               </a:ext>
             </a:extLst>
           </p:cNvPr>
@@ -3507,7 +3507,7 @@
           <p:cNvPr id="6" name="practice-circle-0">
             <a:extLst xmlns:a="http://schemas.openxmlformats.org/drawingml/2006/main">
               <a:ext uri="{FF2B5EF4-FFF2-40B4-BE49-F238E27FC236}">
-                <a16:creationId xmlns:a16="http://schemas.microsoft.com/office/drawing/2014/main" id="{4D085BC0-5002-4059-BD44-66478C5AFD3F}"/>
+                <a16:creationId xmlns:a16="http://schemas.microsoft.com/office/drawing/2014/main" id="{9EF01574-8209-461B-93E8-70896C4353A6}"/>
               </a:ext>
             </a:extLst>
           </p:cNvPr>
@@ -3540,7 +3540,7 @@
           <p:cNvPr id="7" name="practice-number-0">
             <a:extLst xmlns:a="http://schemas.openxmlformats.org/drawingml/2006/main">
               <a:ext uri="{FF2B5EF4-FFF2-40B4-BE49-F238E27FC236}">
-                <a16:creationId xmlns:a16="http://schemas.microsoft.com/office/drawing/2014/main" id="{BFA337D0-98E5-4D20-AE3C-9AF1BBD06AD5}"/>
+                <a16:creationId xmlns:a16="http://schemas.microsoft.com/office/drawing/2014/main" id="{9BAE6D98-0D1D-4CB2-9F57-745264717EDD}"/>
               </a:ext>
             </a:extLst>
           </p:cNvPr>
@@ -3598,7 +3598,7 @@
           <p:cNvPr id="8" name="practice-item-0">
             <a:extLst xmlns:a="http://schemas.openxmlformats.org/drawingml/2006/main">
               <a:ext uri="{FF2B5EF4-FFF2-40B4-BE49-F238E27FC236}">
-                <a16:creationId xmlns:a16="http://schemas.microsoft.com/office/drawing/2014/main" id="{42916A90-41D0-43A5-8E04-04F743E8C71F}"/>
+                <a16:creationId xmlns:a16="http://schemas.microsoft.com/office/drawing/2014/main" id="{2C640A84-4869-49A6-BC0B-3091EBD2ACD8}"/>
               </a:ext>
             </a:extLst>
           </p:cNvPr>
@@ -3662,7 +3662,7 @@
           <p:cNvPr id="9" name="practice-connector-0">
             <a:extLst xmlns:a="http://schemas.openxmlformats.org/drawingml/2006/main">
               <a:ext uri="{FF2B5EF4-FFF2-40B4-BE49-F238E27FC236}">
-                <a16:creationId xmlns:a16="http://schemas.microsoft.com/office/drawing/2014/main" id="{3AF05409-735C-43DE-BCBC-C5584137F2B6}"/>
+                <a16:creationId xmlns:a16="http://schemas.microsoft.com/office/drawing/2014/main" id="{0895BBBB-8B54-4E33-BD4C-E4BC1C75FE99}"/>
               </a:ext>
             </a:extLst>
           </p:cNvPr>
@@ -3693,7 +3693,7 @@
           <p:cNvPr id="10" name="practice-circle-1">
             <a:extLst xmlns:a="http://schemas.openxmlformats.org/drawingml/2006/main">
               <a:ext uri="{FF2B5EF4-FFF2-40B4-BE49-F238E27FC236}">
-                <a16:creationId xmlns:a16="http://schemas.microsoft.com/office/drawing/2014/main" id="{D80CEDA7-7A8B-4739-9840-D9919E26F6C1}"/>
+                <a16:creationId xmlns:a16="http://schemas.microsoft.com/office/drawing/2014/main" id="{EF96E69E-E74B-482E-A497-9185666230FC}"/>
               </a:ext>
             </a:extLst>
           </p:cNvPr>
@@ -3726,7 +3726,7 @@
           <p:cNvPr id="11" name="practice-number-1">
             <a:extLst xmlns:a="http://schemas.openxmlformats.org/drawingml/2006/main">
               <a:ext uri="{FF2B5EF4-FFF2-40B4-BE49-F238E27FC236}">
-                <a16:creationId xmlns:a16="http://schemas.microsoft.com/office/drawing/2014/main" id="{7CB53A12-BA82-4C0A-A9FB-FFFAFC5F9F5E}"/>
+                <a16:creationId xmlns:a16="http://schemas.microsoft.com/office/drawing/2014/main" id="{89D5FD3F-80AE-4974-BB29-A3FDCF6F3A26}"/>
               </a:ext>
             </a:extLst>
           </p:cNvPr>
@@ -3784,7 +3784,7 @@
           <p:cNvPr id="12" name="practice-item-1">
             <a:extLst xmlns:a="http://schemas.openxmlformats.org/drawingml/2006/main">
               <a:ext uri="{FF2B5EF4-FFF2-40B4-BE49-F238E27FC236}">
-                <a16:creationId xmlns:a16="http://schemas.microsoft.com/office/drawing/2014/main" id="{D96AE2AF-E43C-4FA4-A6A6-403B49F2C088}"/>
+                <a16:creationId xmlns:a16="http://schemas.microsoft.com/office/drawing/2014/main" id="{4DC45A1F-E6DF-475B-ABBD-CBDF8E57E515}"/>
               </a:ext>
             </a:extLst>
           </p:cNvPr>
@@ -3848,7 +3848,7 @@
           <p:cNvPr id="13" name="practice-connector-1">
             <a:extLst xmlns:a="http://schemas.openxmlformats.org/drawingml/2006/main">
               <a:ext uri="{FF2B5EF4-FFF2-40B4-BE49-F238E27FC236}">
-                <a16:creationId xmlns:a16="http://schemas.microsoft.com/office/drawing/2014/main" id="{C1CB29DA-1F91-46D6-8C1F-443F11250E94}"/>
+                <a16:creationId xmlns:a16="http://schemas.microsoft.com/office/drawing/2014/main" id="{5A7BCB90-2040-44C7-ABAF-379DD1993C22}"/>
               </a:ext>
             </a:extLst>
           </p:cNvPr>
@@ -3879,7 +3879,7 @@
           <p:cNvPr id="14" name="practice-circle-2">
             <a:extLst xmlns:a="http://schemas.openxmlformats.org/drawingml/2006/main">
               <a:ext uri="{FF2B5EF4-FFF2-40B4-BE49-F238E27FC236}">
-                <a16:creationId xmlns:a16="http://schemas.microsoft.com/office/drawing/2014/main" id="{F9444D7A-8116-4DE8-8477-63F0EC43D776}"/>
+                <a16:creationId xmlns:a16="http://schemas.microsoft.com/office/drawing/2014/main" id="{280F8CAA-6BB3-46F8-8274-0812AA4E9C65}"/>
               </a:ext>
             </a:extLst>
           </p:cNvPr>
@@ -3912,7 +3912,7 @@
           <p:cNvPr id="15" name="practice-number-2">
             <a:extLst xmlns:a="http://schemas.openxmlformats.org/drawingml/2006/main">
               <a:ext uri="{FF2B5EF4-FFF2-40B4-BE49-F238E27FC236}">
-                <a16:creationId xmlns:a16="http://schemas.microsoft.com/office/drawing/2014/main" id="{66905434-4964-4066-818A-580283144D1F}"/>
+                <a16:creationId xmlns:a16="http://schemas.microsoft.com/office/drawing/2014/main" id="{AFFB1FED-29FE-4236-B145-81BD97E2CCC5}"/>
               </a:ext>
             </a:extLst>
           </p:cNvPr>
@@ -3970,7 +3970,7 @@
           <p:cNvPr id="16" name="practice-item-2">
             <a:extLst xmlns:a="http://schemas.openxmlformats.org/drawingml/2006/main">
               <a:ext uri="{FF2B5EF4-FFF2-40B4-BE49-F238E27FC236}">
-                <a16:creationId xmlns:a16="http://schemas.microsoft.com/office/drawing/2014/main" id="{D9BD816D-85D1-4CE2-9ED4-F03E7FC17620}"/>
+                <a16:creationId xmlns:a16="http://schemas.microsoft.com/office/drawing/2014/main" id="{DE37D2B7-ADC0-4A52-813B-7B3478062031}"/>
               </a:ext>
             </a:extLst>
           </p:cNvPr>
@@ -4032,7 +4032,7 @@
     </p:spTree>
     <p:extLst>
       <p:ext uri="{BB962C8B-B14F-4D97-AF65-F5344CB8AC3E}">
-        <p14:creationId xmlns:p14="http://schemas.microsoft.com/office/powerpoint/2010/main" val="1040197947"/>
+        <p14:creationId xmlns:p14="http://schemas.microsoft.com/office/powerpoint/2010/main" val="1100480259"/>
       </p:ext>
     </p:extLst>
   </p:cSld>
@@ -4063,7 +4063,7 @@
           <p:cNvPr id="1" name="s12-rule">
             <a:extLst xmlns:a="http://schemas.openxmlformats.org/drawingml/2006/main">
               <a:ext uri="{FF2B5EF4-FFF2-40B4-BE49-F238E27FC236}">
-                <a16:creationId xmlns:a16="http://schemas.microsoft.com/office/drawing/2014/main" id="{8C287415-3123-46D8-B297-E89C4F2FA7CE}"/>
+                <a16:creationId xmlns:a16="http://schemas.microsoft.com/office/drawing/2014/main" id="{98FEAFBA-27E1-440D-BF18-128BAC88154D}"/>
               </a:ext>
             </a:extLst>
           </p:cNvPr>
@@ -4096,7 +4096,7 @@
           <p:cNvPr id="2" name="s12-eyebrow">
             <a:extLst xmlns:a="http://schemas.openxmlformats.org/drawingml/2006/main">
               <a:ext uri="{FF2B5EF4-FFF2-40B4-BE49-F238E27FC236}">
-                <a16:creationId xmlns:a16="http://schemas.microsoft.com/office/drawing/2014/main" id="{1683B165-ABF8-40D7-BA89-8E0D1C1D1D2B}"/>
+                <a16:creationId xmlns:a16="http://schemas.microsoft.com/office/drawing/2014/main" id="{EAF17C5B-BC99-41EA-BF23-4E9F65BC16ED}"/>
               </a:ext>
             </a:extLst>
           </p:cNvPr>
@@ -4154,7 +4154,7 @@
           <p:cNvPr id="3" name="s12-title">
             <a:extLst xmlns:a="http://schemas.openxmlformats.org/drawingml/2006/main">
               <a:ext uri="{FF2B5EF4-FFF2-40B4-BE49-F238E27FC236}">
-                <a16:creationId xmlns:a16="http://schemas.microsoft.com/office/drawing/2014/main" id="{C51D8980-910E-4F53-8A76-B0F461BBB973}"/>
+                <a16:creationId xmlns:a16="http://schemas.microsoft.com/office/drawing/2014/main" id="{88103CA1-9EAF-45FE-A341-B927980AA1E8}"/>
               </a:ext>
             </a:extLst>
           </p:cNvPr>
@@ -4212,7 +4212,7 @@
           <p:cNvPr id="4" name="s12-footer">
             <a:extLst xmlns:a="http://schemas.openxmlformats.org/drawingml/2006/main">
               <a:ext uri="{FF2B5EF4-FFF2-40B4-BE49-F238E27FC236}">
-                <a16:creationId xmlns:a16="http://schemas.microsoft.com/office/drawing/2014/main" id="{1B8BE81B-9613-45F5-8386-25AA23713863}"/>
+                <a16:creationId xmlns:a16="http://schemas.microsoft.com/office/drawing/2014/main" id="{A06AE4A0-273B-4103-8FC7-C06AC22CAA52}"/>
               </a:ext>
             </a:extLst>
           </p:cNvPr>
@@ -4243,7 +4243,7 @@
           <p:cNvPr id="5" name="s12-identity">
             <a:extLst xmlns:a="http://schemas.openxmlformats.org/drawingml/2006/main">
               <a:ext uri="{FF2B5EF4-FFF2-40B4-BE49-F238E27FC236}">
-                <a16:creationId xmlns:a16="http://schemas.microsoft.com/office/drawing/2014/main" id="{0F4AA89F-5356-4C94-97C4-1C6EFBAF466D}"/>
+                <a16:creationId xmlns:a16="http://schemas.microsoft.com/office/drawing/2014/main" id="{A2E73EE0-08F5-4326-94BC-6D0BB965B5D1}"/>
               </a:ext>
             </a:extLst>
           </p:cNvPr>
@@ -4301,7 +4301,7 @@
           <p:cNvPr id="6" name="recap-circle-0">
             <a:extLst xmlns:a="http://schemas.openxmlformats.org/drawingml/2006/main">
               <a:ext uri="{FF2B5EF4-FFF2-40B4-BE49-F238E27FC236}">
-                <a16:creationId xmlns:a16="http://schemas.microsoft.com/office/drawing/2014/main" id="{AC4CF551-F8D6-46C1-9177-87D47E2825D3}"/>
+                <a16:creationId xmlns:a16="http://schemas.microsoft.com/office/drawing/2014/main" id="{3F4A73C5-1273-4194-BF68-B5FFDBB4610B}"/>
               </a:ext>
             </a:extLst>
           </p:cNvPr>
@@ -4334,7 +4334,7 @@
           <p:cNvPr id="7" name="recap-number-0">
             <a:extLst xmlns:a="http://schemas.openxmlformats.org/drawingml/2006/main">
               <a:ext uri="{FF2B5EF4-FFF2-40B4-BE49-F238E27FC236}">
-                <a16:creationId xmlns:a16="http://schemas.microsoft.com/office/drawing/2014/main" id="{D807C80F-F8EB-4462-B3E5-B500E1885445}"/>
+                <a16:creationId xmlns:a16="http://schemas.microsoft.com/office/drawing/2014/main" id="{3B117AA5-9653-4AAD-8A35-61B3FFBDB489}"/>
               </a:ext>
             </a:extLst>
           </p:cNvPr>
@@ -4392,7 +4392,7 @@
           <p:cNvPr id="8" name="recap-item-0">
             <a:extLst xmlns:a="http://schemas.openxmlformats.org/drawingml/2006/main">
               <a:ext uri="{FF2B5EF4-FFF2-40B4-BE49-F238E27FC236}">
-                <a16:creationId xmlns:a16="http://schemas.microsoft.com/office/drawing/2014/main" id="{CD54668C-90AD-423D-8E97-A772DF743868}"/>
+                <a16:creationId xmlns:a16="http://schemas.microsoft.com/office/drawing/2014/main" id="{5CC6170A-EC10-4D9A-AD6D-EEAA79327AE2}"/>
               </a:ext>
             </a:extLst>
           </p:cNvPr>
@@ -4456,7 +4456,7 @@
           <p:cNvPr id="9" name="recap-connector-0">
             <a:extLst xmlns:a="http://schemas.openxmlformats.org/drawingml/2006/main">
               <a:ext uri="{FF2B5EF4-FFF2-40B4-BE49-F238E27FC236}">
-                <a16:creationId xmlns:a16="http://schemas.microsoft.com/office/drawing/2014/main" id="{450F3D0D-6DD5-4CB4-BE71-E19A74F4CF6C}"/>
+                <a16:creationId xmlns:a16="http://schemas.microsoft.com/office/drawing/2014/main" id="{32FFB362-A694-410B-8DBA-3B110146F1A0}"/>
               </a:ext>
             </a:extLst>
           </p:cNvPr>
@@ -4487,7 +4487,7 @@
           <p:cNvPr id="10" name="recap-circle-1">
             <a:extLst xmlns:a="http://schemas.openxmlformats.org/drawingml/2006/main">
               <a:ext uri="{FF2B5EF4-FFF2-40B4-BE49-F238E27FC236}">
-                <a16:creationId xmlns:a16="http://schemas.microsoft.com/office/drawing/2014/main" id="{4BF5CC7C-2B1F-4E1A-9080-AA54DE1BC44F}"/>
+                <a16:creationId xmlns:a16="http://schemas.microsoft.com/office/drawing/2014/main" id="{5E899C88-7D91-4606-8847-DE60909D744E}"/>
               </a:ext>
             </a:extLst>
           </p:cNvPr>
@@ -4520,7 +4520,7 @@
           <p:cNvPr id="11" name="recap-number-1">
             <a:extLst xmlns:a="http://schemas.openxmlformats.org/drawingml/2006/main">
               <a:ext uri="{FF2B5EF4-FFF2-40B4-BE49-F238E27FC236}">
-                <a16:creationId xmlns:a16="http://schemas.microsoft.com/office/drawing/2014/main" id="{8EA89BC1-F979-4CDB-8B75-83246A22834E}"/>
+                <a16:creationId xmlns:a16="http://schemas.microsoft.com/office/drawing/2014/main" id="{EC5C79A9-C65C-4CB2-A342-2A173A8BCEF6}"/>
               </a:ext>
             </a:extLst>
           </p:cNvPr>
@@ -4578,7 +4578,7 @@
           <p:cNvPr id="12" name="recap-item-1">
             <a:extLst xmlns:a="http://schemas.openxmlformats.org/drawingml/2006/main">
               <a:ext uri="{FF2B5EF4-FFF2-40B4-BE49-F238E27FC236}">
-                <a16:creationId xmlns:a16="http://schemas.microsoft.com/office/drawing/2014/main" id="{B0B57BB3-A9A3-484F-89CC-AD491A9D0042}"/>
+                <a16:creationId xmlns:a16="http://schemas.microsoft.com/office/drawing/2014/main" id="{FD833AD9-99F6-4788-BB7A-0336CFE93762}"/>
               </a:ext>
             </a:extLst>
           </p:cNvPr>
@@ -4642,7 +4642,7 @@
           <p:cNvPr id="13" name="recap-connector-1">
             <a:extLst xmlns:a="http://schemas.openxmlformats.org/drawingml/2006/main">
               <a:ext uri="{FF2B5EF4-FFF2-40B4-BE49-F238E27FC236}">
-                <a16:creationId xmlns:a16="http://schemas.microsoft.com/office/drawing/2014/main" id="{E31CB819-8447-4035-8AB3-C8B0D2BBED5E}"/>
+                <a16:creationId xmlns:a16="http://schemas.microsoft.com/office/drawing/2014/main" id="{1F98E9F5-3848-4884-9E31-D5645471BC78}"/>
               </a:ext>
             </a:extLst>
           </p:cNvPr>
@@ -4673,7 +4673,7 @@
           <p:cNvPr id="14" name="recap-circle-2">
             <a:extLst xmlns:a="http://schemas.openxmlformats.org/drawingml/2006/main">
               <a:ext uri="{FF2B5EF4-FFF2-40B4-BE49-F238E27FC236}">
-                <a16:creationId xmlns:a16="http://schemas.microsoft.com/office/drawing/2014/main" id="{BDA54381-7C3E-45C8-B57D-520415DC8178}"/>
+                <a16:creationId xmlns:a16="http://schemas.microsoft.com/office/drawing/2014/main" id="{71A60726-B6A8-459E-A79F-A5E11EBABA09}"/>
               </a:ext>
             </a:extLst>
           </p:cNvPr>
@@ -4706,7 +4706,7 @@
           <p:cNvPr id="15" name="recap-number-2">
             <a:extLst xmlns:a="http://schemas.openxmlformats.org/drawingml/2006/main">
               <a:ext uri="{FF2B5EF4-FFF2-40B4-BE49-F238E27FC236}">
-                <a16:creationId xmlns:a16="http://schemas.microsoft.com/office/drawing/2014/main" id="{81C6B174-F9DD-4797-B9AA-1C4B421F5297}"/>
+                <a16:creationId xmlns:a16="http://schemas.microsoft.com/office/drawing/2014/main" id="{126359D2-DEBE-4D34-BBC3-83596336C968}"/>
               </a:ext>
             </a:extLst>
           </p:cNvPr>
@@ -4764,7 +4764,7 @@
           <p:cNvPr id="16" name="recap-item-2">
             <a:extLst xmlns:a="http://schemas.openxmlformats.org/drawingml/2006/main">
               <a:ext uri="{FF2B5EF4-FFF2-40B4-BE49-F238E27FC236}">
-                <a16:creationId xmlns:a16="http://schemas.microsoft.com/office/drawing/2014/main" id="{AD311220-A7D3-4D82-A059-1E74D25F38F4}"/>
+                <a16:creationId xmlns:a16="http://schemas.microsoft.com/office/drawing/2014/main" id="{5FC0C4B8-F8E8-4463-93AD-353BC91D211D}"/>
               </a:ext>
             </a:extLst>
           </p:cNvPr>
@@ -4826,7 +4826,7 @@
     </p:spTree>
     <p:extLst>
       <p:ext uri="{BB962C8B-B14F-4D97-AF65-F5344CB8AC3E}">
-        <p14:creationId xmlns:p14="http://schemas.microsoft.com/office/powerpoint/2010/main" val="1992791871"/>
+        <p14:creationId xmlns:p14="http://schemas.microsoft.com/office/powerpoint/2010/main" val="899334789"/>
       </p:ext>
     </p:extLst>
   </p:cSld>
@@ -4857,7 +4857,7 @@
           <p:cNvPr id="1" name="s13-rule">
             <a:extLst xmlns:a="http://schemas.openxmlformats.org/drawingml/2006/main">
               <a:ext uri="{FF2B5EF4-FFF2-40B4-BE49-F238E27FC236}">
-                <a16:creationId xmlns:a16="http://schemas.microsoft.com/office/drawing/2014/main" id="{C5FDD624-141B-4B1C-99B1-12E3545B5F0B}"/>
+                <a16:creationId xmlns:a16="http://schemas.microsoft.com/office/drawing/2014/main" id="{173C07BD-FD51-408E-B841-9F5D2830A4EB}"/>
               </a:ext>
             </a:extLst>
           </p:cNvPr>
@@ -4890,7 +4890,7 @@
           <p:cNvPr id="2" name="s13-eyebrow">
             <a:extLst xmlns:a="http://schemas.openxmlformats.org/drawingml/2006/main">
               <a:ext uri="{FF2B5EF4-FFF2-40B4-BE49-F238E27FC236}">
-                <a16:creationId xmlns:a16="http://schemas.microsoft.com/office/drawing/2014/main" id="{8677818F-9FEF-4016-8D0D-ABBE76CC5349}"/>
+                <a16:creationId xmlns:a16="http://schemas.microsoft.com/office/drawing/2014/main" id="{BF4B64E4-B197-4C3B-ADB3-DC0CB8CE00C3}"/>
               </a:ext>
             </a:extLst>
           </p:cNvPr>
@@ -4948,7 +4948,7 @@
           <p:cNvPr id="3" name="s13-title">
             <a:extLst xmlns:a="http://schemas.openxmlformats.org/drawingml/2006/main">
               <a:ext uri="{FF2B5EF4-FFF2-40B4-BE49-F238E27FC236}">
-                <a16:creationId xmlns:a16="http://schemas.microsoft.com/office/drawing/2014/main" id="{C73C9C69-1384-4EC9-A11A-906B0EA40FD7}"/>
+                <a16:creationId xmlns:a16="http://schemas.microsoft.com/office/drawing/2014/main" id="{748974F9-A5EA-4BD4-85BE-3986378DBBBE}"/>
               </a:ext>
             </a:extLst>
           </p:cNvPr>
@@ -5006,7 +5006,7 @@
           <p:cNvPr id="4" name="s13-footer">
             <a:extLst xmlns:a="http://schemas.openxmlformats.org/drawingml/2006/main">
               <a:ext uri="{FF2B5EF4-FFF2-40B4-BE49-F238E27FC236}">
-                <a16:creationId xmlns:a16="http://schemas.microsoft.com/office/drawing/2014/main" id="{ECFD38F0-DD3B-461F-B813-28DDF244E5F8}"/>
+                <a16:creationId xmlns:a16="http://schemas.microsoft.com/office/drawing/2014/main" id="{319B5419-E5D1-4F31-A201-93C172FE160D}"/>
               </a:ext>
             </a:extLst>
           </p:cNvPr>
@@ -5037,7 +5037,7 @@
           <p:cNvPr id="5" name="s13-identity">
             <a:extLst xmlns:a="http://schemas.openxmlformats.org/drawingml/2006/main">
               <a:ext uri="{FF2B5EF4-FFF2-40B4-BE49-F238E27FC236}">
-                <a16:creationId xmlns:a16="http://schemas.microsoft.com/office/drawing/2014/main" id="{730A9874-8C3F-4F8B-877F-0DE7F4D3BEA7}"/>
+                <a16:creationId xmlns:a16="http://schemas.microsoft.com/office/drawing/2014/main" id="{414CB8B8-5E5D-4627-A26C-291A8C09FF48}"/>
               </a:ext>
             </a:extLst>
           </p:cNvPr>
@@ -5095,7 +5095,7 @@
           <p:cNvPr id="6" name="source-0">
             <a:extLst xmlns:a="http://schemas.openxmlformats.org/drawingml/2006/main">
               <a:ext uri="{FF2B5EF4-FFF2-40B4-BE49-F238E27FC236}">
-                <a16:creationId xmlns:a16="http://schemas.microsoft.com/office/drawing/2014/main" id="{1831003A-C90E-41E1-9FC2-099C47A60C76}"/>
+                <a16:creationId xmlns:a16="http://schemas.microsoft.com/office/drawing/2014/main" id="{BAAC563F-9E67-402A-9D02-15090842E53B}"/>
               </a:ext>
             </a:extLst>
           </p:cNvPr>
@@ -5159,7 +5159,7 @@
           <p:cNvPr id="7" name="source-1">
             <a:extLst xmlns:a="http://schemas.openxmlformats.org/drawingml/2006/main">
               <a:ext uri="{FF2B5EF4-FFF2-40B4-BE49-F238E27FC236}">
-                <a16:creationId xmlns:a16="http://schemas.microsoft.com/office/drawing/2014/main" id="{16871354-D5A4-43B6-8C32-EF9305D82D67}"/>
+                <a16:creationId xmlns:a16="http://schemas.microsoft.com/office/drawing/2014/main" id="{E04DEA23-AB3A-41AB-8282-832F503CFFBB}"/>
               </a:ext>
             </a:extLst>
           </p:cNvPr>
@@ -5223,7 +5223,7 @@
           <p:cNvPr id="8" name="s13-takeaway-rule">
             <a:extLst xmlns:a="http://schemas.openxmlformats.org/drawingml/2006/main">
               <a:ext uri="{FF2B5EF4-FFF2-40B4-BE49-F238E27FC236}">
-                <a16:creationId xmlns:a16="http://schemas.microsoft.com/office/drawing/2014/main" id="{C21602C9-5B83-46E2-9B11-070F9CF037E7}"/>
+                <a16:creationId xmlns:a16="http://schemas.microsoft.com/office/drawing/2014/main" id="{1042C805-B816-4D7F-9799-610D2676FF02}"/>
               </a:ext>
             </a:extLst>
           </p:cNvPr>
@@ -5256,7 +5256,7 @@
           <p:cNvPr id="9" name="s13-takeaway">
             <a:extLst xmlns:a="http://schemas.openxmlformats.org/drawingml/2006/main">
               <a:ext uri="{FF2B5EF4-FFF2-40B4-BE49-F238E27FC236}">
-                <a16:creationId xmlns:a16="http://schemas.microsoft.com/office/drawing/2014/main" id="{50106896-1E43-4BDC-A41F-386B251E90D0}"/>
+                <a16:creationId xmlns:a16="http://schemas.microsoft.com/office/drawing/2014/main" id="{45EEF947-74DB-4BD5-A265-72C5C68BB802}"/>
               </a:ext>
             </a:extLst>
           </p:cNvPr>
@@ -5281,7 +5281,7 @@
         </p:spPr>
         <p:txBody>
           <a:bodyPr xmlns:a="http://schemas.openxmlformats.org/drawingml/2006/main" lIns="0" tIns="0" rIns="0" bIns="0" anchor="ctr">
-            <a:normAutofit fontScale="95911"/>
+            <a:normAutofit fontScale="100000"/>
           </a:bodyPr>
           <a:lstStyle xmlns:a="http://schemas.openxmlformats.org/drawingml/2006/main"/>
           <a:p xmlns:a="http://schemas.openxmlformats.org/drawingml/2006/main">
@@ -5304,7 +5304,7 @@
                 <a:ea typeface="PingFang SC"/>
                 <a:cs typeface="PingFang SC"/>
               </a:rPr>
-              <a:t>课程精编页用于讲授主线；播放器中的“原课件”模式保留团队 PowerPoint 精选页、真实图片和可播放视频。</a:t>
+              <a:t>课程正文与幻灯片共享同一知识主线，图片和视频用于帮助理解本节概念与案例。</a:t>
             </a:r>
           </a:p>
         </p:txBody>
@@ -5312,7 +5312,7 @@
     </p:spTree>
     <p:extLst>
       <p:ext uri="{BB962C8B-B14F-4D97-AF65-F5344CB8AC3E}">
-        <p14:creationId xmlns:p14="http://schemas.microsoft.com/office/powerpoint/2010/main" val="1987899000"/>
+        <p14:creationId xmlns:p14="http://schemas.microsoft.com/office/powerpoint/2010/main" val="84423350"/>
       </p:ext>
     </p:extLst>
   </p:cSld>
@@ -5343,7 +5343,7 @@
           <p:cNvPr id="1" name="s2-rule">
             <a:extLst xmlns:a="http://schemas.openxmlformats.org/drawingml/2006/main">
               <a:ext uri="{FF2B5EF4-FFF2-40B4-BE49-F238E27FC236}">
-                <a16:creationId xmlns:a16="http://schemas.microsoft.com/office/drawing/2014/main" id="{45B655D5-BF7F-40FC-9049-AAC10C6E40B3}"/>
+                <a16:creationId xmlns:a16="http://schemas.microsoft.com/office/drawing/2014/main" id="{A2C5648F-FEDC-4818-84F3-E5E321A4ABF0}"/>
               </a:ext>
             </a:extLst>
           </p:cNvPr>
@@ -5376,7 +5376,7 @@
           <p:cNvPr id="2" name="s2-eyebrow">
             <a:extLst xmlns:a="http://schemas.openxmlformats.org/drawingml/2006/main">
               <a:ext uri="{FF2B5EF4-FFF2-40B4-BE49-F238E27FC236}">
-                <a16:creationId xmlns:a16="http://schemas.microsoft.com/office/drawing/2014/main" id="{B2A4ED31-AB8D-41ED-BCF1-435683C7DE32}"/>
+                <a16:creationId xmlns:a16="http://schemas.microsoft.com/office/drawing/2014/main" id="{A7E2F19A-8A70-4104-891F-9FEB9CE296C0}"/>
               </a:ext>
             </a:extLst>
           </p:cNvPr>
@@ -5434,7 +5434,7 @@
           <p:cNvPr id="3" name="s2-title">
             <a:extLst xmlns:a="http://schemas.openxmlformats.org/drawingml/2006/main">
               <a:ext uri="{FF2B5EF4-FFF2-40B4-BE49-F238E27FC236}">
-                <a16:creationId xmlns:a16="http://schemas.microsoft.com/office/drawing/2014/main" id="{22B929B9-A189-4D2D-9429-3FF6DB67FC6A}"/>
+                <a16:creationId xmlns:a16="http://schemas.microsoft.com/office/drawing/2014/main" id="{A78F4B14-8A15-406B-8389-ACA2B273B3B6}"/>
               </a:ext>
             </a:extLst>
           </p:cNvPr>
@@ -5492,7 +5492,7 @@
           <p:cNvPr id="4" name="s2-footer">
             <a:extLst xmlns:a="http://schemas.openxmlformats.org/drawingml/2006/main">
               <a:ext uri="{FF2B5EF4-FFF2-40B4-BE49-F238E27FC236}">
-                <a16:creationId xmlns:a16="http://schemas.microsoft.com/office/drawing/2014/main" id="{66027F74-739B-4FFB-AC00-B37D9DF2F4EE}"/>
+                <a16:creationId xmlns:a16="http://schemas.microsoft.com/office/drawing/2014/main" id="{D17EB297-E817-4502-A7A8-A0838BAED65E}"/>
               </a:ext>
             </a:extLst>
           </p:cNvPr>
@@ -5523,7 +5523,7 @@
           <p:cNvPr id="5" name="s2-identity">
             <a:extLst xmlns:a="http://schemas.openxmlformats.org/drawingml/2006/main">
               <a:ext uri="{FF2B5EF4-FFF2-40B4-BE49-F238E27FC236}">
-                <a16:creationId xmlns:a16="http://schemas.microsoft.com/office/drawing/2014/main" id="{333ABB6D-FD93-4523-9545-49ACD09FE7BF}"/>
+                <a16:creationId xmlns:a16="http://schemas.microsoft.com/office/drawing/2014/main" id="{D5D4629E-E233-46C9-BCAF-443D0D2D072D}"/>
               </a:ext>
             </a:extLst>
           </p:cNvPr>
@@ -5581,7 +5581,7 @@
           <p:cNvPr id="6" name="objective-1">
             <a:extLst xmlns:a="http://schemas.openxmlformats.org/drawingml/2006/main">
               <a:ext uri="{FF2B5EF4-FFF2-40B4-BE49-F238E27FC236}">
-                <a16:creationId xmlns:a16="http://schemas.microsoft.com/office/drawing/2014/main" id="{14FD4518-1119-4AC5-86FA-851D950257C2}"/>
+                <a16:creationId xmlns:a16="http://schemas.microsoft.com/office/drawing/2014/main" id="{79BDF164-6F0F-4971-9C64-0A7BD45BA57D}"/>
               </a:ext>
             </a:extLst>
           </p:cNvPr>
@@ -5668,7 +5668,7 @@
           <p:cNvPr id="7" name="objective-2">
             <a:extLst xmlns:a="http://schemas.openxmlformats.org/drawingml/2006/main">
               <a:ext uri="{FF2B5EF4-FFF2-40B4-BE49-F238E27FC236}">
-                <a16:creationId xmlns:a16="http://schemas.microsoft.com/office/drawing/2014/main" id="{8FEAE02F-5ED1-4AAC-9A71-6F8B5442A280}"/>
+                <a16:creationId xmlns:a16="http://schemas.microsoft.com/office/drawing/2014/main" id="{6BCC48C1-0539-492F-906B-71890B08DA23}"/>
               </a:ext>
             </a:extLst>
           </p:cNvPr>
@@ -5753,7 +5753,7 @@
     </p:spTree>
     <p:extLst>
       <p:ext uri="{BB962C8B-B14F-4D97-AF65-F5344CB8AC3E}">
-        <p14:creationId xmlns:p14="http://schemas.microsoft.com/office/powerpoint/2010/main" val="139358510"/>
+        <p14:creationId xmlns:p14="http://schemas.microsoft.com/office/powerpoint/2010/main" val="306495849"/>
       </p:ext>
     </p:extLst>
   </p:cSld>
@@ -5784,7 +5784,7 @@
           <p:cNvPr id="1" name="s3-rule">
             <a:extLst xmlns:a="http://schemas.openxmlformats.org/drawingml/2006/main">
               <a:ext uri="{FF2B5EF4-FFF2-40B4-BE49-F238E27FC236}">
-                <a16:creationId xmlns:a16="http://schemas.microsoft.com/office/drawing/2014/main" id="{C6AB8539-A495-4B2E-939D-A69A48F244E9}"/>
+                <a16:creationId xmlns:a16="http://schemas.microsoft.com/office/drawing/2014/main" id="{F55AE4A1-3878-45EA-A371-88DA3F4FE142}"/>
               </a:ext>
             </a:extLst>
           </p:cNvPr>
@@ -5817,7 +5817,7 @@
           <p:cNvPr id="2" name="s3-eyebrow">
             <a:extLst xmlns:a="http://schemas.openxmlformats.org/drawingml/2006/main">
               <a:ext uri="{FF2B5EF4-FFF2-40B4-BE49-F238E27FC236}">
-                <a16:creationId xmlns:a16="http://schemas.microsoft.com/office/drawing/2014/main" id="{C6BFA881-0349-48FB-B8EE-1DCBFFDEBBDC}"/>
+                <a16:creationId xmlns:a16="http://schemas.microsoft.com/office/drawing/2014/main" id="{7BD71E3C-7234-44E2-932B-A44B801811C7}"/>
               </a:ext>
             </a:extLst>
           </p:cNvPr>
@@ -5875,7 +5875,7 @@
           <p:cNvPr id="3" name="s3-title">
             <a:extLst xmlns:a="http://schemas.openxmlformats.org/drawingml/2006/main">
               <a:ext uri="{FF2B5EF4-FFF2-40B4-BE49-F238E27FC236}">
-                <a16:creationId xmlns:a16="http://schemas.microsoft.com/office/drawing/2014/main" id="{AE42B5BD-4874-4677-9319-0A48796E6DD1}"/>
+                <a16:creationId xmlns:a16="http://schemas.microsoft.com/office/drawing/2014/main" id="{EA080411-5909-4BE7-9972-EB4979282FEB}"/>
               </a:ext>
             </a:extLst>
           </p:cNvPr>
@@ -5933,7 +5933,7 @@
           <p:cNvPr id="4" name="s3-footer">
             <a:extLst xmlns:a="http://schemas.openxmlformats.org/drawingml/2006/main">
               <a:ext uri="{FF2B5EF4-FFF2-40B4-BE49-F238E27FC236}">
-                <a16:creationId xmlns:a16="http://schemas.microsoft.com/office/drawing/2014/main" id="{C242F375-CF5C-45D8-8578-CBC6057B1359}"/>
+                <a16:creationId xmlns:a16="http://schemas.microsoft.com/office/drawing/2014/main" id="{7405B00E-53CD-48FB-B147-AD7215118473}"/>
               </a:ext>
             </a:extLst>
           </p:cNvPr>
@@ -5964,7 +5964,7 @@
           <p:cNvPr id="5" name="s3-identity">
             <a:extLst xmlns:a="http://schemas.openxmlformats.org/drawingml/2006/main">
               <a:ext uri="{FF2B5EF4-FFF2-40B4-BE49-F238E27FC236}">
-                <a16:creationId xmlns:a16="http://schemas.microsoft.com/office/drawing/2014/main" id="{94649DB6-643A-4CB2-997A-638DA2D80C4B}"/>
+                <a16:creationId xmlns:a16="http://schemas.microsoft.com/office/drawing/2014/main" id="{D1F75414-D0F0-4DC5-95C9-AAF56C71F5F6}"/>
               </a:ext>
             </a:extLst>
           </p:cNvPr>
@@ -6022,7 +6022,7 @@
           <p:cNvPr id="6" name="core-no-0">
             <a:extLst xmlns:a="http://schemas.openxmlformats.org/drawingml/2006/main">
               <a:ext uri="{FF2B5EF4-FFF2-40B4-BE49-F238E27FC236}">
-                <a16:creationId xmlns:a16="http://schemas.microsoft.com/office/drawing/2014/main" id="{E7ABB90D-C481-434A-A600-D1DE45BA86E5}"/>
+                <a16:creationId xmlns:a16="http://schemas.microsoft.com/office/drawing/2014/main" id="{D37757D7-50C0-49B9-B08D-8F0EBD78EFC4}"/>
               </a:ext>
             </a:extLst>
           </p:cNvPr>
@@ -6080,7 +6080,7 @@
           <p:cNvPr id="7" name="core-label-0">
             <a:extLst xmlns:a="http://schemas.openxmlformats.org/drawingml/2006/main">
               <a:ext uri="{FF2B5EF4-FFF2-40B4-BE49-F238E27FC236}">
-                <a16:creationId xmlns:a16="http://schemas.microsoft.com/office/drawing/2014/main" id="{9567A482-2CF1-4C30-B17E-062B14CE73BE}"/>
+                <a16:creationId xmlns:a16="http://schemas.microsoft.com/office/drawing/2014/main" id="{9BCF237A-A414-4C35-8B37-25B2615EA2F1}"/>
               </a:ext>
             </a:extLst>
           </p:cNvPr>
@@ -6138,7 +6138,7 @@
           <p:cNvPr id="8" name="core-body-0">
             <a:extLst xmlns:a="http://schemas.openxmlformats.org/drawingml/2006/main">
               <a:ext uri="{FF2B5EF4-FFF2-40B4-BE49-F238E27FC236}">
-                <a16:creationId xmlns:a16="http://schemas.microsoft.com/office/drawing/2014/main" id="{5F95C02D-B09F-4EFC-AAB3-17F21115A86B}"/>
+                <a16:creationId xmlns:a16="http://schemas.microsoft.com/office/drawing/2014/main" id="{61258558-6CB3-42B1-A5C3-E7DC4DA067A1}"/>
               </a:ext>
             </a:extLst>
           </p:cNvPr>
@@ -6202,7 +6202,7 @@
           <p:cNvPr id="9" name="core-no-1">
             <a:extLst xmlns:a="http://schemas.openxmlformats.org/drawingml/2006/main">
               <a:ext uri="{FF2B5EF4-FFF2-40B4-BE49-F238E27FC236}">
-                <a16:creationId xmlns:a16="http://schemas.microsoft.com/office/drawing/2014/main" id="{1F9D78C8-E32F-45DE-8F36-2CDAEDBB6EAF}"/>
+                <a16:creationId xmlns:a16="http://schemas.microsoft.com/office/drawing/2014/main" id="{75C0EA0E-6630-44E5-8402-845A07FFA414}"/>
               </a:ext>
             </a:extLst>
           </p:cNvPr>
@@ -6260,7 +6260,7 @@
           <p:cNvPr id="10" name="core-body-1">
             <a:extLst xmlns:a="http://schemas.openxmlformats.org/drawingml/2006/main">
               <a:ext uri="{FF2B5EF4-FFF2-40B4-BE49-F238E27FC236}">
-                <a16:creationId xmlns:a16="http://schemas.microsoft.com/office/drawing/2014/main" id="{15D7F11E-D313-49C5-8AF7-3F83A3F34DE0}"/>
+                <a16:creationId xmlns:a16="http://schemas.microsoft.com/office/drawing/2014/main" id="{9CF6DB9E-93BE-4D72-8F20-ECCEBF271B18}"/>
               </a:ext>
             </a:extLst>
           </p:cNvPr>
@@ -6324,7 +6324,7 @@
           <p:cNvPr id="11" name="s3-takeaway-rule">
             <a:extLst xmlns:a="http://schemas.openxmlformats.org/drawingml/2006/main">
               <a:ext uri="{FF2B5EF4-FFF2-40B4-BE49-F238E27FC236}">
-                <a16:creationId xmlns:a16="http://schemas.microsoft.com/office/drawing/2014/main" id="{6972C407-919C-4127-B078-8A3F9821EE6C}"/>
+                <a16:creationId xmlns:a16="http://schemas.microsoft.com/office/drawing/2014/main" id="{E5C50A22-BE03-4016-8400-65FDC3C661E4}"/>
               </a:ext>
             </a:extLst>
           </p:cNvPr>
@@ -6357,7 +6357,7 @@
           <p:cNvPr id="12" name="s3-takeaway">
             <a:extLst xmlns:a="http://schemas.openxmlformats.org/drawingml/2006/main">
               <a:ext uri="{FF2B5EF4-FFF2-40B4-BE49-F238E27FC236}">
-                <a16:creationId xmlns:a16="http://schemas.microsoft.com/office/drawing/2014/main" id="{DCBE1AAA-5A2D-4FCF-AD45-15ECD8574EE7}"/>
+                <a16:creationId xmlns:a16="http://schemas.microsoft.com/office/drawing/2014/main" id="{25F1C412-643E-4364-81B5-09F396619940}"/>
               </a:ext>
             </a:extLst>
           </p:cNvPr>
@@ -6413,7 +6413,7 @@
     </p:spTree>
     <p:extLst>
       <p:ext uri="{BB962C8B-B14F-4D97-AF65-F5344CB8AC3E}">
-        <p14:creationId xmlns:p14="http://schemas.microsoft.com/office/powerpoint/2010/main" val="1365379630"/>
+        <p14:creationId xmlns:p14="http://schemas.microsoft.com/office/powerpoint/2010/main" val="516852977"/>
       </p:ext>
     </p:extLst>
   </p:cSld>
@@ -6444,7 +6444,7 @@
           <p:cNvPr id="1" name="s4-rule">
             <a:extLst xmlns:a="http://schemas.openxmlformats.org/drawingml/2006/main">
               <a:ext uri="{FF2B5EF4-FFF2-40B4-BE49-F238E27FC236}">
-                <a16:creationId xmlns:a16="http://schemas.microsoft.com/office/drawing/2014/main" id="{4582A0F7-3BA2-4F34-8867-D961C7FFBA73}"/>
+                <a16:creationId xmlns:a16="http://schemas.microsoft.com/office/drawing/2014/main" id="{D53F68A4-249C-43A9-A87C-46B06B7288F7}"/>
               </a:ext>
             </a:extLst>
           </p:cNvPr>
@@ -6477,7 +6477,7 @@
           <p:cNvPr id="2" name="s4-eyebrow">
             <a:extLst xmlns:a="http://schemas.openxmlformats.org/drawingml/2006/main">
               <a:ext uri="{FF2B5EF4-FFF2-40B4-BE49-F238E27FC236}">
-                <a16:creationId xmlns:a16="http://schemas.microsoft.com/office/drawing/2014/main" id="{B80988CF-1972-41F9-9E02-BFD5CE0E2171}"/>
+                <a16:creationId xmlns:a16="http://schemas.microsoft.com/office/drawing/2014/main" id="{E4B316AD-8235-4E87-8A58-B7E7C4B49AEC}"/>
               </a:ext>
             </a:extLst>
           </p:cNvPr>
@@ -6535,7 +6535,7 @@
           <p:cNvPr id="3" name="s4-title">
             <a:extLst xmlns:a="http://schemas.openxmlformats.org/drawingml/2006/main">
               <a:ext uri="{FF2B5EF4-FFF2-40B4-BE49-F238E27FC236}">
-                <a16:creationId xmlns:a16="http://schemas.microsoft.com/office/drawing/2014/main" id="{DA6BC19A-A266-4317-83E6-62316D9ED15F}"/>
+                <a16:creationId xmlns:a16="http://schemas.microsoft.com/office/drawing/2014/main" id="{593647EB-7F9D-4547-8F4F-7483C1ABAE7F}"/>
               </a:ext>
             </a:extLst>
           </p:cNvPr>
@@ -6593,7 +6593,7 @@
           <p:cNvPr id="4" name="s4-footer">
             <a:extLst xmlns:a="http://schemas.openxmlformats.org/drawingml/2006/main">
               <a:ext uri="{FF2B5EF4-FFF2-40B4-BE49-F238E27FC236}">
-                <a16:creationId xmlns:a16="http://schemas.microsoft.com/office/drawing/2014/main" id="{872B222A-6FFC-4C85-8261-9279CF292EB0}"/>
+                <a16:creationId xmlns:a16="http://schemas.microsoft.com/office/drawing/2014/main" id="{D068CC82-2E6D-4A66-968F-2BD6B99BFE08}"/>
               </a:ext>
             </a:extLst>
           </p:cNvPr>
@@ -6624,7 +6624,7 @@
           <p:cNvPr id="5" name="s4-identity">
             <a:extLst xmlns:a="http://schemas.openxmlformats.org/drawingml/2006/main">
               <a:ext uri="{FF2B5EF4-FFF2-40B4-BE49-F238E27FC236}">
-                <a16:creationId xmlns:a16="http://schemas.microsoft.com/office/drawing/2014/main" id="{C58B5331-3B1D-42DE-8092-00B56ADF2C51}"/>
+                <a16:creationId xmlns:a16="http://schemas.microsoft.com/office/drawing/2014/main" id="{7A2F7B8A-0D50-46A4-956D-E74F431FB065}"/>
               </a:ext>
             </a:extLst>
           </p:cNvPr>
@@ -6682,7 +6682,7 @@
           <p:cNvPr id="6" name="core-no-0">
             <a:extLst xmlns:a="http://schemas.openxmlformats.org/drawingml/2006/main">
               <a:ext uri="{FF2B5EF4-FFF2-40B4-BE49-F238E27FC236}">
-                <a16:creationId xmlns:a16="http://schemas.microsoft.com/office/drawing/2014/main" id="{08D13BB5-8B5B-4136-B471-9D4913568015}"/>
+                <a16:creationId xmlns:a16="http://schemas.microsoft.com/office/drawing/2014/main" id="{962415A3-963B-4C56-A270-1C6AAE33A471}"/>
               </a:ext>
             </a:extLst>
           </p:cNvPr>
@@ -6740,7 +6740,7 @@
           <p:cNvPr id="7" name="core-label-0">
             <a:extLst xmlns:a="http://schemas.openxmlformats.org/drawingml/2006/main">
               <a:ext uri="{FF2B5EF4-FFF2-40B4-BE49-F238E27FC236}">
-                <a16:creationId xmlns:a16="http://schemas.microsoft.com/office/drawing/2014/main" id="{913C4702-37B6-41A9-8547-CDC29A2BDA81}"/>
+                <a16:creationId xmlns:a16="http://schemas.microsoft.com/office/drawing/2014/main" id="{EF257A7B-4B48-4781-AEED-3EAD5DEBD5D1}"/>
               </a:ext>
             </a:extLst>
           </p:cNvPr>
@@ -6798,7 +6798,7 @@
           <p:cNvPr id="8" name="core-body-0">
             <a:extLst xmlns:a="http://schemas.openxmlformats.org/drawingml/2006/main">
               <a:ext uri="{FF2B5EF4-FFF2-40B4-BE49-F238E27FC236}">
-                <a16:creationId xmlns:a16="http://schemas.microsoft.com/office/drawing/2014/main" id="{5D09E033-FA9E-4A10-AC35-9A2414299C57}"/>
+                <a16:creationId xmlns:a16="http://schemas.microsoft.com/office/drawing/2014/main" id="{AB20DAEB-A195-40B9-A0D6-E42D28F164F2}"/>
               </a:ext>
             </a:extLst>
           </p:cNvPr>
@@ -6862,7 +6862,7 @@
           <p:cNvPr id="9" name="core-no-1">
             <a:extLst xmlns:a="http://schemas.openxmlformats.org/drawingml/2006/main">
               <a:ext uri="{FF2B5EF4-FFF2-40B4-BE49-F238E27FC236}">
-                <a16:creationId xmlns:a16="http://schemas.microsoft.com/office/drawing/2014/main" id="{913C1BF2-1054-44A9-9627-C69901001532}"/>
+                <a16:creationId xmlns:a16="http://schemas.microsoft.com/office/drawing/2014/main" id="{FA4FA91E-4D2A-4FC0-AD21-8569B8A16E9F}"/>
               </a:ext>
             </a:extLst>
           </p:cNvPr>
@@ -6920,7 +6920,7 @@
           <p:cNvPr id="10" name="core-body-1">
             <a:extLst xmlns:a="http://schemas.openxmlformats.org/drawingml/2006/main">
               <a:ext uri="{FF2B5EF4-FFF2-40B4-BE49-F238E27FC236}">
-                <a16:creationId xmlns:a16="http://schemas.microsoft.com/office/drawing/2014/main" id="{B3774ED8-F741-4FCD-9DA3-05849659E302}"/>
+                <a16:creationId xmlns:a16="http://schemas.microsoft.com/office/drawing/2014/main" id="{13564A3A-F27A-41B1-B007-74FF86B13BD7}"/>
               </a:ext>
             </a:extLst>
           </p:cNvPr>
@@ -6984,7 +6984,7 @@
           <p:cNvPr id="11" name="s4-takeaway-rule">
             <a:extLst xmlns:a="http://schemas.openxmlformats.org/drawingml/2006/main">
               <a:ext uri="{FF2B5EF4-FFF2-40B4-BE49-F238E27FC236}">
-                <a16:creationId xmlns:a16="http://schemas.microsoft.com/office/drawing/2014/main" id="{B075853C-1BA3-4E79-A64A-CEAF69C0D3B6}"/>
+                <a16:creationId xmlns:a16="http://schemas.microsoft.com/office/drawing/2014/main" id="{022AA6D8-A1ED-44F8-84A7-19E824298947}"/>
               </a:ext>
             </a:extLst>
           </p:cNvPr>
@@ -7017,7 +7017,7 @@
           <p:cNvPr id="12" name="s4-takeaway">
             <a:extLst xmlns:a="http://schemas.openxmlformats.org/drawingml/2006/main">
               <a:ext uri="{FF2B5EF4-FFF2-40B4-BE49-F238E27FC236}">
-                <a16:creationId xmlns:a16="http://schemas.microsoft.com/office/drawing/2014/main" id="{24B1936A-52DB-42FE-B06D-CD922BD92B87}"/>
+                <a16:creationId xmlns:a16="http://schemas.microsoft.com/office/drawing/2014/main" id="{C19DAD17-BB65-402D-A6BB-9237BBAF05CA}"/>
               </a:ext>
             </a:extLst>
           </p:cNvPr>
@@ -7073,7 +7073,7 @@
     </p:spTree>
     <p:extLst>
       <p:ext uri="{BB962C8B-B14F-4D97-AF65-F5344CB8AC3E}">
-        <p14:creationId xmlns:p14="http://schemas.microsoft.com/office/powerpoint/2010/main" val="1967135254"/>
+        <p14:creationId xmlns:p14="http://schemas.microsoft.com/office/powerpoint/2010/main" val="966402601"/>
       </p:ext>
     </p:extLst>
   </p:cSld>
@@ -7104,7 +7104,7 @@
           <p:cNvPr id="1" name="s5-rule">
             <a:extLst xmlns:a="http://schemas.openxmlformats.org/drawingml/2006/main">
               <a:ext uri="{FF2B5EF4-FFF2-40B4-BE49-F238E27FC236}">
-                <a16:creationId xmlns:a16="http://schemas.microsoft.com/office/drawing/2014/main" id="{BCD2F570-2050-4D08-8E6D-08379518FD00}"/>
+                <a16:creationId xmlns:a16="http://schemas.microsoft.com/office/drawing/2014/main" id="{13B4183F-2473-4ACD-BCC2-0D2AA59D4636}"/>
               </a:ext>
             </a:extLst>
           </p:cNvPr>
@@ -7137,7 +7137,7 @@
           <p:cNvPr id="2" name="s5-eyebrow">
             <a:extLst xmlns:a="http://schemas.openxmlformats.org/drawingml/2006/main">
               <a:ext uri="{FF2B5EF4-FFF2-40B4-BE49-F238E27FC236}">
-                <a16:creationId xmlns:a16="http://schemas.microsoft.com/office/drawing/2014/main" id="{0CA2B6BB-D6ED-4544-9594-A7D0E89D8451}"/>
+                <a16:creationId xmlns:a16="http://schemas.microsoft.com/office/drawing/2014/main" id="{961CEDED-A73B-4A76-A2E9-36DE50DF0F7A}"/>
               </a:ext>
             </a:extLst>
           </p:cNvPr>
@@ -7195,7 +7195,7 @@
           <p:cNvPr id="3" name="s5-title">
             <a:extLst xmlns:a="http://schemas.openxmlformats.org/drawingml/2006/main">
               <a:ext uri="{FF2B5EF4-FFF2-40B4-BE49-F238E27FC236}">
-                <a16:creationId xmlns:a16="http://schemas.microsoft.com/office/drawing/2014/main" id="{4F880B91-4AE3-40E8-9DDA-7EC8E69D8564}"/>
+                <a16:creationId xmlns:a16="http://schemas.microsoft.com/office/drawing/2014/main" id="{E15D9EF7-F43B-4957-8A7B-85B9C820D11A}"/>
               </a:ext>
             </a:extLst>
           </p:cNvPr>
@@ -7253,7 +7253,7 @@
           <p:cNvPr id="4" name="s5-footer">
             <a:extLst xmlns:a="http://schemas.openxmlformats.org/drawingml/2006/main">
               <a:ext uri="{FF2B5EF4-FFF2-40B4-BE49-F238E27FC236}">
-                <a16:creationId xmlns:a16="http://schemas.microsoft.com/office/drawing/2014/main" id="{7CAD4BBA-4819-421E-8417-39C115CB119A}"/>
+                <a16:creationId xmlns:a16="http://schemas.microsoft.com/office/drawing/2014/main" id="{B5DF736B-7949-4E12-A297-E0890893EB1E}"/>
               </a:ext>
             </a:extLst>
           </p:cNvPr>
@@ -7284,7 +7284,7 @@
           <p:cNvPr id="5" name="s5-identity">
             <a:extLst xmlns:a="http://schemas.openxmlformats.org/drawingml/2006/main">
               <a:ext uri="{FF2B5EF4-FFF2-40B4-BE49-F238E27FC236}">
-                <a16:creationId xmlns:a16="http://schemas.microsoft.com/office/drawing/2014/main" id="{112E9442-EEAD-4D98-97A6-3E66AD51F9F6}"/>
+                <a16:creationId xmlns:a16="http://schemas.microsoft.com/office/drawing/2014/main" id="{0FB8A4C0-F0D7-4650-9999-06664E0220F8}"/>
               </a:ext>
             </a:extLst>
           </p:cNvPr>
@@ -7342,7 +7342,7 @@
           <p:cNvPr id="6" name="core-no-0">
             <a:extLst xmlns:a="http://schemas.openxmlformats.org/drawingml/2006/main">
               <a:ext uri="{FF2B5EF4-FFF2-40B4-BE49-F238E27FC236}">
-                <a16:creationId xmlns:a16="http://schemas.microsoft.com/office/drawing/2014/main" id="{2B8901F9-B632-4D9F-BE62-366AAA326360}"/>
+                <a16:creationId xmlns:a16="http://schemas.microsoft.com/office/drawing/2014/main" id="{C4EAE18B-FCB6-498C-9D56-C51958017EDB}"/>
               </a:ext>
             </a:extLst>
           </p:cNvPr>
@@ -7400,7 +7400,7 @@
           <p:cNvPr id="7" name="core-label-0">
             <a:extLst xmlns:a="http://schemas.openxmlformats.org/drawingml/2006/main">
               <a:ext uri="{FF2B5EF4-FFF2-40B4-BE49-F238E27FC236}">
-                <a16:creationId xmlns:a16="http://schemas.microsoft.com/office/drawing/2014/main" id="{65CB8139-4A6A-427B-A704-DD69562BB8D3}"/>
+                <a16:creationId xmlns:a16="http://schemas.microsoft.com/office/drawing/2014/main" id="{3E8D9B74-E610-421B-8F49-C74F03EBD4F5}"/>
               </a:ext>
             </a:extLst>
           </p:cNvPr>
@@ -7458,7 +7458,7 @@
           <p:cNvPr id="8" name="core-body-0">
             <a:extLst xmlns:a="http://schemas.openxmlformats.org/drawingml/2006/main">
               <a:ext uri="{FF2B5EF4-FFF2-40B4-BE49-F238E27FC236}">
-                <a16:creationId xmlns:a16="http://schemas.microsoft.com/office/drawing/2014/main" id="{D8C16FC0-AEC8-4B2F-8C46-A36DC8AB9333}"/>
+                <a16:creationId xmlns:a16="http://schemas.microsoft.com/office/drawing/2014/main" id="{8DE4093E-CE2E-4396-A160-664461B97E57}"/>
               </a:ext>
             </a:extLst>
           </p:cNvPr>
@@ -7522,7 +7522,7 @@
           <p:cNvPr id="9" name="core-no-1">
             <a:extLst xmlns:a="http://schemas.openxmlformats.org/drawingml/2006/main">
               <a:ext uri="{FF2B5EF4-FFF2-40B4-BE49-F238E27FC236}">
-                <a16:creationId xmlns:a16="http://schemas.microsoft.com/office/drawing/2014/main" id="{7D4D4B2F-B94F-4D87-9125-DAEE7A1C4B3E}"/>
+                <a16:creationId xmlns:a16="http://schemas.microsoft.com/office/drawing/2014/main" id="{00A473E2-8527-416A-8293-FFE6C5B5B709}"/>
               </a:ext>
             </a:extLst>
           </p:cNvPr>
@@ -7580,7 +7580,7 @@
           <p:cNvPr id="10" name="core-body-1">
             <a:extLst xmlns:a="http://schemas.openxmlformats.org/drawingml/2006/main">
               <a:ext uri="{FF2B5EF4-FFF2-40B4-BE49-F238E27FC236}">
-                <a16:creationId xmlns:a16="http://schemas.microsoft.com/office/drawing/2014/main" id="{901D143D-08CB-4A2C-91EF-F0226C506986}"/>
+                <a16:creationId xmlns:a16="http://schemas.microsoft.com/office/drawing/2014/main" id="{CE6DB323-35BB-4056-911A-CB2234019C51}"/>
               </a:ext>
             </a:extLst>
           </p:cNvPr>
@@ -7644,7 +7644,7 @@
           <p:cNvPr id="11" name="s5-takeaway-rule">
             <a:extLst xmlns:a="http://schemas.openxmlformats.org/drawingml/2006/main">
               <a:ext uri="{FF2B5EF4-FFF2-40B4-BE49-F238E27FC236}">
-                <a16:creationId xmlns:a16="http://schemas.microsoft.com/office/drawing/2014/main" id="{9A574F0F-BCAE-4737-AD0B-0E0CBD1A5679}"/>
+                <a16:creationId xmlns:a16="http://schemas.microsoft.com/office/drawing/2014/main" id="{2F7911E1-07C6-4FFA-874B-CCE0BA377388}"/>
               </a:ext>
             </a:extLst>
           </p:cNvPr>
@@ -7677,7 +7677,7 @@
           <p:cNvPr id="12" name="s5-takeaway">
             <a:extLst xmlns:a="http://schemas.openxmlformats.org/drawingml/2006/main">
               <a:ext uri="{FF2B5EF4-FFF2-40B4-BE49-F238E27FC236}">
-                <a16:creationId xmlns:a16="http://schemas.microsoft.com/office/drawing/2014/main" id="{3AC67DFB-64E0-4260-87A1-58D6E53A6CA3}"/>
+                <a16:creationId xmlns:a16="http://schemas.microsoft.com/office/drawing/2014/main" id="{B474437C-BFA0-4791-A6EC-E551702C3CA1}"/>
               </a:ext>
             </a:extLst>
           </p:cNvPr>
@@ -7733,7 +7733,7 @@
     </p:spTree>
     <p:extLst>
       <p:ext uri="{BB962C8B-B14F-4D97-AF65-F5344CB8AC3E}">
-        <p14:creationId xmlns:p14="http://schemas.microsoft.com/office/powerpoint/2010/main" val="568197883"/>
+        <p14:creationId xmlns:p14="http://schemas.microsoft.com/office/powerpoint/2010/main" val="587271694"/>
       </p:ext>
     </p:extLst>
   </p:cSld>
@@ -7764,7 +7764,7 @@
           <p:cNvPr id="1" name="s6-rule">
             <a:extLst xmlns:a="http://schemas.openxmlformats.org/drawingml/2006/main">
               <a:ext uri="{FF2B5EF4-FFF2-40B4-BE49-F238E27FC236}">
-                <a16:creationId xmlns:a16="http://schemas.microsoft.com/office/drawing/2014/main" id="{9A0A5E6A-14EC-4B03-8033-F9AC1F236E01}"/>
+                <a16:creationId xmlns:a16="http://schemas.microsoft.com/office/drawing/2014/main" id="{C586B366-A9AE-4F41-8B68-45009A45CE2D}"/>
               </a:ext>
             </a:extLst>
           </p:cNvPr>
@@ -7797,7 +7797,7 @@
           <p:cNvPr id="2" name="s6-eyebrow">
             <a:extLst xmlns:a="http://schemas.openxmlformats.org/drawingml/2006/main">
               <a:ext uri="{FF2B5EF4-FFF2-40B4-BE49-F238E27FC236}">
-                <a16:creationId xmlns:a16="http://schemas.microsoft.com/office/drawing/2014/main" id="{39CFAEC2-1132-4788-A4F0-DE8DACB0F221}"/>
+                <a16:creationId xmlns:a16="http://schemas.microsoft.com/office/drawing/2014/main" id="{48493037-D907-4CCE-B841-A40857DDC0E1}"/>
               </a:ext>
             </a:extLst>
           </p:cNvPr>
@@ -7855,7 +7855,7 @@
           <p:cNvPr id="3" name="s6-title">
             <a:extLst xmlns:a="http://schemas.openxmlformats.org/drawingml/2006/main">
               <a:ext uri="{FF2B5EF4-FFF2-40B4-BE49-F238E27FC236}">
-                <a16:creationId xmlns:a16="http://schemas.microsoft.com/office/drawing/2014/main" id="{A88F4A72-CBC5-4357-B82A-81C9A0BAA553}"/>
+                <a16:creationId xmlns:a16="http://schemas.microsoft.com/office/drawing/2014/main" id="{46F5C92E-41EB-4375-B1F7-3C44E42210D6}"/>
               </a:ext>
             </a:extLst>
           </p:cNvPr>
@@ -7913,7 +7913,7 @@
           <p:cNvPr id="4" name="s6-footer">
             <a:extLst xmlns:a="http://schemas.openxmlformats.org/drawingml/2006/main">
               <a:ext uri="{FF2B5EF4-FFF2-40B4-BE49-F238E27FC236}">
-                <a16:creationId xmlns:a16="http://schemas.microsoft.com/office/drawing/2014/main" id="{93F7B627-6A78-42A9-B0C8-AB6B155C7840}"/>
+                <a16:creationId xmlns:a16="http://schemas.microsoft.com/office/drawing/2014/main" id="{35871203-C12A-4B4B-B073-BE1776BC2970}"/>
               </a:ext>
             </a:extLst>
           </p:cNvPr>
@@ -7944,7 +7944,7 @@
           <p:cNvPr id="5" name="s6-identity">
             <a:extLst xmlns:a="http://schemas.openxmlformats.org/drawingml/2006/main">
               <a:ext uri="{FF2B5EF4-FFF2-40B4-BE49-F238E27FC236}">
-                <a16:creationId xmlns:a16="http://schemas.microsoft.com/office/drawing/2014/main" id="{0CE14A5C-3DA7-4642-9118-2DD305FAF08D}"/>
+                <a16:creationId xmlns:a16="http://schemas.microsoft.com/office/drawing/2014/main" id="{771133DC-013A-41FF-A7F3-CB30EC292853}"/>
               </a:ext>
             </a:extLst>
           </p:cNvPr>
@@ -8002,7 +8002,7 @@
           <p:cNvPr id="6" name="core-no-0">
             <a:extLst xmlns:a="http://schemas.openxmlformats.org/drawingml/2006/main">
               <a:ext uri="{FF2B5EF4-FFF2-40B4-BE49-F238E27FC236}">
-                <a16:creationId xmlns:a16="http://schemas.microsoft.com/office/drawing/2014/main" id="{3629C935-086D-41F6-9C3A-A6C522BA995D}"/>
+                <a16:creationId xmlns:a16="http://schemas.microsoft.com/office/drawing/2014/main" id="{67736840-7BB7-4587-9755-4F5D8F384C68}"/>
               </a:ext>
             </a:extLst>
           </p:cNvPr>
@@ -8060,7 +8060,7 @@
           <p:cNvPr id="7" name="core-label-0">
             <a:extLst xmlns:a="http://schemas.openxmlformats.org/drawingml/2006/main">
               <a:ext uri="{FF2B5EF4-FFF2-40B4-BE49-F238E27FC236}">
-                <a16:creationId xmlns:a16="http://schemas.microsoft.com/office/drawing/2014/main" id="{E3464ECE-CB83-4CEA-A511-0C910C1A38F2}"/>
+                <a16:creationId xmlns:a16="http://schemas.microsoft.com/office/drawing/2014/main" id="{E461A5DC-C9A1-44F6-B707-3BA255493455}"/>
               </a:ext>
             </a:extLst>
           </p:cNvPr>
@@ -8118,7 +8118,7 @@
           <p:cNvPr id="8" name="core-body-0">
             <a:extLst xmlns:a="http://schemas.openxmlformats.org/drawingml/2006/main">
               <a:ext uri="{FF2B5EF4-FFF2-40B4-BE49-F238E27FC236}">
-                <a16:creationId xmlns:a16="http://schemas.microsoft.com/office/drawing/2014/main" id="{5557B8BA-900F-49DB-A400-CA130BCA3CF9}"/>
+                <a16:creationId xmlns:a16="http://schemas.microsoft.com/office/drawing/2014/main" id="{88027C6F-D2BB-4D50-865B-A692B3DC134F}"/>
               </a:ext>
             </a:extLst>
           </p:cNvPr>
@@ -8182,7 +8182,7 @@
           <p:cNvPr id="9" name="core-no-1">
             <a:extLst xmlns:a="http://schemas.openxmlformats.org/drawingml/2006/main">
               <a:ext uri="{FF2B5EF4-FFF2-40B4-BE49-F238E27FC236}">
-                <a16:creationId xmlns:a16="http://schemas.microsoft.com/office/drawing/2014/main" id="{450D9A11-1C16-4891-9715-79D80951D385}"/>
+                <a16:creationId xmlns:a16="http://schemas.microsoft.com/office/drawing/2014/main" id="{0A7EA05A-9C8D-484C-86F1-B8F3D7BC1914}"/>
               </a:ext>
             </a:extLst>
           </p:cNvPr>
@@ -8240,7 +8240,7 @@
           <p:cNvPr id="10" name="core-body-1">
             <a:extLst xmlns:a="http://schemas.openxmlformats.org/drawingml/2006/main">
               <a:ext uri="{FF2B5EF4-FFF2-40B4-BE49-F238E27FC236}">
-                <a16:creationId xmlns:a16="http://schemas.microsoft.com/office/drawing/2014/main" id="{A93B37D8-1123-4415-895B-2514F260113E}"/>
+                <a16:creationId xmlns:a16="http://schemas.microsoft.com/office/drawing/2014/main" id="{3C18FB03-54A1-4F39-9289-098C381B90AF}"/>
               </a:ext>
             </a:extLst>
           </p:cNvPr>
@@ -8304,7 +8304,7 @@
           <p:cNvPr id="11" name="s6-takeaway-rule">
             <a:extLst xmlns:a="http://schemas.openxmlformats.org/drawingml/2006/main">
               <a:ext uri="{FF2B5EF4-FFF2-40B4-BE49-F238E27FC236}">
-                <a16:creationId xmlns:a16="http://schemas.microsoft.com/office/drawing/2014/main" id="{F7ED12DD-B770-43E5-A4C8-D0BEC4481E30}"/>
+                <a16:creationId xmlns:a16="http://schemas.microsoft.com/office/drawing/2014/main" id="{606850A7-8DB1-4511-A6DA-B53C5F4FD895}"/>
               </a:ext>
             </a:extLst>
           </p:cNvPr>
@@ -8337,7 +8337,7 @@
           <p:cNvPr id="12" name="s6-takeaway">
             <a:extLst xmlns:a="http://schemas.openxmlformats.org/drawingml/2006/main">
               <a:ext uri="{FF2B5EF4-FFF2-40B4-BE49-F238E27FC236}">
-                <a16:creationId xmlns:a16="http://schemas.microsoft.com/office/drawing/2014/main" id="{824277EF-DD09-44BF-AE5D-1CCD43832184}"/>
+                <a16:creationId xmlns:a16="http://schemas.microsoft.com/office/drawing/2014/main" id="{AAF2975A-95B3-4358-87CB-AEB60024400E}"/>
               </a:ext>
             </a:extLst>
           </p:cNvPr>
@@ -8393,7 +8393,7 @@
     </p:spTree>
     <p:extLst>
       <p:ext uri="{BB962C8B-B14F-4D97-AF65-F5344CB8AC3E}">
-        <p14:creationId xmlns:p14="http://schemas.microsoft.com/office/powerpoint/2010/main" val="1186110771"/>
+        <p14:creationId xmlns:p14="http://schemas.microsoft.com/office/powerpoint/2010/main" val="2052026337"/>
       </p:ext>
     </p:extLst>
   </p:cSld>
@@ -8424,7 +8424,7 @@
           <p:cNvPr id="1" name="s7-rule">
             <a:extLst xmlns:a="http://schemas.openxmlformats.org/drawingml/2006/main">
               <a:ext uri="{FF2B5EF4-FFF2-40B4-BE49-F238E27FC236}">
-                <a16:creationId xmlns:a16="http://schemas.microsoft.com/office/drawing/2014/main" id="{3E757B95-6C7C-466F-AAEB-18CB4D9CF646}"/>
+                <a16:creationId xmlns:a16="http://schemas.microsoft.com/office/drawing/2014/main" id="{5B7888FC-18FD-45E1-9355-09187D8ED016}"/>
               </a:ext>
             </a:extLst>
           </p:cNvPr>
@@ -8457,7 +8457,7 @@
           <p:cNvPr id="2" name="s7-eyebrow">
             <a:extLst xmlns:a="http://schemas.openxmlformats.org/drawingml/2006/main">
               <a:ext uri="{FF2B5EF4-FFF2-40B4-BE49-F238E27FC236}">
-                <a16:creationId xmlns:a16="http://schemas.microsoft.com/office/drawing/2014/main" id="{3F3D28D6-B647-47C0-B494-A99F07B9BD52}"/>
+                <a16:creationId xmlns:a16="http://schemas.microsoft.com/office/drawing/2014/main" id="{1D4785D1-AC94-488B-BB1C-4C468163157D}"/>
               </a:ext>
             </a:extLst>
           </p:cNvPr>
@@ -8515,7 +8515,7 @@
           <p:cNvPr id="3" name="s7-title">
             <a:extLst xmlns:a="http://schemas.openxmlformats.org/drawingml/2006/main">
               <a:ext uri="{FF2B5EF4-FFF2-40B4-BE49-F238E27FC236}">
-                <a16:creationId xmlns:a16="http://schemas.microsoft.com/office/drawing/2014/main" id="{A6BA28C6-94C8-4677-868E-5E677F302A90}"/>
+                <a16:creationId xmlns:a16="http://schemas.microsoft.com/office/drawing/2014/main" id="{982CB7A0-7DD6-45CF-9BA6-27E73CD2B4A6}"/>
               </a:ext>
             </a:extLst>
           </p:cNvPr>
@@ -8573,7 +8573,7 @@
           <p:cNvPr id="4" name="s7-footer">
             <a:extLst xmlns:a="http://schemas.openxmlformats.org/drawingml/2006/main">
               <a:ext uri="{FF2B5EF4-FFF2-40B4-BE49-F238E27FC236}">
-                <a16:creationId xmlns:a16="http://schemas.microsoft.com/office/drawing/2014/main" id="{3E016111-5E10-4007-BB4D-4D48A720F922}"/>
+                <a16:creationId xmlns:a16="http://schemas.microsoft.com/office/drawing/2014/main" id="{ED114F20-3874-4708-9B3C-D603021F644A}"/>
               </a:ext>
             </a:extLst>
           </p:cNvPr>
@@ -8604,7 +8604,7 @@
           <p:cNvPr id="5" name="s7-identity">
             <a:extLst xmlns:a="http://schemas.openxmlformats.org/drawingml/2006/main">
               <a:ext uri="{FF2B5EF4-FFF2-40B4-BE49-F238E27FC236}">
-                <a16:creationId xmlns:a16="http://schemas.microsoft.com/office/drawing/2014/main" id="{08EF60EF-52ED-447A-9ED3-FF9E19427348}"/>
+                <a16:creationId xmlns:a16="http://schemas.microsoft.com/office/drawing/2014/main" id="{4CB0750D-D0E2-45B9-8040-CB09244F3C70}"/>
               </a:ext>
             </a:extLst>
           </p:cNvPr>
@@ -8662,7 +8662,7 @@
           <p:cNvPr id="6" name="core-no-0">
             <a:extLst xmlns:a="http://schemas.openxmlformats.org/drawingml/2006/main">
               <a:ext uri="{FF2B5EF4-FFF2-40B4-BE49-F238E27FC236}">
-                <a16:creationId xmlns:a16="http://schemas.microsoft.com/office/drawing/2014/main" id="{3467CF81-650D-4699-8FFC-4585506CFFEC}"/>
+                <a16:creationId xmlns:a16="http://schemas.microsoft.com/office/drawing/2014/main" id="{F89FC965-C213-4A5E-AC8B-45C7481C0E6C}"/>
               </a:ext>
             </a:extLst>
           </p:cNvPr>
@@ -8720,7 +8720,7 @@
           <p:cNvPr id="7" name="core-label-0">
             <a:extLst xmlns:a="http://schemas.openxmlformats.org/drawingml/2006/main">
               <a:ext uri="{FF2B5EF4-FFF2-40B4-BE49-F238E27FC236}">
-                <a16:creationId xmlns:a16="http://schemas.microsoft.com/office/drawing/2014/main" id="{97C0EC60-058C-429B-B317-C9073E73FEB5}"/>
+                <a16:creationId xmlns:a16="http://schemas.microsoft.com/office/drawing/2014/main" id="{1BDDDF84-A2DD-4DE1-9441-41A393C67273}"/>
               </a:ext>
             </a:extLst>
           </p:cNvPr>
@@ -8778,7 +8778,7 @@
           <p:cNvPr id="8" name="core-body-0">
             <a:extLst xmlns:a="http://schemas.openxmlformats.org/drawingml/2006/main">
               <a:ext uri="{FF2B5EF4-FFF2-40B4-BE49-F238E27FC236}">
-                <a16:creationId xmlns:a16="http://schemas.microsoft.com/office/drawing/2014/main" id="{1D01E354-B27B-4452-8362-CD8A21D314E2}"/>
+                <a16:creationId xmlns:a16="http://schemas.microsoft.com/office/drawing/2014/main" id="{F97DFD4D-D683-4F2B-9E71-F47A6D6E2763}"/>
               </a:ext>
             </a:extLst>
           </p:cNvPr>
@@ -8842,7 +8842,7 @@
           <p:cNvPr id="9" name="core-no-1">
             <a:extLst xmlns:a="http://schemas.openxmlformats.org/drawingml/2006/main">
               <a:ext uri="{FF2B5EF4-FFF2-40B4-BE49-F238E27FC236}">
-                <a16:creationId xmlns:a16="http://schemas.microsoft.com/office/drawing/2014/main" id="{7AA1B19E-29A5-46AE-A7CB-151E798B3658}"/>
+                <a16:creationId xmlns:a16="http://schemas.microsoft.com/office/drawing/2014/main" id="{0E412722-4564-4B50-B4C8-909E0CADD646}"/>
               </a:ext>
             </a:extLst>
           </p:cNvPr>
@@ -8900,7 +8900,7 @@
           <p:cNvPr id="10" name="core-body-1">
             <a:extLst xmlns:a="http://schemas.openxmlformats.org/drawingml/2006/main">
               <a:ext uri="{FF2B5EF4-FFF2-40B4-BE49-F238E27FC236}">
-                <a16:creationId xmlns:a16="http://schemas.microsoft.com/office/drawing/2014/main" id="{2CE7F4B3-A57D-4D64-9150-27D461B6AC81}"/>
+                <a16:creationId xmlns:a16="http://schemas.microsoft.com/office/drawing/2014/main" id="{A2A89126-722A-46E4-A1A1-B87A902B949E}"/>
               </a:ext>
             </a:extLst>
           </p:cNvPr>
@@ -8964,7 +8964,7 @@
           <p:cNvPr id="11" name="s7-takeaway-rule">
             <a:extLst xmlns:a="http://schemas.openxmlformats.org/drawingml/2006/main">
               <a:ext uri="{FF2B5EF4-FFF2-40B4-BE49-F238E27FC236}">
-                <a16:creationId xmlns:a16="http://schemas.microsoft.com/office/drawing/2014/main" id="{BD3CD692-30FD-4F7C-83BD-4AB8B010DFF3}"/>
+                <a16:creationId xmlns:a16="http://schemas.microsoft.com/office/drawing/2014/main" id="{0936CB3A-25C0-43D1-95DA-E794801E7B43}"/>
               </a:ext>
             </a:extLst>
           </p:cNvPr>
@@ -8997,7 +8997,7 @@
           <p:cNvPr id="12" name="s7-takeaway">
             <a:extLst xmlns:a="http://schemas.openxmlformats.org/drawingml/2006/main">
               <a:ext uri="{FF2B5EF4-FFF2-40B4-BE49-F238E27FC236}">
-                <a16:creationId xmlns:a16="http://schemas.microsoft.com/office/drawing/2014/main" id="{BF94700D-0FB7-4B0A-8980-914E7C6CEFD2}"/>
+                <a16:creationId xmlns:a16="http://schemas.microsoft.com/office/drawing/2014/main" id="{1922DFA0-CC56-49C2-9EF3-D4B973B1A0EC}"/>
               </a:ext>
             </a:extLst>
           </p:cNvPr>
@@ -9053,7 +9053,7 @@
     </p:spTree>
     <p:extLst>
       <p:ext uri="{BB962C8B-B14F-4D97-AF65-F5344CB8AC3E}">
-        <p14:creationId xmlns:p14="http://schemas.microsoft.com/office/powerpoint/2010/main" val="286425863"/>
+        <p14:creationId xmlns:p14="http://schemas.microsoft.com/office/powerpoint/2010/main" val="1061539151"/>
       </p:ext>
     </p:extLst>
   </p:cSld>
@@ -9084,7 +9084,7 @@
           <p:cNvPr id="1" name="s8-rule">
             <a:extLst xmlns:a="http://schemas.openxmlformats.org/drawingml/2006/main">
               <a:ext uri="{FF2B5EF4-FFF2-40B4-BE49-F238E27FC236}">
-                <a16:creationId xmlns:a16="http://schemas.microsoft.com/office/drawing/2014/main" id="{E8CD1056-2D00-48AC-B0F2-A05CDA567058}"/>
+                <a16:creationId xmlns:a16="http://schemas.microsoft.com/office/drawing/2014/main" id="{F2163E4D-14D5-4729-9EFD-4CFC36D4D88C}"/>
               </a:ext>
             </a:extLst>
           </p:cNvPr>
@@ -9117,7 +9117,7 @@
           <p:cNvPr id="2" name="s8-eyebrow">
             <a:extLst xmlns:a="http://schemas.openxmlformats.org/drawingml/2006/main">
               <a:ext uri="{FF2B5EF4-FFF2-40B4-BE49-F238E27FC236}">
-                <a16:creationId xmlns:a16="http://schemas.microsoft.com/office/drawing/2014/main" id="{CD7B5391-6071-4FDE-98B1-46E0A3C0B7AB}"/>
+                <a16:creationId xmlns:a16="http://schemas.microsoft.com/office/drawing/2014/main" id="{6B43C3F0-2BBA-4D02-85F2-AEDBDE7B30F4}"/>
               </a:ext>
             </a:extLst>
           </p:cNvPr>
@@ -9175,7 +9175,7 @@
           <p:cNvPr id="3" name="s8-title">
             <a:extLst xmlns:a="http://schemas.openxmlformats.org/drawingml/2006/main">
               <a:ext uri="{FF2B5EF4-FFF2-40B4-BE49-F238E27FC236}">
-                <a16:creationId xmlns:a16="http://schemas.microsoft.com/office/drawing/2014/main" id="{540E0240-8B06-4043-B95B-D03FA6670C29}"/>
+                <a16:creationId xmlns:a16="http://schemas.microsoft.com/office/drawing/2014/main" id="{AFCB0D49-37CD-4F7A-B1B4-F734688E67EB}"/>
               </a:ext>
             </a:extLst>
           </p:cNvPr>
@@ -9233,7 +9233,7 @@
           <p:cNvPr id="4" name="s8-footer">
             <a:extLst xmlns:a="http://schemas.openxmlformats.org/drawingml/2006/main">
               <a:ext uri="{FF2B5EF4-FFF2-40B4-BE49-F238E27FC236}">
-                <a16:creationId xmlns:a16="http://schemas.microsoft.com/office/drawing/2014/main" id="{FB43CC7D-FD92-47ED-A4BA-251402A0C1A6}"/>
+                <a16:creationId xmlns:a16="http://schemas.microsoft.com/office/drawing/2014/main" id="{87A49269-E2CF-4671-A73C-9251FB1B798A}"/>
               </a:ext>
             </a:extLst>
           </p:cNvPr>
@@ -9264,7 +9264,7 @@
           <p:cNvPr id="5" name="s8-identity">
             <a:extLst xmlns:a="http://schemas.openxmlformats.org/drawingml/2006/main">
               <a:ext uri="{FF2B5EF4-FFF2-40B4-BE49-F238E27FC236}">
-                <a16:creationId xmlns:a16="http://schemas.microsoft.com/office/drawing/2014/main" id="{5E25092D-78E9-4B82-8514-68C505B5F75F}"/>
+                <a16:creationId xmlns:a16="http://schemas.microsoft.com/office/drawing/2014/main" id="{45412BD3-01A3-4001-A190-E2B1CCFDEE80}"/>
               </a:ext>
             </a:extLst>
           </p:cNvPr>
@@ -9322,7 +9322,7 @@
           <p:cNvPr id="6" name="core-no-0">
             <a:extLst xmlns:a="http://schemas.openxmlformats.org/drawingml/2006/main">
               <a:ext uri="{FF2B5EF4-FFF2-40B4-BE49-F238E27FC236}">
-                <a16:creationId xmlns:a16="http://schemas.microsoft.com/office/drawing/2014/main" id="{1029FA7E-2029-46CF-B603-4A9933A714C6}"/>
+                <a16:creationId xmlns:a16="http://schemas.microsoft.com/office/drawing/2014/main" id="{33DE2AD0-27F4-46B1-8BD2-E68079E6879E}"/>
               </a:ext>
             </a:extLst>
           </p:cNvPr>
@@ -9380,7 +9380,7 @@
           <p:cNvPr id="7" name="core-label-0">
             <a:extLst xmlns:a="http://schemas.openxmlformats.org/drawingml/2006/main">
               <a:ext uri="{FF2B5EF4-FFF2-40B4-BE49-F238E27FC236}">
-                <a16:creationId xmlns:a16="http://schemas.microsoft.com/office/drawing/2014/main" id="{0154E6EF-3FBF-4837-A986-28243D078379}"/>
+                <a16:creationId xmlns:a16="http://schemas.microsoft.com/office/drawing/2014/main" id="{D6188DD8-82C8-47F9-B886-8829030A8742}"/>
               </a:ext>
             </a:extLst>
           </p:cNvPr>
@@ -9438,7 +9438,7 @@
           <p:cNvPr id="8" name="core-body-0">
             <a:extLst xmlns:a="http://schemas.openxmlformats.org/drawingml/2006/main">
               <a:ext uri="{FF2B5EF4-FFF2-40B4-BE49-F238E27FC236}">
-                <a16:creationId xmlns:a16="http://schemas.microsoft.com/office/drawing/2014/main" id="{5E2936C1-0B14-4FD9-8AD4-8EFE37C39CF9}"/>
+                <a16:creationId xmlns:a16="http://schemas.microsoft.com/office/drawing/2014/main" id="{A9826F30-B72D-4DDF-BD3A-EAFBB37822B4}"/>
               </a:ext>
             </a:extLst>
           </p:cNvPr>
@@ -9502,7 +9502,7 @@
           <p:cNvPr id="9" name="core-no-1">
             <a:extLst xmlns:a="http://schemas.openxmlformats.org/drawingml/2006/main">
               <a:ext uri="{FF2B5EF4-FFF2-40B4-BE49-F238E27FC236}">
-                <a16:creationId xmlns:a16="http://schemas.microsoft.com/office/drawing/2014/main" id="{B47DE981-7552-42D6-A6E7-024B2DFE9596}"/>
+                <a16:creationId xmlns:a16="http://schemas.microsoft.com/office/drawing/2014/main" id="{B36528E2-6B05-476A-AB87-D7802F5B9978}"/>
               </a:ext>
             </a:extLst>
           </p:cNvPr>
@@ -9560,7 +9560,7 @@
           <p:cNvPr id="10" name="core-body-1">
             <a:extLst xmlns:a="http://schemas.openxmlformats.org/drawingml/2006/main">
               <a:ext uri="{FF2B5EF4-FFF2-40B4-BE49-F238E27FC236}">
-                <a16:creationId xmlns:a16="http://schemas.microsoft.com/office/drawing/2014/main" id="{B2EB6190-CE01-4B46-AA1A-8EA0277C965F}"/>
+                <a16:creationId xmlns:a16="http://schemas.microsoft.com/office/drawing/2014/main" id="{A8B2F980-87C4-455E-A02C-32C481784C04}"/>
               </a:ext>
             </a:extLst>
           </p:cNvPr>
@@ -9624,7 +9624,7 @@
           <p:cNvPr id="11" name="s8-takeaway-rule">
             <a:extLst xmlns:a="http://schemas.openxmlformats.org/drawingml/2006/main">
               <a:ext uri="{FF2B5EF4-FFF2-40B4-BE49-F238E27FC236}">
-                <a16:creationId xmlns:a16="http://schemas.microsoft.com/office/drawing/2014/main" id="{FE141E60-F190-43BB-B82C-7C1A75A566FE}"/>
+                <a16:creationId xmlns:a16="http://schemas.microsoft.com/office/drawing/2014/main" id="{0ED53EBA-04D3-485F-922D-AC14E1FF2BB4}"/>
               </a:ext>
             </a:extLst>
           </p:cNvPr>
@@ -9657,7 +9657,7 @@
           <p:cNvPr id="12" name="s8-takeaway">
             <a:extLst xmlns:a="http://schemas.openxmlformats.org/drawingml/2006/main">
               <a:ext uri="{FF2B5EF4-FFF2-40B4-BE49-F238E27FC236}">
-                <a16:creationId xmlns:a16="http://schemas.microsoft.com/office/drawing/2014/main" id="{7EB20BBE-561A-4A16-87F1-3D689B3F67F2}"/>
+                <a16:creationId xmlns:a16="http://schemas.microsoft.com/office/drawing/2014/main" id="{993B3613-7F29-4003-B5FE-C66024C93EEE}"/>
               </a:ext>
             </a:extLst>
           </p:cNvPr>
@@ -9713,7 +9713,7 @@
     </p:spTree>
     <p:extLst>
       <p:ext uri="{BB962C8B-B14F-4D97-AF65-F5344CB8AC3E}">
-        <p14:creationId xmlns:p14="http://schemas.microsoft.com/office/powerpoint/2010/main" val="1487357090"/>
+        <p14:creationId xmlns:p14="http://schemas.microsoft.com/office/powerpoint/2010/main" val="360425054"/>
       </p:ext>
     </p:extLst>
   </p:cSld>
@@ -9744,7 +9744,7 @@
           <p:cNvPr id="1" name="s9-rule">
             <a:extLst xmlns:a="http://schemas.openxmlformats.org/drawingml/2006/main">
               <a:ext uri="{FF2B5EF4-FFF2-40B4-BE49-F238E27FC236}">
-                <a16:creationId xmlns:a16="http://schemas.microsoft.com/office/drawing/2014/main" id="{0DA9B2F5-DFAB-4818-8BD8-D94E18487A05}"/>
+                <a16:creationId xmlns:a16="http://schemas.microsoft.com/office/drawing/2014/main" id="{4FEB39A4-A2F3-43B9-87C6-172517AA0CA2}"/>
               </a:ext>
             </a:extLst>
           </p:cNvPr>
@@ -9777,7 +9777,7 @@
           <p:cNvPr id="2" name="s9-eyebrow">
             <a:extLst xmlns:a="http://schemas.openxmlformats.org/drawingml/2006/main">
               <a:ext uri="{FF2B5EF4-FFF2-40B4-BE49-F238E27FC236}">
-                <a16:creationId xmlns:a16="http://schemas.microsoft.com/office/drawing/2014/main" id="{444EDB78-DFA6-4640-B000-E8A3456FB104}"/>
+                <a16:creationId xmlns:a16="http://schemas.microsoft.com/office/drawing/2014/main" id="{9B735A34-9D5E-498B-AAB9-90D3E599F30C}"/>
               </a:ext>
             </a:extLst>
           </p:cNvPr>
@@ -9835,7 +9835,7 @@
           <p:cNvPr id="3" name="s9-title">
             <a:extLst xmlns:a="http://schemas.openxmlformats.org/drawingml/2006/main">
               <a:ext uri="{FF2B5EF4-FFF2-40B4-BE49-F238E27FC236}">
-                <a16:creationId xmlns:a16="http://schemas.microsoft.com/office/drawing/2014/main" id="{18961371-15D0-4CA2-901A-B8A08FC51E92}"/>
+                <a16:creationId xmlns:a16="http://schemas.microsoft.com/office/drawing/2014/main" id="{3F08B710-A36B-4644-8197-B091F2434B71}"/>
               </a:ext>
             </a:extLst>
           </p:cNvPr>
@@ -9893,7 +9893,7 @@
           <p:cNvPr id="4" name="s9-footer">
             <a:extLst xmlns:a="http://schemas.openxmlformats.org/drawingml/2006/main">
               <a:ext uri="{FF2B5EF4-FFF2-40B4-BE49-F238E27FC236}">
-                <a16:creationId xmlns:a16="http://schemas.microsoft.com/office/drawing/2014/main" id="{B6767D27-660E-4A50-B922-442A89F7C88D}"/>
+                <a16:creationId xmlns:a16="http://schemas.microsoft.com/office/drawing/2014/main" id="{CAAEFFEE-9858-48BC-840E-B6146AF470DA}"/>
               </a:ext>
             </a:extLst>
           </p:cNvPr>
@@ -9924,7 +9924,7 @@
           <p:cNvPr id="5" name="s9-identity">
             <a:extLst xmlns:a="http://schemas.openxmlformats.org/drawingml/2006/main">
               <a:ext uri="{FF2B5EF4-FFF2-40B4-BE49-F238E27FC236}">
-                <a16:creationId xmlns:a16="http://schemas.microsoft.com/office/drawing/2014/main" id="{7E0E6904-F915-44FF-8E5D-10BF7FCFAA94}"/>
+                <a16:creationId xmlns:a16="http://schemas.microsoft.com/office/drawing/2014/main" id="{FB90FA17-E29A-47CD-82FB-22DF4642647A}"/>
               </a:ext>
             </a:extLst>
           </p:cNvPr>
@@ -9982,7 +9982,7 @@
           <p:cNvPr id="6" name="core-no-0">
             <a:extLst xmlns:a="http://schemas.openxmlformats.org/drawingml/2006/main">
               <a:ext uri="{FF2B5EF4-FFF2-40B4-BE49-F238E27FC236}">
-                <a16:creationId xmlns:a16="http://schemas.microsoft.com/office/drawing/2014/main" id="{9C729C8A-C53A-4595-9177-A5B1DBCB451F}"/>
+                <a16:creationId xmlns:a16="http://schemas.microsoft.com/office/drawing/2014/main" id="{5413F7A7-B1E8-4A50-971C-4E4C21D87685}"/>
               </a:ext>
             </a:extLst>
           </p:cNvPr>
@@ -10040,7 +10040,7 @@
           <p:cNvPr id="7" name="core-label-0">
             <a:extLst xmlns:a="http://schemas.openxmlformats.org/drawingml/2006/main">
               <a:ext uri="{FF2B5EF4-FFF2-40B4-BE49-F238E27FC236}">
-                <a16:creationId xmlns:a16="http://schemas.microsoft.com/office/drawing/2014/main" id="{E4D8C2EA-B160-4436-BE33-9DB4A699155E}"/>
+                <a16:creationId xmlns:a16="http://schemas.microsoft.com/office/drawing/2014/main" id="{28D4EE64-A7AF-4411-8B29-C9110E6FFBDB}"/>
               </a:ext>
             </a:extLst>
           </p:cNvPr>
@@ -10098,7 +10098,7 @@
           <p:cNvPr id="8" name="core-body-0">
             <a:extLst xmlns:a="http://schemas.openxmlformats.org/drawingml/2006/main">
               <a:ext uri="{FF2B5EF4-FFF2-40B4-BE49-F238E27FC236}">
-                <a16:creationId xmlns:a16="http://schemas.microsoft.com/office/drawing/2014/main" id="{035EE61D-3EDF-4DE9-8C70-09998C0D0179}"/>
+                <a16:creationId xmlns:a16="http://schemas.microsoft.com/office/drawing/2014/main" id="{EBB30D1A-30DC-4905-9000-5753BBED572A}"/>
               </a:ext>
             </a:extLst>
           </p:cNvPr>
@@ -10162,7 +10162,7 @@
           <p:cNvPr id="9" name="core-no-1">
             <a:extLst xmlns:a="http://schemas.openxmlformats.org/drawingml/2006/main">
               <a:ext uri="{FF2B5EF4-FFF2-40B4-BE49-F238E27FC236}">
-                <a16:creationId xmlns:a16="http://schemas.microsoft.com/office/drawing/2014/main" id="{B4C50BCD-C125-4053-9F2B-06C8C5D09D29}"/>
+                <a16:creationId xmlns:a16="http://schemas.microsoft.com/office/drawing/2014/main" id="{0838A1FB-9CD2-4432-8C78-3AB8DD927408}"/>
               </a:ext>
             </a:extLst>
           </p:cNvPr>
@@ -10220,7 +10220,7 @@
           <p:cNvPr id="10" name="core-body-1">
             <a:extLst xmlns:a="http://schemas.openxmlformats.org/drawingml/2006/main">
               <a:ext uri="{FF2B5EF4-FFF2-40B4-BE49-F238E27FC236}">
-                <a16:creationId xmlns:a16="http://schemas.microsoft.com/office/drawing/2014/main" id="{97611479-0609-4834-AD03-16AA083299FD}"/>
+                <a16:creationId xmlns:a16="http://schemas.microsoft.com/office/drawing/2014/main" id="{184C5702-D742-471D-866B-3F1A6BF30369}"/>
               </a:ext>
             </a:extLst>
           </p:cNvPr>
@@ -10284,7 +10284,7 @@
           <p:cNvPr id="11" name="s9-takeaway-rule">
             <a:extLst xmlns:a="http://schemas.openxmlformats.org/drawingml/2006/main">
               <a:ext uri="{FF2B5EF4-FFF2-40B4-BE49-F238E27FC236}">
-                <a16:creationId xmlns:a16="http://schemas.microsoft.com/office/drawing/2014/main" id="{D61A4DE3-762B-4306-B4B2-50F2F32653AF}"/>
+                <a16:creationId xmlns:a16="http://schemas.microsoft.com/office/drawing/2014/main" id="{6294FD27-3FB3-41F0-BC6F-88589F9E4A56}"/>
               </a:ext>
             </a:extLst>
           </p:cNvPr>
@@ -10317,7 +10317,7 @@
           <p:cNvPr id="12" name="s9-takeaway">
             <a:extLst xmlns:a="http://schemas.openxmlformats.org/drawingml/2006/main">
               <a:ext uri="{FF2B5EF4-FFF2-40B4-BE49-F238E27FC236}">
-                <a16:creationId xmlns:a16="http://schemas.microsoft.com/office/drawing/2014/main" id="{54B23D1C-302C-47B8-882F-465267E848AD}"/>
+                <a16:creationId xmlns:a16="http://schemas.microsoft.com/office/drawing/2014/main" id="{94427AD6-774A-4653-B13F-93A91E631D98}"/>
               </a:ext>
             </a:extLst>
           </p:cNvPr>
@@ -10373,7 +10373,7 @@
     </p:spTree>
     <p:extLst>
       <p:ext uri="{BB962C8B-B14F-4D97-AF65-F5344CB8AC3E}">
-        <p14:creationId xmlns:p14="http://schemas.microsoft.com/office/powerpoint/2010/main" val="2061547061"/>
+        <p14:creationId xmlns:p14="http://schemas.microsoft.com/office/powerpoint/2010/main" val="90790749"/>
       </p:ext>
     </p:extLst>
   </p:cSld>
